--- a/a7/build/out/u4/A7 4.06 Order of Operations with Radicals - Slides.pptx
+++ b/a7/build/out/u4/A7 4.06 Order of Operations with Radicals - Slides.pptx
@@ -3129,7 +3129,7 @@
         </p:nvSpPr>
         <p:spPr>
           <a:xfrm>
-            <a:off x="777240" y="1691640"/>
+            <a:off x="777240" y="2148840"/>
             <a:ext cx="10607040" cy="347472"/>
           </a:xfrm>
           <a:prstGeom prst="rect">
@@ -3164,7 +3164,7 @@
         </p:nvSpPr>
         <p:spPr>
           <a:xfrm>
-            <a:off x="777240" y="2048256"/>
+            <a:off x="777240" y="2505456"/>
             <a:ext cx="10607040" cy="1005840"/>
           </a:xfrm>
           <a:prstGeom prst="rect">
@@ -3199,7 +3199,7 @@
         </p:nvCxnSpPr>
         <p:spPr>
           <a:xfrm>
-            <a:off x="3291840" y="3255264"/>
+            <a:off x="3291840" y="3712464"/>
             <a:ext cx="5577840" cy="0"/>
           </a:xfrm>
           <a:prstGeom prst="line">
@@ -3234,7 +3234,7 @@
         </p:nvCxnSpPr>
         <p:spPr>
           <a:xfrm>
-            <a:off x="3291840" y="3337560"/>
+            <a:off x="3291840" y="3794760"/>
             <a:ext cx="5577840" cy="0"/>
           </a:xfrm>
           <a:prstGeom prst="line">
@@ -3269,7 +3269,7 @@
         </p:nvSpPr>
         <p:spPr>
           <a:xfrm>
-            <a:off x="777240" y="3502152"/>
+            <a:off x="777240" y="3959352"/>
             <a:ext cx="10607040" cy="310896"/>
           </a:xfrm>
           <a:prstGeom prst="rect">
@@ -3304,7 +3304,7 @@
         </p:nvSpPr>
         <p:spPr>
           <a:xfrm>
-            <a:off x="777240" y="3840480"/>
+            <a:off x="777240" y="4297680"/>
             <a:ext cx="10607040" cy="731520"/>
           </a:xfrm>
           <a:prstGeom prst="rect">
@@ -3327,129 +3327,13 @@
                 <a:latin typeface="Century Schoolbook"/>
               </a:rPr>
               <a:t>I can evaluate a multi-step expression with rational numbers, exponents and radicals by reading its structure.</a:t>
-            </a:r>
-          </a:p>
-        </p:txBody>
-      </p:sp>
-      <p:sp>
-        <p:nvSpPr>
-          <p:cNvPr id="8" name="Rectangle 7"/>
-          <p:cNvSpPr/>
-          <p:nvPr/>
-        </p:nvSpPr>
-        <p:spPr>
-          <a:xfrm>
-            <a:off x="2377440" y="4736592"/>
-            <a:ext cx="7406640" cy="1051560"/>
-          </a:xfrm>
-          <a:prstGeom prst="rect">
-            <a:avLst/>
-          </a:prstGeom>
-          <a:solidFill>
-            <a:srgbClr val="F2F2F0"/>
-          </a:solidFill>
-          <a:ln w="9525">
-            <a:solidFill>
-              <a:srgbClr val="BFBFBF"/>
-            </a:solidFill>
-          </a:ln>
-          <a:effectLst/>
-        </p:spPr>
-        <p:style>
-          <a:lnRef idx="1">
-            <a:schemeClr val="accent1"/>
-          </a:lnRef>
-          <a:fillRef idx="3">
-            <a:schemeClr val="accent1"/>
-          </a:fillRef>
-          <a:effectRef idx="2">
-            <a:schemeClr val="accent1"/>
-          </a:effectRef>
-          <a:fontRef idx="minor">
-            <a:schemeClr val="lt1"/>
-          </a:fontRef>
-        </p:style>
-        <p:txBody>
-          <a:bodyPr rtlCol="0" anchor="ctr"/>
-          <a:lstStyle/>
-          <a:p>
-            <a:pPr algn="ctr"/>
-          </a:p>
-        </p:txBody>
-      </p:sp>
-      <p:sp>
-        <p:nvSpPr>
-          <p:cNvPr id="9" name="TextBox 8"/>
-          <p:cNvSpPr txBox="1"/>
-          <p:nvPr/>
-        </p:nvSpPr>
-        <p:spPr>
-          <a:xfrm>
-            <a:off x="2606040" y="4892040"/>
-            <a:ext cx="6949440" cy="365760"/>
-          </a:xfrm>
-          <a:prstGeom prst="rect">
-            <a:avLst/>
-          </a:prstGeom>
-          <a:noFill/>
-        </p:spPr>
-        <p:txBody>
-          <a:bodyPr wrap="square" lIns="45720" rIns="45720" tIns="18288" bIns="18288" anchor="t">
-            <a:spAutoFit/>
-          </a:bodyPr>
-          <a:lstStyle/>
-          <a:p>
-            <a:pPr algn="ctr"/>
-            <a:r>
-              <a:rPr sz="1700" b="0" i="1">
-                <a:solidFill>
-                  <a:srgbClr val="6B6B6B"/>
-                </a:solidFill>
-                <a:latin typeface="Century Schoolbook"/>
-              </a:rPr>
-              <a:t>Yesterday the radical bar grouped whatever sat under it.</a:t>
-            </a:r>
-          </a:p>
-        </p:txBody>
-      </p:sp>
-      <p:sp>
-        <p:nvSpPr>
-          <p:cNvPr id="10" name="TextBox 9"/>
-          <p:cNvSpPr txBox="1"/>
-          <p:nvPr/>
-        </p:nvSpPr>
-        <p:spPr>
-          <a:xfrm>
-            <a:off x="2606040" y="5276088"/>
-            <a:ext cx="6949440" cy="365760"/>
-          </a:xfrm>
-          <a:prstGeom prst="rect">
-            <a:avLst/>
-          </a:prstGeom>
-          <a:noFill/>
-        </p:spPr>
-        <p:txBody>
-          <a:bodyPr wrap="square" lIns="45720" rIns="45720" tIns="18288" bIns="18288" anchor="t">
-            <a:spAutoFit/>
-          </a:bodyPr>
-          <a:lstStyle/>
-          <a:p>
-            <a:pPr algn="ctr"/>
-            <a:r>
-              <a:rPr sz="1700" b="1" i="0">
-                <a:solidFill>
-                  <a:srgbClr val="1A1A1A"/>
-                </a:solidFill>
-                <a:latin typeface="Century Schoolbook"/>
-              </a:rPr>
-              <a:t>Today: all the grouping symbols — structure sets the order.</a:t>
             </a:r>
           </a:p>
         </p:txBody>
       </p:sp>
       <p:cxnSp>
         <p:nvCxnSpPr>
-          <p:cNvPr id="11" name="Connector 10"/>
+          <p:cNvPr id="8" name="Connector 7"/>
           <p:cNvCxnSpPr/>
           <p:nvPr/>
         </p:nvCxnSpPr>
@@ -3484,7 +3368,7 @@
       </p:cxnSp>
       <p:sp>
         <p:nvSpPr>
-          <p:cNvPr id="12" name="TextBox 11"/>
+          <p:cNvPr id="9" name="TextBox 8"/>
           <p:cNvSpPr txBox="1"/>
           <p:nvPr/>
         </p:nvSpPr>
@@ -3519,7 +3403,7 @@
       </p:sp>
       <p:sp>
         <p:nvSpPr>
-          <p:cNvPr id="13" name="TextBox 12"/>
+          <p:cNvPr id="10" name="TextBox 9"/>
           <p:cNvSpPr txBox="1"/>
           <p:nvPr/>
         </p:nvSpPr>
@@ -3675,44 +3559,9 @@
           </a:fontRef>
         </p:style>
       </p:cxnSp>
-      <p:sp>
-        <p:nvSpPr>
-          <p:cNvPr id="5" name="TextBox 4"/>
-          <p:cNvSpPr txBox="1"/>
-          <p:nvPr/>
-        </p:nvSpPr>
-        <p:spPr>
-          <a:xfrm>
-            <a:off x="777240" y="1261872"/>
-            <a:ext cx="10607040" cy="310896"/>
-          </a:xfrm>
-          <a:prstGeom prst="rect">
-            <a:avLst/>
-          </a:prstGeom>
-          <a:noFill/>
-        </p:spPr>
-        <p:txBody>
-          <a:bodyPr wrap="square" lIns="45720" rIns="45720" tIns="18288" bIns="18288" anchor="t">
-            <a:spAutoFit/>
-          </a:bodyPr>
-          <a:lstStyle/>
-          <a:p>
-            <a:pPr algn="l"/>
-            <a:r>
-              <a:rPr sz="1700" b="0" i="1">
-                <a:solidFill>
-                  <a:srgbClr val="6B6B6B"/>
-                </a:solidFill>
-                <a:latin typeface="Century Schoolbook"/>
-              </a:rPr>
-              <a:t>Answer.</a:t>
-            </a:r>
-          </a:p>
-        </p:txBody>
-      </p:sp>
       <p:cxnSp>
         <p:nvCxnSpPr>
-          <p:cNvPr id="6" name="Connector 5"/>
+          <p:cNvPr id="5" name="Connector 4"/>
           <p:cNvCxnSpPr/>
           <p:nvPr/>
         </p:nvCxnSpPr>
@@ -3747,7 +3596,7 @@
       </p:cxnSp>
       <p:sp>
         <p:nvSpPr>
-          <p:cNvPr id="7" name="TextBox 6"/>
+          <p:cNvPr id="6" name="TextBox 5"/>
           <p:cNvSpPr txBox="1"/>
           <p:nvPr/>
         </p:nvSpPr>
@@ -3782,7 +3631,7 @@
       </p:sp>
       <p:sp>
         <p:nvSpPr>
-          <p:cNvPr id="8" name="TextBox 7"/>
+          <p:cNvPr id="7" name="TextBox 6"/>
           <p:cNvSpPr txBox="1"/>
           <p:nvPr/>
         </p:nvSpPr>
@@ -3817,7 +3666,7 @@
       </p:sp>
       <p:pic>
         <p:nvPicPr>
-          <p:cNvPr id="9" name="Picture 8" descr="7d9dafa919c33afa.png"/>
+          <p:cNvPr id="8" name="Picture 7" descr="7d9dafa919c33afa.png"/>
           <p:cNvPicPr>
             <a:picLocks noChangeAspect="1"/>
           </p:cNvPicPr>
@@ -3841,42 +3690,42 @@
       </p:pic>
       <p:sp>
         <p:nvSpPr>
+          <p:cNvPr id="9" name="TextBox 8"/>
+          <p:cNvSpPr txBox="1"/>
+          <p:nvPr/>
+        </p:nvSpPr>
+        <p:spPr>
+          <a:xfrm>
+            <a:off x="777240" y="3328416"/>
+            <a:ext cx="10607040" cy="429370"/>
+          </a:xfrm>
+          <a:prstGeom prst="rect">
+            <a:avLst/>
+          </a:prstGeom>
+          <a:noFill/>
+        </p:spPr>
+        <p:txBody>
+          <a:bodyPr wrap="square" lIns="45720" rIns="45720" tIns="18288" bIns="18288" anchor="t">
+            <a:spAutoFit/>
+          </a:bodyPr>
+          <a:lstStyle/>
+          <a:p>
+            <a:pPr algn="ctr"/>
+            <a:r>
+              <a:rPr sz="2400" b="1" i="0">
+                <a:solidFill>
+                  <a:srgbClr val="1A1A1A"/>
+                </a:solidFill>
+                <a:latin typeface="Century Schoolbook"/>
+              </a:rPr>
+              <a:t>Evaluate.</a:t>
+            </a:r>
+          </a:p>
+        </p:txBody>
+      </p:sp>
+      <p:sp>
+        <p:nvSpPr>
           <p:cNvPr id="10" name="TextBox 9"/>
-          <p:cNvSpPr txBox="1"/>
-          <p:nvPr/>
-        </p:nvSpPr>
-        <p:spPr>
-          <a:xfrm>
-            <a:off x="777240" y="3145536"/>
-            <a:ext cx="10607040" cy="429370"/>
-          </a:xfrm>
-          <a:prstGeom prst="rect">
-            <a:avLst/>
-          </a:prstGeom>
-          <a:noFill/>
-        </p:spPr>
-        <p:txBody>
-          <a:bodyPr wrap="square" lIns="45720" rIns="45720" tIns="18288" bIns="18288" anchor="t">
-            <a:spAutoFit/>
-          </a:bodyPr>
-          <a:lstStyle/>
-          <a:p>
-            <a:pPr algn="ctr"/>
-            <a:r>
-              <a:rPr sz="2400" b="0" i="0">
-                <a:solidFill>
-                  <a:srgbClr val="6B6B6B"/>
-                </a:solidFill>
-                <a:latin typeface="Century Schoolbook"/>
-              </a:rPr>
-              <a:t>3(0.99) + 7</a:t>
-            </a:r>
-          </a:p>
-        </p:txBody>
-      </p:sp>
-      <p:sp>
-        <p:nvSpPr>
-          <p:cNvPr id="11" name="TextBox 10"/>
           <p:cNvSpPr txBox="1"/>
           <p:nvPr/>
         </p:nvSpPr>
@@ -4032,44 +3881,9 @@
           </a:fontRef>
         </p:style>
       </p:cxnSp>
-      <p:sp>
-        <p:nvSpPr>
-          <p:cNvPr id="5" name="TextBox 4"/>
-          <p:cNvSpPr txBox="1"/>
-          <p:nvPr/>
-        </p:nvSpPr>
-        <p:spPr>
-          <a:xfrm>
-            <a:off x="777240" y="1261872"/>
-            <a:ext cx="10607040" cy="310896"/>
-          </a:xfrm>
-          <a:prstGeom prst="rect">
-            <a:avLst/>
-          </a:prstGeom>
-          <a:noFill/>
-        </p:spPr>
-        <p:txBody>
-          <a:bodyPr wrap="square" lIns="45720" rIns="45720" tIns="18288" bIns="18288" anchor="t">
-            <a:spAutoFit/>
-          </a:bodyPr>
-          <a:lstStyle/>
-          <a:p>
-            <a:pPr algn="l"/>
-            <a:r>
-              <a:rPr sz="1700" b="0" i="1">
-                <a:solidFill>
-                  <a:srgbClr val="6B6B6B"/>
-                </a:solidFill>
-                <a:latin typeface="Century Schoolbook"/>
-              </a:rPr>
-              <a:t>A fraction bar and a radical in one expression.</a:t>
-            </a:r>
-          </a:p>
-        </p:txBody>
-      </p:sp>
       <p:cxnSp>
         <p:nvCxnSpPr>
-          <p:cNvPr id="6" name="Connector 5"/>
+          <p:cNvPr id="5" name="Connector 4"/>
           <p:cNvCxnSpPr/>
           <p:nvPr/>
         </p:nvCxnSpPr>
@@ -4104,7 +3918,7 @@
       </p:cxnSp>
       <p:sp>
         <p:nvSpPr>
-          <p:cNvPr id="7" name="TextBox 6"/>
+          <p:cNvPr id="6" name="TextBox 5"/>
           <p:cNvSpPr txBox="1"/>
           <p:nvPr/>
         </p:nvSpPr>
@@ -4139,7 +3953,7 @@
       </p:sp>
       <p:sp>
         <p:nvSpPr>
-          <p:cNvPr id="8" name="TextBox 7"/>
+          <p:cNvPr id="7" name="TextBox 6"/>
           <p:cNvSpPr txBox="1"/>
           <p:nvPr/>
         </p:nvSpPr>
@@ -4174,7 +3988,7 @@
       </p:sp>
       <p:pic>
         <p:nvPicPr>
-          <p:cNvPr id="9" name="Picture 8" descr="9657b87afa13d574.png"/>
+          <p:cNvPr id="8" name="Picture 7" descr="9657b87afa13d574.png"/>
           <p:cNvPicPr>
             <a:picLocks noChangeAspect="1"/>
           </p:cNvPicPr>
@@ -4198,7 +4012,7 @@
       </p:pic>
       <p:sp>
         <p:nvSpPr>
-          <p:cNvPr id="10" name="TextBox 9"/>
+          <p:cNvPr id="9" name="TextBox 8"/>
           <p:cNvSpPr txBox="1"/>
           <p:nvPr/>
         </p:nvSpPr>
@@ -4354,44 +4168,9 @@
           </a:fontRef>
         </p:style>
       </p:cxnSp>
-      <p:sp>
-        <p:nvSpPr>
-          <p:cNvPr id="5" name="TextBox 4"/>
-          <p:cNvSpPr txBox="1"/>
-          <p:nvPr/>
-        </p:nvSpPr>
-        <p:spPr>
-          <a:xfrm>
-            <a:off x="777240" y="1261872"/>
-            <a:ext cx="10607040" cy="310896"/>
-          </a:xfrm>
-          <a:prstGeom prst="rect">
-            <a:avLst/>
-          </a:prstGeom>
-          <a:noFill/>
-        </p:spPr>
-        <p:txBody>
-          <a:bodyPr wrap="square" lIns="45720" rIns="45720" tIns="18288" bIns="18288" anchor="t">
-            <a:spAutoFit/>
-          </a:bodyPr>
-          <a:lstStyle/>
-          <a:p>
-            <a:pPr algn="l"/>
-            <a:r>
-              <a:rPr sz="1700" b="0" i="1">
-                <a:solidFill>
-                  <a:srgbClr val="6B6B6B"/>
-                </a:solidFill>
-                <a:latin typeface="Century Schoolbook"/>
-              </a:rPr>
-              <a:t>Worked.</a:t>
-            </a:r>
-          </a:p>
-        </p:txBody>
-      </p:sp>
       <p:cxnSp>
         <p:nvCxnSpPr>
-          <p:cNvPr id="6" name="Connector 5"/>
+          <p:cNvPr id="5" name="Connector 4"/>
           <p:cNvCxnSpPr/>
           <p:nvPr/>
         </p:nvCxnSpPr>
@@ -4426,7 +4205,7 @@
       </p:cxnSp>
       <p:sp>
         <p:nvSpPr>
-          <p:cNvPr id="7" name="TextBox 6"/>
+          <p:cNvPr id="6" name="TextBox 5"/>
           <p:cNvSpPr txBox="1"/>
           <p:nvPr/>
         </p:nvSpPr>
@@ -4461,7 +4240,7 @@
       </p:sp>
       <p:sp>
         <p:nvSpPr>
-          <p:cNvPr id="8" name="TextBox 7"/>
+          <p:cNvPr id="7" name="TextBox 6"/>
           <p:cNvSpPr txBox="1"/>
           <p:nvPr/>
         </p:nvSpPr>
@@ -4496,7 +4275,7 @@
       </p:sp>
       <p:pic>
         <p:nvPicPr>
-          <p:cNvPr id="9" name="Picture 8" descr="184a5d14892d37dc.png"/>
+          <p:cNvPr id="8" name="Picture 7" descr="184a5d14892d37dc.png"/>
           <p:cNvPicPr>
             <a:picLocks noChangeAspect="1"/>
           </p:cNvPicPr>
@@ -4518,44 +4297,9 @@
           </a:prstGeom>
         </p:spPr>
       </p:pic>
-      <p:sp>
-        <p:nvSpPr>
-          <p:cNvPr id="10" name="TextBox 9"/>
-          <p:cNvSpPr txBox="1"/>
-          <p:nvPr/>
-        </p:nvSpPr>
-        <p:spPr>
-          <a:xfrm>
-            <a:off x="4962144" y="2097024"/>
-            <a:ext cx="6400800" cy="502920"/>
-          </a:xfrm>
-          <a:prstGeom prst="rect">
-            <a:avLst/>
-          </a:prstGeom>
-          <a:noFill/>
-        </p:spPr>
-        <p:txBody>
-          <a:bodyPr wrap="square" lIns="45720" rIns="45720" tIns="18288" bIns="18288" anchor="ctr">
-            <a:spAutoFit/>
-          </a:bodyPr>
-          <a:lstStyle/>
-          <a:p>
-            <a:pPr algn="l"/>
-            <a:r>
-              <a:rPr sz="2100" b="0" i="1">
-                <a:solidFill>
-                  <a:srgbClr val="6B6B6B"/>
-                </a:solidFill>
-                <a:latin typeface="Century Schoolbook"/>
-              </a:rPr>
-              <a:t>numerator and denominator, each finished</a:t>
-            </a:r>
-          </a:p>
-        </p:txBody>
-      </p:sp>
       <p:pic>
         <p:nvPicPr>
-          <p:cNvPr id="11" name="Picture 10" descr="d857c92eedcaecc7.png"/>
+          <p:cNvPr id="9" name="Picture 8" descr="d857c92eedcaecc7.png"/>
           <p:cNvPicPr>
             <a:picLocks noChangeAspect="1"/>
           </p:cNvPicPr>
@@ -4577,44 +4321,9 @@
           </a:prstGeom>
         </p:spPr>
       </p:pic>
-      <p:sp>
-        <p:nvSpPr>
-          <p:cNvPr id="12" name="TextBox 11"/>
-          <p:cNvSpPr txBox="1"/>
-          <p:nvPr/>
-        </p:nvSpPr>
-        <p:spPr>
-          <a:xfrm>
-            <a:off x="5913120" y="3183636"/>
-            <a:ext cx="5471159" cy="502920"/>
-          </a:xfrm>
-          <a:prstGeom prst="rect">
-            <a:avLst/>
-          </a:prstGeom>
-          <a:noFill/>
-        </p:spPr>
-        <p:txBody>
-          <a:bodyPr wrap="square" lIns="45720" rIns="45720" tIns="18288" bIns="18288" anchor="ctr">
-            <a:spAutoFit/>
-          </a:bodyPr>
-          <a:lstStyle/>
-          <a:p>
-            <a:pPr algn="l"/>
-            <a:r>
-              <a:rPr sz="2100" b="0" i="1">
-                <a:solidFill>
-                  <a:srgbClr val="6B6B6B"/>
-                </a:solidFill>
-                <a:latin typeface="Century Schoolbook"/>
-              </a:rPr>
-              <a:t>under the bar, then the root</a:t>
-            </a:r>
-          </a:p>
-        </p:txBody>
-      </p:sp>
       <p:pic>
         <p:nvPicPr>
-          <p:cNvPr id="13" name="Picture 12" descr="72e6766a18ceae4c.png"/>
+          <p:cNvPr id="10" name="Picture 9" descr="72e6766a18ceae4c.png"/>
           <p:cNvPicPr>
             <a:picLocks noChangeAspect="1"/>
           </p:cNvPicPr>
@@ -4638,42 +4347,7 @@
       </p:pic>
       <p:sp>
         <p:nvSpPr>
-          <p:cNvPr id="14" name="TextBox 13"/>
-          <p:cNvSpPr txBox="1"/>
-          <p:nvPr/>
-        </p:nvSpPr>
-        <p:spPr>
-          <a:xfrm>
-            <a:off x="4270248" y="4204716"/>
-            <a:ext cx="6400800" cy="502920"/>
-          </a:xfrm>
-          <a:prstGeom prst="rect">
-            <a:avLst/>
-          </a:prstGeom>
-          <a:noFill/>
-        </p:spPr>
-        <p:txBody>
-          <a:bodyPr wrap="square" lIns="45720" rIns="45720" tIns="18288" bIns="18288" anchor="ctr">
-            <a:spAutoFit/>
-          </a:bodyPr>
-          <a:lstStyle/>
-          <a:p>
-            <a:pPr algn="l"/>
-            <a:r>
-              <a:rPr sz="2100" b="0" i="1">
-                <a:solidFill>
-                  <a:srgbClr val="6B6B6B"/>
-                </a:solidFill>
-                <a:latin typeface="Century Schoolbook"/>
-              </a:rPr>
-              <a:t>subtract last</a:t>
-            </a:r>
-          </a:p>
-        </p:txBody>
-      </p:sp>
-      <p:sp>
-        <p:nvSpPr>
-          <p:cNvPr id="15" name="TextBox 14"/>
+          <p:cNvPr id="11" name="TextBox 10"/>
           <p:cNvSpPr txBox="1"/>
           <p:nvPr/>
         </p:nvSpPr>
@@ -4829,44 +4503,9 @@
           </a:fontRef>
         </p:style>
       </p:cxnSp>
-      <p:sp>
-        <p:nvSpPr>
-          <p:cNvPr id="5" name="TextBox 4"/>
-          <p:cNvSpPr txBox="1"/>
-          <p:nvPr/>
-        </p:nvSpPr>
-        <p:spPr>
-          <a:xfrm>
-            <a:off x="777240" y="1261872"/>
-            <a:ext cx="10607040" cy="310896"/>
-          </a:xfrm>
-          <a:prstGeom prst="rect">
-            <a:avLst/>
-          </a:prstGeom>
-          <a:noFill/>
-        </p:spPr>
-        <p:txBody>
-          <a:bodyPr wrap="square" lIns="45720" rIns="45720" tIns="18288" bIns="18288" anchor="t">
-            <a:spAutoFit/>
-          </a:bodyPr>
-          <a:lstStyle/>
-          <a:p>
-            <a:pPr algn="l"/>
-            <a:r>
-              <a:rPr sz="1700" b="0" i="1">
-                <a:solidFill>
-                  <a:srgbClr val="6B6B6B"/>
-                </a:solidFill>
-                <a:latin typeface="Century Schoolbook"/>
-              </a:rPr>
-              <a:t>Same steps, your numbers. Boards up when done.</a:t>
-            </a:r>
-          </a:p>
-        </p:txBody>
-      </p:sp>
       <p:cxnSp>
         <p:nvCxnSpPr>
-          <p:cNvPr id="6" name="Connector 5"/>
+          <p:cNvPr id="5" name="Connector 4"/>
           <p:cNvCxnSpPr/>
           <p:nvPr/>
         </p:nvCxnSpPr>
@@ -4901,7 +4540,7 @@
       </p:cxnSp>
       <p:sp>
         <p:nvSpPr>
-          <p:cNvPr id="7" name="TextBox 6"/>
+          <p:cNvPr id="6" name="TextBox 5"/>
           <p:cNvSpPr txBox="1"/>
           <p:nvPr/>
         </p:nvSpPr>
@@ -4936,7 +4575,7 @@
       </p:sp>
       <p:sp>
         <p:nvSpPr>
-          <p:cNvPr id="8" name="TextBox 7"/>
+          <p:cNvPr id="7" name="TextBox 6"/>
           <p:cNvSpPr txBox="1"/>
           <p:nvPr/>
         </p:nvSpPr>
@@ -4971,7 +4610,7 @@
       </p:sp>
       <p:pic>
         <p:nvPicPr>
-          <p:cNvPr id="9" name="Picture 8" descr="c8e5417f2d59a8e1.png"/>
+          <p:cNvPr id="8" name="Picture 7" descr="c8e5417f2d59a8e1.png"/>
           <p:cNvPicPr>
             <a:picLocks noChangeAspect="1"/>
           </p:cNvPicPr>
@@ -4993,6 +4632,41 @@
           </a:prstGeom>
         </p:spPr>
       </p:pic>
+      <p:sp>
+        <p:nvSpPr>
+          <p:cNvPr id="9" name="TextBox 8"/>
+          <p:cNvSpPr txBox="1"/>
+          <p:nvPr/>
+        </p:nvSpPr>
+        <p:spPr>
+          <a:xfrm>
+            <a:off x="777240" y="3782568"/>
+            <a:ext cx="10607040" cy="429370"/>
+          </a:xfrm>
+          <a:prstGeom prst="rect">
+            <a:avLst/>
+          </a:prstGeom>
+          <a:noFill/>
+        </p:spPr>
+        <p:txBody>
+          <a:bodyPr wrap="square" lIns="45720" rIns="45720" tIns="18288" bIns="18288" anchor="t">
+            <a:spAutoFit/>
+          </a:bodyPr>
+          <a:lstStyle/>
+          <a:p>
+            <a:pPr algn="ctr"/>
+            <a:r>
+              <a:rPr sz="2400" b="1" i="0">
+                <a:solidFill>
+                  <a:srgbClr val="1A1A1A"/>
+                </a:solidFill>
+                <a:latin typeface="Century Schoolbook"/>
+              </a:rPr>
+              <a:t>Evaluate.</a:t>
+            </a:r>
+          </a:p>
+        </p:txBody>
+      </p:sp>
     </p:spTree>
   </p:cSld>
   <p:clrMapOvr>
@@ -5116,44 +4790,9 @@
           </a:fontRef>
         </p:style>
       </p:cxnSp>
-      <p:sp>
-        <p:nvSpPr>
-          <p:cNvPr id="5" name="TextBox 4"/>
-          <p:cNvSpPr txBox="1"/>
-          <p:nvPr/>
-        </p:nvSpPr>
-        <p:spPr>
-          <a:xfrm>
-            <a:off x="777240" y="1261872"/>
-            <a:ext cx="10607040" cy="310896"/>
-          </a:xfrm>
-          <a:prstGeom prst="rect">
-            <a:avLst/>
-          </a:prstGeom>
-          <a:noFill/>
-        </p:spPr>
-        <p:txBody>
-          <a:bodyPr wrap="square" lIns="45720" rIns="45720" tIns="18288" bIns="18288" anchor="t">
-            <a:spAutoFit/>
-          </a:bodyPr>
-          <a:lstStyle/>
-          <a:p>
-            <a:pPr algn="l"/>
-            <a:r>
-              <a:rPr sz="1700" b="0" i="1">
-                <a:solidFill>
-                  <a:srgbClr val="6B6B6B"/>
-                </a:solidFill>
-                <a:latin typeface="Century Schoolbook"/>
-              </a:rPr>
-              <a:t>Answer.</a:t>
-            </a:r>
-          </a:p>
-        </p:txBody>
-      </p:sp>
       <p:cxnSp>
         <p:nvCxnSpPr>
-          <p:cNvPr id="6" name="Connector 5"/>
+          <p:cNvPr id="5" name="Connector 4"/>
           <p:cNvCxnSpPr/>
           <p:nvPr/>
         </p:nvCxnSpPr>
@@ -5188,7 +4827,7 @@
       </p:cxnSp>
       <p:sp>
         <p:nvSpPr>
-          <p:cNvPr id="7" name="TextBox 6"/>
+          <p:cNvPr id="6" name="TextBox 5"/>
           <p:cNvSpPr txBox="1"/>
           <p:nvPr/>
         </p:nvSpPr>
@@ -5223,7 +4862,7 @@
       </p:sp>
       <p:sp>
         <p:nvSpPr>
-          <p:cNvPr id="8" name="TextBox 7"/>
+          <p:cNvPr id="7" name="TextBox 6"/>
           <p:cNvSpPr txBox="1"/>
           <p:nvPr/>
         </p:nvSpPr>
@@ -5258,7 +4897,7 @@
       </p:sp>
       <p:pic>
         <p:nvPicPr>
-          <p:cNvPr id="9" name="Picture 8" descr="7dacaa3a652d2758.png"/>
+          <p:cNvPr id="8" name="Picture 7" descr="7dacaa3a652d2758.png"/>
           <p:cNvPicPr>
             <a:picLocks noChangeAspect="1"/>
           </p:cNvPicPr>
@@ -5282,42 +4921,42 @@
       </p:pic>
       <p:sp>
         <p:nvSpPr>
+          <p:cNvPr id="9" name="TextBox 8"/>
+          <p:cNvSpPr txBox="1"/>
+          <p:nvPr/>
+        </p:nvSpPr>
+        <p:spPr>
+          <a:xfrm>
+            <a:off x="777240" y="3785615"/>
+            <a:ext cx="10607040" cy="429370"/>
+          </a:xfrm>
+          <a:prstGeom prst="rect">
+            <a:avLst/>
+          </a:prstGeom>
+          <a:noFill/>
+        </p:spPr>
+        <p:txBody>
+          <a:bodyPr wrap="square" lIns="45720" rIns="45720" tIns="18288" bIns="18288" anchor="t">
+            <a:spAutoFit/>
+          </a:bodyPr>
+          <a:lstStyle/>
+          <a:p>
+            <a:pPr algn="ctr"/>
+            <a:r>
+              <a:rPr sz="2400" b="1" i="0">
+                <a:solidFill>
+                  <a:srgbClr val="1A1A1A"/>
+                </a:solidFill>
+                <a:latin typeface="Century Schoolbook"/>
+              </a:rPr>
+              <a:t>Evaluate.</a:t>
+            </a:r>
+          </a:p>
+        </p:txBody>
+      </p:sp>
+      <p:sp>
+        <p:nvSpPr>
           <p:cNvPr id="10" name="TextBox 9"/>
-          <p:cNvSpPr txBox="1"/>
-          <p:nvPr/>
-        </p:nvSpPr>
-        <p:spPr>
-          <a:xfrm>
-            <a:off x="777240" y="3602736"/>
-            <a:ext cx="10607040" cy="429370"/>
-          </a:xfrm>
-          <a:prstGeom prst="rect">
-            <a:avLst/>
-          </a:prstGeom>
-          <a:noFill/>
-        </p:spPr>
-        <p:txBody>
-          <a:bodyPr wrap="square" lIns="45720" rIns="45720" tIns="18288" bIns="18288" anchor="t">
-            <a:spAutoFit/>
-          </a:bodyPr>
-          <a:lstStyle/>
-          <a:p>
-            <a:pPr algn="ctr"/>
-            <a:r>
-              <a:rPr sz="2400" b="0" i="0">
-                <a:solidFill>
-                  <a:srgbClr val="6B6B6B"/>
-                </a:solidFill>
-                <a:latin typeface="Century Schoolbook"/>
-              </a:rPr>
-              <a:t>a half plus a half</a:t>
-            </a:r>
-          </a:p>
-        </p:txBody>
-      </p:sp>
-      <p:sp>
-        <p:nvSpPr>
-          <p:cNvPr id="11" name="TextBox 10"/>
           <p:cNvSpPr txBox="1"/>
           <p:nvPr/>
         </p:nvSpPr>
@@ -5473,44 +5112,9 @@
           </a:fontRef>
         </p:style>
       </p:cxnSp>
-      <p:sp>
-        <p:nvSpPr>
-          <p:cNvPr id="5" name="TextBox 4"/>
-          <p:cNvSpPr txBox="1"/>
-          <p:nvPr/>
-        </p:nvSpPr>
-        <p:spPr>
-          <a:xfrm>
-            <a:off x="777240" y="1261872"/>
-            <a:ext cx="10607040" cy="310896"/>
-          </a:xfrm>
-          <a:prstGeom prst="rect">
-            <a:avLst/>
-          </a:prstGeom>
-          <a:noFill/>
-        </p:spPr>
-        <p:txBody>
-          <a:bodyPr wrap="square" lIns="45720" rIns="45720" tIns="18288" bIns="18288" anchor="t">
-            <a:spAutoFit/>
-          </a:bodyPr>
-          <a:lstStyle/>
-          <a:p>
-            <a:pPr algn="l"/>
-            <a:r>
-              <a:rPr sz="1700" b="0" i="1">
-                <a:solidFill>
-                  <a:srgbClr val="6B6B6B"/>
-                </a:solidFill>
-                <a:latin typeface="Century Schoolbook"/>
-              </a:rPr>
-              <a:t>Boards up on three.</a:t>
-            </a:r>
-          </a:p>
-        </p:txBody>
-      </p:sp>
       <p:cxnSp>
         <p:nvCxnSpPr>
-          <p:cNvPr id="6" name="Connector 5"/>
+          <p:cNvPr id="5" name="Connector 4"/>
           <p:cNvCxnSpPr/>
           <p:nvPr/>
         </p:nvCxnSpPr>
@@ -5545,7 +5149,7 @@
       </p:cxnSp>
       <p:sp>
         <p:nvSpPr>
-          <p:cNvPr id="7" name="TextBox 6"/>
+          <p:cNvPr id="6" name="TextBox 5"/>
           <p:cNvSpPr txBox="1"/>
           <p:nvPr/>
         </p:nvSpPr>
@@ -5580,7 +5184,7 @@
       </p:sp>
       <p:sp>
         <p:nvSpPr>
-          <p:cNvPr id="8" name="TextBox 7"/>
+          <p:cNvPr id="7" name="TextBox 6"/>
           <p:cNvSpPr txBox="1"/>
           <p:nvPr/>
         </p:nvSpPr>
@@ -5615,7 +5219,7 @@
       </p:sp>
       <p:pic>
         <p:nvPicPr>
-          <p:cNvPr id="9" name="Picture 8" descr="6f2b5e6da5da13af.png"/>
+          <p:cNvPr id="8" name="Picture 7" descr="6f2b5e6da5da13af.png"/>
           <p:cNvPicPr>
             <a:picLocks noChangeAspect="1"/>
           </p:cNvPicPr>
@@ -5639,7 +5243,7 @@
       </p:pic>
       <p:sp>
         <p:nvSpPr>
-          <p:cNvPr id="10" name="TextBox 9"/>
+          <p:cNvPr id="9" name="TextBox 8"/>
           <p:cNvSpPr txBox="1"/>
           <p:nvPr/>
         </p:nvSpPr>
@@ -5668,41 +5272,6 @@
                 <a:latin typeface="Century Schoolbook"/>
               </a:rPr>
               <a:t>Answer it.</a:t>
-            </a:r>
-          </a:p>
-        </p:txBody>
-      </p:sp>
-      <p:sp>
-        <p:nvSpPr>
-          <p:cNvPr id="11" name="TextBox 10"/>
-          <p:cNvSpPr txBox="1"/>
-          <p:nvPr/>
-        </p:nvSpPr>
-        <p:spPr>
-          <a:xfrm>
-            <a:off x="777240" y="4828032"/>
-            <a:ext cx="10607040" cy="365760"/>
-          </a:xfrm>
-          <a:prstGeom prst="rect">
-            <a:avLst/>
-          </a:prstGeom>
-          <a:noFill/>
-        </p:spPr>
-        <p:txBody>
-          <a:bodyPr wrap="square" lIns="45720" rIns="45720" tIns="18288" bIns="18288" anchor="t">
-            <a:spAutoFit/>
-          </a:bodyPr>
-          <a:lstStyle/>
-          <a:p>
-            <a:pPr algn="ctr"/>
-            <a:r>
-              <a:rPr sz="1900" b="0" i="1">
-                <a:solidFill>
-                  <a:srgbClr val="6B6B6B"/>
-                </a:solidFill>
-                <a:latin typeface="Century Schoolbook"/>
-              </a:rPr>
-              <a:t>Left to right.</a:t>
             </a:r>
           </a:p>
         </p:txBody>
@@ -5830,44 +5399,9 @@
           </a:fontRef>
         </p:style>
       </p:cxnSp>
-      <p:sp>
-        <p:nvSpPr>
-          <p:cNvPr id="5" name="TextBox 4"/>
-          <p:cNvSpPr txBox="1"/>
-          <p:nvPr/>
-        </p:nvSpPr>
-        <p:spPr>
-          <a:xfrm>
-            <a:off x="777240" y="1261872"/>
-            <a:ext cx="10607040" cy="310896"/>
-          </a:xfrm>
-          <a:prstGeom prst="rect">
-            <a:avLst/>
-          </a:prstGeom>
-          <a:noFill/>
-        </p:spPr>
-        <p:txBody>
-          <a:bodyPr wrap="square" lIns="45720" rIns="45720" tIns="18288" bIns="18288" anchor="t">
-            <a:spAutoFit/>
-          </a:bodyPr>
-          <a:lstStyle/>
-          <a:p>
-            <a:pPr algn="l"/>
-            <a:r>
-              <a:rPr sz="1700" b="0" i="1">
-                <a:solidFill>
-                  <a:srgbClr val="6B6B6B"/>
-                </a:solidFill>
-                <a:latin typeface="Century Schoolbook"/>
-              </a:rPr>
-              <a:t>Answer.</a:t>
-            </a:r>
-          </a:p>
-        </p:txBody>
-      </p:sp>
       <p:cxnSp>
         <p:nvCxnSpPr>
-          <p:cNvPr id="6" name="Connector 5"/>
+          <p:cNvPr id="5" name="Connector 4"/>
           <p:cNvCxnSpPr/>
           <p:nvPr/>
         </p:nvCxnSpPr>
@@ -5902,7 +5436,7 @@
       </p:cxnSp>
       <p:sp>
         <p:nvSpPr>
-          <p:cNvPr id="7" name="TextBox 6"/>
+          <p:cNvPr id="6" name="TextBox 5"/>
           <p:cNvSpPr txBox="1"/>
           <p:nvPr/>
         </p:nvSpPr>
@@ -5937,7 +5471,7 @@
       </p:sp>
       <p:sp>
         <p:nvSpPr>
-          <p:cNvPr id="8" name="TextBox 7"/>
+          <p:cNvPr id="7" name="TextBox 6"/>
           <p:cNvSpPr txBox="1"/>
           <p:nvPr/>
         </p:nvSpPr>
@@ -5972,7 +5506,7 @@
       </p:sp>
       <p:pic>
         <p:nvPicPr>
-          <p:cNvPr id="9" name="Picture 8" descr="2fd862883ce8c3fd.png"/>
+          <p:cNvPr id="8" name="Picture 7" descr="2fd862883ce8c3fd.png"/>
           <p:cNvPicPr>
             <a:picLocks noChangeAspect="1"/>
           </p:cNvPicPr>
@@ -5996,42 +5530,7 @@
       </p:pic>
       <p:sp>
         <p:nvSpPr>
-          <p:cNvPr id="10" name="TextBox 9"/>
-          <p:cNvSpPr txBox="1"/>
-          <p:nvPr/>
-        </p:nvSpPr>
-        <p:spPr>
-          <a:xfrm>
-            <a:off x="1828800" y="2834639"/>
-            <a:ext cx="8503920" cy="548640"/>
-          </a:xfrm>
-          <a:prstGeom prst="rect">
-            <a:avLst/>
-          </a:prstGeom>
-          <a:noFill/>
-        </p:spPr>
-        <p:txBody>
-          <a:bodyPr wrap="square" lIns="45720" rIns="45720" tIns="18288" bIns="18288" anchor="t">
-            <a:spAutoFit/>
-          </a:bodyPr>
-          <a:lstStyle/>
-          <a:p>
-            <a:pPr algn="ctr"/>
-            <a:r>
-              <a:rPr sz="2400" b="0" i="0">
-                <a:solidFill>
-                  <a:srgbClr val="6B6B6B"/>
-                </a:solidFill>
-                <a:latin typeface="Century Schoolbook"/>
-              </a:rPr>
-              <a:t>12 ÷ 3 first</a:t>
-            </a:r>
-          </a:p>
-        </p:txBody>
-      </p:sp>
-      <p:sp>
-        <p:nvSpPr>
-          <p:cNvPr id="11" name="TextBox 10"/>
+          <p:cNvPr id="9" name="TextBox 8"/>
           <p:cNvSpPr txBox="1"/>
           <p:nvPr/>
         </p:nvSpPr>
@@ -6187,44 +5686,9 @@
           </a:fontRef>
         </p:style>
       </p:cxnSp>
-      <p:sp>
-        <p:nvSpPr>
-          <p:cNvPr id="5" name="TextBox 4"/>
-          <p:cNvSpPr txBox="1"/>
-          <p:nvPr/>
-        </p:nvSpPr>
-        <p:spPr>
-          <a:xfrm>
-            <a:off x="777240" y="1261872"/>
-            <a:ext cx="10607040" cy="310896"/>
-          </a:xfrm>
-          <a:prstGeom prst="rect">
-            <a:avLst/>
-          </a:prstGeom>
-          <a:noFill/>
-        </p:spPr>
-        <p:txBody>
-          <a:bodyPr wrap="square" lIns="45720" rIns="45720" tIns="18288" bIns="18288" anchor="t">
-            <a:spAutoFit/>
-          </a:bodyPr>
-          <a:lstStyle/>
-          <a:p>
-            <a:pPr algn="l"/>
-            <a:r>
-              <a:rPr sz="1700" b="0" i="1">
-                <a:solidFill>
-                  <a:srgbClr val="6B6B6B"/>
-                </a:solidFill>
-                <a:latin typeface="Century Schoolbook"/>
-              </a:rPr>
-              <a:t>Boards up on three.</a:t>
-            </a:r>
-          </a:p>
-        </p:txBody>
-      </p:sp>
       <p:cxnSp>
         <p:nvCxnSpPr>
-          <p:cNvPr id="6" name="Connector 5"/>
+          <p:cNvPr id="5" name="Connector 4"/>
           <p:cNvCxnSpPr/>
           <p:nvPr/>
         </p:nvCxnSpPr>
@@ -6259,7 +5723,7 @@
       </p:cxnSp>
       <p:sp>
         <p:nvSpPr>
-          <p:cNvPr id="7" name="TextBox 6"/>
+          <p:cNvPr id="6" name="TextBox 5"/>
           <p:cNvSpPr txBox="1"/>
           <p:nvPr/>
         </p:nvSpPr>
@@ -6294,7 +5758,7 @@
       </p:sp>
       <p:sp>
         <p:nvSpPr>
-          <p:cNvPr id="8" name="TextBox 7"/>
+          <p:cNvPr id="7" name="TextBox 6"/>
           <p:cNvSpPr txBox="1"/>
           <p:nvPr/>
         </p:nvSpPr>
@@ -6329,7 +5793,7 @@
       </p:sp>
       <p:sp>
         <p:nvSpPr>
-          <p:cNvPr id="9" name="TextBox 8"/>
+          <p:cNvPr id="8" name="TextBox 7"/>
           <p:cNvSpPr txBox="1"/>
           <p:nvPr/>
         </p:nvSpPr>
@@ -6364,7 +5828,7 @@
       </p:sp>
       <p:pic>
         <p:nvPicPr>
-          <p:cNvPr id="10" name="Picture 9" descr="9fe57fc54286b299.png"/>
+          <p:cNvPr id="9" name="Picture 8" descr="9fe57fc54286b299.png"/>
           <p:cNvPicPr>
             <a:picLocks noChangeAspect="1"/>
           </p:cNvPicPr>
@@ -6388,7 +5852,7 @@
       </p:pic>
       <p:sp>
         <p:nvSpPr>
-          <p:cNvPr id="11" name="TextBox 10"/>
+          <p:cNvPr id="10" name="TextBox 9"/>
           <p:cNvSpPr txBox="1"/>
           <p:nvPr/>
         </p:nvSpPr>
@@ -6423,7 +5887,7 @@
       </p:sp>
       <p:sp>
         <p:nvSpPr>
-          <p:cNvPr id="12" name="TextBox 11"/>
+          <p:cNvPr id="11" name="TextBox 10"/>
           <p:cNvSpPr txBox="1"/>
           <p:nvPr/>
         </p:nvSpPr>
@@ -6458,7 +5922,7 @@
       </p:sp>
       <p:sp>
         <p:nvSpPr>
-          <p:cNvPr id="13" name="TextBox 12"/>
+          <p:cNvPr id="12" name="TextBox 11"/>
           <p:cNvSpPr txBox="1"/>
           <p:nvPr/>
         </p:nvSpPr>
@@ -6493,7 +5957,7 @@
       </p:sp>
       <p:sp>
         <p:nvSpPr>
-          <p:cNvPr id="14" name="TextBox 13"/>
+          <p:cNvPr id="13" name="TextBox 12"/>
           <p:cNvSpPr txBox="1"/>
           <p:nvPr/>
         </p:nvSpPr>
@@ -6649,44 +6113,9 @@
           </a:fontRef>
         </p:style>
       </p:cxnSp>
-      <p:sp>
-        <p:nvSpPr>
-          <p:cNvPr id="5" name="TextBox 4"/>
-          <p:cNvSpPr txBox="1"/>
-          <p:nvPr/>
-        </p:nvSpPr>
-        <p:spPr>
-          <a:xfrm>
-            <a:off x="777240" y="1261872"/>
-            <a:ext cx="10607040" cy="310896"/>
-          </a:xfrm>
-          <a:prstGeom prst="rect">
-            <a:avLst/>
-          </a:prstGeom>
-          <a:noFill/>
-        </p:spPr>
-        <p:txBody>
-          <a:bodyPr wrap="square" lIns="45720" rIns="45720" tIns="18288" bIns="18288" anchor="t">
-            <a:spAutoFit/>
-          </a:bodyPr>
-          <a:lstStyle/>
-          <a:p>
-            <a:pPr algn="l"/>
-            <a:r>
-              <a:rPr sz="1700" b="0" i="1">
-                <a:solidFill>
-                  <a:srgbClr val="6B6B6B"/>
-                </a:solidFill>
-                <a:latin typeface="Century Schoolbook"/>
-              </a:rPr>
-              <a:t>Answer.</a:t>
-            </a:r>
-          </a:p>
-        </p:txBody>
-      </p:sp>
       <p:cxnSp>
         <p:nvCxnSpPr>
-          <p:cNvPr id="6" name="Connector 5"/>
+          <p:cNvPr id="5" name="Connector 4"/>
           <p:cNvCxnSpPr/>
           <p:nvPr/>
         </p:nvCxnSpPr>
@@ -6721,7 +6150,7 @@
       </p:cxnSp>
       <p:sp>
         <p:nvSpPr>
-          <p:cNvPr id="7" name="TextBox 6"/>
+          <p:cNvPr id="6" name="TextBox 5"/>
           <p:cNvSpPr txBox="1"/>
           <p:nvPr/>
         </p:nvSpPr>
@@ -6756,7 +6185,7 @@
       </p:sp>
       <p:sp>
         <p:nvSpPr>
-          <p:cNvPr id="8" name="TextBox 7"/>
+          <p:cNvPr id="7" name="TextBox 6"/>
           <p:cNvSpPr txBox="1"/>
           <p:nvPr/>
         </p:nvSpPr>
@@ -6791,7 +6220,7 @@
       </p:sp>
       <p:sp>
         <p:nvSpPr>
-          <p:cNvPr id="9" name="TextBox 8"/>
+          <p:cNvPr id="8" name="TextBox 7"/>
           <p:cNvSpPr txBox="1"/>
           <p:nvPr/>
         </p:nvSpPr>
@@ -6826,7 +6255,7 @@
       </p:sp>
       <p:pic>
         <p:nvPicPr>
-          <p:cNvPr id="10" name="Picture 9" descr="538eaa100b231b86.png"/>
+          <p:cNvPr id="9" name="Picture 8" descr="538eaa100b231b86.png"/>
           <p:cNvPicPr>
             <a:picLocks noChangeAspect="1"/>
           </p:cNvPicPr>
@@ -6850,7 +6279,7 @@
       </p:pic>
       <p:sp>
         <p:nvSpPr>
-          <p:cNvPr id="11" name="TextBox 10"/>
+          <p:cNvPr id="10" name="TextBox 9"/>
           <p:cNvSpPr txBox="1"/>
           <p:nvPr/>
         </p:nvSpPr>
@@ -6885,7 +6314,7 @@
       </p:sp>
       <p:sp>
         <p:nvSpPr>
-          <p:cNvPr id="12" name="TextBox 11"/>
+          <p:cNvPr id="11" name="TextBox 10"/>
           <p:cNvSpPr txBox="1"/>
           <p:nvPr/>
         </p:nvSpPr>
@@ -6920,7 +6349,7 @@
       </p:sp>
       <p:sp>
         <p:nvSpPr>
-          <p:cNvPr id="13" name="TextBox 12"/>
+          <p:cNvPr id="12" name="TextBox 11"/>
           <p:cNvSpPr txBox="1"/>
           <p:nvPr/>
         </p:nvSpPr>
@@ -6955,42 +6384,7 @@
       </p:sp>
       <p:sp>
         <p:nvSpPr>
-          <p:cNvPr id="14" name="TextBox 13"/>
-          <p:cNvSpPr txBox="1"/>
-          <p:nvPr/>
-        </p:nvSpPr>
-        <p:spPr>
-          <a:xfrm>
-            <a:off x="1828800" y="3656804"/>
-            <a:ext cx="8503920" cy="548640"/>
-          </a:xfrm>
-          <a:prstGeom prst="rect">
-            <a:avLst/>
-          </a:prstGeom>
-          <a:noFill/>
-        </p:spPr>
-        <p:txBody>
-          <a:bodyPr wrap="square" lIns="45720" rIns="45720" tIns="18288" bIns="18288" anchor="t">
-            <a:spAutoFit/>
-          </a:bodyPr>
-          <a:lstStyle/>
-          <a:p>
-            <a:pPr algn="ctr"/>
-            <a:r>
-              <a:rPr sz="2400" b="0" i="0">
-                <a:solidFill>
-                  <a:srgbClr val="6B6B6B"/>
-                </a:solidFill>
-                <a:latin typeface="Century Schoolbook"/>
-              </a:rPr>
-              <a:t>4 sides of 14</a:t>
-            </a:r>
-          </a:p>
-        </p:txBody>
-      </p:sp>
-      <p:sp>
-        <p:nvSpPr>
-          <p:cNvPr id="15" name="TextBox 14"/>
+          <p:cNvPr id="13" name="TextBox 12"/>
           <p:cNvSpPr txBox="1"/>
           <p:nvPr/>
         </p:nvSpPr>
@@ -7146,44 +6540,9 @@
           </a:fontRef>
         </p:style>
       </p:cxnSp>
-      <p:sp>
-        <p:nvSpPr>
-          <p:cNvPr id="5" name="TextBox 4"/>
-          <p:cNvSpPr txBox="1"/>
-          <p:nvPr/>
-        </p:nvSpPr>
-        <p:spPr>
-          <a:xfrm>
-            <a:off x="777240" y="1261872"/>
-            <a:ext cx="10607040" cy="310896"/>
-          </a:xfrm>
-          <a:prstGeom prst="rect">
-            <a:avLst/>
-          </a:prstGeom>
-          <a:noFill/>
-        </p:spPr>
-        <p:txBody>
-          <a:bodyPr wrap="square" lIns="45720" rIns="45720" tIns="18288" bIns="18288" anchor="t">
-            <a:spAutoFit/>
-          </a:bodyPr>
-          <a:lstStyle/>
-          <a:p>
-            <a:pPr algn="l"/>
-            <a:r>
-              <a:rPr sz="1700" b="0" i="1">
-                <a:solidFill>
-                  <a:srgbClr val="6B6B6B"/>
-                </a:solidFill>
-                <a:latin typeface="Century Schoolbook"/>
-              </a:rPr>
-              <a:t>Boards up on three.</a:t>
-            </a:r>
-          </a:p>
-        </p:txBody>
-      </p:sp>
       <p:cxnSp>
         <p:nvCxnSpPr>
-          <p:cNvPr id="6" name="Connector 5"/>
+          <p:cNvPr id="5" name="Connector 4"/>
           <p:cNvCxnSpPr/>
           <p:nvPr/>
         </p:nvCxnSpPr>
@@ -7218,7 +6577,7 @@
       </p:cxnSp>
       <p:sp>
         <p:nvSpPr>
-          <p:cNvPr id="7" name="TextBox 6"/>
+          <p:cNvPr id="6" name="TextBox 5"/>
           <p:cNvSpPr txBox="1"/>
           <p:nvPr/>
         </p:nvSpPr>
@@ -7253,7 +6612,7 @@
       </p:sp>
       <p:sp>
         <p:nvSpPr>
-          <p:cNvPr id="8" name="TextBox 7"/>
+          <p:cNvPr id="7" name="TextBox 6"/>
           <p:cNvSpPr txBox="1"/>
           <p:nvPr/>
         </p:nvSpPr>
@@ -7288,7 +6647,7 @@
       </p:sp>
       <p:pic>
         <p:nvPicPr>
-          <p:cNvPr id="9" name="Picture 8" descr="0bd57d1fcf1bcfbb.png"/>
+          <p:cNvPr id="8" name="Picture 7" descr="0bd57d1fcf1bcfbb.png"/>
           <p:cNvPicPr>
             <a:picLocks noChangeAspect="1"/>
           </p:cNvPicPr>
@@ -7312,7 +6671,7 @@
       </p:pic>
       <p:sp>
         <p:nvSpPr>
-          <p:cNvPr id="10" name="TextBox 9"/>
+          <p:cNvPr id="9" name="TextBox 8"/>
           <p:cNvSpPr txBox="1"/>
           <p:nvPr/>
         </p:nvSpPr>
@@ -7341,41 +6700,6 @@
                 <a:latin typeface="Century Schoolbook"/>
               </a:rPr>
               <a:t>Answer it.</a:t>
-            </a:r>
-          </a:p>
-        </p:txBody>
-      </p:sp>
-      <p:sp>
-        <p:nvSpPr>
-          <p:cNvPr id="11" name="TextBox 10"/>
-          <p:cNvSpPr txBox="1"/>
-          <p:nvPr/>
-        </p:nvSpPr>
-        <p:spPr>
-          <a:xfrm>
-            <a:off x="777240" y="4828032"/>
-            <a:ext cx="10607040" cy="365760"/>
-          </a:xfrm>
-          <a:prstGeom prst="rect">
-            <a:avLst/>
-          </a:prstGeom>
-          <a:noFill/>
-        </p:spPr>
-        <p:txBody>
-          <a:bodyPr wrap="square" lIns="45720" rIns="45720" tIns="18288" bIns="18288" anchor="t">
-            <a:spAutoFit/>
-          </a:bodyPr>
-          <a:lstStyle/>
-          <a:p>
-            <a:pPr algn="ctr"/>
-            <a:r>
-              <a:rPr sz="1900" b="0" i="1">
-                <a:solidFill>
-                  <a:srgbClr val="6B6B6B"/>
-                </a:solidFill>
-                <a:latin typeface="Century Schoolbook"/>
-              </a:rPr>
-              <a:t>Left to right.</a:t>
             </a:r>
           </a:p>
         </p:txBody>
@@ -7503,44 +6827,9 @@
           </a:fontRef>
         </p:style>
       </p:cxnSp>
-      <p:sp>
-        <p:nvSpPr>
-          <p:cNvPr id="5" name="TextBox 4"/>
-          <p:cNvSpPr txBox="1"/>
-          <p:nvPr/>
-        </p:nvSpPr>
-        <p:spPr>
-          <a:xfrm>
-            <a:off x="777240" y="1261872"/>
-            <a:ext cx="10607040" cy="310896"/>
-          </a:xfrm>
-          <a:prstGeom prst="rect">
-            <a:avLst/>
-          </a:prstGeom>
-          <a:noFill/>
-        </p:spPr>
-        <p:txBody>
-          <a:bodyPr wrap="square" lIns="45720" rIns="45720" tIns="18288" bIns="18288" anchor="t">
-            <a:spAutoFit/>
-          </a:bodyPr>
-          <a:lstStyle/>
-          <a:p>
-            <a:pPr algn="l"/>
-            <a:r>
-              <a:rPr sz="1700" b="0" i="1">
-                <a:solidFill>
-                  <a:srgbClr val="6B6B6B"/>
-                </a:solidFill>
-                <a:latin typeface="Century Schoolbook"/>
-              </a:rPr>
-              <a:t>On your own. Four minutes. No notes.</a:t>
-            </a:r>
-          </a:p>
-        </p:txBody>
-      </p:sp>
       <p:cxnSp>
         <p:nvCxnSpPr>
-          <p:cNvPr id="6" name="Connector 5"/>
+          <p:cNvPr id="5" name="Connector 4"/>
           <p:cNvCxnSpPr/>
           <p:nvPr/>
         </p:nvCxnSpPr>
@@ -7575,7 +6864,7 @@
       </p:cxnSp>
       <p:sp>
         <p:nvSpPr>
-          <p:cNvPr id="7" name="TextBox 6"/>
+          <p:cNvPr id="6" name="TextBox 5"/>
           <p:cNvSpPr txBox="1"/>
           <p:nvPr/>
         </p:nvSpPr>
@@ -7610,7 +6899,7 @@
       </p:sp>
       <p:sp>
         <p:nvSpPr>
-          <p:cNvPr id="8" name="TextBox 7"/>
+          <p:cNvPr id="7" name="TextBox 6"/>
           <p:cNvSpPr txBox="1"/>
           <p:nvPr/>
         </p:nvSpPr>
@@ -7645,13 +6934,13 @@
       </p:sp>
       <p:sp>
         <p:nvSpPr>
-          <p:cNvPr id="9" name="TextBox 8"/>
-          <p:cNvSpPr txBox="1"/>
-          <p:nvPr/>
-        </p:nvSpPr>
-        <p:spPr>
-          <a:xfrm>
-            <a:off x="1874519" y="1760220"/>
+          <p:cNvPr id="8" name="TextBox 7"/>
+          <p:cNvSpPr txBox="1"/>
+          <p:nvPr/>
+        </p:nvSpPr>
+        <p:spPr>
+          <a:xfrm>
+            <a:off x="1874519" y="1440180"/>
             <a:ext cx="720605" cy="457200"/>
           </a:xfrm>
           <a:prstGeom prst="rect">
@@ -7680,7 +6969,7 @@
       </p:sp>
       <p:pic>
         <p:nvPicPr>
-          <p:cNvPr id="10" name="Picture 9" descr="535c314b8c201a80.png"/>
+          <p:cNvPr id="9" name="Picture 8" descr="535c314b8c201a80.png"/>
           <p:cNvPicPr>
             <a:picLocks noChangeAspect="1"/>
           </p:cNvPicPr>
@@ -7694,7 +6983,7 @@
         </p:blipFill>
         <p:spPr>
           <a:xfrm>
-            <a:off x="2457965" y="1784604"/>
+            <a:off x="2457965" y="1464564"/>
             <a:ext cx="1143000" cy="408432"/>
           </a:xfrm>
           <a:prstGeom prst="rect">
@@ -7704,13 +6993,13 @@
       </p:pic>
       <p:sp>
         <p:nvSpPr>
-          <p:cNvPr id="11" name="TextBox 10"/>
-          <p:cNvSpPr txBox="1"/>
-          <p:nvPr/>
-        </p:nvSpPr>
-        <p:spPr>
-          <a:xfrm>
-            <a:off x="1874519" y="2372868"/>
+          <p:cNvPr id="10" name="TextBox 9"/>
+          <p:cNvSpPr txBox="1"/>
+          <p:nvPr/>
+        </p:nvSpPr>
+        <p:spPr>
+          <a:xfrm>
+            <a:off x="1874519" y="2052828"/>
             <a:ext cx="6812791" cy="457200"/>
           </a:xfrm>
           <a:prstGeom prst="rect">
@@ -7739,13 +7028,13 @@
       </p:sp>
       <p:sp>
         <p:nvSpPr>
-          <p:cNvPr id="12" name="TextBox 11"/>
-          <p:cNvSpPr txBox="1"/>
-          <p:nvPr/>
-        </p:nvSpPr>
-        <p:spPr>
-          <a:xfrm>
-            <a:off x="1874519" y="3057144"/>
+          <p:cNvPr id="11" name="TextBox 10"/>
+          <p:cNvSpPr txBox="1"/>
+          <p:nvPr/>
+        </p:nvSpPr>
+        <p:spPr>
+          <a:xfrm>
+            <a:off x="1874519" y="2737104"/>
             <a:ext cx="3064939" cy="457200"/>
           </a:xfrm>
           <a:prstGeom prst="rect">
@@ -7774,7 +7063,7 @@
       </p:sp>
       <p:pic>
         <p:nvPicPr>
-          <p:cNvPr id="13" name="Picture 12" descr="70fd4f7c195b27fd.png"/>
+          <p:cNvPr id="12" name="Picture 11" descr="70fd4f7c195b27fd.png"/>
           <p:cNvPicPr>
             <a:picLocks noChangeAspect="1"/>
           </p:cNvPicPr>
@@ -7788,7 +7077,7 @@
         </p:blipFill>
         <p:spPr>
           <a:xfrm>
-            <a:off x="4802299" y="3008376"/>
+            <a:off x="4802299" y="2688336"/>
             <a:ext cx="795528" cy="554736"/>
           </a:xfrm>
           <a:prstGeom prst="rect">
@@ -7798,13 +7087,13 @@
       </p:pic>
       <p:sp>
         <p:nvSpPr>
-          <p:cNvPr id="14" name="TextBox 13"/>
-          <p:cNvSpPr txBox="1"/>
-          <p:nvPr/>
-        </p:nvSpPr>
-        <p:spPr>
-          <a:xfrm>
-            <a:off x="1874519" y="3741420"/>
+          <p:cNvPr id="13" name="TextBox 12"/>
+          <p:cNvSpPr txBox="1"/>
+          <p:nvPr/>
+        </p:nvSpPr>
+        <p:spPr>
+          <a:xfrm>
+            <a:off x="1874519" y="3421380"/>
             <a:ext cx="2276518" cy="457200"/>
           </a:xfrm>
           <a:prstGeom prst="rect">
@@ -7833,7 +7122,7 @@
       </p:sp>
       <p:pic>
         <p:nvPicPr>
-          <p:cNvPr id="15" name="Picture 14" descr="9720c4bedb33ef6c.png"/>
+          <p:cNvPr id="14" name="Picture 13" descr="9720c4bedb33ef6c.png"/>
           <p:cNvPicPr>
             <a:picLocks noChangeAspect="1"/>
           </p:cNvPicPr>
@@ -7847,7 +7136,7 @@
         </p:blipFill>
         <p:spPr>
           <a:xfrm>
-            <a:off x="4013878" y="3854196"/>
+            <a:off x="4013878" y="3534156"/>
             <a:ext cx="1088136" cy="231648"/>
           </a:xfrm>
           <a:prstGeom prst="rect">
@@ -7978,44 +7267,9 @@
           </a:fontRef>
         </p:style>
       </p:cxnSp>
-      <p:sp>
-        <p:nvSpPr>
-          <p:cNvPr id="5" name="TextBox 4"/>
-          <p:cNvSpPr txBox="1"/>
-          <p:nvPr/>
-        </p:nvSpPr>
-        <p:spPr>
-          <a:xfrm>
-            <a:off x="777240" y="1261872"/>
-            <a:ext cx="10607040" cy="310896"/>
-          </a:xfrm>
-          <a:prstGeom prst="rect">
-            <a:avLst/>
-          </a:prstGeom>
-          <a:noFill/>
-        </p:spPr>
-        <p:txBody>
-          <a:bodyPr wrap="square" lIns="45720" rIns="45720" tIns="18288" bIns="18288" anchor="t">
-            <a:spAutoFit/>
-          </a:bodyPr>
-          <a:lstStyle/>
-          <a:p>
-            <a:pPr algn="l"/>
-            <a:r>
-              <a:rPr sz="1700" b="0" i="1">
-                <a:solidFill>
-                  <a:srgbClr val="6B6B6B"/>
-                </a:solidFill>
-                <a:latin typeface="Century Schoolbook"/>
-              </a:rPr>
-              <a:t>Answer.</a:t>
-            </a:r>
-          </a:p>
-        </p:txBody>
-      </p:sp>
       <p:cxnSp>
         <p:nvCxnSpPr>
-          <p:cNvPr id="6" name="Connector 5"/>
+          <p:cNvPr id="5" name="Connector 4"/>
           <p:cNvCxnSpPr/>
           <p:nvPr/>
         </p:nvCxnSpPr>
@@ -8050,7 +7304,7 @@
       </p:cxnSp>
       <p:sp>
         <p:nvSpPr>
-          <p:cNvPr id="7" name="TextBox 6"/>
+          <p:cNvPr id="6" name="TextBox 5"/>
           <p:cNvSpPr txBox="1"/>
           <p:nvPr/>
         </p:nvSpPr>
@@ -8085,7 +7339,7 @@
       </p:sp>
       <p:sp>
         <p:nvSpPr>
-          <p:cNvPr id="8" name="TextBox 7"/>
+          <p:cNvPr id="7" name="TextBox 6"/>
           <p:cNvSpPr txBox="1"/>
           <p:nvPr/>
         </p:nvSpPr>
@@ -8120,7 +7374,7 @@
       </p:sp>
       <p:pic>
         <p:nvPicPr>
-          <p:cNvPr id="9" name="Picture 8" descr="e06ac948f72f4ec3.png"/>
+          <p:cNvPr id="8" name="Picture 7" descr="e06ac948f72f4ec3.png"/>
           <p:cNvPicPr>
             <a:picLocks noChangeAspect="1"/>
           </p:cNvPicPr>
@@ -8144,42 +7398,7 @@
       </p:pic>
       <p:sp>
         <p:nvSpPr>
-          <p:cNvPr id="10" name="TextBox 9"/>
-          <p:cNvSpPr txBox="1"/>
-          <p:nvPr/>
-        </p:nvSpPr>
-        <p:spPr>
-          <a:xfrm>
-            <a:off x="1828800" y="2834639"/>
-            <a:ext cx="8503920" cy="548640"/>
-          </a:xfrm>
-          <a:prstGeom prst="rect">
-            <a:avLst/>
-          </a:prstGeom>
-          <a:noFill/>
-        </p:spPr>
-        <p:txBody>
-          <a:bodyPr wrap="square" lIns="45720" rIns="45720" tIns="18288" bIns="18288" anchor="t">
-            <a:spAutoFit/>
-          </a:bodyPr>
-          <a:lstStyle/>
-          <a:p>
-            <a:pPr algn="ctr"/>
-            <a:r>
-              <a:rPr sz="2400" b="0" i="0">
-                <a:solidFill>
-                  <a:srgbClr val="6B6B6B"/>
-                </a:solidFill>
-                <a:latin typeface="Century Schoolbook"/>
-              </a:rPr>
-              <a:t>10 − 4 first</a:t>
-            </a:r>
-          </a:p>
-        </p:txBody>
-      </p:sp>
-      <p:sp>
-        <p:nvSpPr>
-          <p:cNvPr id="11" name="TextBox 10"/>
+          <p:cNvPr id="9" name="TextBox 8"/>
           <p:cNvSpPr txBox="1"/>
           <p:nvPr/>
         </p:nvSpPr>
@@ -8335,44 +7554,9 @@
           </a:fontRef>
         </p:style>
       </p:cxnSp>
-      <p:sp>
-        <p:nvSpPr>
-          <p:cNvPr id="5" name="TextBox 4"/>
-          <p:cNvSpPr txBox="1"/>
-          <p:nvPr/>
-        </p:nvSpPr>
-        <p:spPr>
-          <a:xfrm>
-            <a:off x="777240" y="1261872"/>
-            <a:ext cx="10607040" cy="310896"/>
-          </a:xfrm>
-          <a:prstGeom prst="rect">
-            <a:avLst/>
-          </a:prstGeom>
-          <a:noFill/>
-        </p:spPr>
-        <p:txBody>
-          <a:bodyPr wrap="square" lIns="45720" rIns="45720" tIns="18288" bIns="18288" anchor="t">
-            <a:spAutoFit/>
-          </a:bodyPr>
-          <a:lstStyle/>
-          <a:p>
-            <a:pPr algn="l"/>
-            <a:r>
-              <a:rPr sz="1700" b="0" i="1">
-                <a:solidFill>
-                  <a:srgbClr val="6B6B6B"/>
-                </a:solidFill>
-                <a:latin typeface="Century Schoolbook"/>
-              </a:rPr>
-              <a:t>Boards up on three.</a:t>
-            </a:r>
-          </a:p>
-        </p:txBody>
-      </p:sp>
       <p:cxnSp>
         <p:nvCxnSpPr>
-          <p:cNvPr id="6" name="Connector 5"/>
+          <p:cNvPr id="5" name="Connector 4"/>
           <p:cNvCxnSpPr/>
           <p:nvPr/>
         </p:nvCxnSpPr>
@@ -8407,7 +7591,7 @@
       </p:cxnSp>
       <p:sp>
         <p:nvSpPr>
-          <p:cNvPr id="7" name="TextBox 6"/>
+          <p:cNvPr id="6" name="TextBox 5"/>
           <p:cNvSpPr txBox="1"/>
           <p:nvPr/>
         </p:nvSpPr>
@@ -8442,7 +7626,7 @@
       </p:sp>
       <p:sp>
         <p:nvSpPr>
-          <p:cNvPr id="8" name="TextBox 7"/>
+          <p:cNvPr id="7" name="TextBox 6"/>
           <p:cNvSpPr txBox="1"/>
           <p:nvPr/>
         </p:nvSpPr>
@@ -8477,7 +7661,7 @@
       </p:sp>
       <p:pic>
         <p:nvPicPr>
-          <p:cNvPr id="9" name="Picture 8" descr="4a8f8f45b07cb518.png"/>
+          <p:cNvPr id="8" name="Picture 7" descr="4a8f8f45b07cb518.png"/>
           <p:cNvPicPr>
             <a:picLocks noChangeAspect="1"/>
           </p:cNvPicPr>
@@ -8501,7 +7685,7 @@
       </p:pic>
       <p:sp>
         <p:nvSpPr>
-          <p:cNvPr id="10" name="TextBox 9"/>
+          <p:cNvPr id="9" name="TextBox 8"/>
           <p:cNvSpPr txBox="1"/>
           <p:nvPr/>
         </p:nvSpPr>
@@ -8530,41 +7714,6 @@
                 <a:latin typeface="Century Schoolbook"/>
               </a:rPr>
               <a:t>Answer it.</a:t>
-            </a:r>
-          </a:p>
-        </p:txBody>
-      </p:sp>
-      <p:sp>
-        <p:nvSpPr>
-          <p:cNvPr id="11" name="TextBox 10"/>
-          <p:cNvSpPr txBox="1"/>
-          <p:nvPr/>
-        </p:nvSpPr>
-        <p:spPr>
-          <a:xfrm>
-            <a:off x="777240" y="4828032"/>
-            <a:ext cx="10607040" cy="365760"/>
-          </a:xfrm>
-          <a:prstGeom prst="rect">
-            <a:avLst/>
-          </a:prstGeom>
-          <a:noFill/>
-        </p:spPr>
-        <p:txBody>
-          <a:bodyPr wrap="square" lIns="45720" rIns="45720" tIns="18288" bIns="18288" anchor="t">
-            <a:spAutoFit/>
-          </a:bodyPr>
-          <a:lstStyle/>
-          <a:p>
-            <a:pPr algn="ctr"/>
-            <a:r>
-              <a:rPr sz="1900" b="0" i="1">
-                <a:solidFill>
-                  <a:srgbClr val="6B6B6B"/>
-                </a:solidFill>
-                <a:latin typeface="Century Schoolbook"/>
-              </a:rPr>
-              <a:t>Finish the top and the bottom.</a:t>
             </a:r>
           </a:p>
         </p:txBody>
@@ -8692,44 +7841,9 @@
           </a:fontRef>
         </p:style>
       </p:cxnSp>
-      <p:sp>
-        <p:nvSpPr>
-          <p:cNvPr id="5" name="TextBox 4"/>
-          <p:cNvSpPr txBox="1"/>
-          <p:nvPr/>
-        </p:nvSpPr>
-        <p:spPr>
-          <a:xfrm>
-            <a:off x="777240" y="1261872"/>
-            <a:ext cx="10607040" cy="310896"/>
-          </a:xfrm>
-          <a:prstGeom prst="rect">
-            <a:avLst/>
-          </a:prstGeom>
-          <a:noFill/>
-        </p:spPr>
-        <p:txBody>
-          <a:bodyPr wrap="square" lIns="45720" rIns="45720" tIns="18288" bIns="18288" anchor="t">
-            <a:spAutoFit/>
-          </a:bodyPr>
-          <a:lstStyle/>
-          <a:p>
-            <a:pPr algn="l"/>
-            <a:r>
-              <a:rPr sz="1700" b="0" i="1">
-                <a:solidFill>
-                  <a:srgbClr val="6B6B6B"/>
-                </a:solidFill>
-                <a:latin typeface="Century Schoolbook"/>
-              </a:rPr>
-              <a:t>Answer.</a:t>
-            </a:r>
-          </a:p>
-        </p:txBody>
-      </p:sp>
       <p:cxnSp>
         <p:nvCxnSpPr>
-          <p:cNvPr id="6" name="Connector 5"/>
+          <p:cNvPr id="5" name="Connector 4"/>
           <p:cNvCxnSpPr/>
           <p:nvPr/>
         </p:nvCxnSpPr>
@@ -8764,7 +7878,7 @@
       </p:cxnSp>
       <p:sp>
         <p:nvSpPr>
-          <p:cNvPr id="7" name="TextBox 6"/>
+          <p:cNvPr id="6" name="TextBox 5"/>
           <p:cNvSpPr txBox="1"/>
           <p:nvPr/>
         </p:nvSpPr>
@@ -8799,7 +7913,7 @@
       </p:sp>
       <p:sp>
         <p:nvSpPr>
-          <p:cNvPr id="8" name="TextBox 7"/>
+          <p:cNvPr id="7" name="TextBox 6"/>
           <p:cNvSpPr txBox="1"/>
           <p:nvPr/>
         </p:nvSpPr>
@@ -8834,7 +7948,7 @@
       </p:sp>
       <p:pic>
         <p:nvPicPr>
-          <p:cNvPr id="9" name="Picture 8" descr="19aa5c3e206c11fc.png"/>
+          <p:cNvPr id="8" name="Picture 7" descr="19aa5c3e206c11fc.png"/>
           <p:cNvPicPr>
             <a:picLocks noChangeAspect="1"/>
           </p:cNvPicPr>
@@ -8858,42 +7972,7 @@
       </p:pic>
       <p:sp>
         <p:nvSpPr>
-          <p:cNvPr id="10" name="TextBox 9"/>
-          <p:cNvSpPr txBox="1"/>
-          <p:nvPr/>
-        </p:nvSpPr>
-        <p:spPr>
-          <a:xfrm>
-            <a:off x="1828800" y="3233927"/>
-            <a:ext cx="8503920" cy="548640"/>
-          </a:xfrm>
-          <a:prstGeom prst="rect">
-            <a:avLst/>
-          </a:prstGeom>
-          <a:noFill/>
-        </p:spPr>
-        <p:txBody>
-          <a:bodyPr wrap="square" lIns="45720" rIns="45720" tIns="18288" bIns="18288" anchor="t">
-            <a:spAutoFit/>
-          </a:bodyPr>
-          <a:lstStyle/>
-          <a:p>
-            <a:pPr algn="ctr"/>
-            <a:r>
-              <a:rPr sz="2400" b="0" i="0">
-                <a:solidFill>
-                  <a:srgbClr val="6B6B6B"/>
-                </a:solidFill>
-                <a:latin typeface="Century Schoolbook"/>
-              </a:rPr>
-              <a:t>3 over 9</a:t>
-            </a:r>
-          </a:p>
-        </p:txBody>
-      </p:sp>
-      <p:sp>
-        <p:nvSpPr>
-          <p:cNvPr id="11" name="TextBox 10"/>
+          <p:cNvPr id="9" name="TextBox 8"/>
           <p:cNvSpPr txBox="1"/>
           <p:nvPr/>
         </p:nvSpPr>
@@ -9049,44 +8128,9 @@
           </a:fontRef>
         </p:style>
       </p:cxnSp>
-      <p:sp>
-        <p:nvSpPr>
-          <p:cNvPr id="5" name="TextBox 4"/>
-          <p:cNvSpPr txBox="1"/>
-          <p:nvPr/>
-        </p:nvSpPr>
-        <p:spPr>
-          <a:xfrm>
-            <a:off x="777240" y="1261872"/>
-            <a:ext cx="10607040" cy="310896"/>
-          </a:xfrm>
-          <a:prstGeom prst="rect">
-            <a:avLst/>
-          </a:prstGeom>
-          <a:noFill/>
-        </p:spPr>
-        <p:txBody>
-          <a:bodyPr wrap="square" lIns="45720" rIns="45720" tIns="18288" bIns="18288" anchor="t">
-            <a:spAutoFit/>
-          </a:bodyPr>
-          <a:lstStyle/>
-          <a:p>
-            <a:pPr algn="l"/>
-            <a:r>
-              <a:rPr sz="1700" b="0" i="1">
-                <a:solidFill>
-                  <a:srgbClr val="6B6B6B"/>
-                </a:solidFill>
-                <a:latin typeface="Century Schoolbook"/>
-              </a:rPr>
-              <a:t>Boards up on three.</a:t>
-            </a:r>
-          </a:p>
-        </p:txBody>
-      </p:sp>
       <p:cxnSp>
         <p:nvCxnSpPr>
-          <p:cNvPr id="6" name="Connector 5"/>
+          <p:cNvPr id="5" name="Connector 4"/>
           <p:cNvCxnSpPr/>
           <p:nvPr/>
         </p:nvCxnSpPr>
@@ -9121,7 +8165,7 @@
       </p:cxnSp>
       <p:sp>
         <p:nvSpPr>
-          <p:cNvPr id="7" name="TextBox 6"/>
+          <p:cNvPr id="6" name="TextBox 5"/>
           <p:cNvSpPr txBox="1"/>
           <p:nvPr/>
         </p:nvSpPr>
@@ -9156,7 +8200,7 @@
       </p:sp>
       <p:sp>
         <p:nvSpPr>
-          <p:cNvPr id="8" name="TextBox 7"/>
+          <p:cNvPr id="7" name="TextBox 6"/>
           <p:cNvSpPr txBox="1"/>
           <p:nvPr/>
         </p:nvSpPr>
@@ -9191,7 +8235,7 @@
       </p:sp>
       <p:pic>
         <p:nvPicPr>
-          <p:cNvPr id="9" name="Picture 8" descr="0e9d178742cadf8a.png"/>
+          <p:cNvPr id="8" name="Picture 7" descr="0e9d178742cadf8a.png"/>
           <p:cNvPicPr>
             <a:picLocks noChangeAspect="1"/>
           </p:cNvPicPr>
@@ -9215,7 +8259,7 @@
       </p:pic>
       <p:sp>
         <p:nvSpPr>
-          <p:cNvPr id="10" name="TextBox 9"/>
+          <p:cNvPr id="9" name="TextBox 8"/>
           <p:cNvSpPr txBox="1"/>
           <p:nvPr/>
         </p:nvSpPr>
@@ -9250,7 +8294,7 @@
       </p:sp>
       <p:sp>
         <p:nvSpPr>
-          <p:cNvPr id="11" name="TextBox 10"/>
+          <p:cNvPr id="10" name="TextBox 9"/>
           <p:cNvSpPr txBox="1"/>
           <p:nvPr/>
         </p:nvSpPr>
@@ -9294,7 +8338,7 @@
       </p:sp>
       <p:sp>
         <p:nvSpPr>
-          <p:cNvPr id="12" name="TextBox 11"/>
+          <p:cNvPr id="11" name="TextBox 10"/>
           <p:cNvSpPr txBox="1"/>
           <p:nvPr/>
         </p:nvSpPr>
@@ -9338,7 +8382,7 @@
       </p:sp>
       <p:sp>
         <p:nvSpPr>
-          <p:cNvPr id="13" name="TextBox 12"/>
+          <p:cNvPr id="12" name="TextBox 11"/>
           <p:cNvSpPr txBox="1"/>
           <p:nvPr/>
         </p:nvSpPr>
@@ -9382,7 +8426,7 @@
       </p:sp>
       <p:sp>
         <p:nvSpPr>
-          <p:cNvPr id="14" name="TextBox 13"/>
+          <p:cNvPr id="13" name="TextBox 12"/>
           <p:cNvSpPr txBox="1"/>
           <p:nvPr/>
         </p:nvSpPr>
@@ -9426,7 +8470,7 @@
       </p:sp>
       <p:sp>
         <p:nvSpPr>
-          <p:cNvPr id="15" name="TextBox 14"/>
+          <p:cNvPr id="14" name="TextBox 13"/>
           <p:cNvSpPr txBox="1"/>
           <p:nvPr/>
         </p:nvSpPr>
@@ -9582,44 +8626,9 @@
           </a:fontRef>
         </p:style>
       </p:cxnSp>
-      <p:sp>
-        <p:nvSpPr>
-          <p:cNvPr id="5" name="TextBox 4"/>
-          <p:cNvSpPr txBox="1"/>
-          <p:nvPr/>
-        </p:nvSpPr>
-        <p:spPr>
-          <a:xfrm>
-            <a:off x="777240" y="1261872"/>
-            <a:ext cx="10607040" cy="310896"/>
-          </a:xfrm>
-          <a:prstGeom prst="rect">
-            <a:avLst/>
-          </a:prstGeom>
-          <a:noFill/>
-        </p:spPr>
-        <p:txBody>
-          <a:bodyPr wrap="square" lIns="45720" rIns="45720" tIns="18288" bIns="18288" anchor="t">
-            <a:spAutoFit/>
-          </a:bodyPr>
-          <a:lstStyle/>
-          <a:p>
-            <a:pPr algn="l"/>
-            <a:r>
-              <a:rPr sz="1700" b="0" i="1">
-                <a:solidFill>
-                  <a:srgbClr val="6B6B6B"/>
-                </a:solidFill>
-                <a:latin typeface="Century Schoolbook"/>
-              </a:rPr>
-              <a:t>Answer.</a:t>
-            </a:r>
-          </a:p>
-        </p:txBody>
-      </p:sp>
       <p:cxnSp>
         <p:nvCxnSpPr>
-          <p:cNvPr id="6" name="Connector 5"/>
+          <p:cNvPr id="5" name="Connector 4"/>
           <p:cNvCxnSpPr/>
           <p:nvPr/>
         </p:nvCxnSpPr>
@@ -9654,7 +8663,7 @@
       </p:cxnSp>
       <p:sp>
         <p:nvSpPr>
-          <p:cNvPr id="7" name="TextBox 6"/>
+          <p:cNvPr id="6" name="TextBox 5"/>
           <p:cNvSpPr txBox="1"/>
           <p:nvPr/>
         </p:nvSpPr>
@@ -9689,7 +8698,7 @@
       </p:sp>
       <p:sp>
         <p:nvSpPr>
-          <p:cNvPr id="8" name="TextBox 7"/>
+          <p:cNvPr id="7" name="TextBox 6"/>
           <p:cNvSpPr txBox="1"/>
           <p:nvPr/>
         </p:nvSpPr>
@@ -9724,7 +8733,7 @@
       </p:sp>
       <p:pic>
         <p:nvPicPr>
-          <p:cNvPr id="9" name="Picture 8" descr="d34694b9b55f634e.png"/>
+          <p:cNvPr id="8" name="Picture 7" descr="d34694b9b55f634e.png"/>
           <p:cNvPicPr>
             <a:picLocks noChangeAspect="1"/>
           </p:cNvPicPr>
@@ -9748,7 +8757,7 @@
       </p:pic>
       <p:sp>
         <p:nvSpPr>
-          <p:cNvPr id="10" name="TextBox 9"/>
+          <p:cNvPr id="9" name="TextBox 8"/>
           <p:cNvSpPr txBox="1"/>
           <p:nvPr/>
         </p:nvSpPr>
@@ -9783,7 +8792,7 @@
       </p:sp>
       <p:sp>
         <p:nvSpPr>
-          <p:cNvPr id="11" name="TextBox 10"/>
+          <p:cNvPr id="10" name="TextBox 9"/>
           <p:cNvSpPr txBox="1"/>
           <p:nvPr/>
         </p:nvSpPr>
@@ -9827,7 +8836,7 @@
       </p:sp>
       <p:sp>
         <p:nvSpPr>
-          <p:cNvPr id="12" name="TextBox 11"/>
+          <p:cNvPr id="11" name="TextBox 10"/>
           <p:cNvSpPr txBox="1"/>
           <p:nvPr/>
         </p:nvSpPr>
@@ -9871,7 +8880,7 @@
       </p:sp>
       <p:sp>
         <p:nvSpPr>
-          <p:cNvPr id="13" name="TextBox 12"/>
+          <p:cNvPr id="12" name="TextBox 11"/>
           <p:cNvSpPr txBox="1"/>
           <p:nvPr/>
         </p:nvSpPr>
@@ -9915,7 +8924,7 @@
       </p:sp>
       <p:sp>
         <p:nvSpPr>
-          <p:cNvPr id="14" name="TextBox 13"/>
+          <p:cNvPr id="13" name="TextBox 12"/>
           <p:cNvSpPr txBox="1"/>
           <p:nvPr/>
         </p:nvSpPr>
@@ -9959,7 +8968,7 @@
       </p:sp>
       <p:sp>
         <p:nvSpPr>
-          <p:cNvPr id="15" name="TextBox 14"/>
+          <p:cNvPr id="14" name="TextBox 13"/>
           <p:cNvSpPr txBox="1"/>
           <p:nvPr/>
         </p:nvSpPr>
@@ -10115,44 +9124,9 @@
           </a:fontRef>
         </p:style>
       </p:cxnSp>
-      <p:sp>
-        <p:nvSpPr>
-          <p:cNvPr id="5" name="TextBox 4"/>
-          <p:cNvSpPr txBox="1"/>
-          <p:nvPr/>
-        </p:nvSpPr>
-        <p:spPr>
-          <a:xfrm>
-            <a:off x="777240" y="1261872"/>
-            <a:ext cx="10607040" cy="310896"/>
-          </a:xfrm>
-          <a:prstGeom prst="rect">
-            <a:avLst/>
-          </a:prstGeom>
-          <a:noFill/>
-        </p:spPr>
-        <p:txBody>
-          <a:bodyPr wrap="square" lIns="45720" rIns="45720" tIns="18288" bIns="18288" anchor="t">
-            <a:spAutoFit/>
-          </a:bodyPr>
-          <a:lstStyle/>
-          <a:p>
-            <a:pPr algn="l"/>
-            <a:r>
-              <a:rPr sz="1700" b="0" i="1">
-                <a:solidFill>
-                  <a:srgbClr val="6B6B6B"/>
-                </a:solidFill>
-                <a:latin typeface="Century Schoolbook"/>
-              </a:rPr>
-              <a:t>Boards up on three.</a:t>
-            </a:r>
-          </a:p>
-        </p:txBody>
-      </p:sp>
       <p:cxnSp>
         <p:nvCxnSpPr>
-          <p:cNvPr id="6" name="Connector 5"/>
+          <p:cNvPr id="5" name="Connector 4"/>
           <p:cNvCxnSpPr/>
           <p:nvPr/>
         </p:nvCxnSpPr>
@@ -10187,7 +9161,7 @@
       </p:cxnSp>
       <p:sp>
         <p:nvSpPr>
-          <p:cNvPr id="7" name="TextBox 6"/>
+          <p:cNvPr id="6" name="TextBox 5"/>
           <p:cNvSpPr txBox="1"/>
           <p:nvPr/>
         </p:nvSpPr>
@@ -10222,7 +9196,7 @@
       </p:sp>
       <p:sp>
         <p:nvSpPr>
-          <p:cNvPr id="8" name="TextBox 7"/>
+          <p:cNvPr id="7" name="TextBox 6"/>
           <p:cNvSpPr txBox="1"/>
           <p:nvPr/>
         </p:nvSpPr>
@@ -10257,7 +9231,7 @@
       </p:sp>
       <p:pic>
         <p:nvPicPr>
-          <p:cNvPr id="9" name="Picture 8" descr="076eeeb065b72033.png"/>
+          <p:cNvPr id="8" name="Picture 7" descr="076eeeb065b72033.png"/>
           <p:cNvPicPr>
             <a:picLocks noChangeAspect="1"/>
           </p:cNvPicPr>
@@ -10281,7 +9255,7 @@
       </p:pic>
       <p:sp>
         <p:nvSpPr>
-          <p:cNvPr id="10" name="TextBox 9"/>
+          <p:cNvPr id="9" name="TextBox 8"/>
           <p:cNvSpPr txBox="1"/>
           <p:nvPr/>
         </p:nvSpPr>
@@ -10316,7 +9290,7 @@
       </p:sp>
       <p:sp>
         <p:nvSpPr>
-          <p:cNvPr id="11" name="TextBox 10"/>
+          <p:cNvPr id="10" name="TextBox 9"/>
           <p:cNvSpPr txBox="1"/>
           <p:nvPr/>
         </p:nvSpPr>
@@ -10360,7 +9334,7 @@
       </p:sp>
       <p:sp>
         <p:nvSpPr>
-          <p:cNvPr id="12" name="TextBox 11"/>
+          <p:cNvPr id="11" name="TextBox 10"/>
           <p:cNvSpPr txBox="1"/>
           <p:nvPr/>
         </p:nvSpPr>
@@ -10404,7 +9378,7 @@
       </p:sp>
       <p:sp>
         <p:nvSpPr>
-          <p:cNvPr id="13" name="TextBox 12"/>
+          <p:cNvPr id="12" name="TextBox 11"/>
           <p:cNvSpPr txBox="1"/>
           <p:nvPr/>
         </p:nvSpPr>
@@ -10448,7 +9422,7 @@
       </p:sp>
       <p:sp>
         <p:nvSpPr>
-          <p:cNvPr id="14" name="TextBox 13"/>
+          <p:cNvPr id="13" name="TextBox 12"/>
           <p:cNvSpPr txBox="1"/>
           <p:nvPr/>
         </p:nvSpPr>
@@ -10492,7 +9466,7 @@
       </p:sp>
       <p:sp>
         <p:nvSpPr>
-          <p:cNvPr id="15" name="TextBox 14"/>
+          <p:cNvPr id="14" name="TextBox 13"/>
           <p:cNvSpPr txBox="1"/>
           <p:nvPr/>
         </p:nvSpPr>
@@ -10648,44 +9622,9 @@
           </a:fontRef>
         </p:style>
       </p:cxnSp>
-      <p:sp>
-        <p:nvSpPr>
-          <p:cNvPr id="5" name="TextBox 4"/>
-          <p:cNvSpPr txBox="1"/>
-          <p:nvPr/>
-        </p:nvSpPr>
-        <p:spPr>
-          <a:xfrm>
-            <a:off x="777240" y="1261872"/>
-            <a:ext cx="10607040" cy="310896"/>
-          </a:xfrm>
-          <a:prstGeom prst="rect">
-            <a:avLst/>
-          </a:prstGeom>
-          <a:noFill/>
-        </p:spPr>
-        <p:txBody>
-          <a:bodyPr wrap="square" lIns="45720" rIns="45720" tIns="18288" bIns="18288" anchor="t">
-            <a:spAutoFit/>
-          </a:bodyPr>
-          <a:lstStyle/>
-          <a:p>
-            <a:pPr algn="l"/>
-            <a:r>
-              <a:rPr sz="1700" b="0" i="1">
-                <a:solidFill>
-                  <a:srgbClr val="6B6B6B"/>
-                </a:solidFill>
-                <a:latin typeface="Century Schoolbook"/>
-              </a:rPr>
-              <a:t>Answer.</a:t>
-            </a:r>
-          </a:p>
-        </p:txBody>
-      </p:sp>
       <p:cxnSp>
         <p:nvCxnSpPr>
-          <p:cNvPr id="6" name="Connector 5"/>
+          <p:cNvPr id="5" name="Connector 4"/>
           <p:cNvCxnSpPr/>
           <p:nvPr/>
         </p:nvCxnSpPr>
@@ -10720,7 +9659,7 @@
       </p:cxnSp>
       <p:sp>
         <p:nvSpPr>
-          <p:cNvPr id="7" name="TextBox 6"/>
+          <p:cNvPr id="6" name="TextBox 5"/>
           <p:cNvSpPr txBox="1"/>
           <p:nvPr/>
         </p:nvSpPr>
@@ -10755,7 +9694,7 @@
       </p:sp>
       <p:sp>
         <p:nvSpPr>
-          <p:cNvPr id="8" name="TextBox 7"/>
+          <p:cNvPr id="7" name="TextBox 6"/>
           <p:cNvSpPr txBox="1"/>
           <p:nvPr/>
         </p:nvSpPr>
@@ -10790,7 +9729,7 @@
       </p:sp>
       <p:pic>
         <p:nvPicPr>
-          <p:cNvPr id="9" name="Picture 8" descr="db4460c0abb0f5ed.png"/>
+          <p:cNvPr id="8" name="Picture 7" descr="db4460c0abb0f5ed.png"/>
           <p:cNvPicPr>
             <a:picLocks noChangeAspect="1"/>
           </p:cNvPicPr>
@@ -10814,7 +9753,7 @@
       </p:pic>
       <p:sp>
         <p:nvSpPr>
-          <p:cNvPr id="10" name="TextBox 9"/>
+          <p:cNvPr id="9" name="TextBox 8"/>
           <p:cNvSpPr txBox="1"/>
           <p:nvPr/>
         </p:nvSpPr>
@@ -10849,7 +9788,7 @@
       </p:sp>
       <p:sp>
         <p:nvSpPr>
-          <p:cNvPr id="11" name="TextBox 10"/>
+          <p:cNvPr id="10" name="TextBox 9"/>
           <p:cNvSpPr txBox="1"/>
           <p:nvPr/>
         </p:nvSpPr>
@@ -10893,7 +9832,7 @@
       </p:sp>
       <p:sp>
         <p:nvSpPr>
-          <p:cNvPr id="12" name="TextBox 11"/>
+          <p:cNvPr id="11" name="TextBox 10"/>
           <p:cNvSpPr txBox="1"/>
           <p:nvPr/>
         </p:nvSpPr>
@@ -10937,7 +9876,7 @@
       </p:sp>
       <p:sp>
         <p:nvSpPr>
-          <p:cNvPr id="13" name="TextBox 12"/>
+          <p:cNvPr id="12" name="TextBox 11"/>
           <p:cNvSpPr txBox="1"/>
           <p:nvPr/>
         </p:nvSpPr>
@@ -10981,7 +9920,7 @@
       </p:sp>
       <p:sp>
         <p:nvSpPr>
-          <p:cNvPr id="14" name="TextBox 13"/>
+          <p:cNvPr id="13" name="TextBox 12"/>
           <p:cNvSpPr txBox="1"/>
           <p:nvPr/>
         </p:nvSpPr>
@@ -11025,7 +9964,7 @@
       </p:sp>
       <p:sp>
         <p:nvSpPr>
-          <p:cNvPr id="15" name="TextBox 14"/>
+          <p:cNvPr id="14" name="TextBox 13"/>
           <p:cNvSpPr txBox="1"/>
           <p:nvPr/>
         </p:nvSpPr>
@@ -11181,44 +10120,9 @@
           </a:fontRef>
         </p:style>
       </p:cxnSp>
-      <p:sp>
-        <p:nvSpPr>
-          <p:cNvPr id="5" name="TextBox 4"/>
-          <p:cNvSpPr txBox="1"/>
-          <p:nvPr/>
-        </p:nvSpPr>
-        <p:spPr>
-          <a:xfrm>
-            <a:off x="777240" y="1261872"/>
-            <a:ext cx="10607040" cy="310896"/>
-          </a:xfrm>
-          <a:prstGeom prst="rect">
-            <a:avLst/>
-          </a:prstGeom>
-          <a:noFill/>
-        </p:spPr>
-        <p:txBody>
-          <a:bodyPr wrap="square" lIns="45720" rIns="45720" tIns="18288" bIns="18288" anchor="t">
-            <a:spAutoFit/>
-          </a:bodyPr>
-          <a:lstStyle/>
-          <a:p>
-            <a:pPr algn="l"/>
-            <a:r>
-              <a:rPr sz="1700" b="0" i="1">
-                <a:solidFill>
-                  <a:srgbClr val="6B6B6B"/>
-                </a:solidFill>
-                <a:latin typeface="Century Schoolbook"/>
-              </a:rPr>
-              <a:t>Boards up on three.</a:t>
-            </a:r>
-          </a:p>
-        </p:txBody>
-      </p:sp>
       <p:cxnSp>
         <p:nvCxnSpPr>
-          <p:cNvPr id="6" name="Connector 5"/>
+          <p:cNvPr id="5" name="Connector 4"/>
           <p:cNvCxnSpPr/>
           <p:nvPr/>
         </p:nvCxnSpPr>
@@ -11253,7 +10157,7 @@
       </p:cxnSp>
       <p:sp>
         <p:nvSpPr>
-          <p:cNvPr id="7" name="TextBox 6"/>
+          <p:cNvPr id="6" name="TextBox 5"/>
           <p:cNvSpPr txBox="1"/>
           <p:nvPr/>
         </p:nvSpPr>
@@ -11288,7 +10192,7 @@
       </p:sp>
       <p:sp>
         <p:nvSpPr>
-          <p:cNvPr id="8" name="TextBox 7"/>
+          <p:cNvPr id="7" name="TextBox 6"/>
           <p:cNvSpPr txBox="1"/>
           <p:nvPr/>
         </p:nvSpPr>
@@ -11323,7 +10227,7 @@
       </p:sp>
       <p:pic>
         <p:nvPicPr>
-          <p:cNvPr id="9" name="Picture 8" descr="d135167dce315e91.png"/>
+          <p:cNvPr id="8" name="Picture 7" descr="d135167dce315e91.png"/>
           <p:cNvPicPr>
             <a:picLocks noChangeAspect="1"/>
           </p:cNvPicPr>
@@ -11347,7 +10251,7 @@
       </p:pic>
       <p:sp>
         <p:nvSpPr>
-          <p:cNvPr id="10" name="TextBox 9"/>
+          <p:cNvPr id="9" name="TextBox 8"/>
           <p:cNvSpPr txBox="1"/>
           <p:nvPr/>
         </p:nvSpPr>
@@ -11376,41 +10280,6 @@
                 <a:latin typeface="Century Schoolbook"/>
               </a:rPr>
               <a:t>Answer it.</a:t>
-            </a:r>
-          </a:p>
-        </p:txBody>
-      </p:sp>
-      <p:sp>
-        <p:nvSpPr>
-          <p:cNvPr id="11" name="TextBox 10"/>
-          <p:cNvSpPr txBox="1"/>
-          <p:nvPr/>
-        </p:nvSpPr>
-        <p:spPr>
-          <a:xfrm>
-            <a:off x="777240" y="4828032"/>
-            <a:ext cx="10607040" cy="365760"/>
-          </a:xfrm>
-          <a:prstGeom prst="rect">
-            <a:avLst/>
-          </a:prstGeom>
-          <a:noFill/>
-        </p:spPr>
-        <p:txBody>
-          <a:bodyPr wrap="square" lIns="45720" rIns="45720" tIns="18288" bIns="18288" anchor="t">
-            <a:spAutoFit/>
-          </a:bodyPr>
-          <a:lstStyle/>
-          <a:p>
-            <a:pPr algn="ctr"/>
-            <a:r>
-              <a:rPr sz="1900" b="0" i="1">
-                <a:solidFill>
-                  <a:srgbClr val="6B6B6B"/>
-                </a:solidFill>
-                <a:latin typeface="Century Schoolbook"/>
-              </a:rPr>
-              <a:t>What is each exponent attached to?</a:t>
             </a:r>
           </a:p>
         </p:txBody>
@@ -11538,44 +10407,9 @@
           </a:fontRef>
         </p:style>
       </p:cxnSp>
-      <p:sp>
-        <p:nvSpPr>
-          <p:cNvPr id="5" name="TextBox 4"/>
-          <p:cNvSpPr txBox="1"/>
-          <p:nvPr/>
-        </p:nvSpPr>
-        <p:spPr>
-          <a:xfrm>
-            <a:off x="777240" y="1261872"/>
-            <a:ext cx="10607040" cy="310896"/>
-          </a:xfrm>
-          <a:prstGeom prst="rect">
-            <a:avLst/>
-          </a:prstGeom>
-          <a:noFill/>
-        </p:spPr>
-        <p:txBody>
-          <a:bodyPr wrap="square" lIns="45720" rIns="45720" tIns="18288" bIns="18288" anchor="t">
-            <a:spAutoFit/>
-          </a:bodyPr>
-          <a:lstStyle/>
-          <a:p>
-            <a:pPr algn="l"/>
-            <a:r>
-              <a:rPr sz="1700" b="0" i="1">
-                <a:solidFill>
-                  <a:srgbClr val="6B6B6B"/>
-                </a:solidFill>
-                <a:latin typeface="Century Schoolbook"/>
-              </a:rPr>
-              <a:t>Answer.</a:t>
-            </a:r>
-          </a:p>
-        </p:txBody>
-      </p:sp>
       <p:cxnSp>
         <p:nvCxnSpPr>
-          <p:cNvPr id="6" name="Connector 5"/>
+          <p:cNvPr id="5" name="Connector 4"/>
           <p:cNvCxnSpPr/>
           <p:nvPr/>
         </p:nvCxnSpPr>
@@ -11610,7 +10444,7 @@
       </p:cxnSp>
       <p:sp>
         <p:nvSpPr>
-          <p:cNvPr id="7" name="TextBox 6"/>
+          <p:cNvPr id="6" name="TextBox 5"/>
           <p:cNvSpPr txBox="1"/>
           <p:nvPr/>
         </p:nvSpPr>
@@ -11645,7 +10479,7 @@
       </p:sp>
       <p:sp>
         <p:nvSpPr>
-          <p:cNvPr id="8" name="TextBox 7"/>
+          <p:cNvPr id="7" name="TextBox 6"/>
           <p:cNvSpPr txBox="1"/>
           <p:nvPr/>
         </p:nvSpPr>
@@ -11680,7 +10514,7 @@
       </p:sp>
       <p:pic>
         <p:nvPicPr>
-          <p:cNvPr id="9" name="Picture 8" descr="43cce3e34e7bfbfb.png"/>
+          <p:cNvPr id="8" name="Picture 7" descr="43cce3e34e7bfbfb.png"/>
           <p:cNvPicPr>
             <a:picLocks noChangeAspect="1"/>
           </p:cNvPicPr>
@@ -11704,42 +10538,7 @@
       </p:pic>
       <p:sp>
         <p:nvSpPr>
-          <p:cNvPr id="10" name="TextBox 9"/>
-          <p:cNvSpPr txBox="1"/>
-          <p:nvPr/>
-        </p:nvSpPr>
-        <p:spPr>
-          <a:xfrm>
-            <a:off x="1828800" y="2834639"/>
-            <a:ext cx="8503920" cy="548640"/>
-          </a:xfrm>
-          <a:prstGeom prst="rect">
-            <a:avLst/>
-          </a:prstGeom>
-          <a:noFill/>
-        </p:spPr>
-        <p:txBody>
-          <a:bodyPr wrap="square" lIns="45720" rIns="45720" tIns="18288" bIns="18288" anchor="t">
-            <a:spAutoFit/>
-          </a:bodyPr>
-          <a:lstStyle/>
-          <a:p>
-            <a:pPr algn="ctr"/>
-            <a:r>
-              <a:rPr sz="2400" b="0" i="0">
-                <a:solidFill>
-                  <a:srgbClr val="6B6B6B"/>
-                </a:solidFill>
-                <a:latin typeface="Century Schoolbook"/>
-              </a:rPr>
-              <a:t>−4 and +4</a:t>
-            </a:r>
-          </a:p>
-        </p:txBody>
-      </p:sp>
-      <p:sp>
-        <p:nvSpPr>
-          <p:cNvPr id="11" name="TextBox 10"/>
+          <p:cNvPr id="9" name="TextBox 8"/>
           <p:cNvSpPr txBox="1"/>
           <p:nvPr/>
         </p:nvSpPr>
@@ -11895,44 +10694,9 @@
           </a:fontRef>
         </p:style>
       </p:cxnSp>
-      <p:sp>
-        <p:nvSpPr>
-          <p:cNvPr id="5" name="TextBox 4"/>
-          <p:cNvSpPr txBox="1"/>
-          <p:nvPr/>
-        </p:nvSpPr>
-        <p:spPr>
-          <a:xfrm>
-            <a:off x="777240" y="1261872"/>
-            <a:ext cx="10607040" cy="310896"/>
-          </a:xfrm>
-          <a:prstGeom prst="rect">
-            <a:avLst/>
-          </a:prstGeom>
-          <a:noFill/>
-        </p:spPr>
-        <p:txBody>
-          <a:bodyPr wrap="square" lIns="45720" rIns="45720" tIns="18288" bIns="18288" anchor="t">
-            <a:spAutoFit/>
-          </a:bodyPr>
-          <a:lstStyle/>
-          <a:p>
-            <a:pPr algn="l"/>
-            <a:r>
-              <a:rPr sz="1700" b="0" i="1">
-                <a:solidFill>
-                  <a:srgbClr val="6B6B6B"/>
-                </a:solidFill>
-                <a:latin typeface="Century Schoolbook"/>
-              </a:rPr>
-              <a:t>Boards up on three.</a:t>
-            </a:r>
-          </a:p>
-        </p:txBody>
-      </p:sp>
       <p:cxnSp>
         <p:nvCxnSpPr>
-          <p:cNvPr id="6" name="Connector 5"/>
+          <p:cNvPr id="5" name="Connector 4"/>
           <p:cNvCxnSpPr/>
           <p:nvPr/>
         </p:nvCxnSpPr>
@@ -11967,7 +10731,7 @@
       </p:cxnSp>
       <p:sp>
         <p:nvSpPr>
-          <p:cNvPr id="7" name="TextBox 6"/>
+          <p:cNvPr id="6" name="TextBox 5"/>
           <p:cNvSpPr txBox="1"/>
           <p:nvPr/>
         </p:nvSpPr>
@@ -12002,7 +10766,7 @@
       </p:sp>
       <p:sp>
         <p:nvSpPr>
-          <p:cNvPr id="8" name="TextBox 7"/>
+          <p:cNvPr id="7" name="TextBox 6"/>
           <p:cNvSpPr txBox="1"/>
           <p:nvPr/>
         </p:nvSpPr>
@@ -12037,7 +10801,7 @@
       </p:sp>
       <p:pic>
         <p:nvPicPr>
-          <p:cNvPr id="9" name="Picture 8" descr="cafb332c72f7d831.png"/>
+          <p:cNvPr id="8" name="Picture 7" descr="cafb332c72f7d831.png"/>
           <p:cNvPicPr>
             <a:picLocks noChangeAspect="1"/>
           </p:cNvPicPr>
@@ -12061,7 +10825,7 @@
       </p:pic>
       <p:sp>
         <p:nvSpPr>
-          <p:cNvPr id="10" name="TextBox 9"/>
+          <p:cNvPr id="9" name="TextBox 8"/>
           <p:cNvSpPr txBox="1"/>
           <p:nvPr/>
         </p:nvSpPr>
@@ -12090,41 +10854,6 @@
                 <a:latin typeface="Century Schoolbook"/>
               </a:rPr>
               <a:t>Answer it.</a:t>
-            </a:r>
-          </a:p>
-        </p:txBody>
-      </p:sp>
-      <p:sp>
-        <p:nvSpPr>
-          <p:cNvPr id="11" name="TextBox 10"/>
-          <p:cNvSpPr txBox="1"/>
-          <p:nvPr/>
-        </p:nvSpPr>
-        <p:spPr>
-          <a:xfrm>
-            <a:off x="777240" y="4828032"/>
-            <a:ext cx="10607040" cy="365760"/>
-          </a:xfrm>
-          <a:prstGeom prst="rect">
-            <a:avLst/>
-          </a:prstGeom>
-          <a:noFill/>
-        </p:spPr>
-        <p:txBody>
-          <a:bodyPr wrap="square" lIns="45720" rIns="45720" tIns="18288" bIns="18288" anchor="t">
-            <a:spAutoFit/>
-          </a:bodyPr>
-          <a:lstStyle/>
-          <a:p>
-            <a:pPr algn="ctr"/>
-            <a:r>
-              <a:rPr sz="1900" b="0" i="1">
-                <a:solidFill>
-                  <a:srgbClr val="6B6B6B"/>
-                </a:solidFill>
-                <a:latin typeface="Century Schoolbook"/>
-              </a:rPr>
-              <a:t>Inside first.</a:t>
             </a:r>
           </a:p>
         </p:txBody>
@@ -12252,44 +10981,9 @@
           </a:fontRef>
         </p:style>
       </p:cxnSp>
-      <p:sp>
-        <p:nvSpPr>
-          <p:cNvPr id="5" name="TextBox 4"/>
-          <p:cNvSpPr txBox="1"/>
-          <p:nvPr/>
-        </p:nvSpPr>
-        <p:spPr>
-          <a:xfrm>
-            <a:off x="777240" y="1261872"/>
-            <a:ext cx="10607040" cy="310896"/>
-          </a:xfrm>
-          <a:prstGeom prst="rect">
-            <a:avLst/>
-          </a:prstGeom>
-          <a:noFill/>
-        </p:spPr>
-        <p:txBody>
-          <a:bodyPr wrap="square" lIns="45720" rIns="45720" tIns="18288" bIns="18288" anchor="t">
-            <a:spAutoFit/>
-          </a:bodyPr>
-          <a:lstStyle/>
-          <a:p>
-            <a:pPr algn="l"/>
-            <a:r>
-              <a:rPr sz="1700" b="0" i="1">
-                <a:solidFill>
-                  <a:srgbClr val="6B6B6B"/>
-                </a:solidFill>
-                <a:latin typeface="Century Schoolbook"/>
-              </a:rPr>
-              <a:t>Answers.</a:t>
-            </a:r>
-          </a:p>
-        </p:txBody>
-      </p:sp>
       <p:cxnSp>
         <p:nvCxnSpPr>
-          <p:cNvPr id="6" name="Connector 5"/>
+          <p:cNvPr id="5" name="Connector 4"/>
           <p:cNvCxnSpPr/>
           <p:nvPr/>
         </p:nvCxnSpPr>
@@ -12324,7 +11018,7 @@
       </p:cxnSp>
       <p:sp>
         <p:nvSpPr>
-          <p:cNvPr id="7" name="TextBox 6"/>
+          <p:cNvPr id="6" name="TextBox 5"/>
           <p:cNvSpPr txBox="1"/>
           <p:nvPr/>
         </p:nvSpPr>
@@ -12359,7 +11053,7 @@
       </p:sp>
       <p:sp>
         <p:nvSpPr>
-          <p:cNvPr id="8" name="TextBox 7"/>
+          <p:cNvPr id="7" name="TextBox 6"/>
           <p:cNvSpPr txBox="1"/>
           <p:nvPr/>
         </p:nvSpPr>
@@ -12394,13 +11088,13 @@
       </p:sp>
       <p:sp>
         <p:nvSpPr>
-          <p:cNvPr id="9" name="TextBox 8"/>
-          <p:cNvSpPr txBox="1"/>
-          <p:nvPr/>
-        </p:nvSpPr>
-        <p:spPr>
-          <a:xfrm>
-            <a:off x="1874519" y="1760220"/>
+          <p:cNvPr id="8" name="TextBox 7"/>
+          <p:cNvSpPr txBox="1"/>
+          <p:nvPr/>
+        </p:nvSpPr>
+        <p:spPr>
+          <a:xfrm>
+            <a:off x="1874519" y="1440180"/>
             <a:ext cx="720605" cy="457200"/>
           </a:xfrm>
           <a:prstGeom prst="rect">
@@ -12429,7 +11123,7 @@
       </p:sp>
       <p:pic>
         <p:nvPicPr>
-          <p:cNvPr id="10" name="Picture 9" descr="535c314b8c201a80.png"/>
+          <p:cNvPr id="9" name="Picture 8" descr="535c314b8c201a80.png"/>
           <p:cNvPicPr>
             <a:picLocks noChangeAspect="1"/>
           </p:cNvPicPr>
@@ -12443,7 +11137,7 @@
         </p:blipFill>
         <p:spPr>
           <a:xfrm>
-            <a:off x="2457965" y="1784604"/>
+            <a:off x="2457965" y="1464564"/>
             <a:ext cx="1143000" cy="408432"/>
           </a:xfrm>
           <a:prstGeom prst="rect">
@@ -12453,13 +11147,13 @@
       </p:pic>
       <p:sp>
         <p:nvSpPr>
-          <p:cNvPr id="11" name="TextBox 10"/>
-          <p:cNvSpPr txBox="1"/>
-          <p:nvPr/>
-        </p:nvSpPr>
-        <p:spPr>
-          <a:xfrm>
-            <a:off x="4149605" y="1760220"/>
+          <p:cNvPr id="10" name="TextBox 9"/>
+          <p:cNvSpPr txBox="1"/>
+          <p:nvPr/>
+        </p:nvSpPr>
+        <p:spPr>
+          <a:xfrm>
+            <a:off x="4149605" y="1440180"/>
             <a:ext cx="388052" cy="457200"/>
           </a:xfrm>
           <a:prstGeom prst="rect">
@@ -12488,13 +11182,13 @@
       </p:sp>
       <p:sp>
         <p:nvSpPr>
-          <p:cNvPr id="12" name="TextBox 11"/>
-          <p:cNvSpPr txBox="1"/>
-          <p:nvPr/>
-        </p:nvSpPr>
-        <p:spPr>
-          <a:xfrm>
-            <a:off x="1874519" y="2372868"/>
+          <p:cNvPr id="11" name="TextBox 10"/>
+          <p:cNvSpPr txBox="1"/>
+          <p:nvPr/>
+        </p:nvSpPr>
+        <p:spPr>
+          <a:xfrm>
+            <a:off x="1874519" y="2052828"/>
             <a:ext cx="6812791" cy="457200"/>
           </a:xfrm>
           <a:prstGeom prst="rect">
@@ -12523,13 +11217,13 @@
       </p:sp>
       <p:sp>
         <p:nvSpPr>
-          <p:cNvPr id="13" name="TextBox 12"/>
-          <p:cNvSpPr txBox="1"/>
-          <p:nvPr/>
-        </p:nvSpPr>
-        <p:spPr>
-          <a:xfrm>
-            <a:off x="9098791" y="2372868"/>
+          <p:cNvPr id="12" name="TextBox 11"/>
+          <p:cNvSpPr txBox="1"/>
+          <p:nvPr/>
+        </p:nvSpPr>
+        <p:spPr>
+          <a:xfrm>
+            <a:off x="9098791" y="2052828"/>
             <a:ext cx="388052" cy="457200"/>
           </a:xfrm>
           <a:prstGeom prst="rect">
@@ -12558,13 +11252,13 @@
       </p:sp>
       <p:sp>
         <p:nvSpPr>
-          <p:cNvPr id="14" name="TextBox 13"/>
-          <p:cNvSpPr txBox="1"/>
-          <p:nvPr/>
-        </p:nvSpPr>
-        <p:spPr>
-          <a:xfrm>
-            <a:off x="1874519" y="3057144"/>
+          <p:cNvPr id="13" name="TextBox 12"/>
+          <p:cNvSpPr txBox="1"/>
+          <p:nvPr/>
+        </p:nvSpPr>
+        <p:spPr>
+          <a:xfrm>
+            <a:off x="1874519" y="2737104"/>
             <a:ext cx="3064939" cy="457200"/>
           </a:xfrm>
           <a:prstGeom prst="rect">
@@ -12593,7 +11287,7 @@
       </p:sp>
       <p:pic>
         <p:nvPicPr>
-          <p:cNvPr id="15" name="Picture 14" descr="70fd4f7c195b27fd.png"/>
+          <p:cNvPr id="14" name="Picture 13" descr="70fd4f7c195b27fd.png"/>
           <p:cNvPicPr>
             <a:picLocks noChangeAspect="1"/>
           </p:cNvPicPr>
@@ -12607,7 +11301,7 @@
         </p:blipFill>
         <p:spPr>
           <a:xfrm>
-            <a:off x="4802299" y="3008376"/>
+            <a:off x="4802299" y="2688336"/>
             <a:ext cx="795528" cy="554736"/>
           </a:xfrm>
           <a:prstGeom prst="rect">
@@ -12617,13 +11311,13 @@
       </p:pic>
       <p:sp>
         <p:nvSpPr>
-          <p:cNvPr id="16" name="TextBox 15"/>
-          <p:cNvSpPr txBox="1"/>
-          <p:nvPr/>
-        </p:nvSpPr>
-        <p:spPr>
-          <a:xfrm>
-            <a:off x="6146467" y="2985516"/>
+          <p:cNvPr id="15" name="TextBox 14"/>
+          <p:cNvSpPr txBox="1"/>
+          <p:nvPr/>
+        </p:nvSpPr>
+        <p:spPr>
+          <a:xfrm>
+            <a:off x="6146467" y="2665476"/>
             <a:ext cx="651876" cy="457200"/>
           </a:xfrm>
           <a:prstGeom prst="rect">
@@ -12652,13 +11346,13 @@
       </p:sp>
       <p:sp>
         <p:nvSpPr>
-          <p:cNvPr id="17" name="TextBox 16"/>
-          <p:cNvSpPr txBox="1"/>
-          <p:nvPr/>
-        </p:nvSpPr>
-        <p:spPr>
-          <a:xfrm>
-            <a:off x="1874519" y="3741420"/>
+          <p:cNvPr id="16" name="TextBox 15"/>
+          <p:cNvSpPr txBox="1"/>
+          <p:nvPr/>
+        </p:nvSpPr>
+        <p:spPr>
+          <a:xfrm>
+            <a:off x="1874519" y="3421380"/>
             <a:ext cx="2276518" cy="457200"/>
           </a:xfrm>
           <a:prstGeom prst="rect">
@@ -12687,7 +11381,7 @@
       </p:sp>
       <p:pic>
         <p:nvPicPr>
-          <p:cNvPr id="18" name="Picture 17" descr="9720c4bedb33ef6c.png"/>
+          <p:cNvPr id="17" name="Picture 16" descr="9720c4bedb33ef6c.png"/>
           <p:cNvPicPr>
             <a:picLocks noChangeAspect="1"/>
           </p:cNvPicPr>
@@ -12701,7 +11395,7 @@
         </p:blipFill>
         <p:spPr>
           <a:xfrm>
-            <a:off x="4013878" y="3854196"/>
+            <a:off x="4013878" y="3534156"/>
             <a:ext cx="1088136" cy="231648"/>
           </a:xfrm>
           <a:prstGeom prst="rect">
@@ -12711,13 +11405,13 @@
       </p:pic>
       <p:sp>
         <p:nvSpPr>
-          <p:cNvPr id="19" name="TextBox 18"/>
-          <p:cNvSpPr txBox="1"/>
-          <p:nvPr/>
-        </p:nvSpPr>
-        <p:spPr>
-          <a:xfrm>
-            <a:off x="5650654" y="3741420"/>
+          <p:cNvPr id="18" name="TextBox 17"/>
+          <p:cNvSpPr txBox="1"/>
+          <p:nvPr/>
+        </p:nvSpPr>
+        <p:spPr>
+          <a:xfrm>
+            <a:off x="5650654" y="3421380"/>
             <a:ext cx="388052" cy="457200"/>
           </a:xfrm>
           <a:prstGeom prst="rect">
@@ -12867,44 +11561,9 @@
           </a:fontRef>
         </p:style>
       </p:cxnSp>
-      <p:sp>
-        <p:nvSpPr>
-          <p:cNvPr id="5" name="TextBox 4"/>
-          <p:cNvSpPr txBox="1"/>
-          <p:nvPr/>
-        </p:nvSpPr>
-        <p:spPr>
-          <a:xfrm>
-            <a:off x="777240" y="1261872"/>
-            <a:ext cx="10607040" cy="310896"/>
-          </a:xfrm>
-          <a:prstGeom prst="rect">
-            <a:avLst/>
-          </a:prstGeom>
-          <a:noFill/>
-        </p:spPr>
-        <p:txBody>
-          <a:bodyPr wrap="square" lIns="45720" rIns="45720" tIns="18288" bIns="18288" anchor="t">
-            <a:spAutoFit/>
-          </a:bodyPr>
-          <a:lstStyle/>
-          <a:p>
-            <a:pPr algn="l"/>
-            <a:r>
-              <a:rPr sz="1700" b="0" i="1">
-                <a:solidFill>
-                  <a:srgbClr val="6B6B6B"/>
-                </a:solidFill>
-                <a:latin typeface="Century Schoolbook"/>
-              </a:rPr>
-              <a:t>Answer.</a:t>
-            </a:r>
-          </a:p>
-        </p:txBody>
-      </p:sp>
       <p:cxnSp>
         <p:nvCxnSpPr>
-          <p:cNvPr id="6" name="Connector 5"/>
+          <p:cNvPr id="5" name="Connector 4"/>
           <p:cNvCxnSpPr/>
           <p:nvPr/>
         </p:nvCxnSpPr>
@@ -12939,7 +11598,7 @@
       </p:cxnSp>
       <p:sp>
         <p:nvSpPr>
-          <p:cNvPr id="7" name="TextBox 6"/>
+          <p:cNvPr id="6" name="TextBox 5"/>
           <p:cNvSpPr txBox="1"/>
           <p:nvPr/>
         </p:nvSpPr>
@@ -12974,7 +11633,7 @@
       </p:sp>
       <p:sp>
         <p:nvSpPr>
-          <p:cNvPr id="8" name="TextBox 7"/>
+          <p:cNvPr id="7" name="TextBox 6"/>
           <p:cNvSpPr txBox="1"/>
           <p:nvPr/>
         </p:nvSpPr>
@@ -13009,7 +11668,7 @@
       </p:sp>
       <p:pic>
         <p:nvPicPr>
-          <p:cNvPr id="9" name="Picture 8" descr="11864b2915a66941.png"/>
+          <p:cNvPr id="8" name="Picture 7" descr="11864b2915a66941.png"/>
           <p:cNvPicPr>
             <a:picLocks noChangeAspect="1"/>
           </p:cNvPicPr>
@@ -13033,42 +11692,7 @@
       </p:pic>
       <p:sp>
         <p:nvSpPr>
-          <p:cNvPr id="10" name="TextBox 9"/>
-          <p:cNvSpPr txBox="1"/>
-          <p:nvPr/>
-        </p:nvSpPr>
-        <p:spPr>
-          <a:xfrm>
-            <a:off x="1828800" y="3099815"/>
-            <a:ext cx="8503920" cy="548640"/>
-          </a:xfrm>
-          <a:prstGeom prst="rect">
-            <a:avLst/>
-          </a:prstGeom>
-          <a:noFill/>
-        </p:spPr>
-        <p:txBody>
-          <a:bodyPr wrap="square" lIns="45720" rIns="45720" tIns="18288" bIns="18288" anchor="t">
-            <a:spAutoFit/>
-          </a:bodyPr>
-          <a:lstStyle/>
-          <a:p>
-            <a:pPr algn="ctr"/>
-            <a:r>
-              <a:rPr sz="2400" b="0" i="0">
-                <a:solidFill>
-                  <a:srgbClr val="6B6B6B"/>
-                </a:solidFill>
-                <a:latin typeface="Century Schoolbook"/>
-              </a:rPr>
-              <a:t>one eighth plus one ninth</a:t>
-            </a:r>
-          </a:p>
-        </p:txBody>
-      </p:sp>
-      <p:sp>
-        <p:nvSpPr>
-          <p:cNvPr id="11" name="TextBox 10"/>
+          <p:cNvPr id="9" name="TextBox 8"/>
           <p:cNvSpPr txBox="1"/>
           <p:nvPr/>
         </p:nvSpPr>
@@ -13224,44 +11848,9 @@
           </a:fontRef>
         </p:style>
       </p:cxnSp>
-      <p:sp>
-        <p:nvSpPr>
-          <p:cNvPr id="5" name="TextBox 4"/>
-          <p:cNvSpPr txBox="1"/>
-          <p:nvPr/>
-        </p:nvSpPr>
-        <p:spPr>
-          <a:xfrm>
-            <a:off x="777240" y="1261872"/>
-            <a:ext cx="10607040" cy="310896"/>
-          </a:xfrm>
-          <a:prstGeom prst="rect">
-            <a:avLst/>
-          </a:prstGeom>
-          <a:noFill/>
-        </p:spPr>
-        <p:txBody>
-          <a:bodyPr wrap="square" lIns="45720" rIns="45720" tIns="18288" bIns="18288" anchor="t">
-            <a:spAutoFit/>
-          </a:bodyPr>
-          <a:lstStyle/>
-          <a:p>
-            <a:pPr algn="l"/>
-            <a:r>
-              <a:rPr sz="1700" b="0" i="1">
-                <a:solidFill>
-                  <a:srgbClr val="6B6B6B"/>
-                </a:solidFill>
-                <a:latin typeface="Century Schoolbook"/>
-              </a:rPr>
-              <a:t>Take your time. Boards up when you have written it.</a:t>
-            </a:r>
-          </a:p>
-        </p:txBody>
-      </p:sp>
       <p:cxnSp>
         <p:nvCxnSpPr>
-          <p:cNvPr id="6" name="Connector 5"/>
+          <p:cNvPr id="5" name="Connector 4"/>
           <p:cNvCxnSpPr/>
           <p:nvPr/>
         </p:nvCxnSpPr>
@@ -13296,7 +11885,7 @@
       </p:cxnSp>
       <p:sp>
         <p:nvSpPr>
-          <p:cNvPr id="7" name="TextBox 6"/>
+          <p:cNvPr id="6" name="TextBox 5"/>
           <p:cNvSpPr txBox="1"/>
           <p:nvPr/>
         </p:nvSpPr>
@@ -13331,7 +11920,7 @@
       </p:sp>
       <p:sp>
         <p:nvSpPr>
-          <p:cNvPr id="8" name="TextBox 7"/>
+          <p:cNvPr id="7" name="TextBox 6"/>
           <p:cNvSpPr txBox="1"/>
           <p:nvPr/>
         </p:nvSpPr>
@@ -13366,7 +11955,7 @@
       </p:sp>
       <p:sp>
         <p:nvSpPr>
-          <p:cNvPr id="9" name="TextBox 8"/>
+          <p:cNvPr id="8" name="TextBox 7"/>
           <p:cNvSpPr txBox="1"/>
           <p:nvPr/>
         </p:nvSpPr>
@@ -13401,7 +11990,7 @@
       </p:sp>
       <p:pic>
         <p:nvPicPr>
-          <p:cNvPr id="10" name="Picture 9" descr="71ab7e8131bab814.png"/>
+          <p:cNvPr id="9" name="Picture 8" descr="71ab7e8131bab814.png"/>
           <p:cNvPicPr>
             <a:picLocks noChangeAspect="1"/>
           </p:cNvPicPr>
@@ -13425,7 +12014,7 @@
       </p:pic>
       <p:sp>
         <p:nvSpPr>
-          <p:cNvPr id="11" name="TextBox 10"/>
+          <p:cNvPr id="10" name="TextBox 9"/>
           <p:cNvSpPr txBox="1"/>
           <p:nvPr/>
         </p:nvSpPr>
@@ -13460,7 +12049,7 @@
       </p:sp>
       <p:sp>
         <p:nvSpPr>
-          <p:cNvPr id="12" name="TextBox 11"/>
+          <p:cNvPr id="11" name="TextBox 10"/>
           <p:cNvSpPr txBox="1"/>
           <p:nvPr/>
         </p:nvSpPr>
@@ -13495,7 +12084,7 @@
       </p:sp>
       <p:sp>
         <p:nvSpPr>
-          <p:cNvPr id="13" name="TextBox 12"/>
+          <p:cNvPr id="12" name="TextBox 11"/>
           <p:cNvSpPr txBox="1"/>
           <p:nvPr/>
         </p:nvSpPr>
@@ -13530,7 +12119,7 @@
       </p:sp>
       <p:pic>
         <p:nvPicPr>
-          <p:cNvPr id="14" name="Picture 13" descr="ce9b607ea85ce740.png"/>
+          <p:cNvPr id="13" name="Picture 12" descr="ce9b607ea85ce740.png"/>
           <p:cNvPicPr>
             <a:picLocks noChangeAspect="1"/>
           </p:cNvPicPr>
@@ -13554,7 +12143,7 @@
       </p:pic>
       <p:sp>
         <p:nvSpPr>
-          <p:cNvPr id="15" name="TextBox 14"/>
+          <p:cNvPr id="14" name="TextBox 13"/>
           <p:cNvSpPr txBox="1"/>
           <p:nvPr/>
         </p:nvSpPr>
@@ -13589,7 +12178,7 @@
       </p:sp>
       <p:sp>
         <p:nvSpPr>
-          <p:cNvPr id="16" name="TextBox 15"/>
+          <p:cNvPr id="15" name="TextBox 14"/>
           <p:cNvSpPr txBox="1"/>
           <p:nvPr/>
         </p:nvSpPr>
@@ -13618,41 +12207,6 @@
                 <a:latin typeface="Century Schoolbook"/>
               </a:rPr>
               <a:t>Write your answer in sentences.</a:t>
-            </a:r>
-          </a:p>
-        </p:txBody>
-      </p:sp>
-      <p:sp>
-        <p:nvSpPr>
-          <p:cNvPr id="17" name="TextBox 16"/>
-          <p:cNvSpPr txBox="1"/>
-          <p:nvPr/>
-        </p:nvSpPr>
-        <p:spPr>
-          <a:xfrm>
-            <a:off x="777240" y="4884751"/>
-            <a:ext cx="10607040" cy="365760"/>
-          </a:xfrm>
-          <a:prstGeom prst="rect">
-            <a:avLst/>
-          </a:prstGeom>
-          <a:noFill/>
-        </p:spPr>
-        <p:txBody>
-          <a:bodyPr wrap="square" lIns="45720" rIns="45720" tIns="18288" bIns="18288" anchor="t">
-            <a:spAutoFit/>
-          </a:bodyPr>
-          <a:lstStyle/>
-          <a:p>
-            <a:pPr algn="ctr"/>
-            <a:r>
-              <a:rPr sz="1900" b="0" i="1">
-                <a:solidFill>
-                  <a:srgbClr val="6B6B6B"/>
-                </a:solidFill>
-                <a:latin typeface="Century Schoolbook"/>
-              </a:rPr>
-              <a:t>Try to make the inside zero.</a:t>
             </a:r>
           </a:p>
         </p:txBody>
@@ -13780,44 +12334,9 @@
           </a:fontRef>
         </p:style>
       </p:cxnSp>
-      <p:sp>
-        <p:nvSpPr>
-          <p:cNvPr id="5" name="TextBox 4"/>
-          <p:cNvSpPr txBox="1"/>
-          <p:nvPr/>
-        </p:nvSpPr>
-        <p:spPr>
-          <a:xfrm>
-            <a:off x="777240" y="1261872"/>
-            <a:ext cx="10607040" cy="310896"/>
-          </a:xfrm>
-          <a:prstGeom prst="rect">
-            <a:avLst/>
-          </a:prstGeom>
-          <a:noFill/>
-        </p:spPr>
-        <p:txBody>
-          <a:bodyPr wrap="square" lIns="45720" rIns="45720" tIns="18288" bIns="18288" anchor="t">
-            <a:spAutoFit/>
-          </a:bodyPr>
-          <a:lstStyle/>
-          <a:p>
-            <a:pPr algn="l"/>
-            <a:r>
-              <a:rPr sz="1700" b="0" i="1">
-                <a:solidFill>
-                  <a:srgbClr val="6B6B6B"/>
-                </a:solidFill>
-                <a:latin typeface="Century Schoolbook"/>
-              </a:rPr>
-              <a:t>Answer.</a:t>
-            </a:r>
-          </a:p>
-        </p:txBody>
-      </p:sp>
       <p:cxnSp>
         <p:nvCxnSpPr>
-          <p:cNvPr id="6" name="Connector 5"/>
+          <p:cNvPr id="5" name="Connector 4"/>
           <p:cNvCxnSpPr/>
           <p:nvPr/>
         </p:nvCxnSpPr>
@@ -13852,7 +12371,7 @@
       </p:cxnSp>
       <p:sp>
         <p:nvSpPr>
-          <p:cNvPr id="7" name="TextBox 6"/>
+          <p:cNvPr id="6" name="TextBox 5"/>
           <p:cNvSpPr txBox="1"/>
           <p:nvPr/>
         </p:nvSpPr>
@@ -13887,7 +12406,7 @@
       </p:sp>
       <p:sp>
         <p:nvSpPr>
-          <p:cNvPr id="8" name="TextBox 7"/>
+          <p:cNvPr id="7" name="TextBox 6"/>
           <p:cNvSpPr txBox="1"/>
           <p:nvPr/>
         </p:nvSpPr>
@@ -13922,7 +12441,7 @@
       </p:sp>
       <p:sp>
         <p:nvSpPr>
-          <p:cNvPr id="9" name="TextBox 8"/>
+          <p:cNvPr id="8" name="TextBox 7"/>
           <p:cNvSpPr txBox="1"/>
           <p:nvPr/>
         </p:nvSpPr>
@@ -13957,7 +12476,7 @@
       </p:sp>
       <p:pic>
         <p:nvPicPr>
-          <p:cNvPr id="10" name="Picture 9" descr="3cbcfcb039974770.png"/>
+          <p:cNvPr id="9" name="Picture 8" descr="3cbcfcb039974770.png"/>
           <p:cNvPicPr>
             <a:picLocks noChangeAspect="1"/>
           </p:cNvPicPr>
@@ -13981,7 +12500,7 @@
       </p:pic>
       <p:sp>
         <p:nvSpPr>
-          <p:cNvPr id="11" name="TextBox 10"/>
+          <p:cNvPr id="10" name="TextBox 9"/>
           <p:cNvSpPr txBox="1"/>
           <p:nvPr/>
         </p:nvSpPr>
@@ -14016,7 +12535,7 @@
       </p:sp>
       <p:sp>
         <p:nvSpPr>
-          <p:cNvPr id="12" name="TextBox 11"/>
+          <p:cNvPr id="11" name="TextBox 10"/>
           <p:cNvSpPr txBox="1"/>
           <p:nvPr/>
         </p:nvSpPr>
@@ -14051,7 +12570,7 @@
       </p:sp>
       <p:sp>
         <p:nvSpPr>
-          <p:cNvPr id="13" name="TextBox 12"/>
+          <p:cNvPr id="12" name="TextBox 11"/>
           <p:cNvSpPr txBox="1"/>
           <p:nvPr/>
         </p:nvSpPr>
@@ -14086,7 +12605,7 @@
       </p:sp>
       <p:pic>
         <p:nvPicPr>
-          <p:cNvPr id="14" name="Picture 13" descr="ce9b607ea85ce740.png"/>
+          <p:cNvPr id="13" name="Picture 12" descr="ce9b607ea85ce740.png"/>
           <p:cNvPicPr>
             <a:picLocks noChangeAspect="1"/>
           </p:cNvPicPr>
@@ -14110,7 +12629,7 @@
       </p:pic>
       <p:sp>
         <p:nvSpPr>
-          <p:cNvPr id="15" name="TextBox 14"/>
+          <p:cNvPr id="14" name="TextBox 13"/>
           <p:cNvSpPr txBox="1"/>
           <p:nvPr/>
         </p:nvSpPr>
@@ -14145,48 +12664,13 @@
       </p:sp>
       <p:sp>
         <p:nvSpPr>
-          <p:cNvPr id="16" name="TextBox 15"/>
-          <p:cNvSpPr txBox="1"/>
-          <p:nvPr/>
-        </p:nvSpPr>
-        <p:spPr>
-          <a:xfrm>
-            <a:off x="1828800" y="4214191"/>
-            <a:ext cx="8503920" cy="548640"/>
-          </a:xfrm>
-          <a:prstGeom prst="rect">
-            <a:avLst/>
-          </a:prstGeom>
-          <a:noFill/>
-        </p:spPr>
-        <p:txBody>
-          <a:bodyPr wrap="square" lIns="45720" rIns="45720" tIns="18288" bIns="18288" anchor="t">
-            <a:spAutoFit/>
-          </a:bodyPr>
-          <a:lstStyle/>
-          <a:p>
-            <a:pPr algn="ctr"/>
-            <a:r>
-              <a:rPr sz="2400" b="0" i="0">
-                <a:solidFill>
-                  <a:srgbClr val="6B6B6B"/>
-                </a:solidFill>
-                <a:latin typeface="Century Schoolbook"/>
-              </a:rPr>
-              <a:t>never negative is not the same as always positive</a:t>
-            </a:r>
-          </a:p>
-        </p:txBody>
-      </p:sp>
-      <p:sp>
-        <p:nvSpPr>
-          <p:cNvPr id="17" name="TextBox 16"/>
-          <p:cNvSpPr txBox="1"/>
-          <p:nvPr/>
-        </p:nvSpPr>
-        <p:spPr>
-          <a:xfrm>
-            <a:off x="777240" y="4945711"/>
+          <p:cNvPr id="15" name="TextBox 14"/>
+          <p:cNvSpPr txBox="1"/>
+          <p:nvPr/>
+        </p:nvSpPr>
+        <p:spPr>
+          <a:xfrm>
+            <a:off x="777240" y="4663440"/>
             <a:ext cx="10607040" cy="548640"/>
           </a:xfrm>
           <a:prstGeom prst="rect">
@@ -14336,44 +12820,9 @@
           </a:fontRef>
         </p:style>
       </p:cxnSp>
-      <p:sp>
-        <p:nvSpPr>
-          <p:cNvPr id="5" name="TextBox 4"/>
-          <p:cNvSpPr txBox="1"/>
-          <p:nvPr/>
-        </p:nvSpPr>
-        <p:spPr>
-          <a:xfrm>
-            <a:off x="777240" y="1261872"/>
-            <a:ext cx="10607040" cy="310896"/>
-          </a:xfrm>
-          <a:prstGeom prst="rect">
-            <a:avLst/>
-          </a:prstGeom>
-          <a:noFill/>
-        </p:spPr>
-        <p:txBody>
-          <a:bodyPr wrap="square" lIns="45720" rIns="45720" tIns="18288" bIns="18288" anchor="t">
-            <a:spAutoFit/>
-          </a:bodyPr>
-          <a:lstStyle/>
-          <a:p>
-            <a:pPr algn="l"/>
-            <a:r>
-              <a:rPr sz="1700" b="0" i="1">
-                <a:solidFill>
-                  <a:srgbClr val="6B6B6B"/>
-                </a:solidFill>
-                <a:latin typeface="Century Schoolbook"/>
-              </a:rPr>
-              <a:t>Six questions. On your own, in silence.</a:t>
-            </a:r>
-          </a:p>
-        </p:txBody>
-      </p:sp>
       <p:cxnSp>
         <p:nvCxnSpPr>
-          <p:cNvPr id="6" name="Connector 5"/>
+          <p:cNvPr id="5" name="Connector 4"/>
           <p:cNvCxnSpPr/>
           <p:nvPr/>
         </p:nvCxnSpPr>
@@ -14408,7 +12857,7 @@
       </p:cxnSp>
       <p:sp>
         <p:nvSpPr>
-          <p:cNvPr id="7" name="TextBox 6"/>
+          <p:cNvPr id="6" name="TextBox 5"/>
           <p:cNvSpPr txBox="1"/>
           <p:nvPr/>
         </p:nvSpPr>
@@ -14443,7 +12892,7 @@
       </p:sp>
       <p:sp>
         <p:nvSpPr>
-          <p:cNvPr id="8" name="TextBox 7"/>
+          <p:cNvPr id="7" name="TextBox 6"/>
           <p:cNvSpPr txBox="1"/>
           <p:nvPr/>
         </p:nvSpPr>
@@ -14478,7 +12927,7 @@
       </p:sp>
       <p:sp>
         <p:nvSpPr>
-          <p:cNvPr id="9" name="TextBox 8"/>
+          <p:cNvPr id="8" name="TextBox 7"/>
           <p:cNvSpPr txBox="1"/>
           <p:nvPr/>
         </p:nvSpPr>
@@ -14513,7 +12962,7 @@
       </p:sp>
       <p:sp>
         <p:nvSpPr>
-          <p:cNvPr id="10" name="TextBox 9"/>
+          <p:cNvPr id="9" name="TextBox 8"/>
           <p:cNvSpPr txBox="1"/>
           <p:nvPr/>
         </p:nvSpPr>
@@ -14548,7 +12997,7 @@
       </p:sp>
       <p:sp>
         <p:nvSpPr>
-          <p:cNvPr id="11" name="TextBox 10"/>
+          <p:cNvPr id="10" name="TextBox 9"/>
           <p:cNvSpPr txBox="1"/>
           <p:nvPr/>
         </p:nvSpPr>
@@ -14583,7 +13032,7 @@
       </p:sp>
       <p:sp>
         <p:nvSpPr>
-          <p:cNvPr id="12" name="TextBox 11"/>
+          <p:cNvPr id="11" name="TextBox 10"/>
           <p:cNvSpPr txBox="1"/>
           <p:nvPr/>
         </p:nvSpPr>
@@ -14618,7 +13067,7 @@
       </p:sp>
       <p:sp>
         <p:nvSpPr>
-          <p:cNvPr id="13" name="TextBox 12"/>
+          <p:cNvPr id="12" name="TextBox 11"/>
           <p:cNvSpPr txBox="1"/>
           <p:nvPr/>
         </p:nvSpPr>
@@ -14653,7 +13102,7 @@
       </p:sp>
       <p:sp>
         <p:nvSpPr>
-          <p:cNvPr id="14" name="TextBox 13"/>
+          <p:cNvPr id="13" name="TextBox 12"/>
           <p:cNvSpPr txBox="1"/>
           <p:nvPr/>
         </p:nvSpPr>
@@ -14809,44 +13258,9 @@
           </a:fontRef>
         </p:style>
       </p:cxnSp>
-      <p:sp>
-        <p:nvSpPr>
-          <p:cNvPr id="5" name="TextBox 4"/>
-          <p:cNvSpPr txBox="1"/>
-          <p:nvPr/>
-        </p:nvSpPr>
-        <p:spPr>
-          <a:xfrm>
-            <a:off x="777240" y="1261872"/>
-            <a:ext cx="10607040" cy="310896"/>
-          </a:xfrm>
-          <a:prstGeom prst="rect">
-            <a:avLst/>
-          </a:prstGeom>
-          <a:noFill/>
-        </p:spPr>
-        <p:txBody>
-          <a:bodyPr wrap="square" lIns="45720" rIns="45720" tIns="18288" bIns="18288" anchor="t">
-            <a:spAutoFit/>
-          </a:bodyPr>
-          <a:lstStyle/>
-          <a:p>
-            <a:pPr algn="l"/>
-            <a:r>
-              <a:rPr sz="1700" b="0" i="1">
-                <a:solidFill>
-                  <a:srgbClr val="6B6B6B"/>
-                </a:solidFill>
-                <a:latin typeface="Century Schoolbook"/>
-              </a:rPr>
-              <a:t>Last five minutes.</a:t>
-            </a:r>
-          </a:p>
-        </p:txBody>
-      </p:sp>
       <p:cxnSp>
         <p:nvCxnSpPr>
-          <p:cNvPr id="6" name="Connector 5"/>
+          <p:cNvPr id="5" name="Connector 4"/>
           <p:cNvCxnSpPr/>
           <p:nvPr/>
         </p:nvCxnSpPr>
@@ -14881,7 +13295,7 @@
       </p:cxnSp>
       <p:sp>
         <p:nvSpPr>
-          <p:cNvPr id="7" name="TextBox 6"/>
+          <p:cNvPr id="6" name="TextBox 5"/>
           <p:cNvSpPr txBox="1"/>
           <p:nvPr/>
         </p:nvSpPr>
@@ -14916,7 +13330,7 @@
       </p:sp>
       <p:sp>
         <p:nvSpPr>
-          <p:cNvPr id="8" name="TextBox 7"/>
+          <p:cNvPr id="7" name="TextBox 6"/>
           <p:cNvSpPr txBox="1"/>
           <p:nvPr/>
         </p:nvSpPr>
@@ -14951,7 +13365,7 @@
       </p:sp>
       <p:sp>
         <p:nvSpPr>
-          <p:cNvPr id="9" name="TextBox 8"/>
+          <p:cNvPr id="8" name="TextBox 7"/>
           <p:cNvSpPr txBox="1"/>
           <p:nvPr/>
         </p:nvSpPr>
@@ -14986,7 +13400,7 @@
       </p:sp>
       <p:sp>
         <p:nvSpPr>
-          <p:cNvPr id="10" name="TextBox 9"/>
+          <p:cNvPr id="9" name="TextBox 8"/>
           <p:cNvSpPr txBox="1"/>
           <p:nvPr/>
         </p:nvSpPr>
@@ -15021,7 +13435,7 @@
       </p:sp>
       <p:sp>
         <p:nvSpPr>
-          <p:cNvPr id="11" name="TextBox 10"/>
+          <p:cNvPr id="10" name="TextBox 9"/>
           <p:cNvSpPr txBox="1"/>
           <p:nvPr/>
         </p:nvSpPr>
@@ -15056,7 +13470,7 @@
       </p:sp>
       <p:sp>
         <p:nvSpPr>
-          <p:cNvPr id="12" name="TextBox 11"/>
+          <p:cNvPr id="11" name="TextBox 10"/>
           <p:cNvSpPr txBox="1"/>
           <p:nvPr/>
         </p:nvSpPr>
@@ -15091,7 +13505,7 @@
       </p:sp>
       <p:sp>
         <p:nvSpPr>
-          <p:cNvPr id="13" name="TextBox 12"/>
+          <p:cNvPr id="12" name="TextBox 11"/>
           <p:cNvSpPr txBox="1"/>
           <p:nvPr/>
         </p:nvSpPr>
@@ -15126,7 +13540,7 @@
       </p:sp>
       <p:sp>
         <p:nvSpPr>
-          <p:cNvPr id="14" name="TextBox 13"/>
+          <p:cNvPr id="13" name="TextBox 12"/>
           <p:cNvSpPr txBox="1"/>
           <p:nvPr/>
         </p:nvSpPr>
@@ -15161,7 +13575,7 @@
       </p:sp>
       <p:sp>
         <p:nvSpPr>
-          <p:cNvPr id="15" name="TextBox 14"/>
+          <p:cNvPr id="14" name="TextBox 13"/>
           <p:cNvSpPr txBox="1"/>
           <p:nvPr/>
         </p:nvSpPr>
@@ -15196,7 +13610,7 @@
       </p:sp>
       <p:sp>
         <p:nvSpPr>
-          <p:cNvPr id="16" name="TextBox 15"/>
+          <p:cNvPr id="15" name="TextBox 14"/>
           <p:cNvSpPr txBox="1"/>
           <p:nvPr/>
         </p:nvSpPr>
@@ -15352,44 +13766,9 @@
           </a:fontRef>
         </p:style>
       </p:cxnSp>
-      <p:sp>
-        <p:nvSpPr>
-          <p:cNvPr id="5" name="TextBox 4"/>
-          <p:cNvSpPr txBox="1"/>
-          <p:nvPr/>
-        </p:nvSpPr>
-        <p:spPr>
-          <a:xfrm>
-            <a:off x="777240" y="1261872"/>
-            <a:ext cx="10607040" cy="310896"/>
-          </a:xfrm>
-          <a:prstGeom prst="rect">
-            <a:avLst/>
-          </a:prstGeom>
-          <a:noFill/>
-        </p:spPr>
-        <p:txBody>
-          <a:bodyPr wrap="square" lIns="45720" rIns="45720" tIns="18288" bIns="18288" anchor="t">
-            <a:spAutoFit/>
-          </a:bodyPr>
-          <a:lstStyle/>
-          <a:p>
-            <a:pPr algn="l"/>
-            <a:r>
-              <a:rPr sz="1700" b="0" i="1">
-                <a:solidFill>
-                  <a:srgbClr val="6B6B6B"/>
-                </a:solidFill>
-                <a:latin typeface="Century Schoolbook"/>
-              </a:rPr>
-              <a:t>Copy the table.</a:t>
-            </a:r>
-          </a:p>
-        </p:txBody>
-      </p:sp>
       <p:cxnSp>
         <p:nvCxnSpPr>
-          <p:cNvPr id="6" name="Connector 5"/>
+          <p:cNvPr id="5" name="Connector 4"/>
           <p:cNvCxnSpPr/>
           <p:nvPr/>
         </p:nvCxnSpPr>
@@ -15424,7 +13803,7 @@
       </p:cxnSp>
       <p:sp>
         <p:nvSpPr>
-          <p:cNvPr id="7" name="TextBox 6"/>
+          <p:cNvPr id="6" name="TextBox 5"/>
           <p:cNvSpPr txBox="1"/>
           <p:nvPr/>
         </p:nvSpPr>
@@ -15459,7 +13838,7 @@
       </p:sp>
       <p:sp>
         <p:nvSpPr>
-          <p:cNvPr id="8" name="TextBox 7"/>
+          <p:cNvPr id="7" name="TextBox 6"/>
           <p:cNvSpPr txBox="1"/>
           <p:nvPr/>
         </p:nvSpPr>
@@ -15494,13 +13873,13 @@
       </p:sp>
       <p:sp>
         <p:nvSpPr>
-          <p:cNvPr id="9" name="TextBox 8"/>
-          <p:cNvSpPr txBox="1"/>
-          <p:nvPr/>
-        </p:nvSpPr>
-        <p:spPr>
-          <a:xfrm>
-            <a:off x="777240" y="1737360"/>
+          <p:cNvPr id="8" name="TextBox 7"/>
+          <p:cNvSpPr txBox="1"/>
+          <p:nvPr/>
+        </p:nvSpPr>
+        <p:spPr>
+          <a:xfrm>
+            <a:off x="777240" y="1389888"/>
             <a:ext cx="10607040" cy="402336"/>
           </a:xfrm>
           <a:prstGeom prst="rect">
@@ -15529,13 +13908,13 @@
       </p:sp>
       <p:cxnSp>
         <p:nvCxnSpPr>
-          <p:cNvPr id="10" name="Connector 9"/>
+          <p:cNvPr id="9" name="Connector 8"/>
           <p:cNvCxnSpPr/>
           <p:nvPr/>
         </p:nvCxnSpPr>
         <p:spPr>
           <a:xfrm>
-            <a:off x="777240" y="2176272"/>
+            <a:off x="777240" y="1828800"/>
             <a:ext cx="10607040" cy="0"/>
           </a:xfrm>
           <a:prstGeom prst="line">
@@ -15564,14 +13943,14 @@
       </p:cxnSp>
       <p:graphicFrame>
         <p:nvGraphicFramePr>
-          <p:cNvPr id="11" name="Table 10"/>
+          <p:cNvPr id="10" name="Table 9"/>
           <p:cNvGraphicFramePr>
             <a:graphicFrameLocks noGrp="1"/>
           </p:cNvGraphicFramePr>
           <p:nvPr/>
         </p:nvGraphicFramePr>
         <p:xfrm>
-          <a:off x="2103120" y="2340864"/>
+          <a:off x="2103120" y="1993392"/>
           <a:ext cx="7955280" cy="1920240"/>
         </p:xfrm>
         <a:graphic>
@@ -16297,13 +14676,13 @@
       </p:graphicFrame>
       <p:sp>
         <p:nvSpPr>
-          <p:cNvPr id="12" name="TextBox 11"/>
-          <p:cNvSpPr txBox="1"/>
-          <p:nvPr/>
-        </p:nvSpPr>
-        <p:spPr>
-          <a:xfrm>
-            <a:off x="987552" y="4553712"/>
+          <p:cNvPr id="11" name="TextBox 10"/>
+          <p:cNvSpPr txBox="1"/>
+          <p:nvPr/>
+        </p:nvSpPr>
+        <p:spPr>
+          <a:xfrm>
+            <a:off x="987552" y="4206240"/>
             <a:ext cx="10131551" cy="475488"/>
           </a:xfrm>
           <a:prstGeom prst="rect">
@@ -16566,7 +14945,7 @@
         </p:nvSpPr>
         <p:spPr>
           <a:xfrm>
-            <a:off x="777240" y="1737360"/>
+            <a:off x="777240" y="1389888"/>
             <a:ext cx="10607040" cy="402336"/>
           </a:xfrm>
           <a:prstGeom prst="rect">
@@ -16601,7 +14980,7 @@
         </p:nvCxnSpPr>
         <p:spPr>
           <a:xfrm>
-            <a:off x="777240" y="2176272"/>
+            <a:off x="777240" y="1828800"/>
             <a:ext cx="10607040" cy="0"/>
           </a:xfrm>
           <a:prstGeom prst="line">
@@ -16644,7 +15023,7 @@
         </p:blipFill>
         <p:spPr>
           <a:xfrm>
-            <a:off x="2928001" y="2406396"/>
+            <a:off x="2928001" y="2058924"/>
             <a:ext cx="2962656" cy="280416"/>
           </a:xfrm>
           <a:prstGeom prst="rect">
@@ -16660,7 +15039,7 @@
         </p:nvSpPr>
         <p:spPr>
           <a:xfrm>
-            <a:off x="5890657" y="2318004"/>
+            <a:off x="5890657" y="1970532"/>
             <a:ext cx="1977357" cy="457200"/>
           </a:xfrm>
           <a:prstGeom prst="rect">
@@ -16703,7 +15082,7 @@
         </p:blipFill>
         <p:spPr>
           <a:xfrm>
-            <a:off x="7730854" y="2403348"/>
+            <a:off x="7730854" y="2055876"/>
             <a:ext cx="1502664" cy="286512"/>
           </a:xfrm>
           <a:prstGeom prst="rect">
@@ -16727,7 +15106,7 @@
         </p:blipFill>
         <p:spPr>
           <a:xfrm>
-            <a:off x="2722261" y="3084576"/>
+            <a:off x="2722261" y="2737104"/>
             <a:ext cx="3343656" cy="295656"/>
           </a:xfrm>
           <a:prstGeom prst="rect">
@@ -16743,7 +15122,7 @@
         </p:nvSpPr>
         <p:spPr>
           <a:xfrm>
-            <a:off x="6065917" y="3003804"/>
+            <a:off x="6065917" y="2656332"/>
             <a:ext cx="1977357" cy="457200"/>
           </a:xfrm>
           <a:prstGeom prst="rect">
@@ -16786,7 +15165,7 @@
         </p:blipFill>
         <p:spPr>
           <a:xfrm>
-            <a:off x="7906114" y="3092196"/>
+            <a:off x="7906114" y="2744724"/>
             <a:ext cx="1533144" cy="280416"/>
           </a:xfrm>
           <a:prstGeom prst="rect">
@@ -16802,7 +15181,7 @@
         </p:nvSpPr>
         <p:spPr>
           <a:xfrm>
-            <a:off x="987552" y="3776472"/>
+            <a:off x="987552" y="3429000"/>
             <a:ext cx="10131551" cy="950976"/>
           </a:xfrm>
           <a:prstGeom prst="rect">
@@ -17065,7 +15444,7 @@
         </p:nvSpPr>
         <p:spPr>
           <a:xfrm>
-            <a:off x="777240" y="1737360"/>
+            <a:off x="777240" y="1389888"/>
             <a:ext cx="10607040" cy="402336"/>
           </a:xfrm>
           <a:prstGeom prst="rect">
@@ -17100,7 +15479,7 @@
         </p:nvCxnSpPr>
         <p:spPr>
           <a:xfrm>
-            <a:off x="777240" y="2176272"/>
+            <a:off x="777240" y="1828800"/>
             <a:ext cx="10607040" cy="0"/>
           </a:xfrm>
           <a:prstGeom prst="line">
@@ -17143,7 +15522,7 @@
         </p:blipFill>
         <p:spPr>
           <a:xfrm>
-            <a:off x="4844796" y="2340864"/>
+            <a:off x="4844796" y="1993392"/>
             <a:ext cx="2471928" cy="810768"/>
           </a:xfrm>
           <a:prstGeom prst="rect">
@@ -17167,7 +15546,7 @@
         </p:blipFill>
         <p:spPr>
           <a:xfrm>
-            <a:off x="3494532" y="3425952"/>
+            <a:off x="3494532" y="3078480"/>
             <a:ext cx="5172456" cy="871728"/>
           </a:xfrm>
           <a:prstGeom prst="rect">
@@ -17183,7 +15562,7 @@
         </p:nvSpPr>
         <p:spPr>
           <a:xfrm>
-            <a:off x="987552" y="4636008"/>
+            <a:off x="987552" y="4288536"/>
             <a:ext cx="10131551" cy="475488"/>
           </a:xfrm>
           <a:prstGeom prst="rect">
@@ -17333,44 +15712,9 @@
           </a:fontRef>
         </p:style>
       </p:cxnSp>
-      <p:sp>
-        <p:nvSpPr>
-          <p:cNvPr id="5" name="TextBox 4"/>
-          <p:cNvSpPr txBox="1"/>
-          <p:nvPr/>
-        </p:nvSpPr>
-        <p:spPr>
-          <a:xfrm>
-            <a:off x="777240" y="1261872"/>
-            <a:ext cx="10607040" cy="310896"/>
-          </a:xfrm>
-          <a:prstGeom prst="rect">
-            <a:avLst/>
-          </a:prstGeom>
-          <a:noFill/>
-        </p:spPr>
-        <p:txBody>
-          <a:bodyPr wrap="square" lIns="45720" rIns="45720" tIns="18288" bIns="18288" anchor="t">
-            <a:spAutoFit/>
-          </a:bodyPr>
-          <a:lstStyle/>
-          <a:p>
-            <a:pPr algn="l"/>
-            <a:r>
-              <a:rPr sz="1700" b="0" i="1">
-                <a:solidFill>
-                  <a:srgbClr val="6B6B6B"/>
-                </a:solidFill>
-                <a:latin typeface="Century Schoolbook"/>
-              </a:rPr>
-              <a:t>A grouping symbol inside a grouping symbol.</a:t>
-            </a:r>
-          </a:p>
-        </p:txBody>
-      </p:sp>
       <p:cxnSp>
         <p:nvCxnSpPr>
-          <p:cNvPr id="6" name="Connector 5"/>
+          <p:cNvPr id="5" name="Connector 4"/>
           <p:cNvCxnSpPr/>
           <p:nvPr/>
         </p:nvCxnSpPr>
@@ -17405,7 +15749,7 @@
       </p:cxnSp>
       <p:sp>
         <p:nvSpPr>
-          <p:cNvPr id="7" name="TextBox 6"/>
+          <p:cNvPr id="6" name="TextBox 5"/>
           <p:cNvSpPr txBox="1"/>
           <p:nvPr/>
         </p:nvSpPr>
@@ -17440,7 +15784,7 @@
       </p:sp>
       <p:sp>
         <p:nvSpPr>
-          <p:cNvPr id="8" name="TextBox 7"/>
+          <p:cNvPr id="7" name="TextBox 6"/>
           <p:cNvSpPr txBox="1"/>
           <p:nvPr/>
         </p:nvSpPr>
@@ -17475,7 +15819,7 @@
       </p:sp>
       <p:pic>
         <p:nvPicPr>
-          <p:cNvPr id="9" name="Picture 8" descr="4b1ef9fa2dcb4dee.png"/>
+          <p:cNvPr id="8" name="Picture 7" descr="4b1ef9fa2dcb4dee.png"/>
           <p:cNvPicPr>
             <a:picLocks noChangeAspect="1"/>
           </p:cNvPicPr>
@@ -17499,7 +15843,7 @@
       </p:pic>
       <p:sp>
         <p:nvSpPr>
-          <p:cNvPr id="10" name="TextBox 9"/>
+          <p:cNvPr id="9" name="TextBox 8"/>
           <p:cNvSpPr txBox="1"/>
           <p:nvPr/>
         </p:nvSpPr>
@@ -17655,44 +15999,9 @@
           </a:fontRef>
         </p:style>
       </p:cxnSp>
-      <p:sp>
-        <p:nvSpPr>
-          <p:cNvPr id="5" name="TextBox 4"/>
-          <p:cNvSpPr txBox="1"/>
-          <p:nvPr/>
-        </p:nvSpPr>
-        <p:spPr>
-          <a:xfrm>
-            <a:off x="777240" y="1261872"/>
-            <a:ext cx="10607040" cy="310896"/>
-          </a:xfrm>
-          <a:prstGeom prst="rect">
-            <a:avLst/>
-          </a:prstGeom>
-          <a:noFill/>
-        </p:spPr>
-        <p:txBody>
-          <a:bodyPr wrap="square" lIns="45720" rIns="45720" tIns="18288" bIns="18288" anchor="t">
-            <a:spAutoFit/>
-          </a:bodyPr>
-          <a:lstStyle/>
-          <a:p>
-            <a:pPr algn="l"/>
-            <a:r>
-              <a:rPr sz="1700" b="0" i="1">
-                <a:solidFill>
-                  <a:srgbClr val="6B6B6B"/>
-                </a:solidFill>
-                <a:latin typeface="Century Schoolbook"/>
-              </a:rPr>
-              <a:t>Worked.</a:t>
-            </a:r>
-          </a:p>
-        </p:txBody>
-      </p:sp>
       <p:cxnSp>
         <p:nvCxnSpPr>
-          <p:cNvPr id="6" name="Connector 5"/>
+          <p:cNvPr id="5" name="Connector 4"/>
           <p:cNvCxnSpPr/>
           <p:nvPr/>
         </p:nvCxnSpPr>
@@ -17727,7 +16036,7 @@
       </p:cxnSp>
       <p:sp>
         <p:nvSpPr>
-          <p:cNvPr id="7" name="TextBox 6"/>
+          <p:cNvPr id="6" name="TextBox 5"/>
           <p:cNvSpPr txBox="1"/>
           <p:nvPr/>
         </p:nvSpPr>
@@ -17762,7 +16071,7 @@
       </p:sp>
       <p:sp>
         <p:nvSpPr>
-          <p:cNvPr id="8" name="TextBox 7"/>
+          <p:cNvPr id="7" name="TextBox 6"/>
           <p:cNvSpPr txBox="1"/>
           <p:nvPr/>
         </p:nvSpPr>
@@ -17797,7 +16106,7 @@
       </p:sp>
       <p:pic>
         <p:nvPicPr>
-          <p:cNvPr id="9" name="Picture 8" descr="353dd49f16316f6f.png"/>
+          <p:cNvPr id="8" name="Picture 7" descr="353dd49f16316f6f.png"/>
           <p:cNvPicPr>
             <a:picLocks noChangeAspect="1"/>
           </p:cNvPicPr>
@@ -17819,44 +16128,9 @@
           </a:prstGeom>
         </p:spPr>
       </p:pic>
-      <p:sp>
-        <p:nvSpPr>
-          <p:cNvPr id="10" name="TextBox 9"/>
-          <p:cNvSpPr txBox="1"/>
-          <p:nvPr/>
-        </p:nvSpPr>
-        <p:spPr>
-          <a:xfrm>
-            <a:off x="4517136" y="1894332"/>
-            <a:ext cx="6400800" cy="502920"/>
-          </a:xfrm>
-          <a:prstGeom prst="rect">
-            <a:avLst/>
-          </a:prstGeom>
-          <a:noFill/>
-        </p:spPr>
-        <p:txBody>
-          <a:bodyPr wrap="square" lIns="45720" rIns="45720" tIns="18288" bIns="18288" anchor="ctr">
-            <a:spAutoFit/>
-          </a:bodyPr>
-          <a:lstStyle/>
-          <a:p>
-            <a:pPr algn="l"/>
-            <a:r>
-              <a:rPr sz="2100" b="0" i="1">
-                <a:solidFill>
-                  <a:srgbClr val="6B6B6B"/>
-                </a:solidFill>
-                <a:latin typeface="Century Schoolbook"/>
-              </a:rPr>
-              <a:t>innermost: the power inside the parentheses</a:t>
-            </a:r>
-          </a:p>
-        </p:txBody>
-      </p:sp>
       <p:pic>
         <p:nvPicPr>
-          <p:cNvPr id="11" name="Picture 10" descr="340b208cd1f74313.png"/>
+          <p:cNvPr id="9" name="Picture 8" descr="340b208cd1f74313.png"/>
           <p:cNvPicPr>
             <a:picLocks noChangeAspect="1"/>
           </p:cNvPicPr>
@@ -17878,44 +16152,9 @@
           </a:prstGeom>
         </p:spPr>
       </p:pic>
-      <p:sp>
-        <p:nvSpPr>
-          <p:cNvPr id="12" name="TextBox 11"/>
-          <p:cNvSpPr txBox="1"/>
-          <p:nvPr/>
-        </p:nvSpPr>
-        <p:spPr>
-          <a:xfrm>
-            <a:off x="9259824" y="2546604"/>
-            <a:ext cx="2124455" cy="502920"/>
-          </a:xfrm>
-          <a:prstGeom prst="rect">
-            <a:avLst/>
-          </a:prstGeom>
-          <a:noFill/>
-        </p:spPr>
-        <p:txBody>
-          <a:bodyPr wrap="square" lIns="45720" rIns="45720" tIns="18288" bIns="18288" anchor="ctr">
-            <a:spAutoFit/>
-          </a:bodyPr>
-          <a:lstStyle/>
-          <a:p>
-            <a:pPr algn="l"/>
-            <a:r>
-              <a:rPr sz="2100" b="0" i="1">
-                <a:solidFill>
-                  <a:srgbClr val="6B6B6B"/>
-                </a:solidFill>
-                <a:latin typeface="Century Schoolbook"/>
-              </a:rPr>
-              <a:t>finish the parentheses, then multiply</a:t>
-            </a:r>
-          </a:p>
-        </p:txBody>
-      </p:sp>
       <p:pic>
         <p:nvPicPr>
-          <p:cNvPr id="13" name="Picture 12" descr="90bf680791a0f62d.png"/>
+          <p:cNvPr id="10" name="Picture 9" descr="90bf680791a0f62d.png"/>
           <p:cNvPicPr>
             <a:picLocks noChangeAspect="1"/>
           </p:cNvPicPr>
@@ -17939,42 +16178,7 @@
       </p:pic>
       <p:sp>
         <p:nvSpPr>
-          <p:cNvPr id="14" name="TextBox 13"/>
-          <p:cNvSpPr txBox="1"/>
-          <p:nvPr/>
-        </p:nvSpPr>
-        <p:spPr>
-          <a:xfrm>
-            <a:off x="5230368" y="3144011"/>
-            <a:ext cx="6153911" cy="502920"/>
-          </a:xfrm>
-          <a:prstGeom prst="rect">
-            <a:avLst/>
-          </a:prstGeom>
-          <a:noFill/>
-        </p:spPr>
-        <p:txBody>
-          <a:bodyPr wrap="square" lIns="45720" rIns="45720" tIns="18288" bIns="18288" anchor="ctr">
-            <a:spAutoFit/>
-          </a:bodyPr>
-          <a:lstStyle/>
-          <a:p>
-            <a:pPr algn="l"/>
-            <a:r>
-              <a:rPr sz="2100" b="0" i="1">
-                <a:solidFill>
-                  <a:srgbClr val="6B6B6B"/>
-                </a:solidFill>
-                <a:latin typeface="Century Schoolbook"/>
-              </a:rPr>
-              <a:t>the cube root is 5; add last</a:t>
-            </a:r>
-          </a:p>
-        </p:txBody>
-      </p:sp>
-      <p:sp>
-        <p:nvSpPr>
-          <p:cNvPr id="15" name="TextBox 14"/>
+          <p:cNvPr id="11" name="TextBox 10"/>
           <p:cNvSpPr txBox="1"/>
           <p:nvPr/>
         </p:nvSpPr>
@@ -18130,44 +16334,9 @@
           </a:fontRef>
         </p:style>
       </p:cxnSp>
-      <p:sp>
-        <p:nvSpPr>
-          <p:cNvPr id="5" name="TextBox 4"/>
-          <p:cNvSpPr txBox="1"/>
-          <p:nvPr/>
-        </p:nvSpPr>
-        <p:spPr>
-          <a:xfrm>
-            <a:off x="777240" y="1261872"/>
-            <a:ext cx="10607040" cy="310896"/>
-          </a:xfrm>
-          <a:prstGeom prst="rect">
-            <a:avLst/>
-          </a:prstGeom>
-          <a:noFill/>
-        </p:spPr>
-        <p:txBody>
-          <a:bodyPr wrap="square" lIns="45720" rIns="45720" tIns="18288" bIns="18288" anchor="t">
-            <a:spAutoFit/>
-          </a:bodyPr>
-          <a:lstStyle/>
-          <a:p>
-            <a:pPr algn="l"/>
-            <a:r>
-              <a:rPr sz="1700" b="0" i="1">
-                <a:solidFill>
-                  <a:srgbClr val="6B6B6B"/>
-                </a:solidFill>
-                <a:latin typeface="Century Schoolbook"/>
-              </a:rPr>
-              <a:t>Same steps, your numbers. Boards up when done.</a:t>
-            </a:r>
-          </a:p>
-        </p:txBody>
-      </p:sp>
       <p:cxnSp>
         <p:nvCxnSpPr>
-          <p:cNvPr id="6" name="Connector 5"/>
+          <p:cNvPr id="5" name="Connector 4"/>
           <p:cNvCxnSpPr/>
           <p:nvPr/>
         </p:nvCxnSpPr>
@@ -18202,7 +16371,7 @@
       </p:cxnSp>
       <p:sp>
         <p:nvSpPr>
-          <p:cNvPr id="7" name="TextBox 6"/>
+          <p:cNvPr id="6" name="TextBox 5"/>
           <p:cNvSpPr txBox="1"/>
           <p:nvPr/>
         </p:nvSpPr>
@@ -18237,7 +16406,7 @@
       </p:sp>
       <p:sp>
         <p:nvSpPr>
-          <p:cNvPr id="8" name="TextBox 7"/>
+          <p:cNvPr id="7" name="TextBox 6"/>
           <p:cNvSpPr txBox="1"/>
           <p:nvPr/>
         </p:nvSpPr>
@@ -18272,7 +16441,7 @@
       </p:sp>
       <p:pic>
         <p:nvPicPr>
-          <p:cNvPr id="9" name="Picture 8" descr="dcc7e91a07786a42.png"/>
+          <p:cNvPr id="8" name="Picture 7" descr="dcc7e91a07786a42.png"/>
           <p:cNvPicPr>
             <a:picLocks noChangeAspect="1"/>
           </p:cNvPicPr>
@@ -18294,6 +16463,41 @@
           </a:prstGeom>
         </p:spPr>
       </p:pic>
+      <p:sp>
+        <p:nvSpPr>
+          <p:cNvPr id="9" name="TextBox 8"/>
+          <p:cNvSpPr txBox="1"/>
+          <p:nvPr/>
+        </p:nvSpPr>
+        <p:spPr>
+          <a:xfrm>
+            <a:off x="777240" y="3328416"/>
+            <a:ext cx="10607040" cy="429370"/>
+          </a:xfrm>
+          <a:prstGeom prst="rect">
+            <a:avLst/>
+          </a:prstGeom>
+          <a:noFill/>
+        </p:spPr>
+        <p:txBody>
+          <a:bodyPr wrap="square" lIns="45720" rIns="45720" tIns="18288" bIns="18288" anchor="t">
+            <a:spAutoFit/>
+          </a:bodyPr>
+          <a:lstStyle/>
+          <a:p>
+            <a:pPr algn="ctr"/>
+            <a:r>
+              <a:rPr sz="2400" b="1" i="0">
+                <a:solidFill>
+                  <a:srgbClr val="1A1A1A"/>
+                </a:solidFill>
+                <a:latin typeface="Century Schoolbook"/>
+              </a:rPr>
+              <a:t>Evaluate.</a:t>
+            </a:r>
+          </a:p>
+        </p:txBody>
+      </p:sp>
     </p:spTree>
   </p:cSld>
   <p:clrMapOvr>

--- a/a7/build/out/u4/A7 4.06 Order of Operations with Radicals - Slides.pptx
+++ b/a7/build/out/u4/A7 4.06 Order of Operations with Radicals - Slides.pptx
@@ -12933,23 +12933,23 @@
         </p:nvSpPr>
         <p:spPr>
           <a:xfrm>
-            <a:off x="960120" y="2011680"/>
-            <a:ext cx="548640" cy="356616"/>
-          </a:xfrm>
-          <a:prstGeom prst="rect">
-            <a:avLst/>
-          </a:prstGeom>
-          <a:noFill/>
-        </p:spPr>
-        <p:txBody>
-          <a:bodyPr wrap="square" lIns="45720" rIns="45720" tIns="18288" bIns="18288" anchor="t">
+            <a:off x="960120" y="1495043"/>
+            <a:ext cx="548640" cy="457200"/>
+          </a:xfrm>
+          <a:prstGeom prst="rect">
+            <a:avLst/>
+          </a:prstGeom>
+          <a:noFill/>
+        </p:spPr>
+        <p:txBody>
+          <a:bodyPr wrap="square" lIns="45720" rIns="45720" tIns="18288" bIns="18288" anchor="ctr">
             <a:spAutoFit/>
           </a:bodyPr>
           <a:lstStyle/>
           <a:p>
             <a:pPr algn="l"/>
             <a:r>
-              <a:rPr sz="2100" b="1" i="0">
+              <a:rPr sz="2300" b="1" i="0">
                 <a:solidFill>
                   <a:srgbClr val="0B5394"/>
                 </a:solidFill>
@@ -12960,181 +12960,325 @@
           </a:p>
         </p:txBody>
       </p:sp>
-      <p:sp>
-        <p:nvSpPr>
-          <p:cNvPr id="9" name="TextBox 8"/>
-          <p:cNvSpPr txBox="1"/>
-          <p:nvPr/>
-        </p:nvSpPr>
-        <p:spPr>
-          <a:xfrm>
-            <a:off x="1554480" y="2011680"/>
-            <a:ext cx="9829800" cy="411480"/>
-          </a:xfrm>
-          <a:prstGeom prst="rect">
-            <a:avLst/>
-          </a:prstGeom>
-          <a:noFill/>
-        </p:spPr>
-        <p:txBody>
-          <a:bodyPr wrap="square" lIns="45720" rIns="45720" tIns="18288" bIns="18288" anchor="t">
+      <p:pic>
+        <p:nvPicPr>
+          <p:cNvPr id="9" name="Picture 8" descr="1f329a86f16255f7.png"/>
+          <p:cNvPicPr>
+            <a:picLocks noChangeAspect="1"/>
+          </p:cNvPicPr>
+          <p:nvPr/>
+        </p:nvPicPr>
+        <p:blipFill>
+          <a:blip r:embed="rId2"/>
+          <a:stretch>
+            <a:fillRect/>
+          </a:stretch>
+        </p:blipFill>
+        <p:spPr>
+          <a:xfrm>
+            <a:off x="1627632" y="1601723"/>
+            <a:ext cx="1639824" cy="243840"/>
+          </a:xfrm>
+          <a:prstGeom prst="rect">
+            <a:avLst/>
+          </a:prstGeom>
+        </p:spPr>
+      </p:pic>
+      <p:sp>
+        <p:nvSpPr>
+          <p:cNvPr id="10" name="TextBox 9"/>
+          <p:cNvSpPr txBox="1"/>
+          <p:nvPr/>
+        </p:nvSpPr>
+        <p:spPr>
+          <a:xfrm>
+            <a:off x="960120" y="2089403"/>
+            <a:ext cx="548640" cy="457200"/>
+          </a:xfrm>
+          <a:prstGeom prst="rect">
+            <a:avLst/>
+          </a:prstGeom>
+          <a:noFill/>
+        </p:spPr>
+        <p:txBody>
+          <a:bodyPr wrap="square" lIns="45720" rIns="45720" tIns="18288" bIns="18288" anchor="ctr">
             <a:spAutoFit/>
           </a:bodyPr>
           <a:lstStyle/>
           <a:p>
             <a:pPr algn="l"/>
             <a:r>
-              <a:rPr sz="2100" b="0" i="0">
-                <a:solidFill>
-                  <a:srgbClr val="1A1A1A"/>
-                </a:solidFill>
-                <a:latin typeface="Century Schoolbook"/>
-              </a:rPr>
-              <a:t>Six questions. Work down the page.</a:t>
-            </a:r>
-          </a:p>
-        </p:txBody>
-      </p:sp>
-      <p:sp>
-        <p:nvSpPr>
-          <p:cNvPr id="10" name="TextBox 9"/>
-          <p:cNvSpPr txBox="1"/>
-          <p:nvPr/>
-        </p:nvSpPr>
-        <p:spPr>
-          <a:xfrm>
-            <a:off x="960120" y="2551176"/>
-            <a:ext cx="548640" cy="356616"/>
-          </a:xfrm>
-          <a:prstGeom prst="rect">
-            <a:avLst/>
-          </a:prstGeom>
-          <a:noFill/>
-        </p:spPr>
-        <p:txBody>
-          <a:bodyPr wrap="square" lIns="45720" rIns="45720" tIns="18288" bIns="18288" anchor="t">
+              <a:rPr sz="2300" b="1" i="0">
+                <a:solidFill>
+                  <a:srgbClr val="0B5394"/>
+                </a:solidFill>
+                <a:latin typeface="Century Schoolbook"/>
+              </a:rPr>
+              <a:t>2.</a:t>
+            </a:r>
+          </a:p>
+        </p:txBody>
+      </p:sp>
+      <p:pic>
+        <p:nvPicPr>
+          <p:cNvPr id="11" name="Picture 10" descr="dc0a4f2891ed4168.png"/>
+          <p:cNvPicPr>
+            <a:picLocks noChangeAspect="1"/>
+          </p:cNvPicPr>
+          <p:nvPr/>
+        </p:nvPicPr>
+        <p:blipFill>
+          <a:blip r:embed="rId3"/>
+          <a:stretch>
+            <a:fillRect/>
+          </a:stretch>
+        </p:blipFill>
+        <p:spPr>
+          <a:xfrm>
+            <a:off x="1627632" y="2202179"/>
+            <a:ext cx="1112520" cy="231648"/>
+          </a:xfrm>
+          <a:prstGeom prst="rect">
+            <a:avLst/>
+          </a:prstGeom>
+        </p:spPr>
+      </p:pic>
+      <p:sp>
+        <p:nvSpPr>
+          <p:cNvPr id="12" name="TextBox 11"/>
+          <p:cNvSpPr txBox="1"/>
+          <p:nvPr/>
+        </p:nvSpPr>
+        <p:spPr>
+          <a:xfrm>
+            <a:off x="960120" y="2683763"/>
+            <a:ext cx="548640" cy="457200"/>
+          </a:xfrm>
+          <a:prstGeom prst="rect">
+            <a:avLst/>
+          </a:prstGeom>
+          <a:noFill/>
+        </p:spPr>
+        <p:txBody>
+          <a:bodyPr wrap="square" lIns="45720" rIns="45720" tIns="18288" bIns="18288" anchor="ctr">
             <a:spAutoFit/>
           </a:bodyPr>
           <a:lstStyle/>
           <a:p>
             <a:pPr algn="l"/>
             <a:r>
-              <a:rPr sz="2100" b="1" i="0">
+              <a:rPr sz="2300" b="1" i="0">
                 <a:solidFill>
                   <a:srgbClr val="0B5394"/>
                 </a:solidFill>
                 <a:latin typeface="Century Schoolbook"/>
               </a:rPr>
-              <a:t>2.</a:t>
-            </a:r>
-          </a:p>
-        </p:txBody>
-      </p:sp>
-      <p:sp>
-        <p:nvSpPr>
-          <p:cNvPr id="11" name="TextBox 10"/>
-          <p:cNvSpPr txBox="1"/>
-          <p:nvPr/>
-        </p:nvSpPr>
-        <p:spPr>
-          <a:xfrm>
-            <a:off x="1554480" y="2551176"/>
-            <a:ext cx="9829800" cy="411480"/>
-          </a:xfrm>
-          <a:prstGeom prst="rect">
-            <a:avLst/>
-          </a:prstGeom>
-          <a:noFill/>
-        </p:spPr>
-        <p:txBody>
-          <a:bodyPr wrap="square" lIns="45720" rIns="45720" tIns="18288" bIns="18288" anchor="t">
+              <a:t>3.</a:t>
+            </a:r>
+          </a:p>
+        </p:txBody>
+      </p:sp>
+      <p:pic>
+        <p:nvPicPr>
+          <p:cNvPr id="13" name="Picture 12" descr="f18144c08071bc4e.png"/>
+          <p:cNvPicPr>
+            <a:picLocks noChangeAspect="1"/>
+          </p:cNvPicPr>
+          <p:nvPr/>
+        </p:nvPicPr>
+        <p:blipFill>
+          <a:blip r:embed="rId4"/>
+          <a:stretch>
+            <a:fillRect/>
+          </a:stretch>
+        </p:blipFill>
+        <p:spPr>
+          <a:xfrm>
+            <a:off x="1627632" y="2744723"/>
+            <a:ext cx="1624584" cy="335280"/>
+          </a:xfrm>
+          <a:prstGeom prst="rect">
+            <a:avLst/>
+          </a:prstGeom>
+        </p:spPr>
+      </p:pic>
+      <p:sp>
+        <p:nvSpPr>
+          <p:cNvPr id="14" name="TextBox 13"/>
+          <p:cNvSpPr txBox="1"/>
+          <p:nvPr/>
+        </p:nvSpPr>
+        <p:spPr>
+          <a:xfrm>
+            <a:off x="960120" y="3407663"/>
+            <a:ext cx="548640" cy="457200"/>
+          </a:xfrm>
+          <a:prstGeom prst="rect">
+            <a:avLst/>
+          </a:prstGeom>
+          <a:noFill/>
+        </p:spPr>
+        <p:txBody>
+          <a:bodyPr wrap="square" lIns="45720" rIns="45720" tIns="18288" bIns="18288" anchor="ctr">
             <a:spAutoFit/>
           </a:bodyPr>
           <a:lstStyle/>
           <a:p>
             <a:pPr algn="l"/>
             <a:r>
-              <a:rPr sz="2100" b="0" i="0">
-                <a:solidFill>
-                  <a:srgbClr val="1A1A1A"/>
-                </a:solidFill>
-                <a:latin typeface="Century Schoolbook"/>
-              </a:rPr>
-              <a:t>Show the step that does the work, not just the answer.</a:t>
-            </a:r>
-          </a:p>
-        </p:txBody>
-      </p:sp>
-      <p:sp>
-        <p:nvSpPr>
-          <p:cNvPr id="12" name="TextBox 11"/>
-          <p:cNvSpPr txBox="1"/>
-          <p:nvPr/>
-        </p:nvSpPr>
-        <p:spPr>
-          <a:xfrm>
-            <a:off x="960120" y="3090672"/>
-            <a:ext cx="548640" cy="356616"/>
-          </a:xfrm>
-          <a:prstGeom prst="rect">
-            <a:avLst/>
-          </a:prstGeom>
-          <a:noFill/>
-        </p:spPr>
-        <p:txBody>
-          <a:bodyPr wrap="square" lIns="45720" rIns="45720" tIns="18288" bIns="18288" anchor="t">
+              <a:rPr sz="2300" b="1" i="0">
+                <a:solidFill>
+                  <a:srgbClr val="0B5394"/>
+                </a:solidFill>
+                <a:latin typeface="Century Schoolbook"/>
+              </a:rPr>
+              <a:t>4.</a:t>
+            </a:r>
+          </a:p>
+        </p:txBody>
+      </p:sp>
+      <p:pic>
+        <p:nvPicPr>
+          <p:cNvPr id="15" name="Picture 14" descr="121faca76136a40d.png"/>
+          <p:cNvPicPr>
+            <a:picLocks noChangeAspect="1"/>
+          </p:cNvPicPr>
+          <p:nvPr/>
+        </p:nvPicPr>
+        <p:blipFill>
+          <a:blip r:embed="rId5"/>
+          <a:stretch>
+            <a:fillRect/>
+          </a:stretch>
+        </p:blipFill>
+        <p:spPr>
+          <a:xfrm>
+            <a:off x="1627632" y="3300983"/>
+            <a:ext cx="792480" cy="670560"/>
+          </a:xfrm>
+          <a:prstGeom prst="rect">
+            <a:avLst/>
+          </a:prstGeom>
+        </p:spPr>
+      </p:pic>
+      <p:sp>
+        <p:nvSpPr>
+          <p:cNvPr id="16" name="TextBox 15"/>
+          <p:cNvSpPr txBox="1"/>
+          <p:nvPr/>
+        </p:nvSpPr>
+        <p:spPr>
+          <a:xfrm>
+            <a:off x="960120" y="4131563"/>
+            <a:ext cx="548640" cy="457200"/>
+          </a:xfrm>
+          <a:prstGeom prst="rect">
+            <a:avLst/>
+          </a:prstGeom>
+          <a:noFill/>
+        </p:spPr>
+        <p:txBody>
+          <a:bodyPr wrap="square" lIns="45720" rIns="45720" tIns="18288" bIns="18288" anchor="ctr">
             <a:spAutoFit/>
           </a:bodyPr>
           <a:lstStyle/>
           <a:p>
             <a:pPr algn="l"/>
             <a:r>
-              <a:rPr sz="2100" b="1" i="0">
+              <a:rPr sz="2300" b="1" i="0">
                 <a:solidFill>
                   <a:srgbClr val="0B5394"/>
                 </a:solidFill>
                 <a:latin typeface="Century Schoolbook"/>
               </a:rPr>
-              <a:t>3.</a:t>
-            </a:r>
-          </a:p>
-        </p:txBody>
-      </p:sp>
-      <p:sp>
-        <p:nvSpPr>
-          <p:cNvPr id="13" name="TextBox 12"/>
-          <p:cNvSpPr txBox="1"/>
-          <p:nvPr/>
-        </p:nvSpPr>
-        <p:spPr>
-          <a:xfrm>
-            <a:off x="1554480" y="3090672"/>
-            <a:ext cx="9829800" cy="411480"/>
-          </a:xfrm>
-          <a:prstGeom prst="rect">
-            <a:avLst/>
-          </a:prstGeom>
-          <a:noFill/>
-        </p:spPr>
-        <p:txBody>
-          <a:bodyPr wrap="square" lIns="45720" rIns="45720" tIns="18288" bIns="18288" anchor="t">
+              <a:t>5.</a:t>
+            </a:r>
+          </a:p>
+        </p:txBody>
+      </p:sp>
+      <p:pic>
+        <p:nvPicPr>
+          <p:cNvPr id="17" name="Picture 16" descr="c4b87d1c3f303ef9.png"/>
+          <p:cNvPicPr>
+            <a:picLocks noChangeAspect="1"/>
+          </p:cNvPicPr>
+          <p:nvPr/>
+        </p:nvPicPr>
+        <p:blipFill>
+          <a:blip r:embed="rId6"/>
+          <a:stretch>
+            <a:fillRect/>
+          </a:stretch>
+        </p:blipFill>
+        <p:spPr>
+          <a:xfrm>
+            <a:off x="1627632" y="4192524"/>
+            <a:ext cx="1554480" cy="335280"/>
+          </a:xfrm>
+          <a:prstGeom prst="rect">
+            <a:avLst/>
+          </a:prstGeom>
+        </p:spPr>
+      </p:pic>
+      <p:sp>
+        <p:nvSpPr>
+          <p:cNvPr id="18" name="TextBox 17"/>
+          <p:cNvSpPr txBox="1"/>
+          <p:nvPr/>
+        </p:nvSpPr>
+        <p:spPr>
+          <a:xfrm>
+            <a:off x="960120" y="4725924"/>
+            <a:ext cx="548640" cy="457200"/>
+          </a:xfrm>
+          <a:prstGeom prst="rect">
+            <a:avLst/>
+          </a:prstGeom>
+          <a:noFill/>
+        </p:spPr>
+        <p:txBody>
+          <a:bodyPr wrap="square" lIns="45720" rIns="45720" tIns="18288" bIns="18288" anchor="ctr">
             <a:spAutoFit/>
           </a:bodyPr>
           <a:lstStyle/>
           <a:p>
             <a:pPr algn="l"/>
             <a:r>
-              <a:rPr sz="2100" b="0" i="0">
-                <a:solidFill>
-                  <a:srgbClr val="1A1A1A"/>
-                </a:solidFill>
-                <a:latin typeface="Century Schoolbook"/>
-              </a:rPr>
-              <a:t>Silence until the six minutes are up.</a:t>
-            </a:r>
-          </a:p>
-        </p:txBody>
-      </p:sp>
+              <a:rPr sz="2300" b="1" i="0">
+                <a:solidFill>
+                  <a:srgbClr val="0B5394"/>
+                </a:solidFill>
+                <a:latin typeface="Century Schoolbook"/>
+              </a:rPr>
+              <a:t>6.</a:t>
+            </a:r>
+          </a:p>
+        </p:txBody>
+      </p:sp>
+      <p:pic>
+        <p:nvPicPr>
+          <p:cNvPr id="19" name="Picture 18" descr="ffa7e16a200ba393.png"/>
+          <p:cNvPicPr>
+            <a:picLocks noChangeAspect="1"/>
+          </p:cNvPicPr>
+          <p:nvPr/>
+        </p:nvPicPr>
+        <p:blipFill>
+          <a:blip r:embed="rId7"/>
+          <a:stretch>
+            <a:fillRect/>
+          </a:stretch>
+        </p:blipFill>
+        <p:spPr>
+          <a:xfrm>
+            <a:off x="1627632" y="4750308"/>
+            <a:ext cx="2258568" cy="408432"/>
+          </a:xfrm>
+          <a:prstGeom prst="rect">
+            <a:avLst/>
+          </a:prstGeom>
+        </p:spPr>
+      </p:pic>
     </p:spTree>
   </p:cSld>
   <p:clrMapOvr>

--- a/a7/build/out/u4/A7 4.06 Order of Operations with Radicals - Slides.pptx
+++ b/a7/build/out/u4/A7 4.06 Order of Operations with Radicals - Slides.pptx
@@ -3145,11 +3145,11 @@
           <a:p>
             <a:pPr algn="ctr"/>
             <a:r>
-              <a:rPr sz="1500" b="0" i="0">
+              <a:rPr sz="1420" b="0" i="0">
                 <a:solidFill>
                   <a:srgbClr val="6B6B6B"/>
                 </a:solidFill>
-                <a:latin typeface="Century Schoolbook"/>
+                <a:latin typeface="Lexend"/>
               </a:rPr>
               <a:t>GRADE 7 ACCELERATED  ·  UNIT 4  ·  LESSON 6</a:t>
             </a:r>
@@ -3180,11 +3180,11 @@
           <a:p>
             <a:pPr algn="ctr"/>
             <a:r>
-              <a:rPr sz="3400" b="1" i="0">
+              <a:rPr sz="3229" b="1" i="0">
                 <a:solidFill>
                   <a:srgbClr val="1A1A1A"/>
                 </a:solidFill>
-                <a:latin typeface="Century Schoolbook"/>
+                <a:latin typeface="Lexend"/>
               </a:rPr>
               <a:t>Order of Operations with Radicals</a:t>
             </a:r>
@@ -3285,11 +3285,11 @@
           <a:p>
             <a:pPr algn="ctr"/>
             <a:r>
-              <a:rPr sz="1600" b="1" i="0">
+              <a:rPr sz="1520" b="1" i="0">
                 <a:solidFill>
                   <a:srgbClr val="1A1A1A"/>
                 </a:solidFill>
-                <a:latin typeface="Century Schoolbook"/>
+                <a:latin typeface="Lexend"/>
               </a:rPr>
               <a:t>MA.8.NSO.1.7</a:t>
             </a:r>
@@ -3320,11 +3320,11 @@
           <a:p>
             <a:pPr algn="ctr"/>
             <a:r>
-              <a:rPr sz="1900" b="0" i="1">
+              <a:rPr sz="1810" b="0" i="0">
                 <a:solidFill>
                   <a:srgbClr val="1A1A1A"/>
                 </a:solidFill>
-                <a:latin typeface="Century Schoolbook"/>
+                <a:latin typeface="Lexend"/>
               </a:rPr>
               <a:t>I can evaluate a multi-step expression with rational numbers, exponents and radicals by reading its structure.</a:t>
             </a:r>
@@ -3390,11 +3390,11 @@
           <a:p>
             <a:pPr algn="l"/>
             <a:r>
-              <a:rPr sz="1100" b="0" i="1">
+              <a:rPr sz="1040" b="0" i="0">
                 <a:solidFill>
                   <a:srgbClr val="6B6B6B"/>
                 </a:solidFill>
-                <a:latin typeface="Century Schoolbook"/>
+                <a:latin typeface="Lexend"/>
               </a:rPr>
               <a:t>Grade 7 Accelerated · Unit 4 · Lesson 6 — Order of Operations with Radicals</a:t>
             </a:r>
@@ -3425,11 +3425,11 @@
           <a:p>
             <a:pPr algn="r"/>
             <a:r>
-              <a:rPr sz="1100" b="0" i="0">
+              <a:rPr sz="1040" b="0" i="0">
                 <a:solidFill>
                   <a:srgbClr val="6B6B6B"/>
                 </a:solidFill>
-                <a:latin typeface="Century Schoolbook"/>
+                <a:latin typeface="Lexend"/>
               </a:rPr>
               <a:t>1</a:t>
             </a:r>
@@ -3478,11 +3478,11 @@
           <a:p>
             <a:pPr algn="l"/>
             <a:r>
-              <a:rPr sz="3600" b="1" i="0">
+              <a:rPr sz="3420" b="1" i="0">
                 <a:solidFill>
                   <a:srgbClr val="1A1A1A"/>
                 </a:solidFill>
-                <a:latin typeface="Century Schoolbook"/>
+                <a:latin typeface="Lexend"/>
               </a:rPr>
               <a:t>Your Turn</a:t>
             </a:r>
@@ -3618,11 +3618,11 @@
           <a:p>
             <a:pPr algn="l"/>
             <a:r>
-              <a:rPr sz="1100" b="0" i="1">
+              <a:rPr sz="1040" b="0" i="0">
                 <a:solidFill>
                   <a:srgbClr val="6B6B6B"/>
                 </a:solidFill>
-                <a:latin typeface="Century Schoolbook"/>
+                <a:latin typeface="Lexend"/>
               </a:rPr>
               <a:t>Grade 7 Accelerated · Unit 4 · Lesson 6 — Order of Operations with Radicals</a:t>
             </a:r>
@@ -3653,11 +3653,11 @@
           <a:p>
             <a:pPr algn="r"/>
             <a:r>
-              <a:rPr sz="1100" b="0" i="0">
+              <a:rPr sz="1040" b="0" i="0">
                 <a:solidFill>
                   <a:srgbClr val="6B6B6B"/>
                 </a:solidFill>
-                <a:latin typeface="Century Schoolbook"/>
+                <a:latin typeface="Lexend"/>
               </a:rPr>
               <a:t>10</a:t>
             </a:r>
@@ -3666,7 +3666,7 @@
       </p:sp>
       <p:pic>
         <p:nvPicPr>
-          <p:cNvPr id="8" name="Picture 7" descr="7d9dafa919c33afa.png"/>
+          <p:cNvPr id="8" name="Picture 7" descr="aac90390d93a983e.png"/>
           <p:cNvPicPr>
             <a:picLocks noChangeAspect="1"/>
           </p:cNvPicPr>
@@ -3680,8 +3680,8 @@
         </p:blipFill>
         <p:spPr>
           <a:xfrm>
-            <a:off x="3814571" y="2194560"/>
-            <a:ext cx="4532376" cy="630936"/>
+            <a:off x="3809999" y="1600200"/>
+            <a:ext cx="4541520" cy="594360"/>
           </a:xfrm>
           <a:prstGeom prst="rect">
             <a:avLst/>
@@ -3696,7 +3696,7 @@
         </p:nvSpPr>
         <p:spPr>
           <a:xfrm>
-            <a:off x="777240" y="3328416"/>
+            <a:off x="777240" y="2697480"/>
             <a:ext cx="10607040" cy="429370"/>
           </a:xfrm>
           <a:prstGeom prst="rect">
@@ -3712,11 +3712,11 @@
           <a:p>
             <a:pPr algn="ctr"/>
             <a:r>
-              <a:rPr sz="2400" b="1" i="0">
+              <a:rPr sz="2280" b="1" i="0">
                 <a:solidFill>
                   <a:srgbClr val="1A1A1A"/>
                 </a:solidFill>
-                <a:latin typeface="Century Schoolbook"/>
+                <a:latin typeface="Lexend"/>
               </a:rPr>
               <a:t>Evaluate.</a:t>
             </a:r>
@@ -3731,7 +3731,208 @@
         </p:nvSpPr>
         <p:spPr>
           <a:xfrm>
-            <a:off x="777240" y="4572000"/>
+            <a:off x="2695478" y="3286870"/>
+            <a:ext cx="3085266" cy="457200"/>
+          </a:xfrm>
+          <a:prstGeom prst="rect">
+            <a:avLst/>
+          </a:prstGeom>
+          <a:noFill/>
+        </p:spPr>
+        <p:txBody>
+          <a:bodyPr wrap="none" lIns="45720" rIns="45720" tIns="18288" bIns="18288" anchor="ctr">
+            <a:noAutofit/>
+          </a:bodyPr>
+          <a:lstStyle/>
+          <a:p>
+            <a:pPr algn="l"/>
+            <a:r>
+              <a:rPr sz="2330" b="0" i="0">
+                <a:solidFill>
+                  <a:srgbClr val="1A1A1A"/>
+                </a:solidFill>
+                <a:latin typeface="Lexend"/>
+              </a:rPr>
+              <a:t>Powers and roots:  </a:t>
+            </a:r>
+          </a:p>
+        </p:txBody>
+      </p:sp>
+      <p:pic>
+        <p:nvPicPr>
+          <p:cNvPr id="11" name="Picture 10" descr="f6d02763ee13a42e.png"/>
+          <p:cNvPicPr>
+            <a:picLocks noChangeAspect="1"/>
+          </p:cNvPicPr>
+          <p:nvPr/>
+        </p:nvPicPr>
+        <p:blipFill>
+          <a:blip r:embed="rId3"/>
+          <a:stretch>
+            <a:fillRect/>
+          </a:stretch>
+        </p:blipFill>
+        <p:spPr>
+          <a:xfrm>
+            <a:off x="5643584" y="3358498"/>
+            <a:ext cx="1548384" cy="313944"/>
+          </a:xfrm>
+          <a:prstGeom prst="rect">
+            <a:avLst/>
+          </a:prstGeom>
+        </p:spPr>
+      </p:pic>
+      <p:sp>
+        <p:nvSpPr>
+          <p:cNvPr id="12" name="TextBox 11"/>
+          <p:cNvSpPr txBox="1"/>
+          <p:nvPr/>
+        </p:nvSpPr>
+        <p:spPr>
+          <a:xfrm>
+            <a:off x="7191968" y="3286870"/>
+            <a:ext cx="1320048" cy="457200"/>
+          </a:xfrm>
+          <a:prstGeom prst="rect">
+            <a:avLst/>
+          </a:prstGeom>
+          <a:noFill/>
+        </p:spPr>
+        <p:txBody>
+          <a:bodyPr wrap="none" lIns="45720" rIns="45720" tIns="18288" bIns="18288" anchor="ctr">
+            <a:noAutofit/>
+          </a:bodyPr>
+          <a:lstStyle/>
+          <a:p>
+            <a:pPr algn="l"/>
+            <a:r>
+              <a:rPr sz="2330" b="0" i="0">
+                <a:solidFill>
+                  <a:srgbClr val="1A1A1A"/>
+                </a:solidFill>
+                <a:latin typeface="Lexend"/>
+              </a:rPr>
+              <a:t>   and   </a:t>
+            </a:r>
+          </a:p>
+        </p:txBody>
+      </p:sp>
+      <p:pic>
+        <p:nvPicPr>
+          <p:cNvPr id="13" name="Picture 12" descr="954e49d4ca9d8573.png"/>
+          <p:cNvPicPr>
+            <a:picLocks noChangeAspect="1"/>
+          </p:cNvPicPr>
+          <p:nvPr/>
+        </p:nvPicPr>
+        <p:blipFill>
+          <a:blip r:embed="rId4"/>
+          <a:stretch>
+            <a:fillRect/>
+          </a:stretch>
+        </p:blipFill>
+        <p:spPr>
+          <a:xfrm>
+            <a:off x="8374857" y="3331066"/>
+            <a:ext cx="1091184" cy="368808"/>
+          </a:xfrm>
+          <a:prstGeom prst="rect">
+            <a:avLst/>
+          </a:prstGeom>
+        </p:spPr>
+      </p:pic>
+      <p:sp>
+        <p:nvSpPr>
+          <p:cNvPr id="14" name="TextBox 13"/>
+          <p:cNvSpPr txBox="1"/>
+          <p:nvPr/>
+        </p:nvSpPr>
+        <p:spPr>
+          <a:xfrm>
+            <a:off x="2695478" y="3789790"/>
+            <a:ext cx="3938126" cy="457200"/>
+          </a:xfrm>
+          <a:prstGeom prst="rect">
+            <a:avLst/>
+          </a:prstGeom>
+          <a:noFill/>
+        </p:spPr>
+        <p:txBody>
+          <a:bodyPr wrap="none" lIns="45720" rIns="45720" tIns="18288" bIns="18288" anchor="ctr">
+            <a:noAutofit/>
+          </a:bodyPr>
+          <a:lstStyle/>
+          <a:p>
+            <a:pPr algn="l"/>
+            <a:r>
+              <a:rPr sz="2330" b="0" i="0">
+                <a:solidFill>
+                  <a:srgbClr val="1A1A1A"/>
+                </a:solidFill>
+                <a:latin typeface="Lexend"/>
+              </a:rPr>
+              <a:t>Inside the parentheses:  </a:t>
+            </a:r>
+          </a:p>
+        </p:txBody>
+      </p:sp>
+      <p:pic>
+        <p:nvPicPr>
+          <p:cNvPr id="15" name="Picture 14" descr="e7c4e03b1a074318.png"/>
+          <p:cNvPicPr>
+            <a:picLocks noChangeAspect="1"/>
+          </p:cNvPicPr>
+          <p:nvPr/>
+        </p:nvPicPr>
+        <p:blipFill>
+          <a:blip r:embed="rId5"/>
+          <a:stretch>
+            <a:fillRect/>
+          </a:stretch>
+        </p:blipFill>
+        <p:spPr>
+          <a:xfrm>
+            <a:off x="6496444" y="3911710"/>
+            <a:ext cx="2109216" cy="213360"/>
+          </a:xfrm>
+          <a:prstGeom prst="rect">
+            <a:avLst/>
+          </a:prstGeom>
+        </p:spPr>
+      </p:pic>
+      <p:pic>
+        <p:nvPicPr>
+          <p:cNvPr id="16" name="Picture 15" descr="9835c37dc0133d28.png"/>
+          <p:cNvPicPr>
+            <a:picLocks noChangeAspect="1"/>
+          </p:cNvPicPr>
+          <p:nvPr/>
+        </p:nvPicPr>
+        <p:blipFill>
+          <a:blip r:embed="rId6"/>
+          <a:stretch>
+            <a:fillRect/>
+          </a:stretch>
+        </p:blipFill>
+        <p:spPr>
+          <a:xfrm>
+            <a:off x="2750342" y="4414630"/>
+            <a:ext cx="3514344" cy="213360"/>
+          </a:xfrm>
+          <a:prstGeom prst="rect">
+            <a:avLst/>
+          </a:prstGeom>
+        </p:spPr>
+      </p:pic>
+      <p:sp>
+        <p:nvSpPr>
+          <p:cNvPr id="17" name="TextBox 16"/>
+          <p:cNvSpPr txBox="1"/>
+          <p:nvPr/>
+        </p:nvSpPr>
+        <p:spPr>
+          <a:xfrm>
+            <a:off x="777240" y="4864210"/>
             <a:ext cx="10607040" cy="548640"/>
           </a:xfrm>
           <a:prstGeom prst="rect">
@@ -3747,11 +3948,11 @@
           <a:p>
             <a:pPr algn="ctr"/>
             <a:r>
-              <a:rPr sz="3200" b="1" i="0">
+              <a:rPr sz="3040" b="1" i="0">
                 <a:solidFill>
                   <a:srgbClr val="9E1B32"/>
                 </a:solidFill>
-                <a:latin typeface="Century Schoolbook"/>
+                <a:latin typeface="Lexend"/>
               </a:rPr>
               <a:t>Answer:   9.97</a:t>
             </a:r>
@@ -3800,11 +4001,11 @@
           <a:p>
             <a:pPr algn="l"/>
             <a:r>
-              <a:rPr sz="3600" b="1" i="0">
+              <a:rPr sz="3420" b="1" i="0">
                 <a:solidFill>
                   <a:srgbClr val="1A1A1A"/>
                 </a:solidFill>
-                <a:latin typeface="Century Schoolbook"/>
+                <a:latin typeface="Lexend"/>
               </a:rPr>
               <a:t>Example 2</a:t>
             </a:r>
@@ -3940,11 +4141,11 @@
           <a:p>
             <a:pPr algn="l"/>
             <a:r>
-              <a:rPr sz="1100" b="0" i="1">
+              <a:rPr sz="1040" b="0" i="0">
                 <a:solidFill>
                   <a:srgbClr val="6B6B6B"/>
                 </a:solidFill>
-                <a:latin typeface="Century Schoolbook"/>
+                <a:latin typeface="Lexend"/>
               </a:rPr>
               <a:t>Grade 7 Accelerated · Unit 4 · Lesson 6 — Order of Operations with Radicals</a:t>
             </a:r>
@@ -3975,11 +4176,11 @@
           <a:p>
             <a:pPr algn="r"/>
             <a:r>
-              <a:rPr sz="1100" b="0" i="0">
+              <a:rPr sz="1040" b="0" i="0">
                 <a:solidFill>
                   <a:srgbClr val="6B6B6B"/>
                 </a:solidFill>
-                <a:latin typeface="Century Schoolbook"/>
+                <a:latin typeface="Lexend"/>
               </a:rPr>
               <a:t>11</a:t>
             </a:r>
@@ -3988,7 +4189,7 @@
       </p:sp>
       <p:pic>
         <p:nvPicPr>
-          <p:cNvPr id="8" name="Picture 7" descr="9657b87afa13d574.png"/>
+          <p:cNvPr id="8" name="Picture 7" descr="b808d9623aef050a.png"/>
           <p:cNvPicPr>
             <a:picLocks noChangeAspect="1"/>
           </p:cNvPicPr>
@@ -4002,8 +4203,8 @@
         </p:blipFill>
         <p:spPr>
           <a:xfrm>
-            <a:off x="4681727" y="2103120"/>
-            <a:ext cx="2798064" cy="871728"/>
+            <a:off x="4713731" y="2103120"/>
+            <a:ext cx="2734056" cy="847344"/>
           </a:xfrm>
           <a:prstGeom prst="rect">
             <a:avLst/>
@@ -4018,7 +4219,7 @@
         </p:nvSpPr>
         <p:spPr>
           <a:xfrm>
-            <a:off x="777240" y="3477768"/>
+            <a:off x="777240" y="3453384"/>
             <a:ext cx="10607040" cy="429370"/>
           </a:xfrm>
           <a:prstGeom prst="rect">
@@ -4034,11 +4235,11 @@
           <a:p>
             <a:pPr algn="ctr"/>
             <a:r>
-              <a:rPr sz="2400" b="1" i="0">
+              <a:rPr sz="2280" b="1" i="0">
                 <a:solidFill>
                   <a:srgbClr val="1A1A1A"/>
                 </a:solidFill>
-                <a:latin typeface="Century Schoolbook"/>
+                <a:latin typeface="Lexend"/>
               </a:rPr>
               <a:t>Evaluate.</a:t>
             </a:r>
@@ -4087,11 +4288,11 @@
           <a:p>
             <a:pPr algn="l"/>
             <a:r>
-              <a:rPr sz="3600" b="1" i="0">
+              <a:rPr sz="3420" b="1" i="0">
                 <a:solidFill>
                   <a:srgbClr val="1A1A1A"/>
                 </a:solidFill>
-                <a:latin typeface="Century Schoolbook"/>
+                <a:latin typeface="Lexend"/>
               </a:rPr>
               <a:t>Example 2</a:t>
             </a:r>
@@ -4227,11 +4428,11 @@
           <a:p>
             <a:pPr algn="l"/>
             <a:r>
-              <a:rPr sz="1100" b="0" i="1">
+              <a:rPr sz="1040" b="0" i="0">
                 <a:solidFill>
                   <a:srgbClr val="6B6B6B"/>
                 </a:solidFill>
-                <a:latin typeface="Century Schoolbook"/>
+                <a:latin typeface="Lexend"/>
               </a:rPr>
               <a:t>Grade 7 Accelerated · Unit 4 · Lesson 6 — Order of Operations with Radicals</a:t>
             </a:r>
@@ -4262,11 +4463,11 @@
           <a:p>
             <a:pPr algn="r"/>
             <a:r>
-              <a:rPr sz="1100" b="0" i="0">
+              <a:rPr sz="1040" b="0" i="0">
                 <a:solidFill>
                   <a:srgbClr val="6B6B6B"/>
                 </a:solidFill>
-                <a:latin typeface="Century Schoolbook"/>
+                <a:latin typeface="Lexend"/>
               </a:rPr>
               <a:t>12</a:t>
             </a:r>
@@ -4275,7 +4476,7 @@
       </p:sp>
       <p:pic>
         <p:nvPicPr>
-          <p:cNvPr id="8" name="Picture 7" descr="184a5d14892d37dc.png"/>
+          <p:cNvPr id="8" name="Picture 7" descr="9aec3c395596e363.png"/>
           <p:cNvPicPr>
             <a:picLocks noChangeAspect="1"/>
           </p:cNvPicPr>
@@ -4290,7 +4491,7 @@
         <p:spPr>
           <a:xfrm>
             <a:off x="1828800" y="1920240"/>
-            <a:ext cx="2676144" cy="810768"/>
+            <a:ext cx="2593848" cy="792480"/>
           </a:xfrm>
           <a:prstGeom prst="rect">
             <a:avLst/>
@@ -4299,7 +4500,7 @@
       </p:pic>
       <p:pic>
         <p:nvPicPr>
-          <p:cNvPr id="9" name="Picture 8" descr="d857c92eedcaecc7.png"/>
+          <p:cNvPr id="9" name="Picture 8" descr="fd77386a9e66a339.png"/>
           <p:cNvPicPr>
             <a:picLocks noChangeAspect="1"/>
           </p:cNvPicPr>
@@ -4313,8 +4514,8 @@
         </p:blipFill>
         <p:spPr>
           <a:xfrm>
-            <a:off x="1828800" y="3005328"/>
-            <a:ext cx="3627120" cy="813816"/>
+            <a:off x="1828800" y="2987040"/>
+            <a:ext cx="3694176" cy="789432"/>
           </a:xfrm>
           <a:prstGeom prst="rect">
             <a:avLst/>
@@ -4323,7 +4524,7 @@
       </p:pic>
       <p:pic>
         <p:nvPicPr>
-          <p:cNvPr id="10" name="Picture 9" descr="72e6766a18ceae4c.png"/>
+          <p:cNvPr id="10" name="Picture 9" descr="69a6d692b4cc56e3.png"/>
           <p:cNvPicPr>
             <a:picLocks noChangeAspect="1"/>
           </p:cNvPicPr>
@@ -4337,8 +4538,8 @@
         </p:blipFill>
         <p:spPr>
           <a:xfrm>
-            <a:off x="1828800" y="4093464"/>
-            <a:ext cx="1984248" cy="679704"/>
+            <a:off x="1828800" y="4050791"/>
+            <a:ext cx="1895856" cy="670560"/>
           </a:xfrm>
           <a:prstGeom prst="rect">
             <a:avLst/>
@@ -4353,7 +4554,7 @@
         </p:nvSpPr>
         <p:spPr>
           <a:xfrm>
-            <a:off x="777240" y="5230368"/>
+            <a:off x="777240" y="5178552"/>
             <a:ext cx="10607040" cy="548640"/>
           </a:xfrm>
           <a:prstGeom prst="rect">
@@ -4369,11 +4570,11 @@
           <a:p>
             <a:pPr algn="ctr"/>
             <a:r>
-              <a:rPr sz="3200" b="1" i="0">
+              <a:rPr sz="3040" b="1" i="0">
                 <a:solidFill>
                   <a:srgbClr val="9E1B32"/>
                 </a:solidFill>
-                <a:latin typeface="Century Schoolbook"/>
+                <a:latin typeface="Lexend"/>
               </a:rPr>
               <a:t>Answer:   −1/4</a:t>
             </a:r>
@@ -4422,11 +4623,11 @@
           <a:p>
             <a:pPr algn="l"/>
             <a:r>
-              <a:rPr sz="3600" b="1" i="0">
+              <a:rPr sz="3420" b="1" i="0">
                 <a:solidFill>
                   <a:srgbClr val="1A1A1A"/>
                 </a:solidFill>
-                <a:latin typeface="Century Schoolbook"/>
+                <a:latin typeface="Lexend"/>
               </a:rPr>
               <a:t>Your Turn</a:t>
             </a:r>
@@ -4562,11 +4763,11 @@
           <a:p>
             <a:pPr algn="l"/>
             <a:r>
-              <a:rPr sz="1100" b="0" i="1">
+              <a:rPr sz="1040" b="0" i="0">
                 <a:solidFill>
                   <a:srgbClr val="6B6B6B"/>
                 </a:solidFill>
-                <a:latin typeface="Century Schoolbook"/>
+                <a:latin typeface="Lexend"/>
               </a:rPr>
               <a:t>Grade 7 Accelerated · Unit 4 · Lesson 6 — Order of Operations with Radicals</a:t>
             </a:r>
@@ -4597,11 +4798,11 @@
           <a:p>
             <a:pPr algn="r"/>
             <a:r>
-              <a:rPr sz="1100" b="0" i="0">
+              <a:rPr sz="1040" b="0" i="0">
                 <a:solidFill>
                   <a:srgbClr val="6B6B6B"/>
                 </a:solidFill>
-                <a:latin typeface="Century Schoolbook"/>
+                <a:latin typeface="Lexend"/>
               </a:rPr>
               <a:t>13</a:t>
             </a:r>
@@ -4610,7 +4811,7 @@
       </p:sp>
       <p:pic>
         <p:nvPicPr>
-          <p:cNvPr id="8" name="Picture 7" descr="c8e5417f2d59a8e1.png"/>
+          <p:cNvPr id="8" name="Picture 7" descr="a0165d764fa8474e.png"/>
           <p:cNvPicPr>
             <a:picLocks noChangeAspect="1"/>
           </p:cNvPicPr>
@@ -4624,8 +4825,8 @@
         </p:blipFill>
         <p:spPr>
           <a:xfrm>
-            <a:off x="4079747" y="2194560"/>
-            <a:ext cx="4002024" cy="1085088"/>
+            <a:off x="4539996" y="1481328"/>
+            <a:ext cx="3081528" cy="847344"/>
           </a:xfrm>
           <a:prstGeom prst="rect">
             <a:avLst/>
@@ -4640,7 +4841,7 @@
         </p:nvSpPr>
         <p:spPr>
           <a:xfrm>
-            <a:off x="777240" y="3782568"/>
+            <a:off x="777240" y="2831592"/>
             <a:ext cx="10607040" cy="429370"/>
           </a:xfrm>
           <a:prstGeom prst="rect">
@@ -4656,11 +4857,11 @@
           <a:p>
             <a:pPr algn="ctr"/>
             <a:r>
-              <a:rPr sz="2400" b="1" i="0">
+              <a:rPr sz="2280" b="1" i="0">
                 <a:solidFill>
                   <a:srgbClr val="1A1A1A"/>
                 </a:solidFill>
-                <a:latin typeface="Century Schoolbook"/>
+                <a:latin typeface="Lexend"/>
               </a:rPr>
               <a:t>Evaluate.</a:t>
             </a:r>
@@ -4709,11 +4910,11 @@
           <a:p>
             <a:pPr algn="l"/>
             <a:r>
-              <a:rPr sz="3600" b="1" i="0">
+              <a:rPr sz="3420" b="1" i="0">
                 <a:solidFill>
                   <a:srgbClr val="1A1A1A"/>
                 </a:solidFill>
-                <a:latin typeface="Century Schoolbook"/>
+                <a:latin typeface="Lexend"/>
               </a:rPr>
               <a:t>Your Turn</a:t>
             </a:r>
@@ -4849,11 +5050,11 @@
           <a:p>
             <a:pPr algn="l"/>
             <a:r>
-              <a:rPr sz="1100" b="0" i="1">
+              <a:rPr sz="1040" b="0" i="0">
                 <a:solidFill>
                   <a:srgbClr val="6B6B6B"/>
                 </a:solidFill>
-                <a:latin typeface="Century Schoolbook"/>
+                <a:latin typeface="Lexend"/>
               </a:rPr>
               <a:t>Grade 7 Accelerated · Unit 4 · Lesson 6 — Order of Operations with Radicals</a:t>
             </a:r>
@@ -4884,11 +5085,11 @@
           <a:p>
             <a:pPr algn="r"/>
             <a:r>
-              <a:rPr sz="1100" b="0" i="0">
+              <a:rPr sz="1040" b="0" i="0">
                 <a:solidFill>
                   <a:srgbClr val="6B6B6B"/>
                 </a:solidFill>
-                <a:latin typeface="Century Schoolbook"/>
+                <a:latin typeface="Lexend"/>
               </a:rPr>
               <a:t>14</a:t>
             </a:r>
@@ -4897,7 +5098,7 @@
       </p:sp>
       <p:pic>
         <p:nvPicPr>
-          <p:cNvPr id="8" name="Picture 7" descr="7dacaa3a652d2758.png"/>
+          <p:cNvPr id="8" name="Picture 7" descr="93f2d6cae19f4401.png"/>
           <p:cNvPicPr>
             <a:picLocks noChangeAspect="1"/>
           </p:cNvPicPr>
@@ -4911,8 +5112,8 @@
         </p:blipFill>
         <p:spPr>
           <a:xfrm>
-            <a:off x="4081271" y="2194560"/>
-            <a:ext cx="3998975" cy="1088136"/>
+            <a:off x="4541519" y="1481328"/>
+            <a:ext cx="3078480" cy="847344"/>
           </a:xfrm>
           <a:prstGeom prst="rect">
             <a:avLst/>
@@ -4927,7 +5128,7 @@
         </p:nvSpPr>
         <p:spPr>
           <a:xfrm>
-            <a:off x="777240" y="3785615"/>
+            <a:off x="777240" y="2831592"/>
             <a:ext cx="10607040" cy="429370"/>
           </a:xfrm>
           <a:prstGeom prst="rect">
@@ -4943,26 +5144,98 @@
           <a:p>
             <a:pPr algn="ctr"/>
             <a:r>
-              <a:rPr sz="2400" b="1" i="0">
+              <a:rPr sz="2280" b="1" i="0">
                 <a:solidFill>
                   <a:srgbClr val="1A1A1A"/>
                 </a:solidFill>
-                <a:latin typeface="Century Schoolbook"/>
+                <a:latin typeface="Lexend"/>
               </a:rPr>
               <a:t>Evaluate.</a:t>
             </a:r>
           </a:p>
         </p:txBody>
       </p:sp>
-      <p:sp>
-        <p:nvSpPr>
-          <p:cNvPr id="10" name="TextBox 9"/>
-          <p:cNvSpPr txBox="1"/>
-          <p:nvPr/>
-        </p:nvSpPr>
-        <p:spPr>
-          <a:xfrm>
-            <a:off x="777240" y="4572000"/>
+      <p:pic>
+        <p:nvPicPr>
+          <p:cNvPr id="10" name="Picture 9" descr="6565c690921d94d1.png"/>
+          <p:cNvPicPr>
+            <a:picLocks noChangeAspect="1"/>
+          </p:cNvPicPr>
+          <p:nvPr/>
+        </p:nvPicPr>
+        <p:blipFill>
+          <a:blip r:embed="rId3"/>
+          <a:stretch>
+            <a:fillRect/>
+          </a:stretch>
+        </p:blipFill>
+        <p:spPr>
+          <a:xfrm>
+            <a:off x="4527803" y="3443842"/>
+            <a:ext cx="1810512" cy="609600"/>
+          </a:xfrm>
+          <a:prstGeom prst="rect">
+            <a:avLst/>
+          </a:prstGeom>
+        </p:spPr>
+      </p:pic>
+      <p:pic>
+        <p:nvPicPr>
+          <p:cNvPr id="11" name="Picture 10" descr="a2173ad1551df9c2.png"/>
+          <p:cNvPicPr>
+            <a:picLocks noChangeAspect="1"/>
+          </p:cNvPicPr>
+          <p:nvPr/>
+        </p:nvPicPr>
+        <p:blipFill>
+          <a:blip r:embed="rId4"/>
+          <a:stretch>
+            <a:fillRect/>
+          </a:stretch>
+        </p:blipFill>
+        <p:spPr>
+          <a:xfrm>
+            <a:off x="4527803" y="4144882"/>
+            <a:ext cx="3212592" cy="612648"/>
+          </a:xfrm>
+          <a:prstGeom prst="rect">
+            <a:avLst/>
+          </a:prstGeom>
+        </p:spPr>
+      </p:pic>
+      <p:pic>
+        <p:nvPicPr>
+          <p:cNvPr id="12" name="Picture 11" descr="03d6a17384790a95.png"/>
+          <p:cNvPicPr>
+            <a:picLocks noChangeAspect="1"/>
+          </p:cNvPicPr>
+          <p:nvPr/>
+        </p:nvPicPr>
+        <p:blipFill>
+          <a:blip r:embed="rId5"/>
+          <a:stretch>
+            <a:fillRect/>
+          </a:stretch>
+        </p:blipFill>
+        <p:spPr>
+          <a:xfrm>
+            <a:off x="4527803" y="4848970"/>
+            <a:ext cx="1091184" cy="512064"/>
+          </a:xfrm>
+          <a:prstGeom prst="rect">
+            <a:avLst/>
+          </a:prstGeom>
+        </p:spPr>
+      </p:pic>
+      <p:sp>
+        <p:nvSpPr>
+          <p:cNvPr id="13" name="TextBox 12"/>
+          <p:cNvSpPr txBox="1"/>
+          <p:nvPr/>
+        </p:nvSpPr>
+        <p:spPr>
+          <a:xfrm>
+            <a:off x="777240" y="5498194"/>
             <a:ext cx="10607040" cy="548640"/>
           </a:xfrm>
           <a:prstGeom prst="rect">
@@ -4978,11 +5251,11 @@
           <a:p>
             <a:pPr algn="ctr"/>
             <a:r>
-              <a:rPr sz="3200" b="1" i="0">
+              <a:rPr sz="3040" b="1" i="0">
                 <a:solidFill>
                   <a:srgbClr val="9E1B32"/>
                 </a:solidFill>
-                <a:latin typeface="Century Schoolbook"/>
+                <a:latin typeface="Lexend"/>
               </a:rPr>
               <a:t>Answer:   1</a:t>
             </a:r>
@@ -5031,11 +5304,11 @@
           <a:p>
             <a:pPr algn="l"/>
             <a:r>
-              <a:rPr sz="3400" b="1" i="0">
+              <a:rPr sz="3229" b="1" i="0">
                 <a:solidFill>
                   <a:srgbClr val="1A1A1A"/>
                 </a:solidFill>
-                <a:latin typeface="Century Schoolbook"/>
+                <a:latin typeface="Lexend"/>
               </a:rPr>
               <a:t>Whiteboards   ·   Question 1 of 9</a:t>
             </a:r>
@@ -5171,11 +5444,11 @@
           <a:p>
             <a:pPr algn="l"/>
             <a:r>
-              <a:rPr sz="1100" b="0" i="1">
+              <a:rPr sz="1040" b="0" i="0">
                 <a:solidFill>
                   <a:srgbClr val="6B6B6B"/>
                 </a:solidFill>
-                <a:latin typeface="Century Schoolbook"/>
+                <a:latin typeface="Lexend"/>
               </a:rPr>
               <a:t>Grade 7 Accelerated · Unit 4 · Lesson 6 — Order of Operations with Radicals</a:t>
             </a:r>
@@ -5206,11 +5479,11 @@
           <a:p>
             <a:pPr algn="r"/>
             <a:r>
-              <a:rPr sz="1100" b="0" i="0">
+              <a:rPr sz="1040" b="0" i="0">
                 <a:solidFill>
                   <a:srgbClr val="6B6B6B"/>
                 </a:solidFill>
-                <a:latin typeface="Century Schoolbook"/>
+                <a:latin typeface="Lexend"/>
               </a:rPr>
               <a:t>15</a:t>
             </a:r>
@@ -5219,7 +5492,7 @@
       </p:sp>
       <p:pic>
         <p:nvPicPr>
-          <p:cNvPr id="8" name="Picture 7" descr="6f2b5e6da5da13af.png"/>
+          <p:cNvPr id="8" name="Picture 7" descr="8c31237e42b535d9.png"/>
           <p:cNvPicPr>
             <a:picLocks noChangeAspect="1"/>
           </p:cNvPicPr>
@@ -5233,8 +5506,8 @@
         </p:blipFill>
         <p:spPr>
           <a:xfrm>
-            <a:off x="5410199" y="2260092"/>
-            <a:ext cx="1341120" cy="280416"/>
+            <a:off x="5388863" y="2261616"/>
+            <a:ext cx="1383792" cy="277368"/>
           </a:xfrm>
           <a:prstGeom prst="rect">
             <a:avLst/>
@@ -5265,11 +5538,11 @@
           <a:p>
             <a:pPr algn="ctr"/>
             <a:r>
-              <a:rPr sz="2600" b="1" i="0">
+              <a:rPr sz="2470" b="1" i="0">
                 <a:solidFill>
                   <a:srgbClr val="1A1A1A"/>
                 </a:solidFill>
-                <a:latin typeface="Century Schoolbook"/>
+                <a:latin typeface="Lexend"/>
               </a:rPr>
               <a:t>Answer it.</a:t>
             </a:r>
@@ -5318,11 +5591,11 @@
           <a:p>
             <a:pPr algn="l"/>
             <a:r>
-              <a:rPr sz="3400" b="1" i="0">
+              <a:rPr sz="3229" b="1" i="0">
                 <a:solidFill>
                   <a:srgbClr val="1A1A1A"/>
                 </a:solidFill>
-                <a:latin typeface="Century Schoolbook"/>
+                <a:latin typeface="Lexend"/>
               </a:rPr>
               <a:t>Whiteboards   ·   Question 1 of 9</a:t>
             </a:r>
@@ -5458,11 +5731,11 @@
           <a:p>
             <a:pPr algn="l"/>
             <a:r>
-              <a:rPr sz="1100" b="0" i="1">
+              <a:rPr sz="1040" b="0" i="0">
                 <a:solidFill>
                   <a:srgbClr val="6B6B6B"/>
                 </a:solidFill>
-                <a:latin typeface="Century Schoolbook"/>
+                <a:latin typeface="Lexend"/>
               </a:rPr>
               <a:t>Grade 7 Accelerated · Unit 4 · Lesson 6 — Order of Operations with Radicals</a:t>
             </a:r>
@@ -5493,11 +5766,11 @@
           <a:p>
             <a:pPr algn="r"/>
             <a:r>
-              <a:rPr sz="1100" b="0" i="0">
+              <a:rPr sz="1040" b="0" i="0">
                 <a:solidFill>
                   <a:srgbClr val="6B6B6B"/>
                 </a:solidFill>
-                <a:latin typeface="Century Schoolbook"/>
+                <a:latin typeface="Lexend"/>
               </a:rPr>
               <a:t>16</a:t>
             </a:r>
@@ -5506,7 +5779,7 @@
       </p:sp>
       <p:pic>
         <p:nvPicPr>
-          <p:cNvPr id="8" name="Picture 7" descr="2fd862883ce8c3fd.png"/>
+          <p:cNvPr id="8" name="Picture 7" descr="0cd271b4ffb0792f.png"/>
           <p:cNvPicPr>
             <a:picLocks noChangeAspect="1"/>
           </p:cNvPicPr>
@@ -5520,8 +5793,8 @@
         </p:blipFill>
         <p:spPr>
           <a:xfrm>
-            <a:off x="5410199" y="2168652"/>
-            <a:ext cx="1341120" cy="280416"/>
+            <a:off x="5388863" y="2170175"/>
+            <a:ext cx="1383792" cy="277368"/>
           </a:xfrm>
           <a:prstGeom prst="rect">
             <a:avLst/>
@@ -5531,6 +5804,89 @@
       <p:sp>
         <p:nvSpPr>
           <p:cNvPr id="9" name="TextBox 8"/>
+          <p:cNvSpPr txBox="1"/>
+          <p:nvPr/>
+        </p:nvSpPr>
+        <p:spPr>
+          <a:xfrm>
+            <a:off x="4126026" y="2839212"/>
+            <a:ext cx="2656738" cy="457200"/>
+          </a:xfrm>
+          <a:prstGeom prst="rect">
+            <a:avLst/>
+          </a:prstGeom>
+          <a:noFill/>
+        </p:spPr>
+        <p:txBody>
+          <a:bodyPr wrap="none" lIns="45720" rIns="45720" tIns="18288" bIns="18288" anchor="ctr">
+            <a:noAutofit/>
+          </a:bodyPr>
+          <a:lstStyle/>
+          <a:p>
+            <a:pPr algn="l"/>
+            <a:r>
+              <a:rPr sz="2750" b="0" i="0">
+                <a:solidFill>
+                  <a:srgbClr val="1A1A1A"/>
+                </a:solidFill>
+                <a:latin typeface="Lexend"/>
+              </a:rPr>
+              <a:t>Left to right:  </a:t>
+            </a:r>
+          </a:p>
+        </p:txBody>
+      </p:sp>
+      <p:pic>
+        <p:nvPicPr>
+          <p:cNvPr id="10" name="Picture 9" descr="2908f8b113149456.png"/>
+          <p:cNvPicPr>
+            <a:picLocks noChangeAspect="1"/>
+          </p:cNvPicPr>
+          <p:nvPr/>
+        </p:nvPicPr>
+        <p:blipFill>
+          <a:blip r:embed="rId3"/>
+          <a:stretch>
+            <a:fillRect/>
+          </a:stretch>
+        </p:blipFill>
+        <p:spPr>
+          <a:xfrm>
+            <a:off x="6645605" y="2941320"/>
+            <a:ext cx="1389888" cy="252984"/>
+          </a:xfrm>
+          <a:prstGeom prst="rect">
+            <a:avLst/>
+          </a:prstGeom>
+        </p:spPr>
+      </p:pic>
+      <p:pic>
+        <p:nvPicPr>
+          <p:cNvPr id="11" name="Picture 10" descr="be3a0b78acc2ca7a.png"/>
+          <p:cNvPicPr>
+            <a:picLocks noChangeAspect="1"/>
+          </p:cNvPicPr>
+          <p:nvPr/>
+        </p:nvPicPr>
+        <p:blipFill>
+          <a:blip r:embed="rId4"/>
+          <a:stretch>
+            <a:fillRect/>
+          </a:stretch>
+        </p:blipFill>
+        <p:spPr>
+          <a:xfrm>
+            <a:off x="4180890" y="3482340"/>
+            <a:ext cx="1127760" cy="249935"/>
+          </a:xfrm>
+          <a:prstGeom prst="rect">
+            <a:avLst/>
+          </a:prstGeom>
+        </p:spPr>
+      </p:pic>
+      <p:sp>
+        <p:nvSpPr>
+          <p:cNvPr id="12" name="TextBox 11"/>
           <p:cNvSpPr txBox="1"/>
           <p:nvPr/>
         </p:nvSpPr>
@@ -5552,11 +5908,11 @@
           <a:p>
             <a:pPr algn="ctr"/>
             <a:r>
-              <a:rPr sz="3200" b="1" i="0">
+              <a:rPr sz="3040" b="1" i="0">
                 <a:solidFill>
                   <a:srgbClr val="9E1B32"/>
                 </a:solidFill>
-                <a:latin typeface="Century Schoolbook"/>
+                <a:latin typeface="Lexend"/>
               </a:rPr>
               <a:t>Answer:   8</a:t>
             </a:r>
@@ -5605,11 +5961,11 @@
           <a:p>
             <a:pPr algn="l"/>
             <a:r>
-              <a:rPr sz="3400" b="1" i="0">
+              <a:rPr sz="3229" b="1" i="0">
                 <a:solidFill>
                   <a:srgbClr val="1A1A1A"/>
                 </a:solidFill>
-                <a:latin typeface="Century Schoolbook"/>
+                <a:latin typeface="Lexend"/>
               </a:rPr>
               <a:t>Whiteboards   ·   Question 2 of 9</a:t>
             </a:r>
@@ -5745,11 +6101,11 @@
           <a:p>
             <a:pPr algn="l"/>
             <a:r>
-              <a:rPr sz="1100" b="0" i="1">
+              <a:rPr sz="1040" b="0" i="0">
                 <a:solidFill>
                   <a:srgbClr val="6B6B6B"/>
                 </a:solidFill>
-                <a:latin typeface="Century Schoolbook"/>
+                <a:latin typeface="Lexend"/>
               </a:rPr>
               <a:t>Grade 7 Accelerated · Unit 4 · Lesson 6 — Order of Operations with Radicals</a:t>
             </a:r>
@@ -5780,11 +6136,11 @@
           <a:p>
             <a:pPr algn="r"/>
             <a:r>
-              <a:rPr sz="1100" b="0" i="0">
+              <a:rPr sz="1040" b="0" i="0">
                 <a:solidFill>
                   <a:srgbClr val="6B6B6B"/>
                 </a:solidFill>
-                <a:latin typeface="Century Schoolbook"/>
+                <a:latin typeface="Lexend"/>
               </a:rPr>
               <a:t>17</a:t>
             </a:r>
@@ -5800,7 +6156,7 @@
         <p:spPr>
           <a:xfrm>
             <a:off x="1234440" y="1851660"/>
-            <a:ext cx="3606311" cy="457200"/>
+            <a:ext cx="3545617" cy="457200"/>
           </a:xfrm>
           <a:prstGeom prst="rect">
             <a:avLst/>
@@ -5815,11 +6171,11 @@
           <a:p>
             <a:pPr algn="l"/>
             <a:r>
-              <a:rPr sz="2400" b="0" i="0">
+              <a:rPr sz="2280" b="0" i="0">
                 <a:solidFill>
                   <a:srgbClr val="1A1A1A"/>
                 </a:solidFill>
-                <a:latin typeface="Century Schoolbook"/>
+                <a:latin typeface="Lexend"/>
               </a:rPr>
               <a:t>A square tile has side  </a:t>
             </a:r>
@@ -5828,7 +6184,7 @@
       </p:sp>
       <p:pic>
         <p:nvPicPr>
-          <p:cNvPr id="9" name="Picture 8" descr="9fe57fc54286b299.png"/>
+          <p:cNvPr id="9" name="Picture 8" descr="97c530a75d29d302.png"/>
           <p:cNvPicPr>
             <a:picLocks noChangeAspect="1"/>
           </p:cNvPicPr>
@@ -5842,8 +6198,8 @@
         </p:blipFill>
         <p:spPr>
           <a:xfrm>
-            <a:off x="4703591" y="1876043"/>
-            <a:ext cx="853440" cy="408432"/>
+            <a:off x="4642897" y="1885187"/>
+            <a:ext cx="844296" cy="390144"/>
           </a:xfrm>
           <a:prstGeom prst="rect">
             <a:avLst/>
@@ -5858,8 +6214,8 @@
         </p:nvSpPr>
         <p:spPr>
           <a:xfrm>
-            <a:off x="5557031" y="1851660"/>
-            <a:ext cx="2233818" cy="457200"/>
+            <a:off x="5487193" y="1851660"/>
+            <a:ext cx="2211425" cy="457200"/>
           </a:xfrm>
           <a:prstGeom prst="rect">
             <a:avLst/>
@@ -5874,11 +6230,11 @@
           <a:p>
             <a:pPr algn="l"/>
             <a:r>
-              <a:rPr sz="2400" b="0" i="0">
+              <a:rPr sz="2280" b="0" i="0">
                 <a:solidFill>
                   <a:srgbClr val="1A1A1A"/>
                 </a:solidFill>
-                <a:latin typeface="Century Schoolbook"/>
+                <a:latin typeface="Lexend"/>
               </a:rPr>
               <a:t>  centimeters.</a:t>
             </a:r>
@@ -5909,11 +6265,11 @@
           <a:p>
             <a:pPr algn="l"/>
             <a:r>
-              <a:rPr sz="2400" b="0" i="0">
+              <a:rPr sz="2280" b="0" i="0">
                 <a:solidFill>
                   <a:srgbClr val="1A1A1A"/>
                 </a:solidFill>
-                <a:latin typeface="Century Schoolbook"/>
+                <a:latin typeface="Lexend"/>
               </a:rPr>
               <a:t>Its diagonal is about 19.8 centimeters.</a:t>
             </a:r>
@@ -5944,11 +6300,11 @@
           <a:p>
             <a:pPr algn="l"/>
             <a:r>
-              <a:rPr sz="2400" b="1" i="0">
+              <a:rPr sz="2280" b="1" i="0">
                 <a:solidFill>
                   <a:srgbClr val="1A1A1A"/>
                 </a:solidFill>
-                <a:latin typeface="Century Schoolbook"/>
+                <a:latin typeface="Lexend"/>
               </a:rPr>
               <a:t>What is the perimeter of the tile?</a:t>
             </a:r>
@@ -5979,11 +6335,11 @@
           <a:p>
             <a:pPr algn="ctr"/>
             <a:r>
-              <a:rPr sz="2600" b="1" i="0">
+              <a:rPr sz="2470" b="1" i="0">
                 <a:solidFill>
                   <a:srgbClr val="1A1A1A"/>
                 </a:solidFill>
-                <a:latin typeface="Century Schoolbook"/>
+                <a:latin typeface="Lexend"/>
               </a:rPr>
               <a:t>Answer it.</a:t>
             </a:r>
@@ -6032,11 +6388,11 @@
           <a:p>
             <a:pPr algn="l"/>
             <a:r>
-              <a:rPr sz="3400" b="1" i="0">
+              <a:rPr sz="3229" b="1" i="0">
                 <a:solidFill>
                   <a:srgbClr val="1A1A1A"/>
                 </a:solidFill>
-                <a:latin typeface="Century Schoolbook"/>
+                <a:latin typeface="Lexend"/>
               </a:rPr>
               <a:t>Whiteboards   ·   Question 2 of 9</a:t>
             </a:r>
@@ -6172,11 +6528,11 @@
           <a:p>
             <a:pPr algn="l"/>
             <a:r>
-              <a:rPr sz="1100" b="0" i="1">
+              <a:rPr sz="1040" b="0" i="0">
                 <a:solidFill>
                   <a:srgbClr val="6B6B6B"/>
                 </a:solidFill>
-                <a:latin typeface="Century Schoolbook"/>
+                <a:latin typeface="Lexend"/>
               </a:rPr>
               <a:t>Grade 7 Accelerated · Unit 4 · Lesson 6 — Order of Operations with Radicals</a:t>
             </a:r>
@@ -6207,11 +6563,11 @@
           <a:p>
             <a:pPr algn="r"/>
             <a:r>
-              <a:rPr sz="1100" b="0" i="0">
+              <a:rPr sz="1040" b="0" i="0">
                 <a:solidFill>
                   <a:srgbClr val="6B6B6B"/>
                 </a:solidFill>
-                <a:latin typeface="Century Schoolbook"/>
+                <a:latin typeface="Lexend"/>
               </a:rPr>
               <a:t>18</a:t>
             </a:r>
@@ -6227,7 +6583,7 @@
         <p:spPr>
           <a:xfrm>
             <a:off x="1234440" y="1851660"/>
-            <a:ext cx="3606311" cy="457200"/>
+            <a:ext cx="3545617" cy="457200"/>
           </a:xfrm>
           <a:prstGeom prst="rect">
             <a:avLst/>
@@ -6242,11 +6598,11 @@
           <a:p>
             <a:pPr algn="l"/>
             <a:r>
-              <a:rPr sz="2400" b="0" i="0">
+              <a:rPr sz="2280" b="0" i="0">
                 <a:solidFill>
                   <a:srgbClr val="1A1A1A"/>
                 </a:solidFill>
-                <a:latin typeface="Century Schoolbook"/>
+                <a:latin typeface="Lexend"/>
               </a:rPr>
               <a:t>A square tile has side  </a:t>
             </a:r>
@@ -6255,7 +6611,7 @@
       </p:sp>
       <p:pic>
         <p:nvPicPr>
-          <p:cNvPr id="9" name="Picture 8" descr="538eaa100b231b86.png"/>
+          <p:cNvPr id="9" name="Picture 8" descr="8dd3731dd90336b5.png"/>
           <p:cNvPicPr>
             <a:picLocks noChangeAspect="1"/>
           </p:cNvPicPr>
@@ -6269,8 +6625,8 @@
         </p:blipFill>
         <p:spPr>
           <a:xfrm>
-            <a:off x="4703591" y="1876043"/>
-            <a:ext cx="847344" cy="408432"/>
+            <a:off x="4642897" y="1885187"/>
+            <a:ext cx="838200" cy="390144"/>
           </a:xfrm>
           <a:prstGeom prst="rect">
             <a:avLst/>
@@ -6285,8 +6641,8 @@
         </p:nvSpPr>
         <p:spPr>
           <a:xfrm>
-            <a:off x="5550935" y="1851660"/>
-            <a:ext cx="2233818" cy="457200"/>
+            <a:off x="5481097" y="1851660"/>
+            <a:ext cx="2211425" cy="457200"/>
           </a:xfrm>
           <a:prstGeom prst="rect">
             <a:avLst/>
@@ -6301,11 +6657,11 @@
           <a:p>
             <a:pPr algn="l"/>
             <a:r>
-              <a:rPr sz="2400" b="0" i="0">
+              <a:rPr sz="2280" b="0" i="0">
                 <a:solidFill>
                   <a:srgbClr val="1A1A1A"/>
                 </a:solidFill>
-                <a:latin typeface="Century Schoolbook"/>
+                <a:latin typeface="Lexend"/>
               </a:rPr>
               <a:t>  centimeters.</a:t>
             </a:r>
@@ -6336,11 +6692,11 @@
           <a:p>
             <a:pPr algn="l"/>
             <a:r>
-              <a:rPr sz="2400" b="0" i="0">
+              <a:rPr sz="2280" b="0" i="0">
                 <a:solidFill>
                   <a:srgbClr val="1A1A1A"/>
                 </a:solidFill>
-                <a:latin typeface="Century Schoolbook"/>
+                <a:latin typeface="Lexend"/>
               </a:rPr>
               <a:t>Its diagonal is about 19.8 centimeters.</a:t>
             </a:r>
@@ -6371,26 +6727,109 @@
           <a:p>
             <a:pPr algn="l"/>
             <a:r>
-              <a:rPr sz="2400" b="1" i="0">
+              <a:rPr sz="2280" b="1" i="0">
                 <a:solidFill>
                   <a:srgbClr val="1A1A1A"/>
                 </a:solidFill>
-                <a:latin typeface="Century Schoolbook"/>
+                <a:latin typeface="Lexend"/>
               </a:rPr>
               <a:t>What is the perimeter of the tile?</a:t>
             </a:r>
           </a:p>
         </p:txBody>
       </p:sp>
-      <p:sp>
-        <p:nvSpPr>
-          <p:cNvPr id="13" name="TextBox 12"/>
-          <p:cNvSpPr txBox="1"/>
-          <p:nvPr/>
-        </p:nvSpPr>
-        <p:spPr>
-          <a:xfrm>
-            <a:off x="777240" y="4663440"/>
+      <p:pic>
+        <p:nvPicPr>
+          <p:cNvPr id="13" name="Picture 12" descr="fe182c84c4bdb5f5.png"/>
+          <p:cNvPicPr>
+            <a:picLocks noChangeAspect="1"/>
+          </p:cNvPicPr>
+          <p:nvPr/>
+        </p:nvPicPr>
+        <p:blipFill>
+          <a:blip r:embed="rId3"/>
+          <a:stretch>
+            <a:fillRect/>
+          </a:stretch>
+        </p:blipFill>
+        <p:spPr>
+          <a:xfrm>
+            <a:off x="4267467" y="3684236"/>
+            <a:ext cx="1642872" cy="432816"/>
+          </a:xfrm>
+          <a:prstGeom prst="rect">
+            <a:avLst/>
+          </a:prstGeom>
+        </p:spPr>
+      </p:pic>
+      <p:sp>
+        <p:nvSpPr>
+          <p:cNvPr id="14" name="TextBox 13"/>
+          <p:cNvSpPr txBox="1"/>
+          <p:nvPr/>
+        </p:nvSpPr>
+        <p:spPr>
+          <a:xfrm>
+            <a:off x="4212603" y="4222208"/>
+            <a:ext cx="2270224" cy="457200"/>
+          </a:xfrm>
+          <a:prstGeom prst="rect">
+            <a:avLst/>
+          </a:prstGeom>
+          <a:noFill/>
+        </p:spPr>
+        <p:txBody>
+          <a:bodyPr wrap="none" lIns="45720" rIns="45720" tIns="18288" bIns="18288" anchor="ctr">
+            <a:noAutofit/>
+          </a:bodyPr>
+          <a:lstStyle/>
+          <a:p>
+            <a:pPr algn="l"/>
+            <a:r>
+              <a:rPr sz="2750" b="0" i="0">
+                <a:solidFill>
+                  <a:srgbClr val="1A1A1A"/>
+                </a:solidFill>
+                <a:latin typeface="Lexend"/>
+              </a:rPr>
+              <a:t>Perimeter:  </a:t>
+            </a:r>
+          </a:p>
+        </p:txBody>
+      </p:sp>
+      <p:pic>
+        <p:nvPicPr>
+          <p:cNvPr id="15" name="Picture 14" descr="b92290561e20c8b3.png"/>
+          <p:cNvPicPr>
+            <a:picLocks noChangeAspect="1"/>
+          </p:cNvPicPr>
+          <p:nvPr/>
+        </p:nvPicPr>
+        <p:blipFill>
+          <a:blip r:embed="rId4"/>
+          <a:stretch>
+            <a:fillRect/>
+          </a:stretch>
+        </p:blipFill>
+        <p:spPr>
+          <a:xfrm>
+            <a:off x="6345668" y="4322792"/>
+            <a:ext cx="1609344" cy="256032"/>
+          </a:xfrm>
+          <a:prstGeom prst="rect">
+            <a:avLst/>
+          </a:prstGeom>
+        </p:spPr>
+      </p:pic>
+      <p:sp>
+        <p:nvSpPr>
+          <p:cNvPr id="16" name="TextBox 15"/>
+          <p:cNvSpPr txBox="1"/>
+          <p:nvPr/>
+        </p:nvSpPr>
+        <p:spPr>
+          <a:xfrm>
+            <a:off x="777240" y="4793708"/>
             <a:ext cx="10607040" cy="548640"/>
           </a:xfrm>
           <a:prstGeom prst="rect">
@@ -6406,11 +6845,11 @@
           <a:p>
             <a:pPr algn="ctr"/>
             <a:r>
-              <a:rPr sz="3200" b="1" i="0">
+              <a:rPr sz="3040" b="1" i="0">
                 <a:solidFill>
                   <a:srgbClr val="9E1B32"/>
                 </a:solidFill>
-                <a:latin typeface="Century Schoolbook"/>
+                <a:latin typeface="Lexend"/>
               </a:rPr>
               <a:t>Answer:   56 centimeters</a:t>
             </a:r>
@@ -6459,11 +6898,11 @@
           <a:p>
             <a:pPr algn="l"/>
             <a:r>
-              <a:rPr sz="3400" b="1" i="0">
+              <a:rPr sz="3229" b="1" i="0">
                 <a:solidFill>
                   <a:srgbClr val="1A1A1A"/>
                 </a:solidFill>
-                <a:latin typeface="Century Schoolbook"/>
+                <a:latin typeface="Lexend"/>
               </a:rPr>
               <a:t>Whiteboards   ·   Question 3 of 9</a:t>
             </a:r>
@@ -6599,11 +7038,11 @@
           <a:p>
             <a:pPr algn="l"/>
             <a:r>
-              <a:rPr sz="1100" b="0" i="1">
+              <a:rPr sz="1040" b="0" i="0">
                 <a:solidFill>
                   <a:srgbClr val="6B6B6B"/>
                 </a:solidFill>
-                <a:latin typeface="Century Schoolbook"/>
+                <a:latin typeface="Lexend"/>
               </a:rPr>
               <a:t>Grade 7 Accelerated · Unit 4 · Lesson 6 — Order of Operations with Radicals</a:t>
             </a:r>
@@ -6634,11 +7073,11 @@
           <a:p>
             <a:pPr algn="r"/>
             <a:r>
-              <a:rPr sz="1100" b="0" i="0">
+              <a:rPr sz="1040" b="0" i="0">
                 <a:solidFill>
                   <a:srgbClr val="6B6B6B"/>
                 </a:solidFill>
-                <a:latin typeface="Century Schoolbook"/>
+                <a:latin typeface="Lexend"/>
               </a:rPr>
               <a:t>19</a:t>
             </a:r>
@@ -6647,7 +7086,7 @@
       </p:sp>
       <p:pic>
         <p:nvPicPr>
-          <p:cNvPr id="8" name="Picture 7" descr="0bd57d1fcf1bcfbb.png"/>
+          <p:cNvPr id="8" name="Picture 7" descr="599215668496d9fa.png"/>
           <p:cNvPicPr>
             <a:picLocks noChangeAspect="1"/>
           </p:cNvPicPr>
@@ -6661,8 +7100,8 @@
         </p:blipFill>
         <p:spPr>
           <a:xfrm>
-            <a:off x="5314187" y="2253996"/>
-            <a:ext cx="1533144" cy="292608"/>
+            <a:off x="5300471" y="2261616"/>
+            <a:ext cx="1560576" cy="277368"/>
           </a:xfrm>
           <a:prstGeom prst="rect">
             <a:avLst/>
@@ -6693,11 +7132,11 @@
           <a:p>
             <a:pPr algn="ctr"/>
             <a:r>
-              <a:rPr sz="2600" b="1" i="0">
+              <a:rPr sz="2470" b="1" i="0">
                 <a:solidFill>
                   <a:srgbClr val="1A1A1A"/>
                 </a:solidFill>
-                <a:latin typeface="Century Schoolbook"/>
+                <a:latin typeface="Lexend"/>
               </a:rPr>
               <a:t>Answer it.</a:t>
             </a:r>
@@ -6746,11 +7185,11 @@
           <a:p>
             <a:pPr algn="l"/>
             <a:r>
-              <a:rPr sz="3600" b="1" i="0">
+              <a:rPr sz="3420" b="1" i="0">
                 <a:solidFill>
                   <a:srgbClr val="1A1A1A"/>
                 </a:solidFill>
-                <a:latin typeface="Century Schoolbook"/>
+                <a:latin typeface="Lexend"/>
               </a:rPr>
               <a:t>Warm-Up</a:t>
             </a:r>
@@ -6886,11 +7325,11 @@
           <a:p>
             <a:pPr algn="l"/>
             <a:r>
-              <a:rPr sz="1100" b="0" i="1">
+              <a:rPr sz="1040" b="0" i="0">
                 <a:solidFill>
                   <a:srgbClr val="6B6B6B"/>
                 </a:solidFill>
-                <a:latin typeface="Century Schoolbook"/>
+                <a:latin typeface="Lexend"/>
               </a:rPr>
               <a:t>Grade 7 Accelerated · Unit 4 · Lesson 6 — Order of Operations with Radicals</a:t>
             </a:r>
@@ -6921,11 +7360,11 @@
           <a:p>
             <a:pPr algn="r"/>
             <a:r>
-              <a:rPr sz="1100" b="0" i="0">
+              <a:rPr sz="1040" b="0" i="0">
                 <a:solidFill>
                   <a:srgbClr val="6B6B6B"/>
                 </a:solidFill>
-                <a:latin typeface="Century Schoolbook"/>
+                <a:latin typeface="Lexend"/>
               </a:rPr>
               <a:t>2</a:t>
             </a:r>
@@ -6941,7 +7380,7 @@
         <p:spPr>
           <a:xfrm>
             <a:off x="1874519" y="1440180"/>
-            <a:ext cx="720605" cy="457200"/>
+            <a:ext cx="671561" cy="457200"/>
           </a:xfrm>
           <a:prstGeom prst="rect">
             <a:avLst/>
@@ -6956,11 +7395,11 @@
           <a:p>
             <a:pPr algn="l"/>
             <a:r>
-              <a:rPr sz="2300" b="0" i="0">
+              <a:rPr sz="2180" b="0" i="0">
                 <a:solidFill>
                   <a:srgbClr val="1A1A1A"/>
                 </a:solidFill>
-                <a:latin typeface="Century Schoolbook"/>
+                <a:latin typeface="Lexend"/>
               </a:rPr>
               <a:t>1.   </a:t>
             </a:r>
@@ -6969,7 +7408,7 @@
       </p:sp>
       <p:pic>
         <p:nvPicPr>
-          <p:cNvPr id="9" name="Picture 8" descr="535c314b8c201a80.png"/>
+          <p:cNvPr id="9" name="Picture 8" descr="380cdbfed5fb5920.png"/>
           <p:cNvPicPr>
             <a:picLocks noChangeAspect="1"/>
           </p:cNvPicPr>
@@ -6983,8 +7422,8 @@
         </p:blipFill>
         <p:spPr>
           <a:xfrm>
-            <a:off x="2457965" y="1464564"/>
-            <a:ext cx="1143000" cy="408432"/>
+            <a:off x="2408921" y="1473708"/>
+            <a:ext cx="1118616" cy="390144"/>
           </a:xfrm>
           <a:prstGeom prst="rect">
             <a:avLst/>
@@ -7000,7 +7439,7 @@
         <p:spPr>
           <a:xfrm>
             <a:off x="1874519" y="2052828"/>
-            <a:ext cx="6812791" cy="457200"/>
+            <a:ext cx="6690387" cy="457200"/>
           </a:xfrm>
           <a:prstGeom prst="rect">
             <a:avLst/>
@@ -7015,11 +7454,11 @@
           <a:p>
             <a:pPr algn="l"/>
             <a:r>
-              <a:rPr sz="2300" b="0" i="0">
+              <a:rPr sz="2180" b="0" i="0">
                 <a:solidFill>
                   <a:srgbClr val="1A1A1A"/>
                 </a:solidFill>
-                <a:latin typeface="Century Schoolbook"/>
+                <a:latin typeface="Lexend"/>
               </a:rPr>
               <a:t>2.   How many significant digits are in  1.020 ?</a:t>
             </a:r>
@@ -7034,8 +7473,8 @@
         </p:nvSpPr>
         <p:spPr>
           <a:xfrm>
-            <a:off x="1874519" y="2737104"/>
-            <a:ext cx="3064939" cy="457200"/>
+            <a:off x="1874519" y="2731008"/>
+            <a:ext cx="2930351" cy="457200"/>
           </a:xfrm>
           <a:prstGeom prst="rect">
             <a:avLst/>
@@ -7050,11 +7489,11 @@
           <a:p>
             <a:pPr algn="l"/>
             <a:r>
-              <a:rPr sz="2300" b="0" i="0">
+              <a:rPr sz="2180" b="0" i="0">
                 <a:solidFill>
                   <a:srgbClr val="1A1A1A"/>
                 </a:solidFill>
-                <a:latin typeface="Century Schoolbook"/>
+                <a:latin typeface="Lexend"/>
               </a:rPr>
               <a:t>3.   Find the value:  </a:t>
             </a:r>
@@ -7063,7 +7502,7 @@
       </p:sp>
       <p:pic>
         <p:nvPicPr>
-          <p:cNvPr id="12" name="Picture 11" descr="70fd4f7c195b27fd.png"/>
+          <p:cNvPr id="12" name="Picture 11" descr="f3c8135f85cfec4f.png"/>
           <p:cNvPicPr>
             <a:picLocks noChangeAspect="1"/>
           </p:cNvPicPr>
@@ -7077,8 +7516,8 @@
         </p:blipFill>
         <p:spPr>
           <a:xfrm>
-            <a:off x="4802299" y="2688336"/>
-            <a:ext cx="795528" cy="554736"/>
+            <a:off x="4667711" y="2688336"/>
+            <a:ext cx="765048" cy="542544"/>
           </a:xfrm>
           <a:prstGeom prst="rect">
             <a:avLst/>
@@ -7093,8 +7532,8 @@
         </p:nvSpPr>
         <p:spPr>
           <a:xfrm>
-            <a:off x="1874519" y="3421380"/>
-            <a:ext cx="2276518" cy="457200"/>
+            <a:off x="1874519" y="3409188"/>
+            <a:ext cx="2185597" cy="457200"/>
           </a:xfrm>
           <a:prstGeom prst="rect">
             <a:avLst/>
@@ -7109,11 +7548,11 @@
           <a:p>
             <a:pPr algn="l"/>
             <a:r>
-              <a:rPr sz="2300" b="0" i="0">
+              <a:rPr sz="2180" b="0" i="0">
                 <a:solidFill>
                   <a:srgbClr val="1A1A1A"/>
                 </a:solidFill>
-                <a:latin typeface="Century Schoolbook"/>
+                <a:latin typeface="Lexend"/>
               </a:rPr>
               <a:t>4.   Evaluate:  </a:t>
             </a:r>
@@ -7122,7 +7561,7 @@
       </p:sp>
       <p:pic>
         <p:nvPicPr>
-          <p:cNvPr id="14" name="Picture 13" descr="9720c4bedb33ef6c.png"/>
+          <p:cNvPr id="14" name="Picture 13" descr="8de25ca1bc5f4d4f.png"/>
           <p:cNvPicPr>
             <a:picLocks noChangeAspect="1"/>
           </p:cNvPicPr>
@@ -7136,8 +7575,8 @@
         </p:blipFill>
         <p:spPr>
           <a:xfrm>
-            <a:off x="4013878" y="3534156"/>
-            <a:ext cx="1088136" cy="231648"/>
+            <a:off x="3922957" y="3525012"/>
+            <a:ext cx="1127760" cy="225552"/>
           </a:xfrm>
           <a:prstGeom prst="rect">
             <a:avLst/>
@@ -7186,11 +7625,11 @@
           <a:p>
             <a:pPr algn="l"/>
             <a:r>
-              <a:rPr sz="3400" b="1" i="0">
+              <a:rPr sz="3229" b="1" i="0">
                 <a:solidFill>
                   <a:srgbClr val="1A1A1A"/>
                 </a:solidFill>
-                <a:latin typeface="Century Schoolbook"/>
+                <a:latin typeface="Lexend"/>
               </a:rPr>
               <a:t>Whiteboards   ·   Question 3 of 9</a:t>
             </a:r>
@@ -7326,11 +7765,11 @@
           <a:p>
             <a:pPr algn="l"/>
             <a:r>
-              <a:rPr sz="1100" b="0" i="1">
+              <a:rPr sz="1040" b="0" i="0">
                 <a:solidFill>
                   <a:srgbClr val="6B6B6B"/>
                 </a:solidFill>
-                <a:latin typeface="Century Schoolbook"/>
+                <a:latin typeface="Lexend"/>
               </a:rPr>
               <a:t>Grade 7 Accelerated · Unit 4 · Lesson 6 — Order of Operations with Radicals</a:t>
             </a:r>
@@ -7361,11 +7800,11 @@
           <a:p>
             <a:pPr algn="r"/>
             <a:r>
-              <a:rPr sz="1100" b="0" i="0">
+              <a:rPr sz="1040" b="0" i="0">
                 <a:solidFill>
                   <a:srgbClr val="6B6B6B"/>
                 </a:solidFill>
-                <a:latin typeface="Century Schoolbook"/>
+                <a:latin typeface="Lexend"/>
               </a:rPr>
               <a:t>20</a:t>
             </a:r>
@@ -7374,7 +7813,7 @@
       </p:sp>
       <p:pic>
         <p:nvPicPr>
-          <p:cNvPr id="8" name="Picture 7" descr="e06ac948f72f4ec3.png"/>
+          <p:cNvPr id="8" name="Picture 7" descr="599215668496d9fa.png"/>
           <p:cNvPicPr>
             <a:picLocks noChangeAspect="1"/>
           </p:cNvPicPr>
@@ -7388,8 +7827,8 @@
         </p:blipFill>
         <p:spPr>
           <a:xfrm>
-            <a:off x="5314187" y="2164080"/>
-            <a:ext cx="1533144" cy="289560"/>
+            <a:off x="5300471" y="2170175"/>
+            <a:ext cx="1560576" cy="277368"/>
           </a:xfrm>
           <a:prstGeom prst="rect">
             <a:avLst/>
@@ -7399,6 +7838,89 @@
       <p:sp>
         <p:nvSpPr>
           <p:cNvPr id="9" name="TextBox 8"/>
+          <p:cNvSpPr txBox="1"/>
+          <p:nvPr/>
+        </p:nvSpPr>
+        <p:spPr>
+          <a:xfrm>
+            <a:off x="4112310" y="2839212"/>
+            <a:ext cx="2656738" cy="457200"/>
+          </a:xfrm>
+          <a:prstGeom prst="rect">
+            <a:avLst/>
+          </a:prstGeom>
+          <a:noFill/>
+        </p:spPr>
+        <p:txBody>
+          <a:bodyPr wrap="none" lIns="45720" rIns="45720" tIns="18288" bIns="18288" anchor="ctr">
+            <a:noAutofit/>
+          </a:bodyPr>
+          <a:lstStyle/>
+          <a:p>
+            <a:pPr algn="l"/>
+            <a:r>
+              <a:rPr sz="2750" b="0" i="0">
+                <a:solidFill>
+                  <a:srgbClr val="1A1A1A"/>
+                </a:solidFill>
+                <a:latin typeface="Lexend"/>
+              </a:rPr>
+              <a:t>Left to right:  </a:t>
+            </a:r>
+          </a:p>
+        </p:txBody>
+      </p:sp>
+      <p:pic>
+        <p:nvPicPr>
+          <p:cNvPr id="10" name="Picture 9" descr="ed3cc0ad086b1417.png"/>
+          <p:cNvPicPr>
+            <a:picLocks noChangeAspect="1"/>
+          </p:cNvPicPr>
+          <p:nvPr/>
+        </p:nvPicPr>
+        <p:blipFill>
+          <a:blip r:embed="rId3"/>
+          <a:stretch>
+            <a:fillRect/>
+          </a:stretch>
+        </p:blipFill>
+        <p:spPr>
+          <a:xfrm>
+            <a:off x="6631889" y="2939796"/>
+            <a:ext cx="1417320" cy="256032"/>
+          </a:xfrm>
+          <a:prstGeom prst="rect">
+            <a:avLst/>
+          </a:prstGeom>
+        </p:spPr>
+      </p:pic>
+      <p:pic>
+        <p:nvPicPr>
+          <p:cNvPr id="11" name="Picture 10" descr="2f02af02afef75ab.png"/>
+          <p:cNvPicPr>
+            <a:picLocks noChangeAspect="1"/>
+          </p:cNvPicPr>
+          <p:nvPr/>
+        </p:nvPicPr>
+        <p:blipFill>
+          <a:blip r:embed="rId4"/>
+          <a:stretch>
+            <a:fillRect/>
+          </a:stretch>
+        </p:blipFill>
+        <p:spPr>
+          <a:xfrm>
+            <a:off x="4167174" y="3479291"/>
+            <a:ext cx="1210056" cy="256032"/>
+          </a:xfrm>
+          <a:prstGeom prst="rect">
+            <a:avLst/>
+          </a:prstGeom>
+        </p:spPr>
+      </p:pic>
+      <p:sp>
+        <p:nvSpPr>
+          <p:cNvPr id="12" name="TextBox 11"/>
           <p:cNvSpPr txBox="1"/>
           <p:nvPr/>
         </p:nvSpPr>
@@ -7420,11 +7942,11 @@
           <a:p>
             <a:pPr algn="ctr"/>
             <a:r>
-              <a:rPr sz="3200" b="1" i="0">
+              <a:rPr sz="3040" b="1" i="0">
                 <a:solidFill>
                   <a:srgbClr val="9E1B32"/>
                 </a:solidFill>
-                <a:latin typeface="Century Schoolbook"/>
+                <a:latin typeface="Lexend"/>
               </a:rPr>
               <a:t>Answer:   9</a:t>
             </a:r>
@@ -7473,11 +7995,11 @@
           <a:p>
             <a:pPr algn="l"/>
             <a:r>
-              <a:rPr sz="3400" b="1" i="0">
+              <a:rPr sz="3229" b="1" i="0">
                 <a:solidFill>
                   <a:srgbClr val="1A1A1A"/>
                 </a:solidFill>
-                <a:latin typeface="Century Schoolbook"/>
+                <a:latin typeface="Lexend"/>
               </a:rPr>
               <a:t>Whiteboards   ·   Question 4 of 9</a:t>
             </a:r>
@@ -7613,11 +8135,11 @@
           <a:p>
             <a:pPr algn="l"/>
             <a:r>
-              <a:rPr sz="1100" b="0" i="1">
+              <a:rPr sz="1040" b="0" i="0">
                 <a:solidFill>
                   <a:srgbClr val="6B6B6B"/>
                 </a:solidFill>
-                <a:latin typeface="Century Schoolbook"/>
+                <a:latin typeface="Lexend"/>
               </a:rPr>
               <a:t>Grade 7 Accelerated · Unit 4 · Lesson 6 — Order of Operations with Radicals</a:t>
             </a:r>
@@ -7648,11 +8170,11 @@
           <a:p>
             <a:pPr algn="r"/>
             <a:r>
-              <a:rPr sz="1100" b="0" i="0">
+              <a:rPr sz="1040" b="0" i="0">
                 <a:solidFill>
                   <a:srgbClr val="6B6B6B"/>
                 </a:solidFill>
-                <a:latin typeface="Century Schoolbook"/>
+                <a:latin typeface="Lexend"/>
               </a:rPr>
               <a:t>21</a:t>
             </a:r>
@@ -7661,7 +8183,7 @@
       </p:sp>
       <p:pic>
         <p:nvPicPr>
-          <p:cNvPr id="8" name="Picture 7" descr="4a8f8f45b07cb518.png"/>
+          <p:cNvPr id="8" name="Picture 7" descr="0e3ec2124e9cdb64.png"/>
           <p:cNvPicPr>
             <a:picLocks noChangeAspect="1"/>
           </p:cNvPicPr>
@@ -7675,8 +8197,8 @@
         </p:blipFill>
         <p:spPr>
           <a:xfrm>
-            <a:off x="5492495" y="2194560"/>
-            <a:ext cx="1176528" cy="816864"/>
+            <a:off x="5497067" y="2194560"/>
+            <a:ext cx="1167384" cy="792480"/>
           </a:xfrm>
           <a:prstGeom prst="rect">
             <a:avLst/>
@@ -7707,11 +8229,11 @@
           <a:p>
             <a:pPr algn="ctr"/>
             <a:r>
-              <a:rPr sz="2600" b="1" i="0">
+              <a:rPr sz="2470" b="1" i="0">
                 <a:solidFill>
                   <a:srgbClr val="1A1A1A"/>
                 </a:solidFill>
-                <a:latin typeface="Century Schoolbook"/>
+                <a:latin typeface="Lexend"/>
               </a:rPr>
               <a:t>Answer it.</a:t>
             </a:r>
@@ -7760,11 +8282,11 @@
           <a:p>
             <a:pPr algn="l"/>
             <a:r>
-              <a:rPr sz="3400" b="1" i="0">
+              <a:rPr sz="3229" b="1" i="0">
                 <a:solidFill>
                   <a:srgbClr val="1A1A1A"/>
                 </a:solidFill>
-                <a:latin typeface="Century Schoolbook"/>
+                <a:latin typeface="Lexend"/>
               </a:rPr>
               <a:t>Whiteboards   ·   Question 4 of 9</a:t>
             </a:r>
@@ -7900,11 +8422,11 @@
           <a:p>
             <a:pPr algn="l"/>
             <a:r>
-              <a:rPr sz="1100" b="0" i="1">
+              <a:rPr sz="1040" b="0" i="0">
                 <a:solidFill>
                   <a:srgbClr val="6B6B6B"/>
                 </a:solidFill>
-                <a:latin typeface="Century Schoolbook"/>
+                <a:latin typeface="Lexend"/>
               </a:rPr>
               <a:t>Grade 7 Accelerated · Unit 4 · Lesson 6 — Order of Operations with Radicals</a:t>
             </a:r>
@@ -7935,11 +8457,11 @@
           <a:p>
             <a:pPr algn="r"/>
             <a:r>
-              <a:rPr sz="1100" b="0" i="0">
+              <a:rPr sz="1040" b="0" i="0">
                 <a:solidFill>
                   <a:srgbClr val="6B6B6B"/>
                 </a:solidFill>
-                <a:latin typeface="Century Schoolbook"/>
+                <a:latin typeface="Lexend"/>
               </a:rPr>
               <a:t>22</a:t>
             </a:r>
@@ -7948,7 +8470,7 @@
       </p:sp>
       <p:pic>
         <p:nvPicPr>
-          <p:cNvPr id="8" name="Picture 7" descr="19aa5c3e206c11fc.png"/>
+          <p:cNvPr id="8" name="Picture 7" descr="cbba9a177d472da8.png"/>
           <p:cNvPicPr>
             <a:picLocks noChangeAspect="1"/>
           </p:cNvPicPr>
@@ -7962,8 +8484,8 @@
         </p:blipFill>
         <p:spPr>
           <a:xfrm>
-            <a:off x="5494020" y="2103120"/>
-            <a:ext cx="1173480" cy="810768"/>
+            <a:off x="5498591" y="2103120"/>
+            <a:ext cx="1164336" cy="792480"/>
           </a:xfrm>
           <a:prstGeom prst="rect">
             <a:avLst/>
@@ -7978,7 +8500,149 @@
         </p:nvSpPr>
         <p:spPr>
           <a:xfrm>
-            <a:off x="777240" y="4663440"/>
+            <a:off x="4103452" y="3220212"/>
+            <a:ext cx="996779" cy="457200"/>
+          </a:xfrm>
+          <a:prstGeom prst="rect">
+            <a:avLst/>
+          </a:prstGeom>
+          <a:noFill/>
+        </p:spPr>
+        <p:txBody>
+          <a:bodyPr wrap="none" lIns="45720" rIns="45720" tIns="18288" bIns="18288" anchor="ctr">
+            <a:noAutofit/>
+          </a:bodyPr>
+          <a:lstStyle/>
+          <a:p>
+            <a:pPr algn="l"/>
+            <a:r>
+              <a:rPr sz="2330" b="0" i="0">
+                <a:solidFill>
+                  <a:srgbClr val="1A1A1A"/>
+                </a:solidFill>
+                <a:latin typeface="Lexend"/>
+              </a:rPr>
+              <a:t>Top:  </a:t>
+            </a:r>
+          </a:p>
+        </p:txBody>
+      </p:sp>
+      <p:pic>
+        <p:nvPicPr>
+          <p:cNvPr id="10" name="Picture 9" descr="e89a91682f16b584.png"/>
+          <p:cNvPicPr>
+            <a:picLocks noChangeAspect="1"/>
+          </p:cNvPicPr>
+          <p:nvPr/>
+        </p:nvPicPr>
+        <p:blipFill>
+          <a:blip r:embed="rId3"/>
+          <a:stretch>
+            <a:fillRect/>
+          </a:stretch>
+        </p:blipFill>
+        <p:spPr>
+          <a:xfrm>
+            <a:off x="4963072" y="3320795"/>
+            <a:ext cx="2036064" cy="256032"/>
+          </a:xfrm>
+          <a:prstGeom prst="rect">
+            <a:avLst/>
+          </a:prstGeom>
+        </p:spPr>
+      </p:pic>
+      <p:sp>
+        <p:nvSpPr>
+          <p:cNvPr id="11" name="TextBox 10"/>
+          <p:cNvSpPr txBox="1"/>
+          <p:nvPr/>
+        </p:nvSpPr>
+        <p:spPr>
+          <a:xfrm>
+            <a:off x="4103452" y="3723131"/>
+            <a:ext cx="1583270" cy="457200"/>
+          </a:xfrm>
+          <a:prstGeom prst="rect">
+            <a:avLst/>
+          </a:prstGeom>
+          <a:noFill/>
+        </p:spPr>
+        <p:txBody>
+          <a:bodyPr wrap="none" lIns="45720" rIns="45720" tIns="18288" bIns="18288" anchor="ctr">
+            <a:noAutofit/>
+          </a:bodyPr>
+          <a:lstStyle/>
+          <a:p>
+            <a:pPr algn="l"/>
+            <a:r>
+              <a:rPr sz="2330" b="0" i="0">
+                <a:solidFill>
+                  <a:srgbClr val="1A1A1A"/>
+                </a:solidFill>
+                <a:latin typeface="Lexend"/>
+              </a:rPr>
+              <a:t>Bottom:  </a:t>
+            </a:r>
+          </a:p>
+        </p:txBody>
+      </p:sp>
+      <p:pic>
+        <p:nvPicPr>
+          <p:cNvPr id="12" name="Picture 11" descr="2d871f17c6a6883d.png"/>
+          <p:cNvPicPr>
+            <a:picLocks noChangeAspect="1"/>
+          </p:cNvPicPr>
+          <p:nvPr/>
+        </p:nvPicPr>
+        <p:blipFill>
+          <a:blip r:embed="rId4"/>
+          <a:stretch>
+            <a:fillRect/>
+          </a:stretch>
+        </p:blipFill>
+        <p:spPr>
+          <a:xfrm>
+            <a:off x="5549563" y="3820668"/>
+            <a:ext cx="2511552" cy="262128"/>
+          </a:xfrm>
+          <a:prstGeom prst="rect">
+            <a:avLst/>
+          </a:prstGeom>
+        </p:spPr>
+      </p:pic>
+      <p:pic>
+        <p:nvPicPr>
+          <p:cNvPr id="13" name="Picture 12" descr="cf247a514e7944c6.png"/>
+          <p:cNvPicPr>
+            <a:picLocks noChangeAspect="1"/>
+          </p:cNvPicPr>
+          <p:nvPr/>
+        </p:nvPicPr>
+        <p:blipFill>
+          <a:blip r:embed="rId5"/>
+          <a:stretch>
+            <a:fillRect/>
+          </a:stretch>
+        </p:blipFill>
+        <p:spPr>
+          <a:xfrm>
+            <a:off x="4158316" y="4248912"/>
+            <a:ext cx="633984" cy="515112"/>
+          </a:xfrm>
+          <a:prstGeom prst="rect">
+            <a:avLst/>
+          </a:prstGeom>
+        </p:spPr>
+      </p:pic>
+      <p:sp>
+        <p:nvSpPr>
+          <p:cNvPr id="14" name="TextBox 13"/>
+          <p:cNvSpPr txBox="1"/>
+          <p:nvPr/>
+        </p:nvSpPr>
+        <p:spPr>
+          <a:xfrm>
+            <a:off x="777240" y="4901184"/>
             <a:ext cx="10607040" cy="548640"/>
           </a:xfrm>
           <a:prstGeom prst="rect">
@@ -7994,11 +8658,11 @@
           <a:p>
             <a:pPr algn="ctr"/>
             <a:r>
-              <a:rPr sz="3200" b="1" i="0">
+              <a:rPr sz="3040" b="1" i="0">
                 <a:solidFill>
                   <a:srgbClr val="9E1B32"/>
                 </a:solidFill>
-                <a:latin typeface="Century Schoolbook"/>
+                <a:latin typeface="Lexend"/>
               </a:rPr>
               <a:t>Answer:   1/3</a:t>
             </a:r>
@@ -8047,11 +8711,11 @@
           <a:p>
             <a:pPr algn="l"/>
             <a:r>
-              <a:rPr sz="3400" b="1" i="0">
+              <a:rPr sz="3229" b="1" i="0">
                 <a:solidFill>
                   <a:srgbClr val="1A1A1A"/>
                 </a:solidFill>
-                <a:latin typeface="Century Schoolbook"/>
+                <a:latin typeface="Lexend"/>
               </a:rPr>
               <a:t>Whiteboards   ·   Question 5 of 9</a:t>
             </a:r>
@@ -8187,11 +8851,11 @@
           <a:p>
             <a:pPr algn="l"/>
             <a:r>
-              <a:rPr sz="1100" b="0" i="1">
+              <a:rPr sz="1040" b="0" i="0">
                 <a:solidFill>
                   <a:srgbClr val="6B6B6B"/>
                 </a:solidFill>
-                <a:latin typeface="Century Schoolbook"/>
+                <a:latin typeface="Lexend"/>
               </a:rPr>
               <a:t>Grade 7 Accelerated · Unit 4 · Lesson 6 — Order of Operations with Radicals</a:t>
             </a:r>
@@ -8222,11 +8886,11 @@
           <a:p>
             <a:pPr algn="r"/>
             <a:r>
-              <a:rPr sz="1100" b="0" i="0">
+              <a:rPr sz="1040" b="0" i="0">
                 <a:solidFill>
                   <a:srgbClr val="6B6B6B"/>
                 </a:solidFill>
-                <a:latin typeface="Century Schoolbook"/>
+                <a:latin typeface="Lexend"/>
               </a:rPr>
               <a:t>23</a:t>
             </a:r>
@@ -8235,7 +8899,7 @@
       </p:sp>
       <p:pic>
         <p:nvPicPr>
-          <p:cNvPr id="8" name="Picture 7" descr="0e9d178742cadf8a.png"/>
+          <p:cNvPr id="8" name="Picture 7" descr="594d57048b4fb9ac.png"/>
           <p:cNvPicPr>
             <a:picLocks noChangeAspect="1"/>
           </p:cNvPicPr>
@@ -8249,8 +8913,8 @@
         </p:blipFill>
         <p:spPr>
           <a:xfrm>
-            <a:off x="5394959" y="2223516"/>
-            <a:ext cx="1371600" cy="353568"/>
+            <a:off x="5387339" y="2229612"/>
+            <a:ext cx="1386840" cy="341376"/>
           </a:xfrm>
           <a:prstGeom prst="rect">
             <a:avLst/>
@@ -8281,11 +8945,11 @@
           <a:p>
             <a:pPr algn="ctr"/>
             <a:r>
-              <a:rPr sz="2600" b="0" i="0">
+              <a:rPr sz="2470" b="0" i="0">
                 <a:solidFill>
                   <a:srgbClr val="1A1A1A"/>
                 </a:solidFill>
-                <a:latin typeface="Century Schoolbook"/>
+                <a:latin typeface="Lexend"/>
               </a:rPr>
               <a:t>Which is the value?</a:t>
             </a:r>
@@ -8316,20 +8980,20 @@
           <a:p>
             <a:pPr algn="l"/>
             <a:r>
-              <a:rPr sz="2400" b="1" i="0">
+              <a:rPr sz="2280" b="1" i="0">
                 <a:solidFill>
                   <a:srgbClr val="1A1A1A"/>
                 </a:solidFill>
-                <a:latin typeface="Century Schoolbook"/>
+                <a:latin typeface="Lexend"/>
               </a:rPr>
               <a:t>A.   </a:t>
             </a:r>
             <a:r>
-              <a:rPr sz="2400" b="0" i="0">
+              <a:rPr sz="2280" b="0" i="0">
                 <a:solidFill>
                   <a:srgbClr val="1A1A1A"/>
                 </a:solidFill>
-                <a:latin typeface="Century Schoolbook"/>
+                <a:latin typeface="Lexend"/>
               </a:rPr>
               <a:t>146</a:t>
             </a:r>
@@ -8360,20 +9024,20 @@
           <a:p>
             <a:pPr algn="l"/>
             <a:r>
-              <a:rPr sz="2400" b="1" i="0">
+              <a:rPr sz="2280" b="1" i="0">
                 <a:solidFill>
                   <a:srgbClr val="1A1A1A"/>
                 </a:solidFill>
-                <a:latin typeface="Century Schoolbook"/>
+                <a:latin typeface="Lexend"/>
               </a:rPr>
               <a:t>B.   </a:t>
             </a:r>
             <a:r>
-              <a:rPr sz="2400" b="0" i="0">
+              <a:rPr sz="2280" b="0" i="0">
                 <a:solidFill>
                   <a:srgbClr val="1A1A1A"/>
                 </a:solidFill>
-                <a:latin typeface="Century Schoolbook"/>
+                <a:latin typeface="Lexend"/>
               </a:rPr>
               <a:t>50</a:t>
             </a:r>
@@ -8404,20 +9068,20 @@
           <a:p>
             <a:pPr algn="l"/>
             <a:r>
-              <a:rPr sz="2400" b="1" i="0">
+              <a:rPr sz="2280" b="1" i="0">
                 <a:solidFill>
                   <a:srgbClr val="1A1A1A"/>
                 </a:solidFill>
-                <a:latin typeface="Century Schoolbook"/>
+                <a:latin typeface="Lexend"/>
               </a:rPr>
               <a:t>C.   </a:t>
             </a:r>
             <a:r>
-              <a:rPr sz="2400" b="0" i="0">
+              <a:rPr sz="2280" b="0" i="0">
                 <a:solidFill>
                   <a:srgbClr val="1A1A1A"/>
                 </a:solidFill>
-                <a:latin typeface="Century Schoolbook"/>
+                <a:latin typeface="Lexend"/>
               </a:rPr>
               <a:t>26</a:t>
             </a:r>
@@ -8448,20 +9112,20 @@
           <a:p>
             <a:pPr algn="l"/>
             <a:r>
-              <a:rPr sz="2400" b="1" i="0">
+              <a:rPr sz="2280" b="1" i="0">
                 <a:solidFill>
                   <a:srgbClr val="1A1A1A"/>
                 </a:solidFill>
-                <a:latin typeface="Century Schoolbook"/>
+                <a:latin typeface="Lexend"/>
               </a:rPr>
               <a:t>D.   </a:t>
             </a:r>
             <a:r>
-              <a:rPr sz="2400" b="0" i="0">
+              <a:rPr sz="2280" b="0" i="0">
                 <a:solidFill>
                   <a:srgbClr val="1A1A1A"/>
                 </a:solidFill>
-                <a:latin typeface="Century Schoolbook"/>
+                <a:latin typeface="Lexend"/>
               </a:rPr>
               <a:t>80</a:t>
             </a:r>
@@ -8492,11 +9156,11 @@
           <a:p>
             <a:pPr algn="ctr"/>
             <a:r>
-              <a:rPr sz="2600" b="1" i="0">
+              <a:rPr sz="2470" b="1" i="0">
                 <a:solidFill>
                   <a:srgbClr val="1A1A1A"/>
                 </a:solidFill>
-                <a:latin typeface="Century Schoolbook"/>
+                <a:latin typeface="Lexend"/>
               </a:rPr>
               <a:t>Answer it.</a:t>
             </a:r>
@@ -8545,11 +9209,11 @@
           <a:p>
             <a:pPr algn="l"/>
             <a:r>
-              <a:rPr sz="3400" b="1" i="0">
+              <a:rPr sz="3229" b="1" i="0">
                 <a:solidFill>
                   <a:srgbClr val="1A1A1A"/>
                 </a:solidFill>
-                <a:latin typeface="Century Schoolbook"/>
+                <a:latin typeface="Lexend"/>
               </a:rPr>
               <a:t>Whiteboards   ·   Question 5 of 9</a:t>
             </a:r>
@@ -8685,11 +9349,11 @@
           <a:p>
             <a:pPr algn="l"/>
             <a:r>
-              <a:rPr sz="1100" b="0" i="1">
+              <a:rPr sz="1040" b="0" i="0">
                 <a:solidFill>
                   <a:srgbClr val="6B6B6B"/>
                 </a:solidFill>
-                <a:latin typeface="Century Schoolbook"/>
+                <a:latin typeface="Lexend"/>
               </a:rPr>
               <a:t>Grade 7 Accelerated · Unit 4 · Lesson 6 — Order of Operations with Radicals</a:t>
             </a:r>
@@ -8720,11 +9384,11 @@
           <a:p>
             <a:pPr algn="r"/>
             <a:r>
-              <a:rPr sz="1100" b="0" i="0">
+              <a:rPr sz="1040" b="0" i="0">
                 <a:solidFill>
                   <a:srgbClr val="6B6B6B"/>
                 </a:solidFill>
-                <a:latin typeface="Century Schoolbook"/>
+                <a:latin typeface="Lexend"/>
               </a:rPr>
               <a:t>24</a:t>
             </a:r>
@@ -8733,7 +9397,7 @@
       </p:sp>
       <p:pic>
         <p:nvPicPr>
-          <p:cNvPr id="8" name="Picture 7" descr="d34694b9b55f634e.png"/>
+          <p:cNvPr id="8" name="Picture 7" descr="53291355aab2c4ad.png"/>
           <p:cNvPicPr>
             <a:picLocks noChangeAspect="1"/>
           </p:cNvPicPr>
@@ -8747,8 +9411,8 @@
         </p:blipFill>
         <p:spPr>
           <a:xfrm>
-            <a:off x="5394959" y="2133599"/>
-            <a:ext cx="1371600" cy="350520"/>
+            <a:off x="5385816" y="2138171"/>
+            <a:ext cx="1389888" cy="341376"/>
           </a:xfrm>
           <a:prstGeom prst="rect">
             <a:avLst/>
@@ -8779,11 +9443,11 @@
           <a:p>
             <a:pPr algn="ctr"/>
             <a:r>
-              <a:rPr sz="2600" b="0" i="0">
+              <a:rPr sz="2470" b="0" i="0">
                 <a:solidFill>
                   <a:srgbClr val="1A1A1A"/>
                 </a:solidFill>
-                <a:latin typeface="Century Schoolbook"/>
+                <a:latin typeface="Lexend"/>
               </a:rPr>
               <a:t>Which is the value?</a:t>
             </a:r>
@@ -8798,8 +9462,185 @@
         </p:nvSpPr>
         <p:spPr>
           <a:xfrm>
-            <a:off x="1874519" y="3455239"/>
-            <a:ext cx="4572000" cy="548640"/>
+            <a:off x="4270490" y="3414091"/>
+            <a:ext cx="2089630" cy="457200"/>
+          </a:xfrm>
+          <a:prstGeom prst="rect">
+            <a:avLst/>
+          </a:prstGeom>
+          <a:noFill/>
+        </p:spPr>
+        <p:txBody>
+          <a:bodyPr wrap="none" lIns="45720" rIns="45720" tIns="18288" bIns="18288" anchor="ctr">
+            <a:noAutofit/>
+          </a:bodyPr>
+          <a:lstStyle/>
+          <a:p>
+            <a:pPr algn="l"/>
+            <a:r>
+              <a:rPr sz="2330" b="0" i="0">
+                <a:solidFill>
+                  <a:srgbClr val="1A1A1A"/>
+                </a:solidFill>
+                <a:latin typeface="Lexend"/>
+              </a:rPr>
+              <a:t>Power first:  </a:t>
+            </a:r>
+          </a:p>
+        </p:txBody>
+      </p:sp>
+      <p:pic>
+        <p:nvPicPr>
+          <p:cNvPr id="11" name="Picture 10" descr="6bee3a4a6e96719d.png"/>
+          <p:cNvPicPr>
+            <a:picLocks noChangeAspect="1"/>
+          </p:cNvPicPr>
+          <p:nvPr/>
+        </p:nvPicPr>
+        <p:blipFill>
+          <a:blip r:embed="rId3"/>
+          <a:stretch>
+            <a:fillRect/>
+          </a:stretch>
+        </p:blipFill>
+        <p:spPr>
+          <a:xfrm>
+            <a:off x="6222961" y="3513151"/>
+            <a:ext cx="880872" cy="259080"/>
+          </a:xfrm>
+          <a:prstGeom prst="rect">
+            <a:avLst/>
+          </a:prstGeom>
+        </p:spPr>
+      </p:pic>
+      <p:sp>
+        <p:nvSpPr>
+          <p:cNvPr id="12" name="TextBox 11"/>
+          <p:cNvSpPr txBox="1"/>
+          <p:nvPr/>
+        </p:nvSpPr>
+        <p:spPr>
+          <a:xfrm>
+            <a:off x="4270490" y="3917011"/>
+            <a:ext cx="2498875" cy="457200"/>
+          </a:xfrm>
+          <a:prstGeom prst="rect">
+            <a:avLst/>
+          </a:prstGeom>
+          <a:noFill/>
+        </p:spPr>
+        <p:txBody>
+          <a:bodyPr wrap="none" lIns="45720" rIns="45720" tIns="18288" bIns="18288" anchor="ctr">
+            <a:noAutofit/>
+          </a:bodyPr>
+          <a:lstStyle/>
+          <a:p>
+            <a:pPr algn="l"/>
+            <a:r>
+              <a:rPr sz="2330" b="0" i="0">
+                <a:solidFill>
+                  <a:srgbClr val="1A1A1A"/>
+                </a:solidFill>
+                <a:latin typeface="Lexend"/>
+              </a:rPr>
+              <a:t>Then multiply:  </a:t>
+            </a:r>
+          </a:p>
+        </p:txBody>
+      </p:sp>
+      <p:pic>
+        <p:nvPicPr>
+          <p:cNvPr id="13" name="Picture 12" descr="521cfcdc4e4431f2.png"/>
+          <p:cNvPicPr>
+            <a:picLocks noChangeAspect="1"/>
+          </p:cNvPicPr>
+          <p:nvPr/>
+        </p:nvPicPr>
+        <p:blipFill>
+          <a:blip r:embed="rId4"/>
+          <a:stretch>
+            <a:fillRect/>
+          </a:stretch>
+        </p:blipFill>
+        <p:spPr>
+          <a:xfrm>
+            <a:off x="6632205" y="4038931"/>
+            <a:ext cx="1255776" cy="213360"/>
+          </a:xfrm>
+          <a:prstGeom prst="rect">
+            <a:avLst/>
+          </a:prstGeom>
+        </p:spPr>
+      </p:pic>
+      <p:sp>
+        <p:nvSpPr>
+          <p:cNvPr id="14" name="TextBox 13"/>
+          <p:cNvSpPr txBox="1"/>
+          <p:nvPr/>
+        </p:nvSpPr>
+        <p:spPr>
+          <a:xfrm>
+            <a:off x="4270490" y="4419931"/>
+            <a:ext cx="1877465" cy="457200"/>
+          </a:xfrm>
+          <a:prstGeom prst="rect">
+            <a:avLst/>
+          </a:prstGeom>
+          <a:noFill/>
+        </p:spPr>
+        <p:txBody>
+          <a:bodyPr wrap="none" lIns="45720" rIns="45720" tIns="18288" bIns="18288" anchor="ctr">
+            <a:noAutofit/>
+          </a:bodyPr>
+          <a:lstStyle/>
+          <a:p>
+            <a:pPr algn="l"/>
+            <a:r>
+              <a:rPr sz="2330" b="0" i="0">
+                <a:solidFill>
+                  <a:srgbClr val="1A1A1A"/>
+                </a:solidFill>
+                <a:latin typeface="Lexend"/>
+              </a:rPr>
+              <a:t>Then add:  </a:t>
+            </a:r>
+          </a:p>
+        </p:txBody>
+      </p:sp>
+      <p:pic>
+        <p:nvPicPr>
+          <p:cNvPr id="15" name="Picture 14" descr="c52f3646b69457bb.png"/>
+          <p:cNvPicPr>
+            <a:picLocks noChangeAspect="1"/>
+          </p:cNvPicPr>
+          <p:nvPr/>
+        </p:nvPicPr>
+        <p:blipFill>
+          <a:blip r:embed="rId5"/>
+          <a:stretch>
+            <a:fillRect/>
+          </a:stretch>
+        </p:blipFill>
+        <p:spPr>
+          <a:xfrm>
+            <a:off x="6010795" y="4541851"/>
+            <a:ext cx="1399032" cy="213360"/>
+          </a:xfrm>
+          <a:prstGeom prst="rect">
+            <a:avLst/>
+          </a:prstGeom>
+        </p:spPr>
+      </p:pic>
+      <p:sp>
+        <p:nvSpPr>
+          <p:cNvPr id="16" name="TextBox 15"/>
+          <p:cNvSpPr txBox="1"/>
+          <p:nvPr/>
+        </p:nvSpPr>
+        <p:spPr>
+          <a:xfrm>
+            <a:off x="777240" y="4991431"/>
+            <a:ext cx="10607040" cy="548640"/>
           </a:xfrm>
           <a:prstGeom prst="rect">
             <a:avLst/>
@@ -8812,189 +9653,13 @@
           </a:bodyPr>
           <a:lstStyle/>
           <a:p>
-            <a:pPr algn="l"/>
-            <a:r>
-              <a:rPr sz="2400" b="1" i="0">
-                <a:solidFill>
-                  <a:srgbClr val="1A1A1A"/>
-                </a:solidFill>
-                <a:latin typeface="Century Schoolbook"/>
-              </a:rPr>
-              <a:t>A.   </a:t>
-            </a:r>
-            <a:r>
-              <a:rPr sz="2400" b="0" i="0">
-                <a:solidFill>
-                  <a:srgbClr val="1A1A1A"/>
-                </a:solidFill>
-                <a:latin typeface="Century Schoolbook"/>
-              </a:rPr>
-              <a:t>146</a:t>
-            </a:r>
-          </a:p>
-        </p:txBody>
-      </p:sp>
-      <p:sp>
-        <p:nvSpPr>
-          <p:cNvPr id="11" name="TextBox 10"/>
-          <p:cNvSpPr txBox="1"/>
-          <p:nvPr/>
-        </p:nvSpPr>
-        <p:spPr>
-          <a:xfrm>
-            <a:off x="6629400" y="3455239"/>
-            <a:ext cx="4572000" cy="548640"/>
-          </a:xfrm>
-          <a:prstGeom prst="rect">
-            <a:avLst/>
-          </a:prstGeom>
-          <a:noFill/>
-        </p:spPr>
-        <p:txBody>
-          <a:bodyPr wrap="square" lIns="45720" rIns="45720" tIns="18288" bIns="18288" anchor="t">
-            <a:spAutoFit/>
-          </a:bodyPr>
-          <a:lstStyle/>
-          <a:p>
-            <a:pPr algn="l"/>
-            <a:r>
-              <a:rPr sz="2400" b="1" i="0">
+            <a:pPr algn="ctr"/>
+            <a:r>
+              <a:rPr sz="3040" b="1" i="0">
                 <a:solidFill>
                   <a:srgbClr val="9E1B32"/>
                 </a:solidFill>
-                <a:latin typeface="Century Schoolbook"/>
-              </a:rPr>
-              <a:t>B.   </a:t>
-            </a:r>
-            <a:r>
-              <a:rPr sz="2400" b="1" i="0">
-                <a:solidFill>
-                  <a:srgbClr val="9E1B32"/>
-                </a:solidFill>
-                <a:latin typeface="Century Schoolbook"/>
-              </a:rPr>
-              <a:t>50</a:t>
-            </a:r>
-          </a:p>
-        </p:txBody>
-      </p:sp>
-      <p:sp>
-        <p:nvSpPr>
-          <p:cNvPr id="12" name="TextBox 11"/>
-          <p:cNvSpPr txBox="1"/>
-          <p:nvPr/>
-        </p:nvSpPr>
-        <p:spPr>
-          <a:xfrm>
-            <a:off x="1874519" y="4141039"/>
-            <a:ext cx="4572000" cy="548640"/>
-          </a:xfrm>
-          <a:prstGeom prst="rect">
-            <a:avLst/>
-          </a:prstGeom>
-          <a:noFill/>
-        </p:spPr>
-        <p:txBody>
-          <a:bodyPr wrap="square" lIns="45720" rIns="45720" tIns="18288" bIns="18288" anchor="t">
-            <a:spAutoFit/>
-          </a:bodyPr>
-          <a:lstStyle/>
-          <a:p>
-            <a:pPr algn="l"/>
-            <a:r>
-              <a:rPr sz="2400" b="1" i="0">
-                <a:solidFill>
-                  <a:srgbClr val="1A1A1A"/>
-                </a:solidFill>
-                <a:latin typeface="Century Schoolbook"/>
-              </a:rPr>
-              <a:t>C.   </a:t>
-            </a:r>
-            <a:r>
-              <a:rPr sz="2400" b="0" i="0">
-                <a:solidFill>
-                  <a:srgbClr val="1A1A1A"/>
-                </a:solidFill>
-                <a:latin typeface="Century Schoolbook"/>
-              </a:rPr>
-              <a:t>26</a:t>
-            </a:r>
-          </a:p>
-        </p:txBody>
-      </p:sp>
-      <p:sp>
-        <p:nvSpPr>
-          <p:cNvPr id="13" name="TextBox 12"/>
-          <p:cNvSpPr txBox="1"/>
-          <p:nvPr/>
-        </p:nvSpPr>
-        <p:spPr>
-          <a:xfrm>
-            <a:off x="6629400" y="4141039"/>
-            <a:ext cx="4572000" cy="548640"/>
-          </a:xfrm>
-          <a:prstGeom prst="rect">
-            <a:avLst/>
-          </a:prstGeom>
-          <a:noFill/>
-        </p:spPr>
-        <p:txBody>
-          <a:bodyPr wrap="square" lIns="45720" rIns="45720" tIns="18288" bIns="18288" anchor="t">
-            <a:spAutoFit/>
-          </a:bodyPr>
-          <a:lstStyle/>
-          <a:p>
-            <a:pPr algn="l"/>
-            <a:r>
-              <a:rPr sz="2400" b="1" i="0">
-                <a:solidFill>
-                  <a:srgbClr val="1A1A1A"/>
-                </a:solidFill>
-                <a:latin typeface="Century Schoolbook"/>
-              </a:rPr>
-              <a:t>D.   </a:t>
-            </a:r>
-            <a:r>
-              <a:rPr sz="2400" b="0" i="0">
-                <a:solidFill>
-                  <a:srgbClr val="1A1A1A"/>
-                </a:solidFill>
-                <a:latin typeface="Century Schoolbook"/>
-              </a:rPr>
-              <a:t>80</a:t>
-            </a:r>
-          </a:p>
-        </p:txBody>
-      </p:sp>
-      <p:sp>
-        <p:nvSpPr>
-          <p:cNvPr id="14" name="TextBox 13"/>
-          <p:cNvSpPr txBox="1"/>
-          <p:nvPr/>
-        </p:nvSpPr>
-        <p:spPr>
-          <a:xfrm>
-            <a:off x="777240" y="5146879"/>
-            <a:ext cx="10607040" cy="548640"/>
-          </a:xfrm>
-          <a:prstGeom prst="rect">
-            <a:avLst/>
-          </a:prstGeom>
-          <a:noFill/>
-        </p:spPr>
-        <p:txBody>
-          <a:bodyPr wrap="square" lIns="45720" rIns="45720" tIns="18288" bIns="18288" anchor="t">
-            <a:spAutoFit/>
-          </a:bodyPr>
-          <a:lstStyle/>
-          <a:p>
-            <a:pPr algn="ctr"/>
-            <a:r>
-              <a:rPr sz="3200" b="1" i="0">
-                <a:solidFill>
-                  <a:srgbClr val="9E1B32"/>
-                </a:solidFill>
-                <a:latin typeface="Century Schoolbook"/>
+                <a:latin typeface="Lexend"/>
               </a:rPr>
               <a:t>Answer:   B — 50</a:t>
             </a:r>
@@ -9043,11 +9708,11 @@
           <a:p>
             <a:pPr algn="l"/>
             <a:r>
-              <a:rPr sz="3400" b="1" i="0">
+              <a:rPr sz="3229" b="1" i="0">
                 <a:solidFill>
                   <a:srgbClr val="1A1A1A"/>
                 </a:solidFill>
-                <a:latin typeface="Century Schoolbook"/>
+                <a:latin typeface="Lexend"/>
               </a:rPr>
               <a:t>Whiteboards   ·   Question 6 of 9</a:t>
             </a:r>
@@ -9183,11 +9848,11 @@
           <a:p>
             <a:pPr algn="l"/>
             <a:r>
-              <a:rPr sz="1100" b="0" i="1">
+              <a:rPr sz="1040" b="0" i="0">
                 <a:solidFill>
                   <a:srgbClr val="6B6B6B"/>
                 </a:solidFill>
-                <a:latin typeface="Century Schoolbook"/>
+                <a:latin typeface="Lexend"/>
               </a:rPr>
               <a:t>Grade 7 Accelerated · Unit 4 · Lesson 6 — Order of Operations with Radicals</a:t>
             </a:r>
@@ -9218,11 +9883,11 @@
           <a:p>
             <a:pPr algn="r"/>
             <a:r>
-              <a:rPr sz="1100" b="0" i="0">
+              <a:rPr sz="1040" b="0" i="0">
                 <a:solidFill>
                   <a:srgbClr val="6B6B6B"/>
                 </a:solidFill>
-                <a:latin typeface="Century Schoolbook"/>
+                <a:latin typeface="Lexend"/>
               </a:rPr>
               <a:t>25</a:t>
             </a:r>
@@ -9231,7 +9896,7 @@
       </p:sp>
       <p:pic>
         <p:nvPicPr>
-          <p:cNvPr id="8" name="Picture 7" descr="076eeeb065b72033.png"/>
+          <p:cNvPr id="8" name="Picture 7" descr="266fcce5418af23c.png"/>
           <p:cNvPicPr>
             <a:picLocks noChangeAspect="1"/>
           </p:cNvPicPr>
@@ -9245,8 +9910,8 @@
         </p:blipFill>
         <p:spPr>
           <a:xfrm>
-            <a:off x="5594604" y="2194560"/>
-            <a:ext cx="972311" cy="804672"/>
+            <a:off x="5586983" y="2194560"/>
+            <a:ext cx="987552" cy="792480"/>
           </a:xfrm>
           <a:prstGeom prst="rect">
             <a:avLst/>
@@ -9261,7 +9926,7 @@
         </p:nvSpPr>
         <p:spPr>
           <a:xfrm>
-            <a:off x="777240" y="3273551"/>
+            <a:off x="777240" y="3261360"/>
             <a:ext cx="10607040" cy="465151"/>
           </a:xfrm>
           <a:prstGeom prst="rect">
@@ -9277,11 +9942,11 @@
           <a:p>
             <a:pPr algn="ctr"/>
             <a:r>
-              <a:rPr sz="2600" b="0" i="0">
+              <a:rPr sz="2470" b="0" i="0">
                 <a:solidFill>
                   <a:srgbClr val="1A1A1A"/>
                 </a:solidFill>
-                <a:latin typeface="Century Schoolbook"/>
+                <a:latin typeface="Lexend"/>
               </a:rPr>
               <a:t>Which is the value?</a:t>
             </a:r>
@@ -9296,7 +9961,7 @@
         </p:nvSpPr>
         <p:spPr>
           <a:xfrm>
-            <a:off x="1874519" y="3939871"/>
+            <a:off x="1874519" y="3927679"/>
             <a:ext cx="4572000" cy="548640"/>
           </a:xfrm>
           <a:prstGeom prst="rect">
@@ -9312,20 +9977,20 @@
           <a:p>
             <a:pPr algn="l"/>
             <a:r>
-              <a:rPr sz="2400" b="1" i="0">
+              <a:rPr sz="2280" b="1" i="0">
                 <a:solidFill>
                   <a:srgbClr val="1A1A1A"/>
                 </a:solidFill>
-                <a:latin typeface="Century Schoolbook"/>
+                <a:latin typeface="Lexend"/>
               </a:rPr>
               <a:t>A.   </a:t>
             </a:r>
             <a:r>
-              <a:rPr sz="2400" b="0" i="0">
+              <a:rPr sz="2280" b="0" i="0">
                 <a:solidFill>
                   <a:srgbClr val="1A1A1A"/>
                 </a:solidFill>
-                <a:latin typeface="Century Schoolbook"/>
+                <a:latin typeface="Lexend"/>
               </a:rPr>
               <a:t>4</a:t>
             </a:r>
@@ -9340,7 +10005,7 @@
         </p:nvSpPr>
         <p:spPr>
           <a:xfrm>
-            <a:off x="6629400" y="3939871"/>
+            <a:off x="6629400" y="3927679"/>
             <a:ext cx="4572000" cy="548640"/>
           </a:xfrm>
           <a:prstGeom prst="rect">
@@ -9356,20 +10021,20 @@
           <a:p>
             <a:pPr algn="l"/>
             <a:r>
-              <a:rPr sz="2400" b="1" i="0">
+              <a:rPr sz="2280" b="1" i="0">
                 <a:solidFill>
                   <a:srgbClr val="1A1A1A"/>
                 </a:solidFill>
-                <a:latin typeface="Century Schoolbook"/>
+                <a:latin typeface="Lexend"/>
               </a:rPr>
               <a:t>B.   </a:t>
             </a:r>
             <a:r>
-              <a:rPr sz="2400" b="0" i="0">
+              <a:rPr sz="2280" b="0" i="0">
                 <a:solidFill>
                   <a:srgbClr val="1A1A1A"/>
                 </a:solidFill>
-                <a:latin typeface="Century Schoolbook"/>
+                <a:latin typeface="Lexend"/>
               </a:rPr>
               <a:t>35.5</a:t>
             </a:r>
@@ -9384,7 +10049,7 @@
         </p:nvSpPr>
         <p:spPr>
           <a:xfrm>
-            <a:off x="1874519" y="4625671"/>
+            <a:off x="1874519" y="4613479"/>
             <a:ext cx="4572000" cy="548640"/>
           </a:xfrm>
           <a:prstGeom prst="rect">
@@ -9400,20 +10065,20 @@
           <a:p>
             <a:pPr algn="l"/>
             <a:r>
-              <a:rPr sz="2400" b="1" i="0">
+              <a:rPr sz="2280" b="1" i="0">
                 <a:solidFill>
                   <a:srgbClr val="1A1A1A"/>
                 </a:solidFill>
-                <a:latin typeface="Century Schoolbook"/>
+                <a:latin typeface="Lexend"/>
               </a:rPr>
               <a:t>C.   </a:t>
             </a:r>
             <a:r>
-              <a:rPr sz="2400" b="0" i="0">
+              <a:rPr sz="2280" b="0" i="0">
                 <a:solidFill>
                   <a:srgbClr val="1A1A1A"/>
                 </a:solidFill>
-                <a:latin typeface="Century Schoolbook"/>
+                <a:latin typeface="Lexend"/>
               </a:rPr>
               <a:t>0.5</a:t>
             </a:r>
@@ -9428,7 +10093,7 @@
         </p:nvSpPr>
         <p:spPr>
           <a:xfrm>
-            <a:off x="6629400" y="4625671"/>
+            <a:off x="6629400" y="4613479"/>
             <a:ext cx="4572000" cy="548640"/>
           </a:xfrm>
           <a:prstGeom prst="rect">
@@ -9444,20 +10109,20 @@
           <a:p>
             <a:pPr algn="l"/>
             <a:r>
-              <a:rPr sz="2400" b="1" i="0">
+              <a:rPr sz="2280" b="1" i="0">
                 <a:solidFill>
                   <a:srgbClr val="1A1A1A"/>
                 </a:solidFill>
-                <a:latin typeface="Century Schoolbook"/>
+                <a:latin typeface="Lexend"/>
               </a:rPr>
               <a:t>D.   </a:t>
             </a:r>
             <a:r>
-              <a:rPr sz="2400" b="0" i="0">
+              <a:rPr sz="2280" b="0" i="0">
                 <a:solidFill>
                   <a:srgbClr val="1A1A1A"/>
                 </a:solidFill>
-                <a:latin typeface="Century Schoolbook"/>
+                <a:latin typeface="Lexend"/>
               </a:rPr>
               <a:t>256</a:t>
             </a:r>
@@ -9472,7 +10137,7 @@
         </p:nvSpPr>
         <p:spPr>
           <a:xfrm>
-            <a:off x="777240" y="5631511"/>
+            <a:off x="777240" y="5619319"/>
             <a:ext cx="10607040" cy="457200"/>
           </a:xfrm>
           <a:prstGeom prst="rect">
@@ -9488,11 +10153,11 @@
           <a:p>
             <a:pPr algn="ctr"/>
             <a:r>
-              <a:rPr sz="2600" b="1" i="0">
+              <a:rPr sz="2470" b="1" i="0">
                 <a:solidFill>
                   <a:srgbClr val="1A1A1A"/>
                 </a:solidFill>
-                <a:latin typeface="Century Schoolbook"/>
+                <a:latin typeface="Lexend"/>
               </a:rPr>
               <a:t>Answer it.</a:t>
             </a:r>
@@ -9541,11 +10206,11 @@
           <a:p>
             <a:pPr algn="l"/>
             <a:r>
-              <a:rPr sz="3400" b="1" i="0">
+              <a:rPr sz="3229" b="1" i="0">
                 <a:solidFill>
                   <a:srgbClr val="1A1A1A"/>
                 </a:solidFill>
-                <a:latin typeface="Century Schoolbook"/>
+                <a:latin typeface="Lexend"/>
               </a:rPr>
               <a:t>Whiteboards   ·   Question 6 of 9</a:t>
             </a:r>
@@ -9681,11 +10346,11 @@
           <a:p>
             <a:pPr algn="l"/>
             <a:r>
-              <a:rPr sz="1100" b="0" i="1">
+              <a:rPr sz="1040" b="0" i="0">
                 <a:solidFill>
                   <a:srgbClr val="6B6B6B"/>
                 </a:solidFill>
-                <a:latin typeface="Century Schoolbook"/>
+                <a:latin typeface="Lexend"/>
               </a:rPr>
               <a:t>Grade 7 Accelerated · Unit 4 · Lesson 6 — Order of Operations with Radicals</a:t>
             </a:r>
@@ -9716,11 +10381,11 @@
           <a:p>
             <a:pPr algn="r"/>
             <a:r>
-              <a:rPr sz="1100" b="0" i="0">
+              <a:rPr sz="1040" b="0" i="0">
                 <a:solidFill>
                   <a:srgbClr val="6B6B6B"/>
                 </a:solidFill>
-                <a:latin typeface="Century Schoolbook"/>
+                <a:latin typeface="Lexend"/>
               </a:rPr>
               <a:t>26</a:t>
             </a:r>
@@ -9729,7 +10394,7 @@
       </p:sp>
       <p:pic>
         <p:nvPicPr>
-          <p:cNvPr id="8" name="Picture 7" descr="db4460c0abb0f5ed.png"/>
+          <p:cNvPr id="8" name="Picture 7" descr="286b5294f6ed7d81.png"/>
           <p:cNvPicPr>
             <a:picLocks noChangeAspect="1"/>
           </p:cNvPicPr>
@@ -9743,8 +10408,8 @@
         </p:blipFill>
         <p:spPr>
           <a:xfrm>
-            <a:off x="5596127" y="2103120"/>
-            <a:ext cx="969264" cy="801624"/>
+            <a:off x="5590032" y="2103120"/>
+            <a:ext cx="981455" cy="789432"/>
           </a:xfrm>
           <a:prstGeom prst="rect">
             <a:avLst/>
@@ -9759,7 +10424,7 @@
         </p:nvSpPr>
         <p:spPr>
           <a:xfrm>
-            <a:off x="777240" y="3179064"/>
+            <a:off x="777240" y="3166871"/>
             <a:ext cx="10607040" cy="465151"/>
           </a:xfrm>
           <a:prstGeom prst="rect">
@@ -9775,11 +10440,11 @@
           <a:p>
             <a:pPr algn="ctr"/>
             <a:r>
-              <a:rPr sz="2600" b="0" i="0">
+              <a:rPr sz="2470" b="0" i="0">
                 <a:solidFill>
                   <a:srgbClr val="1A1A1A"/>
                 </a:solidFill>
-                <a:latin typeface="Century Schoolbook"/>
+                <a:latin typeface="Lexend"/>
               </a:rPr>
               <a:t>Which is the value?</a:t>
             </a:r>
@@ -9794,8 +10459,150 @@
         </p:nvSpPr>
         <p:spPr>
           <a:xfrm>
-            <a:off x="1874519" y="3845383"/>
-            <a:ext cx="4572000" cy="548640"/>
+            <a:off x="4457658" y="3792043"/>
+            <a:ext cx="996779" cy="457200"/>
+          </a:xfrm>
+          <a:prstGeom prst="rect">
+            <a:avLst/>
+          </a:prstGeom>
+          <a:noFill/>
+        </p:spPr>
+        <p:txBody>
+          <a:bodyPr wrap="none" lIns="45720" rIns="45720" tIns="18288" bIns="18288" anchor="ctr">
+            <a:noAutofit/>
+          </a:bodyPr>
+          <a:lstStyle/>
+          <a:p>
+            <a:pPr algn="l"/>
+            <a:r>
+              <a:rPr sz="2330" b="0" i="0">
+                <a:solidFill>
+                  <a:srgbClr val="1A1A1A"/>
+                </a:solidFill>
+                <a:latin typeface="Lexend"/>
+              </a:rPr>
+              <a:t>Top:  </a:t>
+            </a:r>
+          </a:p>
+        </p:txBody>
+      </p:sp>
+      <p:pic>
+        <p:nvPicPr>
+          <p:cNvPr id="11" name="Picture 10" descr="f5cf47236f59dc77.png"/>
+          <p:cNvPicPr>
+            <a:picLocks noChangeAspect="1"/>
+          </p:cNvPicPr>
+          <p:nvPr/>
+        </p:nvPicPr>
+        <p:blipFill>
+          <a:blip r:embed="rId3"/>
+          <a:stretch>
+            <a:fillRect/>
+          </a:stretch>
+        </p:blipFill>
+        <p:spPr>
+          <a:xfrm>
+            <a:off x="5317277" y="3889579"/>
+            <a:ext cx="2389632" cy="262128"/>
+          </a:xfrm>
+          <a:prstGeom prst="rect">
+            <a:avLst/>
+          </a:prstGeom>
+        </p:spPr>
+      </p:pic>
+      <p:sp>
+        <p:nvSpPr>
+          <p:cNvPr id="12" name="TextBox 11"/>
+          <p:cNvSpPr txBox="1"/>
+          <p:nvPr/>
+        </p:nvSpPr>
+        <p:spPr>
+          <a:xfrm>
+            <a:off x="4457658" y="4294963"/>
+            <a:ext cx="1583270" cy="457200"/>
+          </a:xfrm>
+          <a:prstGeom prst="rect">
+            <a:avLst/>
+          </a:prstGeom>
+          <a:noFill/>
+        </p:spPr>
+        <p:txBody>
+          <a:bodyPr wrap="none" lIns="45720" rIns="45720" tIns="18288" bIns="18288" anchor="ctr">
+            <a:noAutofit/>
+          </a:bodyPr>
+          <a:lstStyle/>
+          <a:p>
+            <a:pPr algn="l"/>
+            <a:r>
+              <a:rPr sz="2330" b="0" i="0">
+                <a:solidFill>
+                  <a:srgbClr val="1A1A1A"/>
+                </a:solidFill>
+                <a:latin typeface="Lexend"/>
+              </a:rPr>
+              <a:t>Bottom:  </a:t>
+            </a:r>
+          </a:p>
+        </p:txBody>
+      </p:sp>
+      <p:pic>
+        <p:nvPicPr>
+          <p:cNvPr id="13" name="Picture 12" descr="b8964d2fa5cae649.png"/>
+          <p:cNvPicPr>
+            <a:picLocks noChangeAspect="1"/>
+          </p:cNvPicPr>
+          <p:nvPr/>
+        </p:nvPicPr>
+        <p:blipFill>
+          <a:blip r:embed="rId4"/>
+          <a:stretch>
+            <a:fillRect/>
+          </a:stretch>
+        </p:blipFill>
+        <p:spPr>
+          <a:xfrm>
+            <a:off x="5903768" y="4397071"/>
+            <a:ext cx="697992" cy="252984"/>
+          </a:xfrm>
+          <a:prstGeom prst="rect">
+            <a:avLst/>
+          </a:prstGeom>
+        </p:spPr>
+      </p:pic>
+      <p:pic>
+        <p:nvPicPr>
+          <p:cNvPr id="14" name="Picture 13" descr="e3ce27ebfe1bfdde.png"/>
+          <p:cNvPicPr>
+            <a:picLocks noChangeAspect="1"/>
+          </p:cNvPicPr>
+          <p:nvPr/>
+        </p:nvPicPr>
+        <p:blipFill>
+          <a:blip r:embed="rId5"/>
+          <a:stretch>
+            <a:fillRect/>
+          </a:stretch>
+        </p:blipFill>
+        <p:spPr>
+          <a:xfrm>
+            <a:off x="4512522" y="4919803"/>
+            <a:ext cx="1219200" cy="213360"/>
+          </a:xfrm>
+          <a:prstGeom prst="rect">
+            <a:avLst/>
+          </a:prstGeom>
+        </p:spPr>
+      </p:pic>
+      <p:sp>
+        <p:nvSpPr>
+          <p:cNvPr id="15" name="TextBox 14"/>
+          <p:cNvSpPr txBox="1"/>
+          <p:nvPr/>
+        </p:nvSpPr>
+        <p:spPr>
+          <a:xfrm>
+            <a:off x="777240" y="5369383"/>
+            <a:ext cx="10607040" cy="548640"/>
           </a:xfrm>
           <a:prstGeom prst="rect">
             <a:avLst/>
@@ -9808,189 +10615,13 @@
           </a:bodyPr>
           <a:lstStyle/>
           <a:p>
-            <a:pPr algn="l"/>
-            <a:r>
-              <a:rPr sz="2400" b="1" i="0">
+            <a:pPr algn="ctr"/>
+            <a:r>
+              <a:rPr sz="3040" b="1" i="0">
                 <a:solidFill>
                   <a:srgbClr val="9E1B32"/>
                 </a:solidFill>
-                <a:latin typeface="Century Schoolbook"/>
-              </a:rPr>
-              <a:t>A.   </a:t>
-            </a:r>
-            <a:r>
-              <a:rPr sz="2400" b="1" i="0">
-                <a:solidFill>
-                  <a:srgbClr val="9E1B32"/>
-                </a:solidFill>
-                <a:latin typeface="Century Schoolbook"/>
-              </a:rPr>
-              <a:t>4</a:t>
-            </a:r>
-          </a:p>
-        </p:txBody>
-      </p:sp>
-      <p:sp>
-        <p:nvSpPr>
-          <p:cNvPr id="11" name="TextBox 10"/>
-          <p:cNvSpPr txBox="1"/>
-          <p:nvPr/>
-        </p:nvSpPr>
-        <p:spPr>
-          <a:xfrm>
-            <a:off x="6629400" y="3845383"/>
-            <a:ext cx="4572000" cy="548640"/>
-          </a:xfrm>
-          <a:prstGeom prst="rect">
-            <a:avLst/>
-          </a:prstGeom>
-          <a:noFill/>
-        </p:spPr>
-        <p:txBody>
-          <a:bodyPr wrap="square" lIns="45720" rIns="45720" tIns="18288" bIns="18288" anchor="t">
-            <a:spAutoFit/>
-          </a:bodyPr>
-          <a:lstStyle/>
-          <a:p>
-            <a:pPr algn="l"/>
-            <a:r>
-              <a:rPr sz="2400" b="1" i="0">
-                <a:solidFill>
-                  <a:srgbClr val="1A1A1A"/>
-                </a:solidFill>
-                <a:latin typeface="Century Schoolbook"/>
-              </a:rPr>
-              <a:t>B.   </a:t>
-            </a:r>
-            <a:r>
-              <a:rPr sz="2400" b="0" i="0">
-                <a:solidFill>
-                  <a:srgbClr val="1A1A1A"/>
-                </a:solidFill>
-                <a:latin typeface="Century Schoolbook"/>
-              </a:rPr>
-              <a:t>35.5</a:t>
-            </a:r>
-          </a:p>
-        </p:txBody>
-      </p:sp>
-      <p:sp>
-        <p:nvSpPr>
-          <p:cNvPr id="12" name="TextBox 11"/>
-          <p:cNvSpPr txBox="1"/>
-          <p:nvPr/>
-        </p:nvSpPr>
-        <p:spPr>
-          <a:xfrm>
-            <a:off x="1874519" y="4531183"/>
-            <a:ext cx="4572000" cy="548640"/>
-          </a:xfrm>
-          <a:prstGeom prst="rect">
-            <a:avLst/>
-          </a:prstGeom>
-          <a:noFill/>
-        </p:spPr>
-        <p:txBody>
-          <a:bodyPr wrap="square" lIns="45720" rIns="45720" tIns="18288" bIns="18288" anchor="t">
-            <a:spAutoFit/>
-          </a:bodyPr>
-          <a:lstStyle/>
-          <a:p>
-            <a:pPr algn="l"/>
-            <a:r>
-              <a:rPr sz="2400" b="1" i="0">
-                <a:solidFill>
-                  <a:srgbClr val="1A1A1A"/>
-                </a:solidFill>
-                <a:latin typeface="Century Schoolbook"/>
-              </a:rPr>
-              <a:t>C.   </a:t>
-            </a:r>
-            <a:r>
-              <a:rPr sz="2400" b="0" i="0">
-                <a:solidFill>
-                  <a:srgbClr val="1A1A1A"/>
-                </a:solidFill>
-                <a:latin typeface="Century Schoolbook"/>
-              </a:rPr>
-              <a:t>0.5</a:t>
-            </a:r>
-          </a:p>
-        </p:txBody>
-      </p:sp>
-      <p:sp>
-        <p:nvSpPr>
-          <p:cNvPr id="13" name="TextBox 12"/>
-          <p:cNvSpPr txBox="1"/>
-          <p:nvPr/>
-        </p:nvSpPr>
-        <p:spPr>
-          <a:xfrm>
-            <a:off x="6629400" y="4531183"/>
-            <a:ext cx="4572000" cy="548640"/>
-          </a:xfrm>
-          <a:prstGeom prst="rect">
-            <a:avLst/>
-          </a:prstGeom>
-          <a:noFill/>
-        </p:spPr>
-        <p:txBody>
-          <a:bodyPr wrap="square" lIns="45720" rIns="45720" tIns="18288" bIns="18288" anchor="t">
-            <a:spAutoFit/>
-          </a:bodyPr>
-          <a:lstStyle/>
-          <a:p>
-            <a:pPr algn="l"/>
-            <a:r>
-              <a:rPr sz="2400" b="1" i="0">
-                <a:solidFill>
-                  <a:srgbClr val="1A1A1A"/>
-                </a:solidFill>
-                <a:latin typeface="Century Schoolbook"/>
-              </a:rPr>
-              <a:t>D.   </a:t>
-            </a:r>
-            <a:r>
-              <a:rPr sz="2400" b="0" i="0">
-                <a:solidFill>
-                  <a:srgbClr val="1A1A1A"/>
-                </a:solidFill>
-                <a:latin typeface="Century Schoolbook"/>
-              </a:rPr>
-              <a:t>256</a:t>
-            </a:r>
-          </a:p>
-        </p:txBody>
-      </p:sp>
-      <p:sp>
-        <p:nvSpPr>
-          <p:cNvPr id="14" name="TextBox 13"/>
-          <p:cNvSpPr txBox="1"/>
-          <p:nvPr/>
-        </p:nvSpPr>
-        <p:spPr>
-          <a:xfrm>
-            <a:off x="777240" y="5537023"/>
-            <a:ext cx="10607040" cy="548640"/>
-          </a:xfrm>
-          <a:prstGeom prst="rect">
-            <a:avLst/>
-          </a:prstGeom>
-          <a:noFill/>
-        </p:spPr>
-        <p:txBody>
-          <a:bodyPr wrap="square" lIns="45720" rIns="45720" tIns="18288" bIns="18288" anchor="t">
-            <a:spAutoFit/>
-          </a:bodyPr>
-          <a:lstStyle/>
-          <a:p>
-            <a:pPr algn="ctr"/>
-            <a:r>
-              <a:rPr sz="3200" b="1" i="0">
-                <a:solidFill>
-                  <a:srgbClr val="9E1B32"/>
-                </a:solidFill>
-                <a:latin typeface="Century Schoolbook"/>
+                <a:latin typeface="Lexend"/>
               </a:rPr>
               <a:t>Answer:   A — 4</a:t>
             </a:r>
@@ -10039,11 +10670,11 @@
           <a:p>
             <a:pPr algn="l"/>
             <a:r>
-              <a:rPr sz="3400" b="1" i="0">
+              <a:rPr sz="3229" b="1" i="0">
                 <a:solidFill>
                   <a:srgbClr val="1A1A1A"/>
                 </a:solidFill>
-                <a:latin typeface="Century Schoolbook"/>
+                <a:latin typeface="Lexend"/>
               </a:rPr>
               <a:t>Whiteboards   ·   Question 7 of 9</a:t>
             </a:r>
@@ -10179,11 +10810,11 @@
           <a:p>
             <a:pPr algn="l"/>
             <a:r>
-              <a:rPr sz="1100" b="0" i="1">
+              <a:rPr sz="1040" b="0" i="0">
                 <a:solidFill>
                   <a:srgbClr val="6B6B6B"/>
                 </a:solidFill>
-                <a:latin typeface="Century Schoolbook"/>
+                <a:latin typeface="Lexend"/>
               </a:rPr>
               <a:t>Grade 7 Accelerated · Unit 4 · Lesson 6 — Order of Operations with Radicals</a:t>
             </a:r>
@@ -10214,11 +10845,11 @@
           <a:p>
             <a:pPr algn="r"/>
             <a:r>
-              <a:rPr sz="1100" b="0" i="0">
+              <a:rPr sz="1040" b="0" i="0">
                 <a:solidFill>
                   <a:srgbClr val="6B6B6B"/>
                 </a:solidFill>
-                <a:latin typeface="Century Schoolbook"/>
+                <a:latin typeface="Lexend"/>
               </a:rPr>
               <a:t>27</a:t>
             </a:r>
@@ -10227,7 +10858,7 @@
       </p:sp>
       <p:pic>
         <p:nvPicPr>
-          <p:cNvPr id="8" name="Picture 7" descr="d135167dce315e91.png"/>
+          <p:cNvPr id="8" name="Picture 7" descr="6ce0d9f4982b6995.png"/>
           <p:cNvPicPr>
             <a:picLocks noChangeAspect="1"/>
           </p:cNvPicPr>
@@ -10241,8 +10872,8 @@
         </p:blipFill>
         <p:spPr>
           <a:xfrm>
-            <a:off x="5123687" y="2196083"/>
-            <a:ext cx="1914144" cy="408432"/>
+            <a:off x="5175503" y="2194560"/>
+            <a:ext cx="1810512" cy="411480"/>
           </a:xfrm>
           <a:prstGeom prst="rect">
             <a:avLst/>
@@ -10273,11 +10904,11 @@
           <a:p>
             <a:pPr algn="ctr"/>
             <a:r>
-              <a:rPr sz="2600" b="1" i="0">
+              <a:rPr sz="2470" b="1" i="0">
                 <a:solidFill>
                   <a:srgbClr val="1A1A1A"/>
                 </a:solidFill>
-                <a:latin typeface="Century Schoolbook"/>
+                <a:latin typeface="Lexend"/>
               </a:rPr>
               <a:t>Answer it.</a:t>
             </a:r>
@@ -10326,11 +10957,11 @@
           <a:p>
             <a:pPr algn="l"/>
             <a:r>
-              <a:rPr sz="3400" b="1" i="0">
+              <a:rPr sz="3229" b="1" i="0">
                 <a:solidFill>
                   <a:srgbClr val="1A1A1A"/>
                 </a:solidFill>
-                <a:latin typeface="Century Schoolbook"/>
+                <a:latin typeface="Lexend"/>
               </a:rPr>
               <a:t>Whiteboards   ·   Question 7 of 9</a:t>
             </a:r>
@@ -10466,11 +11097,11 @@
           <a:p>
             <a:pPr algn="l"/>
             <a:r>
-              <a:rPr sz="1100" b="0" i="1">
+              <a:rPr sz="1040" b="0" i="0">
                 <a:solidFill>
                   <a:srgbClr val="6B6B6B"/>
                 </a:solidFill>
-                <a:latin typeface="Century Schoolbook"/>
+                <a:latin typeface="Lexend"/>
               </a:rPr>
               <a:t>Grade 7 Accelerated · Unit 4 · Lesson 6 — Order of Operations with Radicals</a:t>
             </a:r>
@@ -10501,11 +11132,11 @@
           <a:p>
             <a:pPr algn="r"/>
             <a:r>
-              <a:rPr sz="1100" b="0" i="0">
+              <a:rPr sz="1040" b="0" i="0">
                 <a:solidFill>
                   <a:srgbClr val="6B6B6B"/>
                 </a:solidFill>
-                <a:latin typeface="Century Schoolbook"/>
+                <a:latin typeface="Lexend"/>
               </a:rPr>
               <a:t>28</a:t>
             </a:r>
@@ -10514,7 +11145,7 @@
       </p:sp>
       <p:pic>
         <p:nvPicPr>
-          <p:cNvPr id="8" name="Picture 7" descr="43cce3e34e7bfbfb.png"/>
+          <p:cNvPr id="8" name="Picture 7" descr="74e67f9444e64508.png"/>
           <p:cNvPicPr>
             <a:picLocks noChangeAspect="1"/>
           </p:cNvPicPr>
@@ -10528,17 +11159,124 @@
         </p:blipFill>
         <p:spPr>
           <a:xfrm>
-            <a:off x="5122164" y="2106168"/>
-            <a:ext cx="1917192" cy="405384"/>
+            <a:off x="5173980" y="2103120"/>
+            <a:ext cx="1813560" cy="411480"/>
           </a:xfrm>
           <a:prstGeom prst="rect">
             <a:avLst/>
           </a:prstGeom>
         </p:spPr>
       </p:pic>
-      <p:sp>
-        <p:nvSpPr>
-          <p:cNvPr id="9" name="TextBox 8"/>
+      <p:pic>
+        <p:nvPicPr>
+          <p:cNvPr id="9" name="Picture 8" descr="068d9a19700e1389.png"/>
+          <p:cNvPicPr>
+            <a:picLocks noChangeAspect="1"/>
+          </p:cNvPicPr>
+          <p:nvPr/>
+        </p:nvPicPr>
+        <p:blipFill>
+          <a:blip r:embed="rId3"/>
+          <a:stretch>
+            <a:fillRect/>
+          </a:stretch>
+        </p:blipFill>
+        <p:spPr>
+          <a:xfrm>
+            <a:off x="3055152" y="2938272"/>
+            <a:ext cx="1066800" cy="259080"/>
+          </a:xfrm>
+          <a:prstGeom prst="rect">
+            <a:avLst/>
+          </a:prstGeom>
+        </p:spPr>
+      </p:pic>
+      <p:sp>
+        <p:nvSpPr>
+          <p:cNvPr id="10" name="TextBox 9"/>
+          <p:cNvSpPr txBox="1"/>
+          <p:nvPr/>
+        </p:nvSpPr>
+        <p:spPr>
+          <a:xfrm>
+            <a:off x="4121952" y="2839212"/>
+            <a:ext cx="5234351" cy="457200"/>
+          </a:xfrm>
+          <a:prstGeom prst="rect">
+            <a:avLst/>
+          </a:prstGeom>
+          <a:noFill/>
+        </p:spPr>
+        <p:txBody>
+          <a:bodyPr wrap="none" lIns="45720" rIns="45720" tIns="18288" bIns="18288" anchor="ctr">
+            <a:noAutofit/>
+          </a:bodyPr>
+          <a:lstStyle/>
+          <a:p>
+            <a:pPr algn="l"/>
+            <a:r>
+              <a:rPr sz="2330" b="0" i="0">
+                <a:solidFill>
+                  <a:srgbClr val="1A1A1A"/>
+                </a:solidFill>
+                <a:latin typeface="Lexend"/>
+              </a:rPr>
+              <a:t>     (the exponent is on the 2 only)</a:t>
+            </a:r>
+          </a:p>
+        </p:txBody>
+      </p:sp>
+      <p:pic>
+        <p:nvPicPr>
+          <p:cNvPr id="11" name="Picture 10" descr="a8317bc2e11e2fea.png"/>
+          <p:cNvPicPr>
+            <a:picLocks noChangeAspect="1"/>
+          </p:cNvPicPr>
+          <p:nvPr/>
+        </p:nvPicPr>
+        <p:blipFill>
+          <a:blip r:embed="rId4"/>
+          <a:stretch>
+            <a:fillRect/>
+          </a:stretch>
+        </p:blipFill>
+        <p:spPr>
+          <a:xfrm>
+            <a:off x="3055152" y="3413759"/>
+            <a:ext cx="1115568" cy="313944"/>
+          </a:xfrm>
+          <a:prstGeom prst="rect">
+            <a:avLst/>
+          </a:prstGeom>
+        </p:spPr>
+      </p:pic>
+      <p:pic>
+        <p:nvPicPr>
+          <p:cNvPr id="12" name="Picture 11" descr="ab059e2234c19043.png"/>
+          <p:cNvPicPr>
+            <a:picLocks noChangeAspect="1"/>
+          </p:cNvPicPr>
+          <p:nvPr/>
+        </p:nvPicPr>
+        <p:blipFill>
+          <a:blip r:embed="rId5"/>
+          <a:stretch>
+            <a:fillRect/>
+          </a:stretch>
+        </p:blipFill>
+        <p:spPr>
+          <a:xfrm>
+            <a:off x="3055152" y="3966971"/>
+            <a:ext cx="1252728" cy="213360"/>
+          </a:xfrm>
+          <a:prstGeom prst="rect">
+            <a:avLst/>
+          </a:prstGeom>
+        </p:spPr>
+      </p:pic>
+      <p:sp>
+        <p:nvSpPr>
+          <p:cNvPr id="13" name="TextBox 12"/>
           <p:cNvSpPr txBox="1"/>
           <p:nvPr/>
         </p:nvSpPr>
@@ -10560,11 +11298,11 @@
           <a:p>
             <a:pPr algn="ctr"/>
             <a:r>
-              <a:rPr sz="3200" b="1" i="0">
+              <a:rPr sz="3040" b="1" i="0">
                 <a:solidFill>
                   <a:srgbClr val="9E1B32"/>
                 </a:solidFill>
-                <a:latin typeface="Century Schoolbook"/>
+                <a:latin typeface="Lexend"/>
               </a:rPr>
               <a:t>Answer:   0</a:t>
             </a:r>
@@ -10613,11 +11351,11 @@
           <a:p>
             <a:pPr algn="l"/>
             <a:r>
-              <a:rPr sz="3400" b="1" i="0">
+              <a:rPr sz="3229" b="1" i="0">
                 <a:solidFill>
                   <a:srgbClr val="1A1A1A"/>
                 </a:solidFill>
-                <a:latin typeface="Century Schoolbook"/>
+                <a:latin typeface="Lexend"/>
               </a:rPr>
               <a:t>Whiteboards   ·   Question 8 of 9</a:t>
             </a:r>
@@ -10753,11 +11491,11 @@
           <a:p>
             <a:pPr algn="l"/>
             <a:r>
-              <a:rPr sz="1100" b="0" i="1">
+              <a:rPr sz="1040" b="0" i="0">
                 <a:solidFill>
                   <a:srgbClr val="6B6B6B"/>
                 </a:solidFill>
-                <a:latin typeface="Century Schoolbook"/>
+                <a:latin typeface="Lexend"/>
               </a:rPr>
               <a:t>Grade 7 Accelerated · Unit 4 · Lesson 6 — Order of Operations with Radicals</a:t>
             </a:r>
@@ -10788,11 +11526,11 @@
           <a:p>
             <a:pPr algn="r"/>
             <a:r>
-              <a:rPr sz="1100" b="0" i="0">
+              <a:rPr sz="1040" b="0" i="0">
                 <a:solidFill>
                   <a:srgbClr val="6B6B6B"/>
                 </a:solidFill>
-                <a:latin typeface="Century Schoolbook"/>
+                <a:latin typeface="Lexend"/>
               </a:rPr>
               <a:t>29</a:t>
             </a:r>
@@ -10801,7 +11539,7 @@
       </p:sp>
       <p:pic>
         <p:nvPicPr>
-          <p:cNvPr id="8" name="Picture 7" descr="cafb332c72f7d831.png"/>
+          <p:cNvPr id="8" name="Picture 7" descr="f06e7d140296346b.png"/>
           <p:cNvPicPr>
             <a:picLocks noChangeAspect="1"/>
           </p:cNvPicPr>
@@ -10815,8 +11553,8 @@
         </p:blipFill>
         <p:spPr>
           <a:xfrm>
-            <a:off x="4794503" y="2194560"/>
-            <a:ext cx="2572512" cy="676656"/>
+            <a:off x="4832603" y="2194560"/>
+            <a:ext cx="2496312" cy="667512"/>
           </a:xfrm>
           <a:prstGeom prst="rect">
             <a:avLst/>
@@ -10847,11 +11585,11 @@
           <a:p>
             <a:pPr algn="ctr"/>
             <a:r>
-              <a:rPr sz="2600" b="1" i="0">
+              <a:rPr sz="2470" b="1" i="0">
                 <a:solidFill>
                   <a:srgbClr val="1A1A1A"/>
                 </a:solidFill>
-                <a:latin typeface="Century Schoolbook"/>
+                <a:latin typeface="Lexend"/>
               </a:rPr>
               <a:t>Answer it.</a:t>
             </a:r>
@@ -10900,11 +11638,11 @@
           <a:p>
             <a:pPr algn="l"/>
             <a:r>
-              <a:rPr sz="3600" b="1" i="0">
+              <a:rPr sz="3420" b="1" i="0">
                 <a:solidFill>
                   <a:srgbClr val="1A1A1A"/>
                 </a:solidFill>
-                <a:latin typeface="Century Schoolbook"/>
+                <a:latin typeface="Lexend"/>
               </a:rPr>
               <a:t>Warm-Up</a:t>
             </a:r>
@@ -11040,11 +11778,11 @@
           <a:p>
             <a:pPr algn="l"/>
             <a:r>
-              <a:rPr sz="1100" b="0" i="1">
+              <a:rPr sz="1040" b="0" i="0">
                 <a:solidFill>
                   <a:srgbClr val="6B6B6B"/>
                 </a:solidFill>
-                <a:latin typeface="Century Schoolbook"/>
+                <a:latin typeface="Lexend"/>
               </a:rPr>
               <a:t>Grade 7 Accelerated · Unit 4 · Lesson 6 — Order of Operations with Radicals</a:t>
             </a:r>
@@ -11075,11 +11813,11 @@
           <a:p>
             <a:pPr algn="r"/>
             <a:r>
-              <a:rPr sz="1100" b="0" i="0">
+              <a:rPr sz="1040" b="0" i="0">
                 <a:solidFill>
                   <a:srgbClr val="6B6B6B"/>
                 </a:solidFill>
-                <a:latin typeface="Century Schoolbook"/>
+                <a:latin typeface="Lexend"/>
               </a:rPr>
               <a:t>3</a:t>
             </a:r>
@@ -11095,7 +11833,7 @@
         <p:spPr>
           <a:xfrm>
             <a:off x="1874519" y="1440180"/>
-            <a:ext cx="720605" cy="457200"/>
+            <a:ext cx="671561" cy="457200"/>
           </a:xfrm>
           <a:prstGeom prst="rect">
             <a:avLst/>
@@ -11110,11 +11848,11 @@
           <a:p>
             <a:pPr algn="l"/>
             <a:r>
-              <a:rPr sz="2300" b="0" i="0">
+              <a:rPr sz="2180" b="0" i="0">
                 <a:solidFill>
                   <a:srgbClr val="1A1A1A"/>
                 </a:solidFill>
-                <a:latin typeface="Century Schoolbook"/>
+                <a:latin typeface="Lexend"/>
               </a:rPr>
               <a:t>1.   </a:t>
             </a:r>
@@ -11123,7 +11861,7 @@
       </p:sp>
       <p:pic>
         <p:nvPicPr>
-          <p:cNvPr id="9" name="Picture 8" descr="535c314b8c201a80.png"/>
+          <p:cNvPr id="9" name="Picture 8" descr="380cdbfed5fb5920.png"/>
           <p:cNvPicPr>
             <a:picLocks noChangeAspect="1"/>
           </p:cNvPicPr>
@@ -11137,8 +11875,8 @@
         </p:blipFill>
         <p:spPr>
           <a:xfrm>
-            <a:off x="2457965" y="1464564"/>
-            <a:ext cx="1143000" cy="408432"/>
+            <a:off x="2408921" y="1473708"/>
+            <a:ext cx="1118616" cy="390144"/>
           </a:xfrm>
           <a:prstGeom prst="rect">
             <a:avLst/>
@@ -11153,8 +11891,8 @@
         </p:nvSpPr>
         <p:spPr>
           <a:xfrm>
-            <a:off x="4149605" y="1440180"/>
-            <a:ext cx="388052" cy="457200"/>
+            <a:off x="4076177" y="1440180"/>
+            <a:ext cx="405042" cy="457200"/>
           </a:xfrm>
           <a:prstGeom prst="rect">
             <a:avLst/>
@@ -11169,11 +11907,11 @@
           <a:p>
             <a:pPr algn="l"/>
             <a:r>
-              <a:rPr sz="2300" b="1" i="0">
+              <a:rPr sz="2180" b="1" i="0">
                 <a:solidFill>
                   <a:srgbClr val="9E1B32"/>
                 </a:solidFill>
-                <a:latin typeface="Century Schoolbook"/>
+                <a:latin typeface="Lexend"/>
               </a:rPr>
               <a:t>4</a:t>
             </a:r>
@@ -11189,7 +11927,7 @@
         <p:spPr>
           <a:xfrm>
             <a:off x="1874519" y="2052828"/>
-            <a:ext cx="6812791" cy="457200"/>
+            <a:ext cx="6690387" cy="457200"/>
           </a:xfrm>
           <a:prstGeom prst="rect">
             <a:avLst/>
@@ -11204,11 +11942,11 @@
           <a:p>
             <a:pPr algn="l"/>
             <a:r>
-              <a:rPr sz="2300" b="0" i="0">
+              <a:rPr sz="2180" b="0" i="0">
                 <a:solidFill>
                   <a:srgbClr val="1A1A1A"/>
                 </a:solidFill>
-                <a:latin typeface="Century Schoolbook"/>
+                <a:latin typeface="Lexend"/>
               </a:rPr>
               <a:t>2.   How many significant digits are in  1.020 ?</a:t>
             </a:r>
@@ -11223,8 +11961,8 @@
         </p:nvSpPr>
         <p:spPr>
           <a:xfrm>
-            <a:off x="9098791" y="2052828"/>
-            <a:ext cx="388052" cy="457200"/>
+            <a:off x="8976387" y="2052828"/>
+            <a:ext cx="405042" cy="457200"/>
           </a:xfrm>
           <a:prstGeom prst="rect">
             <a:avLst/>
@@ -11239,11 +11977,11 @@
           <a:p>
             <a:pPr algn="l"/>
             <a:r>
-              <a:rPr sz="2300" b="1" i="0">
+              <a:rPr sz="2180" b="1" i="0">
                 <a:solidFill>
                   <a:srgbClr val="9E1B32"/>
                 </a:solidFill>
-                <a:latin typeface="Century Schoolbook"/>
+                <a:latin typeface="Lexend"/>
               </a:rPr>
               <a:t>4</a:t>
             </a:r>
@@ -11258,8 +11996,8 @@
         </p:nvSpPr>
         <p:spPr>
           <a:xfrm>
-            <a:off x="1874519" y="2737104"/>
-            <a:ext cx="3064939" cy="457200"/>
+            <a:off x="1874519" y="2731008"/>
+            <a:ext cx="2930351" cy="457200"/>
           </a:xfrm>
           <a:prstGeom prst="rect">
             <a:avLst/>
@@ -11274,11 +12012,11 @@
           <a:p>
             <a:pPr algn="l"/>
             <a:r>
-              <a:rPr sz="2300" b="0" i="0">
+              <a:rPr sz="2180" b="0" i="0">
                 <a:solidFill>
                   <a:srgbClr val="1A1A1A"/>
                 </a:solidFill>
-                <a:latin typeface="Century Schoolbook"/>
+                <a:latin typeface="Lexend"/>
               </a:rPr>
               <a:t>3.   Find the value:  </a:t>
             </a:r>
@@ -11287,7 +12025,7 @@
       </p:sp>
       <p:pic>
         <p:nvPicPr>
-          <p:cNvPr id="14" name="Picture 13" descr="70fd4f7c195b27fd.png"/>
+          <p:cNvPr id="14" name="Picture 13" descr="f3c8135f85cfec4f.png"/>
           <p:cNvPicPr>
             <a:picLocks noChangeAspect="1"/>
           </p:cNvPicPr>
@@ -11301,8 +12039,8 @@
         </p:blipFill>
         <p:spPr>
           <a:xfrm>
-            <a:off x="4802299" y="2688336"/>
-            <a:ext cx="795528" cy="554736"/>
+            <a:off x="4667711" y="2688336"/>
+            <a:ext cx="765048" cy="542544"/>
           </a:xfrm>
           <a:prstGeom prst="rect">
             <a:avLst/>
@@ -11317,8 +12055,8 @@
         </p:nvSpPr>
         <p:spPr>
           <a:xfrm>
-            <a:off x="6146467" y="2665476"/>
-            <a:ext cx="651876" cy="457200"/>
+            <a:off x="5981399" y="2665476"/>
+            <a:ext cx="717421" cy="457200"/>
           </a:xfrm>
           <a:prstGeom prst="rect">
             <a:avLst/>
@@ -11333,11 +12071,11 @@
           <a:p>
             <a:pPr algn="l"/>
             <a:r>
-              <a:rPr sz="2300" b="1" i="0">
+              <a:rPr sz="2180" b="1" i="0">
                 <a:solidFill>
                   <a:srgbClr val="9E1B32"/>
                 </a:solidFill>
-                <a:latin typeface="Century Schoolbook"/>
+                <a:latin typeface="Lexend"/>
               </a:rPr>
               <a:t>9/4</a:t>
             </a:r>
@@ -11352,8 +12090,8 @@
         </p:nvSpPr>
         <p:spPr>
           <a:xfrm>
-            <a:off x="1874519" y="3421380"/>
-            <a:ext cx="2276518" cy="457200"/>
+            <a:off x="1874519" y="3409188"/>
+            <a:ext cx="2185597" cy="457200"/>
           </a:xfrm>
           <a:prstGeom prst="rect">
             <a:avLst/>
@@ -11368,11 +12106,11 @@
           <a:p>
             <a:pPr algn="l"/>
             <a:r>
-              <a:rPr sz="2300" b="0" i="0">
+              <a:rPr sz="2180" b="0" i="0">
                 <a:solidFill>
                   <a:srgbClr val="1A1A1A"/>
                 </a:solidFill>
-                <a:latin typeface="Century Schoolbook"/>
+                <a:latin typeface="Lexend"/>
               </a:rPr>
               <a:t>4.   Evaluate:  </a:t>
             </a:r>
@@ -11381,7 +12119,7 @@
       </p:sp>
       <p:pic>
         <p:nvPicPr>
-          <p:cNvPr id="17" name="Picture 16" descr="9720c4bedb33ef6c.png"/>
+          <p:cNvPr id="17" name="Picture 16" descr="8de25ca1bc5f4d4f.png"/>
           <p:cNvPicPr>
             <a:picLocks noChangeAspect="1"/>
           </p:cNvPicPr>
@@ -11395,8 +12133,8 @@
         </p:blipFill>
         <p:spPr>
           <a:xfrm>
-            <a:off x="4013878" y="3534156"/>
-            <a:ext cx="1088136" cy="231648"/>
+            <a:off x="3922957" y="3525012"/>
+            <a:ext cx="1127760" cy="225552"/>
           </a:xfrm>
           <a:prstGeom prst="rect">
             <a:avLst/>
@@ -11411,8 +12149,8 @@
         </p:nvSpPr>
         <p:spPr>
           <a:xfrm>
-            <a:off x="5650654" y="3421380"/>
-            <a:ext cx="388052" cy="457200"/>
+            <a:off x="5599357" y="3409188"/>
+            <a:ext cx="386509" cy="457200"/>
           </a:xfrm>
           <a:prstGeom prst="rect">
             <a:avLst/>
@@ -11427,11 +12165,11 @@
           <a:p>
             <a:pPr algn="l"/>
             <a:r>
-              <a:rPr sz="2300" b="1" i="0">
+              <a:rPr sz="2180" b="1" i="0">
                 <a:solidFill>
                   <a:srgbClr val="9E1B32"/>
                 </a:solidFill>
-                <a:latin typeface="Century Schoolbook"/>
+                <a:latin typeface="Lexend"/>
               </a:rPr>
               <a:t>8</a:t>
             </a:r>
@@ -11480,11 +12218,11 @@
           <a:p>
             <a:pPr algn="l"/>
             <a:r>
-              <a:rPr sz="3400" b="1" i="0">
+              <a:rPr sz="3229" b="1" i="0">
                 <a:solidFill>
                   <a:srgbClr val="1A1A1A"/>
                 </a:solidFill>
-                <a:latin typeface="Century Schoolbook"/>
+                <a:latin typeface="Lexend"/>
               </a:rPr>
               <a:t>Whiteboards   ·   Question 8 of 9</a:t>
             </a:r>
@@ -11620,11 +12358,11 @@
           <a:p>
             <a:pPr algn="l"/>
             <a:r>
-              <a:rPr sz="1100" b="0" i="1">
+              <a:rPr sz="1040" b="0" i="0">
                 <a:solidFill>
                   <a:srgbClr val="6B6B6B"/>
                 </a:solidFill>
-                <a:latin typeface="Century Schoolbook"/>
+                <a:latin typeface="Lexend"/>
               </a:rPr>
               <a:t>Grade 7 Accelerated · Unit 4 · Lesson 6 — Order of Operations with Radicals</a:t>
             </a:r>
@@ -11655,11 +12393,11 @@
           <a:p>
             <a:pPr algn="r"/>
             <a:r>
-              <a:rPr sz="1100" b="0" i="0">
+              <a:rPr sz="1040" b="0" i="0">
                 <a:solidFill>
                   <a:srgbClr val="6B6B6B"/>
                 </a:solidFill>
-                <a:latin typeface="Century Schoolbook"/>
+                <a:latin typeface="Lexend"/>
               </a:rPr>
               <a:t>30</a:t>
             </a:r>
@@ -11668,7 +12406,7 @@
       </p:sp>
       <p:pic>
         <p:nvPicPr>
-          <p:cNvPr id="8" name="Picture 7" descr="11864b2915a66941.png"/>
+          <p:cNvPr id="8" name="Picture 7" descr="3edde1adf91d2fc9.png"/>
           <p:cNvPicPr>
             <a:picLocks noChangeAspect="1"/>
           </p:cNvPicPr>
@@ -11682,23 +12420,154 @@
         </p:blipFill>
         <p:spPr>
           <a:xfrm>
-            <a:off x="4792980" y="2103120"/>
-            <a:ext cx="2575560" cy="676656"/>
+            <a:off x="4831080" y="2103120"/>
+            <a:ext cx="2499360" cy="673608"/>
           </a:xfrm>
           <a:prstGeom prst="rect">
             <a:avLst/>
           </a:prstGeom>
         </p:spPr>
       </p:pic>
-      <p:sp>
-        <p:nvSpPr>
-          <p:cNvPr id="9" name="TextBox 8"/>
-          <p:cNvSpPr txBox="1"/>
-          <p:nvPr/>
-        </p:nvSpPr>
-        <p:spPr>
-          <a:xfrm>
-            <a:off x="777240" y="4663440"/>
+      <p:pic>
+        <p:nvPicPr>
+          <p:cNvPr id="9" name="Picture 8" descr="dcdd245aeaaf1b55.png"/>
+          <p:cNvPicPr>
+            <a:picLocks noChangeAspect="1"/>
+          </p:cNvPicPr>
+          <p:nvPr/>
+        </p:nvPicPr>
+        <p:blipFill>
+          <a:blip r:embed="rId3"/>
+          <a:stretch>
+            <a:fillRect/>
+          </a:stretch>
+        </p:blipFill>
+        <p:spPr>
+          <a:xfrm>
+            <a:off x="4417755" y="3124200"/>
+            <a:ext cx="1057656" cy="515112"/>
+          </a:xfrm>
+          <a:prstGeom prst="rect">
+            <a:avLst/>
+          </a:prstGeom>
+        </p:spPr>
+      </p:pic>
+      <p:sp>
+        <p:nvSpPr>
+          <p:cNvPr id="10" name="TextBox 9"/>
+          <p:cNvSpPr txBox="1"/>
+          <p:nvPr/>
+        </p:nvSpPr>
+        <p:spPr>
+          <a:xfrm>
+            <a:off x="5475411" y="3153156"/>
+            <a:ext cx="1670944" cy="457200"/>
+          </a:xfrm>
+          <a:prstGeom prst="rect">
+            <a:avLst/>
+          </a:prstGeom>
+          <a:noFill/>
+        </p:spPr>
+        <p:txBody>
+          <a:bodyPr wrap="none" lIns="45720" rIns="45720" tIns="18288" bIns="18288" anchor="ctr">
+            <a:noAutofit/>
+          </a:bodyPr>
+          <a:lstStyle/>
+          <a:p>
+            <a:pPr algn="l"/>
+            <a:r>
+              <a:rPr sz="2330" b="0" i="0">
+                <a:solidFill>
+                  <a:srgbClr val="1A1A1A"/>
+                </a:solidFill>
+                <a:latin typeface="Lexend"/>
+              </a:rPr>
+              <a:t>     and     </a:t>
+            </a:r>
+          </a:p>
+        </p:txBody>
+      </p:sp>
+      <p:pic>
+        <p:nvPicPr>
+          <p:cNvPr id="11" name="Picture 10" descr="91dc20afadb1aea1.png"/>
+          <p:cNvPicPr>
+            <a:picLocks noChangeAspect="1"/>
+          </p:cNvPicPr>
+          <p:nvPr/>
+        </p:nvPicPr>
+        <p:blipFill>
+          <a:blip r:embed="rId4"/>
+          <a:stretch>
+            <a:fillRect/>
+          </a:stretch>
+        </p:blipFill>
+        <p:spPr>
+          <a:xfrm>
+            <a:off x="7009196" y="3124200"/>
+            <a:ext cx="829056" cy="515112"/>
+          </a:xfrm>
+          <a:prstGeom prst="rect">
+            <a:avLst/>
+          </a:prstGeom>
+        </p:spPr>
+      </p:pic>
+      <p:pic>
+        <p:nvPicPr>
+          <p:cNvPr id="12" name="Picture 11" descr="116226914234f125.png"/>
+          <p:cNvPicPr>
+            <a:picLocks noChangeAspect="1"/>
+          </p:cNvPicPr>
+          <p:nvPr/>
+        </p:nvPicPr>
+        <p:blipFill>
+          <a:blip r:embed="rId5"/>
+          <a:stretch>
+            <a:fillRect/>
+          </a:stretch>
+        </p:blipFill>
+        <p:spPr>
+          <a:xfrm>
+            <a:off x="4417755" y="3730752"/>
+            <a:ext cx="2569464" cy="515112"/>
+          </a:xfrm>
+          <a:prstGeom prst="rect">
+            <a:avLst/>
+          </a:prstGeom>
+        </p:spPr>
+      </p:pic>
+      <p:pic>
+        <p:nvPicPr>
+          <p:cNvPr id="13" name="Picture 12" descr="ea27676c0bb85836.png"/>
+          <p:cNvPicPr>
+            <a:picLocks noChangeAspect="1"/>
+          </p:cNvPicPr>
+          <p:nvPr/>
+        </p:nvPicPr>
+        <p:blipFill>
+          <a:blip r:embed="rId6"/>
+          <a:stretch>
+            <a:fillRect/>
+          </a:stretch>
+        </p:blipFill>
+        <p:spPr>
+          <a:xfrm>
+            <a:off x="4417755" y="4337304"/>
+            <a:ext cx="1481328" cy="512064"/>
+          </a:xfrm>
+          <a:prstGeom prst="rect">
+            <a:avLst/>
+          </a:prstGeom>
+        </p:spPr>
+      </p:pic>
+      <p:sp>
+        <p:nvSpPr>
+          <p:cNvPr id="14" name="TextBox 13"/>
+          <p:cNvSpPr txBox="1"/>
+          <p:nvPr/>
+        </p:nvSpPr>
+        <p:spPr>
+          <a:xfrm>
+            <a:off x="777240" y="4986528"/>
             <a:ext cx="10607040" cy="548640"/>
           </a:xfrm>
           <a:prstGeom prst="rect">
@@ -11714,11 +12583,11 @@
           <a:p>
             <a:pPr algn="ctr"/>
             <a:r>
-              <a:rPr sz="3200" b="1" i="0">
+              <a:rPr sz="3040" b="1" i="0">
                 <a:solidFill>
                   <a:srgbClr val="9E1B32"/>
                 </a:solidFill>
-                <a:latin typeface="Century Schoolbook"/>
+                <a:latin typeface="Lexend"/>
               </a:rPr>
               <a:t>Answer:   17/6</a:t>
             </a:r>
@@ -11767,11 +12636,11 @@
           <a:p>
             <a:pPr algn="l"/>
             <a:r>
-              <a:rPr sz="3400" b="1" i="0">
+              <a:rPr sz="3229" b="1" i="0">
                 <a:solidFill>
                   <a:srgbClr val="1A1A1A"/>
                 </a:solidFill>
-                <a:latin typeface="Century Schoolbook"/>
+                <a:latin typeface="Lexend"/>
               </a:rPr>
               <a:t>Whiteboards   ·   Question 9 of 9</a:t>
             </a:r>
@@ -11907,11 +12776,11 @@
           <a:p>
             <a:pPr algn="l"/>
             <a:r>
-              <a:rPr sz="1100" b="0" i="1">
+              <a:rPr sz="1040" b="0" i="0">
                 <a:solidFill>
                   <a:srgbClr val="6B6B6B"/>
                 </a:solidFill>
-                <a:latin typeface="Century Schoolbook"/>
+                <a:latin typeface="Lexend"/>
               </a:rPr>
               <a:t>Grade 7 Accelerated · Unit 4 · Lesson 6 — Order of Operations with Radicals</a:t>
             </a:r>
@@ -11942,11 +12811,11 @@
           <a:p>
             <a:pPr algn="r"/>
             <a:r>
-              <a:rPr sz="1100" b="0" i="0">
+              <a:rPr sz="1040" b="0" i="0">
                 <a:solidFill>
                   <a:srgbClr val="6B6B6B"/>
                 </a:solidFill>
-                <a:latin typeface="Century Schoolbook"/>
+                <a:latin typeface="Lexend"/>
               </a:rPr>
               <a:t>31</a:t>
             </a:r>
@@ -11961,8 +12830,8 @@
         </p:nvSpPr>
         <p:spPr>
           <a:xfrm>
-            <a:off x="2041691" y="2232660"/>
-            <a:ext cx="3068147" cy="457200"/>
+            <a:off x="2055986" y="2215896"/>
+            <a:ext cx="3126680" cy="457200"/>
           </a:xfrm>
           <a:prstGeom prst="rect">
             <a:avLst/>
@@ -11977,11 +12846,11 @@
           <a:p>
             <a:pPr algn="l"/>
             <a:r>
-              <a:rPr sz="2600" b="0" i="0">
+              <a:rPr sz="2470" b="0" i="0">
                 <a:solidFill>
                   <a:srgbClr val="1A1A1A"/>
                 </a:solidFill>
-                <a:latin typeface="Century Schoolbook"/>
+                <a:latin typeface="Lexend"/>
               </a:rPr>
               <a:t>Roscoe says that  </a:t>
             </a:r>
@@ -11990,7 +12859,7 @@
       </p:sp>
       <p:pic>
         <p:nvPicPr>
-          <p:cNvPr id="9" name="Picture 8" descr="71ab7e8131bab814.png"/>
+          <p:cNvPr id="9" name="Picture 8" descr="c79d4acb3ae0bdb0.png"/>
           <p:cNvPicPr>
             <a:picLocks noChangeAspect="1"/>
           </p:cNvPicPr>
@@ -12004,8 +12873,8 @@
         </p:blipFill>
         <p:spPr>
           <a:xfrm>
-            <a:off x="4972679" y="2194560"/>
-            <a:ext cx="1969008" cy="533400"/>
+            <a:off x="5045507" y="2194560"/>
+            <a:ext cx="1901952" cy="499871"/>
           </a:xfrm>
           <a:prstGeom prst="rect">
             <a:avLst/>
@@ -12020,8 +12889,8 @@
         </p:nvSpPr>
         <p:spPr>
           <a:xfrm>
-            <a:off x="6941687" y="2232660"/>
-            <a:ext cx="3315301" cy="457200"/>
+            <a:off x="6947459" y="2215896"/>
+            <a:ext cx="3295234" cy="457200"/>
           </a:xfrm>
           <a:prstGeom prst="rect">
             <a:avLst/>
@@ -12036,11 +12905,11 @@
           <a:p>
             <a:pPr algn="l"/>
             <a:r>
-              <a:rPr sz="2600" b="0" i="0">
+              <a:rPr sz="2470" b="0" i="0">
                 <a:solidFill>
                   <a:srgbClr val="1A1A1A"/>
                 </a:solidFill>
-                <a:latin typeface="Century Schoolbook"/>
+                <a:latin typeface="Lexend"/>
               </a:rPr>
               <a:t>  is always positive,</a:t>
             </a:r>
@@ -12055,7 +12924,7 @@
         </p:nvSpPr>
         <p:spPr>
           <a:xfrm>
-            <a:off x="777240" y="3002280"/>
+            <a:off x="777240" y="2968751"/>
             <a:ext cx="10607040" cy="465151"/>
           </a:xfrm>
           <a:prstGeom prst="rect">
@@ -12071,11 +12940,11 @@
           <a:p>
             <a:pPr algn="ctr"/>
             <a:r>
-              <a:rPr sz="2600" b="0" i="0">
+              <a:rPr sz="2470" b="0" i="0">
                 <a:solidFill>
                   <a:srgbClr val="1A1A1A"/>
                 </a:solidFill>
-                <a:latin typeface="Century Schoolbook"/>
+                <a:latin typeface="Lexend"/>
               </a:rPr>
               <a:t>because a square is always positive.</a:t>
             </a:r>
@@ -12090,8 +12959,8 @@
         </p:nvSpPr>
         <p:spPr>
           <a:xfrm>
-            <a:off x="2513913" y="3554299"/>
-            <a:ext cx="4641360" cy="457200"/>
+            <a:off x="2557533" y="3520771"/>
+            <a:ext cx="4651007" cy="457200"/>
           </a:xfrm>
           <a:prstGeom prst="rect">
             <a:avLst/>
@@ -12106,11 +12975,11 @@
           <a:p>
             <a:pPr algn="l"/>
             <a:r>
-              <a:rPr sz="2600" b="0" i="0">
+              <a:rPr sz="2470" b="0" i="0">
                 <a:solidFill>
                   <a:srgbClr val="1A1A1A"/>
                 </a:solidFill>
-                <a:latin typeface="Century Schoolbook"/>
+                <a:latin typeface="Lexend"/>
               </a:rPr>
               <a:t>Is he right? Give a value of </a:t>
             </a:r>
@@ -12119,7 +12988,7 @@
       </p:sp>
       <p:pic>
         <p:nvPicPr>
-          <p:cNvPr id="13" name="Picture 12" descr="ce9b607ea85ce740.png"/>
+          <p:cNvPr id="13" name="Picture 12" descr="f14fce7cf077cd07.png"/>
           <p:cNvPicPr>
             <a:picLocks noChangeAspect="1"/>
           </p:cNvPicPr>
@@ -12133,8 +13002,8 @@
         </p:blipFill>
         <p:spPr>
           <a:xfrm>
-            <a:off x="7018114" y="3691459"/>
-            <a:ext cx="192024" cy="182880"/>
+            <a:off x="7071381" y="3645739"/>
+            <a:ext cx="176784" cy="207264"/>
           </a:xfrm>
           <a:prstGeom prst="rect">
             <a:avLst/>
@@ -12149,8 +13018,8 @@
         </p:nvSpPr>
         <p:spPr>
           <a:xfrm>
-            <a:off x="7210138" y="3554299"/>
-            <a:ext cx="2574628" cy="457200"/>
+            <a:off x="7248165" y="3520771"/>
+            <a:ext cx="2492980" cy="457200"/>
           </a:xfrm>
           <a:prstGeom prst="rect">
             <a:avLst/>
@@ -12165,11 +13034,11 @@
           <a:p>
             <a:pPr algn="l"/>
             <a:r>
-              <a:rPr sz="2600" b="0" i="0">
+              <a:rPr sz="2470" b="0" i="0">
                 <a:solidFill>
                   <a:srgbClr val="1A1A1A"/>
                 </a:solidFill>
-                <a:latin typeface="Century Schoolbook"/>
+                <a:latin typeface="Lexend"/>
               </a:rPr>
               <a:t> that settles it.</a:t>
             </a:r>
@@ -12184,7 +13053,7 @@
         </p:nvSpPr>
         <p:spPr>
           <a:xfrm>
-            <a:off x="777240" y="4400119"/>
+            <a:off x="777240" y="4366591"/>
             <a:ext cx="10607040" cy="457200"/>
           </a:xfrm>
           <a:prstGeom prst="rect">
@@ -12200,11 +13069,11 @@
           <a:p>
             <a:pPr algn="ctr"/>
             <a:r>
-              <a:rPr sz="2600" b="1" i="0">
+              <a:rPr sz="2470" b="1" i="0">
                 <a:solidFill>
                   <a:srgbClr val="1A1A1A"/>
                 </a:solidFill>
-                <a:latin typeface="Century Schoolbook"/>
+                <a:latin typeface="Lexend"/>
               </a:rPr>
               <a:t>Write your answer in sentences.</a:t>
             </a:r>
@@ -12253,11 +13122,11 @@
           <a:p>
             <a:pPr algn="l"/>
             <a:r>
-              <a:rPr sz="3400" b="1" i="0">
+              <a:rPr sz="3229" b="1" i="0">
                 <a:solidFill>
                   <a:srgbClr val="1A1A1A"/>
                 </a:solidFill>
-                <a:latin typeface="Century Schoolbook"/>
+                <a:latin typeface="Lexend"/>
               </a:rPr>
               <a:t>Whiteboards   ·   Question 9 of 9</a:t>
             </a:r>
@@ -12393,11 +13262,11 @@
           <a:p>
             <a:pPr algn="l"/>
             <a:r>
-              <a:rPr sz="1100" b="0" i="1">
+              <a:rPr sz="1040" b="0" i="0">
                 <a:solidFill>
                   <a:srgbClr val="6B6B6B"/>
                 </a:solidFill>
-                <a:latin typeface="Century Schoolbook"/>
+                <a:latin typeface="Lexend"/>
               </a:rPr>
               <a:t>Grade 7 Accelerated · Unit 4 · Lesson 6 — Order of Operations with Radicals</a:t>
             </a:r>
@@ -12428,11 +13297,11 @@
           <a:p>
             <a:pPr algn="r"/>
             <a:r>
-              <a:rPr sz="1100" b="0" i="0">
+              <a:rPr sz="1040" b="0" i="0">
                 <a:solidFill>
                   <a:srgbClr val="6B6B6B"/>
                 </a:solidFill>
-                <a:latin typeface="Century Schoolbook"/>
+                <a:latin typeface="Lexend"/>
               </a:rPr>
               <a:t>32</a:t>
             </a:r>
@@ -12447,8 +13316,8 @@
         </p:nvSpPr>
         <p:spPr>
           <a:xfrm>
-            <a:off x="2041691" y="2139696"/>
-            <a:ext cx="3068147" cy="457200"/>
+            <a:off x="2054462" y="2124456"/>
+            <a:ext cx="3126680" cy="457200"/>
           </a:xfrm>
           <a:prstGeom prst="rect">
             <a:avLst/>
@@ -12463,11 +13332,11 @@
           <a:p>
             <a:pPr algn="l"/>
             <a:r>
-              <a:rPr sz="2600" b="0" i="0">
+              <a:rPr sz="2470" b="0" i="0">
                 <a:solidFill>
                   <a:srgbClr val="1A1A1A"/>
                 </a:solidFill>
-                <a:latin typeface="Century Schoolbook"/>
+                <a:latin typeface="Lexend"/>
               </a:rPr>
               <a:t>Roscoe says that  </a:t>
             </a:r>
@@ -12476,7 +13345,7 @@
       </p:sp>
       <p:pic>
         <p:nvPicPr>
-          <p:cNvPr id="9" name="Picture 8" descr="3cbcfcb039974770.png"/>
+          <p:cNvPr id="9" name="Picture 8" descr="349a51316d69c510.png"/>
           <p:cNvPicPr>
             <a:picLocks noChangeAspect="1"/>
           </p:cNvPicPr>
@@ -12490,8 +13359,8 @@
         </p:blipFill>
         <p:spPr>
           <a:xfrm>
-            <a:off x="4972679" y="2103120"/>
-            <a:ext cx="1969008" cy="530352"/>
+            <a:off x="5043983" y="2103120"/>
+            <a:ext cx="1905000" cy="499871"/>
           </a:xfrm>
           <a:prstGeom prst="rect">
             <a:avLst/>
@@ -12506,8 +13375,8 @@
         </p:nvSpPr>
         <p:spPr>
           <a:xfrm>
-            <a:off x="6941687" y="2139696"/>
-            <a:ext cx="3315301" cy="457200"/>
+            <a:off x="6948983" y="2124456"/>
+            <a:ext cx="3295234" cy="457200"/>
           </a:xfrm>
           <a:prstGeom prst="rect">
             <a:avLst/>
@@ -12522,11 +13391,11 @@
           <a:p>
             <a:pPr algn="l"/>
             <a:r>
-              <a:rPr sz="2600" b="0" i="0">
+              <a:rPr sz="2470" b="0" i="0">
                 <a:solidFill>
                   <a:srgbClr val="1A1A1A"/>
                 </a:solidFill>
-                <a:latin typeface="Century Schoolbook"/>
+                <a:latin typeface="Lexend"/>
               </a:rPr>
               <a:t>  is always positive,</a:t>
             </a:r>
@@ -12541,7 +13410,7 @@
         </p:nvSpPr>
         <p:spPr>
           <a:xfrm>
-            <a:off x="777240" y="2907791"/>
+            <a:off x="777240" y="2877312"/>
             <a:ext cx="10607040" cy="465151"/>
           </a:xfrm>
           <a:prstGeom prst="rect">
@@ -12557,11 +13426,11 @@
           <a:p>
             <a:pPr algn="ctr"/>
             <a:r>
-              <a:rPr sz="2600" b="0" i="0">
+              <a:rPr sz="2470" b="0" i="0">
                 <a:solidFill>
                   <a:srgbClr val="1A1A1A"/>
                 </a:solidFill>
-                <a:latin typeface="Century Schoolbook"/>
+                <a:latin typeface="Lexend"/>
               </a:rPr>
               <a:t>because a square is always positive.</a:t>
             </a:r>
@@ -12576,8 +13445,8 @@
         </p:nvSpPr>
         <p:spPr>
           <a:xfrm>
-            <a:off x="2513913" y="3459811"/>
-            <a:ext cx="4641360" cy="457200"/>
+            <a:off x="2557533" y="3429331"/>
+            <a:ext cx="4651007" cy="457200"/>
           </a:xfrm>
           <a:prstGeom prst="rect">
             <a:avLst/>
@@ -12592,11 +13461,11 @@
           <a:p>
             <a:pPr algn="l"/>
             <a:r>
-              <a:rPr sz="2600" b="0" i="0">
+              <a:rPr sz="2470" b="0" i="0">
                 <a:solidFill>
                   <a:srgbClr val="1A1A1A"/>
                 </a:solidFill>
-                <a:latin typeface="Century Schoolbook"/>
+                <a:latin typeface="Lexend"/>
               </a:rPr>
               <a:t>Is he right? Give a value of </a:t>
             </a:r>
@@ -12605,7 +13474,7 @@
       </p:sp>
       <p:pic>
         <p:nvPicPr>
-          <p:cNvPr id="13" name="Picture 12" descr="ce9b607ea85ce740.png"/>
+          <p:cNvPr id="13" name="Picture 12" descr="f14fce7cf077cd07.png"/>
           <p:cNvPicPr>
             <a:picLocks noChangeAspect="1"/>
           </p:cNvPicPr>
@@ -12619,8 +13488,8 @@
         </p:blipFill>
         <p:spPr>
           <a:xfrm>
-            <a:off x="7018114" y="3596971"/>
-            <a:ext cx="192024" cy="182880"/>
+            <a:off x="7071381" y="3554299"/>
+            <a:ext cx="176784" cy="207264"/>
           </a:xfrm>
           <a:prstGeom prst="rect">
             <a:avLst/>
@@ -12635,8 +13504,8 @@
         </p:nvSpPr>
         <p:spPr>
           <a:xfrm>
-            <a:off x="7210138" y="3459811"/>
-            <a:ext cx="2574628" cy="457200"/>
+            <a:off x="7248165" y="3429331"/>
+            <a:ext cx="2492980" cy="457200"/>
           </a:xfrm>
           <a:prstGeom prst="rect">
             <a:avLst/>
@@ -12651,11 +13520,11 @@
           <a:p>
             <a:pPr algn="l"/>
             <a:r>
-              <a:rPr sz="2600" b="0" i="0">
+              <a:rPr sz="2470" b="0" i="0">
                 <a:solidFill>
                   <a:srgbClr val="1A1A1A"/>
                 </a:solidFill>
-                <a:latin typeface="Century Schoolbook"/>
+                <a:latin typeface="Lexend"/>
               </a:rPr>
               <a:t> that settles it.</a:t>
             </a:r>
@@ -12670,7 +13539,184 @@
         </p:nvSpPr>
         <p:spPr>
           <a:xfrm>
-            <a:off x="777240" y="4663440"/>
+            <a:off x="2988076" y="4198951"/>
+            <a:ext cx="1342179" cy="457200"/>
+          </a:xfrm>
+          <a:prstGeom prst="rect">
+            <a:avLst/>
+          </a:prstGeom>
+          <a:noFill/>
+        </p:spPr>
+        <p:txBody>
+          <a:bodyPr wrap="none" lIns="45720" rIns="45720" tIns="18288" bIns="18288" anchor="ctr">
+            <a:noAutofit/>
+          </a:bodyPr>
+          <a:lstStyle/>
+          <a:p>
+            <a:pPr algn="l"/>
+            <a:r>
+              <a:rPr sz="2750" b="0" i="0">
+                <a:solidFill>
+                  <a:srgbClr val="1A1A1A"/>
+                </a:solidFill>
+                <a:latin typeface="Lexend"/>
+              </a:rPr>
+              <a:t>When </a:t>
+            </a:r>
+          </a:p>
+        </p:txBody>
+      </p:sp>
+      <p:pic>
+        <p:nvPicPr>
+          <p:cNvPr id="16" name="Picture 15" descr="da0bec38e3107c39.png"/>
+          <p:cNvPicPr>
+            <a:picLocks noChangeAspect="1"/>
+          </p:cNvPicPr>
+          <p:nvPr/>
+        </p:nvPicPr>
+        <p:blipFill>
+          <a:blip r:embed="rId4"/>
+          <a:stretch>
+            <a:fillRect/>
+          </a:stretch>
+        </p:blipFill>
+        <p:spPr>
+          <a:xfrm>
+            <a:off x="4193095" y="4302583"/>
+            <a:ext cx="1036320" cy="249935"/>
+          </a:xfrm>
+          <a:prstGeom prst="rect">
+            <a:avLst/>
+          </a:prstGeom>
+        </p:spPr>
+      </p:pic>
+      <p:sp>
+        <p:nvSpPr>
+          <p:cNvPr id="17" name="TextBox 16"/>
+          <p:cNvSpPr txBox="1"/>
+          <p:nvPr/>
+        </p:nvSpPr>
+        <p:spPr>
+          <a:xfrm>
+            <a:off x="5229415" y="4198951"/>
+            <a:ext cx="606468" cy="457200"/>
+          </a:xfrm>
+          <a:prstGeom prst="rect">
+            <a:avLst/>
+          </a:prstGeom>
+          <a:noFill/>
+        </p:spPr>
+        <p:txBody>
+          <a:bodyPr wrap="none" lIns="45720" rIns="45720" tIns="18288" bIns="18288" anchor="ctr">
+            <a:noAutofit/>
+          </a:bodyPr>
+          <a:lstStyle/>
+          <a:p>
+            <a:pPr algn="l"/>
+            <a:r>
+              <a:rPr sz="2750" b="0" i="0">
+                <a:solidFill>
+                  <a:srgbClr val="1A1A1A"/>
+                </a:solidFill>
+                <a:latin typeface="Lexend"/>
+              </a:rPr>
+              <a:t>:   </a:t>
+            </a:r>
+          </a:p>
+        </p:txBody>
+      </p:sp>
+      <p:pic>
+        <p:nvPicPr>
+          <p:cNvPr id="18" name="Picture 17" descr="c90e576750902fbb.png"/>
+          <p:cNvPicPr>
+            <a:picLocks noChangeAspect="1"/>
+          </p:cNvPicPr>
+          <p:nvPr/>
+        </p:nvPicPr>
+        <p:blipFill>
+          <a:blip r:embed="rId5"/>
+          <a:stretch>
+            <a:fillRect/>
+          </a:stretch>
+        </p:blipFill>
+        <p:spPr>
+          <a:xfrm>
+            <a:off x="5698723" y="4211143"/>
+            <a:ext cx="3477768" cy="432816"/>
+          </a:xfrm>
+          <a:prstGeom prst="rect">
+            <a:avLst/>
+          </a:prstGeom>
+        </p:spPr>
+      </p:pic>
+      <p:pic>
+        <p:nvPicPr>
+          <p:cNvPr id="19" name="Picture 18" descr="ff74c5c7fd2cbb83.png"/>
+          <p:cNvPicPr>
+            <a:picLocks noChangeAspect="1"/>
+          </p:cNvPicPr>
+          <p:nvPr/>
+        </p:nvPicPr>
+        <p:blipFill>
+          <a:blip r:embed="rId6"/>
+          <a:stretch>
+            <a:fillRect/>
+          </a:stretch>
+        </p:blipFill>
+        <p:spPr>
+          <a:xfrm>
+            <a:off x="3042940" y="4825315"/>
+            <a:ext cx="868680" cy="304800"/>
+          </a:xfrm>
+          <a:prstGeom prst="rect">
+            <a:avLst/>
+          </a:prstGeom>
+        </p:spPr>
+      </p:pic>
+      <p:sp>
+        <p:nvSpPr>
+          <p:cNvPr id="20" name="TextBox 19"/>
+          <p:cNvSpPr txBox="1"/>
+          <p:nvPr/>
+        </p:nvSpPr>
+        <p:spPr>
+          <a:xfrm>
+            <a:off x="3911620" y="4749115"/>
+            <a:ext cx="4321243" cy="457200"/>
+          </a:xfrm>
+          <a:prstGeom prst="rect">
+            <a:avLst/>
+          </a:prstGeom>
+          <a:noFill/>
+        </p:spPr>
+        <p:txBody>
+          <a:bodyPr wrap="none" lIns="45720" rIns="45720" tIns="18288" bIns="18288" anchor="ctr">
+            <a:noAutofit/>
+          </a:bodyPr>
+          <a:lstStyle/>
+          <a:p>
+            <a:pPr algn="l"/>
+            <a:r>
+              <a:rPr sz="2750" b="0" i="0">
+                <a:solidFill>
+                  <a:srgbClr val="1A1A1A"/>
+                </a:solidFill>
+                <a:latin typeface="Lexend"/>
+              </a:rPr>
+              <a:t>,   and 0 is not positive.</a:t>
+            </a:r>
+          </a:p>
+        </p:txBody>
+      </p:sp>
+      <p:sp>
+        <p:nvSpPr>
+          <p:cNvPr id="21" name="TextBox 20"/>
+          <p:cNvSpPr txBox="1"/>
+          <p:nvPr/>
+        </p:nvSpPr>
+        <p:spPr>
+          <a:xfrm>
+            <a:off x="777240" y="5320615"/>
             <a:ext cx="10607040" cy="548640"/>
           </a:xfrm>
           <a:prstGeom prst="rect">
@@ -12686,11 +13732,11 @@
           <a:p>
             <a:pPr algn="ctr"/>
             <a:r>
-              <a:rPr sz="3200" b="1" i="0">
+              <a:rPr sz="3040" b="1" i="0">
                 <a:solidFill>
                   <a:srgbClr val="9E1B32"/>
                 </a:solidFill>
-                <a:latin typeface="Century Schoolbook"/>
+                <a:latin typeface="Lexend"/>
               </a:rPr>
               <a:t>Answer:   No — at n = 121 the value is 0</a:t>
             </a:r>
@@ -12739,11 +13785,11 @@
           <a:p>
             <a:pPr algn="l"/>
             <a:r>
-              <a:rPr sz="3600" b="1" i="0">
+              <a:rPr sz="3420" b="1" i="0">
                 <a:solidFill>
                   <a:srgbClr val="1A1A1A"/>
                 </a:solidFill>
-                <a:latin typeface="Century Schoolbook"/>
+                <a:latin typeface="Lexend"/>
               </a:rPr>
               <a:t>Independent Set</a:t>
             </a:r>
@@ -12879,11 +13925,11 @@
           <a:p>
             <a:pPr algn="l"/>
             <a:r>
-              <a:rPr sz="1100" b="0" i="1">
+              <a:rPr sz="1040" b="0" i="0">
                 <a:solidFill>
                   <a:srgbClr val="6B6B6B"/>
                 </a:solidFill>
-                <a:latin typeface="Century Schoolbook"/>
+                <a:latin typeface="Lexend"/>
               </a:rPr>
               <a:t>Grade 7 Accelerated · Unit 4 · Lesson 6 — Order of Operations with Radicals</a:t>
             </a:r>
@@ -12914,11 +13960,11 @@
           <a:p>
             <a:pPr algn="r"/>
             <a:r>
-              <a:rPr sz="1100" b="0" i="0">
+              <a:rPr sz="1040" b="0" i="0">
                 <a:solidFill>
                   <a:srgbClr val="6B6B6B"/>
                 </a:solidFill>
-                <a:latin typeface="Century Schoolbook"/>
+                <a:latin typeface="Lexend"/>
               </a:rPr>
               <a:t>33</a:t>
             </a:r>
@@ -12949,11 +13995,11 @@
           <a:p>
             <a:pPr algn="l"/>
             <a:r>
-              <a:rPr sz="2300" b="1" i="0">
+              <a:rPr sz="2180" b="1" i="0">
                 <a:solidFill>
                   <a:srgbClr val="0B5394"/>
                 </a:solidFill>
-                <a:latin typeface="Century Schoolbook"/>
+                <a:latin typeface="Lexend"/>
               </a:rPr>
               <a:t>1.</a:t>
             </a:r>
@@ -12962,7 +14008,7 @@
       </p:sp>
       <p:pic>
         <p:nvPicPr>
-          <p:cNvPr id="9" name="Picture 8" descr="1f329a86f16255f7.png"/>
+          <p:cNvPr id="9" name="Picture 8" descr="7297de9a2fe9374c.png"/>
           <p:cNvPicPr>
             <a:picLocks noChangeAspect="1"/>
           </p:cNvPicPr>
@@ -12976,8 +14022,8 @@
         </p:blipFill>
         <p:spPr>
           <a:xfrm>
-            <a:off x="1627632" y="1601723"/>
-            <a:ext cx="1639824" cy="243840"/>
+            <a:off x="1627632" y="1610867"/>
+            <a:ext cx="1676400" cy="225552"/>
           </a:xfrm>
           <a:prstGeom prst="rect">
             <a:avLst/>
@@ -13008,11 +14054,11 @@
           <a:p>
             <a:pPr algn="l"/>
             <a:r>
-              <a:rPr sz="2300" b="1" i="0">
+              <a:rPr sz="2180" b="1" i="0">
                 <a:solidFill>
                   <a:srgbClr val="0B5394"/>
                 </a:solidFill>
-                <a:latin typeface="Century Schoolbook"/>
+                <a:latin typeface="Lexend"/>
               </a:rPr>
               <a:t>2.</a:t>
             </a:r>
@@ -13021,7 +14067,7 @@
       </p:sp>
       <p:pic>
         <p:nvPicPr>
-          <p:cNvPr id="11" name="Picture 10" descr="dc0a4f2891ed4168.png"/>
+          <p:cNvPr id="11" name="Picture 10" descr="503ca8bbf5ad0378.png"/>
           <p:cNvPicPr>
             <a:picLocks noChangeAspect="1"/>
           </p:cNvPicPr>
@@ -13035,8 +14081,8 @@
         </p:blipFill>
         <p:spPr>
           <a:xfrm>
-            <a:off x="1627632" y="2202179"/>
-            <a:ext cx="1112520" cy="231648"/>
+            <a:off x="1627632" y="2205227"/>
+            <a:ext cx="1167384" cy="225552"/>
           </a:xfrm>
           <a:prstGeom prst="rect">
             <a:avLst/>
@@ -13067,11 +14113,11 @@
           <a:p>
             <a:pPr algn="l"/>
             <a:r>
-              <a:rPr sz="2300" b="1" i="0">
+              <a:rPr sz="2180" b="1" i="0">
                 <a:solidFill>
                   <a:srgbClr val="0B5394"/>
                 </a:solidFill>
-                <a:latin typeface="Century Schoolbook"/>
+                <a:latin typeface="Lexend"/>
               </a:rPr>
               <a:t>3.</a:t>
             </a:r>
@@ -13080,7 +14126,7 @@
       </p:sp>
       <p:pic>
         <p:nvPicPr>
-          <p:cNvPr id="13" name="Picture 12" descr="f18144c08071bc4e.png"/>
+          <p:cNvPr id="13" name="Picture 12" descr="fee2d71f7c46e5ad.png"/>
           <p:cNvPicPr>
             <a:picLocks noChangeAspect="1"/>
           </p:cNvPicPr>
@@ -13095,7 +14141,7 @@
         <p:spPr>
           <a:xfrm>
             <a:off x="1627632" y="2744723"/>
-            <a:ext cx="1624584" cy="335280"/>
+            <a:ext cx="1630680" cy="335280"/>
           </a:xfrm>
           <a:prstGeom prst="rect">
             <a:avLst/>
@@ -13110,7 +14156,7 @@
         </p:nvSpPr>
         <p:spPr>
           <a:xfrm>
-            <a:off x="960120" y="3407663"/>
+            <a:off x="960120" y="3395471"/>
             <a:ext cx="548640" cy="457200"/>
           </a:xfrm>
           <a:prstGeom prst="rect">
@@ -13126,11 +14172,11 @@
           <a:p>
             <a:pPr algn="l"/>
             <a:r>
-              <a:rPr sz="2300" b="1" i="0">
+              <a:rPr sz="2180" b="1" i="0">
                 <a:solidFill>
                   <a:srgbClr val="0B5394"/>
                 </a:solidFill>
-                <a:latin typeface="Century Schoolbook"/>
+                <a:latin typeface="Lexend"/>
               </a:rPr>
               <a:t>4.</a:t>
             </a:r>
@@ -13139,7 +14185,7 @@
       </p:sp>
       <p:pic>
         <p:nvPicPr>
-          <p:cNvPr id="15" name="Picture 14" descr="121faca76136a40d.png"/>
+          <p:cNvPr id="15" name="Picture 14" descr="4e620423e0fdea84.png"/>
           <p:cNvPicPr>
             <a:picLocks noChangeAspect="1"/>
           </p:cNvPicPr>
@@ -13154,7 +14200,7 @@
         <p:spPr>
           <a:xfrm>
             <a:off x="1627632" y="3300983"/>
-            <a:ext cx="792480" cy="670560"/>
+            <a:ext cx="780288" cy="646176"/>
           </a:xfrm>
           <a:prstGeom prst="rect">
             <a:avLst/>
@@ -13169,7 +14215,7 @@
         </p:nvSpPr>
         <p:spPr>
           <a:xfrm>
-            <a:off x="960120" y="4131563"/>
+            <a:off x="960120" y="4107179"/>
             <a:ext cx="548640" cy="457200"/>
           </a:xfrm>
           <a:prstGeom prst="rect">
@@ -13185,11 +14231,11 @@
           <a:p>
             <a:pPr algn="l"/>
             <a:r>
-              <a:rPr sz="2300" b="1" i="0">
+              <a:rPr sz="2180" b="1" i="0">
                 <a:solidFill>
                   <a:srgbClr val="0B5394"/>
                 </a:solidFill>
-                <a:latin typeface="Century Schoolbook"/>
+                <a:latin typeface="Lexend"/>
               </a:rPr>
               <a:t>5.</a:t>
             </a:r>
@@ -13198,7 +14244,7 @@
       </p:sp>
       <p:pic>
         <p:nvPicPr>
-          <p:cNvPr id="17" name="Picture 16" descr="c4b87d1c3f303ef9.png"/>
+          <p:cNvPr id="17" name="Picture 16" descr="749d7946d074ee2f.png"/>
           <p:cNvPicPr>
             <a:picLocks noChangeAspect="1"/>
           </p:cNvPicPr>
@@ -13212,8 +14258,8 @@
         </p:blipFill>
         <p:spPr>
           <a:xfrm>
-            <a:off x="1627632" y="4192524"/>
-            <a:ext cx="1554480" cy="335280"/>
+            <a:off x="1627632" y="4168139"/>
+            <a:ext cx="1514856" cy="335280"/>
           </a:xfrm>
           <a:prstGeom prst="rect">
             <a:avLst/>
@@ -13228,7 +14274,7 @@
         </p:nvSpPr>
         <p:spPr>
           <a:xfrm>
-            <a:off x="960120" y="4725924"/>
+            <a:off x="960120" y="4701539"/>
             <a:ext cx="548640" cy="457200"/>
           </a:xfrm>
           <a:prstGeom prst="rect">
@@ -13244,11 +14290,11 @@
           <a:p>
             <a:pPr algn="l"/>
             <a:r>
-              <a:rPr sz="2300" b="1" i="0">
+              <a:rPr sz="2180" b="1" i="0">
                 <a:solidFill>
                   <a:srgbClr val="0B5394"/>
                 </a:solidFill>
-                <a:latin typeface="Century Schoolbook"/>
+                <a:latin typeface="Lexend"/>
               </a:rPr>
               <a:t>6.</a:t>
             </a:r>
@@ -13257,7 +14303,7 @@
       </p:sp>
       <p:pic>
         <p:nvPicPr>
-          <p:cNvPr id="19" name="Picture 18" descr="ffa7e16a200ba393.png"/>
+          <p:cNvPr id="19" name="Picture 18" descr="16b03c438ff63fe5.png"/>
           <p:cNvPicPr>
             <a:picLocks noChangeAspect="1"/>
           </p:cNvPicPr>
@@ -13271,8 +14317,8 @@
         </p:blipFill>
         <p:spPr>
           <a:xfrm>
-            <a:off x="1627632" y="4750308"/>
-            <a:ext cx="2258568" cy="408432"/>
+            <a:off x="1627632" y="4735067"/>
+            <a:ext cx="2215896" cy="390144"/>
           </a:xfrm>
           <a:prstGeom prst="rect">
             <a:avLst/>
@@ -13321,11 +14367,11 @@
           <a:p>
             <a:pPr algn="l"/>
             <a:r>
-              <a:rPr sz="3600" b="1" i="0">
+              <a:rPr sz="3420" b="1" i="0">
                 <a:solidFill>
                   <a:srgbClr val="1A1A1A"/>
                 </a:solidFill>
-                <a:latin typeface="Century Schoolbook"/>
+                <a:latin typeface="Lexend"/>
               </a:rPr>
               <a:t>IXL</a:t>
             </a:r>
@@ -13461,11 +14507,11 @@
           <a:p>
             <a:pPr algn="l"/>
             <a:r>
-              <a:rPr sz="1100" b="0" i="1">
+              <a:rPr sz="1040" b="0" i="0">
                 <a:solidFill>
                   <a:srgbClr val="6B6B6B"/>
                 </a:solidFill>
-                <a:latin typeface="Century Schoolbook"/>
+                <a:latin typeface="Lexend"/>
               </a:rPr>
               <a:t>Grade 7 Accelerated · Unit 4 · Lesson 6 — Order of Operations with Radicals</a:t>
             </a:r>
@@ -13496,11 +14542,11 @@
           <a:p>
             <a:pPr algn="r"/>
             <a:r>
-              <a:rPr sz="1100" b="0" i="0">
+              <a:rPr sz="1040" b="0" i="0">
                 <a:solidFill>
                   <a:srgbClr val="6B6B6B"/>
                 </a:solidFill>
-                <a:latin typeface="Century Schoolbook"/>
+                <a:latin typeface="Lexend"/>
               </a:rPr>
               <a:t>34</a:t>
             </a:r>
@@ -13531,11 +14577,11 @@
           <a:p>
             <a:pPr algn="l"/>
             <a:r>
-              <a:rPr sz="2100" b="1" i="0">
+              <a:rPr sz="1989" b="1" i="0">
                 <a:solidFill>
                   <a:srgbClr val="0B5394"/>
                 </a:solidFill>
-                <a:latin typeface="Century Schoolbook"/>
+                <a:latin typeface="Lexend"/>
               </a:rPr>
               <a:t>1.</a:t>
             </a:r>
@@ -13566,11 +14612,11 @@
           <a:p>
             <a:pPr algn="l"/>
             <a:r>
-              <a:rPr sz="2100" b="0" i="0">
+              <a:rPr sz="1989" b="0" i="0">
                 <a:solidFill>
                   <a:srgbClr val="1A1A1A"/>
                 </a:solidFill>
-                <a:latin typeface="Century Schoolbook"/>
+                <a:latin typeface="Lexend"/>
               </a:rPr>
               <a:t>Open IXL and start today's skills.</a:t>
             </a:r>
@@ -13601,11 +14647,11 @@
           <a:p>
             <a:pPr algn="l"/>
             <a:r>
-              <a:rPr sz="2100" b="1" i="0">
+              <a:rPr sz="1989" b="1" i="0">
                 <a:solidFill>
                   <a:srgbClr val="0B5394"/>
                 </a:solidFill>
-                <a:latin typeface="Century Schoolbook"/>
+                <a:latin typeface="Lexend"/>
               </a:rPr>
               <a:t>2.</a:t>
             </a:r>
@@ -13636,11 +14682,11 @@
           <a:p>
             <a:pPr algn="l"/>
             <a:r>
-              <a:rPr sz="2100" b="0" i="0">
+              <a:rPr sz="1989" b="0" i="0">
                 <a:solidFill>
                   <a:srgbClr val="1A1A1A"/>
                 </a:solidFill>
-                <a:latin typeface="Century Schoolbook"/>
+                <a:latin typeface="Lexend"/>
               </a:rPr>
               <a:t>Work on paper where the question needs work. The answer box does not show it.</a:t>
             </a:r>
@@ -13671,11 +14717,11 @@
           <a:p>
             <a:pPr algn="l"/>
             <a:r>
-              <a:rPr sz="2100" b="1" i="0">
+              <a:rPr sz="1989" b="1" i="0">
                 <a:solidFill>
                   <a:srgbClr val="0B5394"/>
                 </a:solidFill>
-                <a:latin typeface="Century Schoolbook"/>
+                <a:latin typeface="Lexend"/>
               </a:rPr>
               <a:t>3.</a:t>
             </a:r>
@@ -13706,11 +14752,11 @@
           <a:p>
             <a:pPr algn="l"/>
             <a:r>
-              <a:rPr sz="2100" b="0" i="0">
+              <a:rPr sz="1989" b="0" i="0">
                 <a:solidFill>
                   <a:srgbClr val="1A1A1A"/>
                 </a:solidFill>
-                <a:latin typeface="Century Schoolbook"/>
+                <a:latin typeface="Lexend"/>
               </a:rPr>
               <a:t>Every skill listed is required, to a SmartScore of 67. Due at the start of the next class.</a:t>
             </a:r>
@@ -13741,11 +14787,11 @@
           <a:p>
             <a:pPr algn="l"/>
             <a:r>
-              <a:rPr sz="2100" b="1" i="0">
+              <a:rPr sz="1989" b="1" i="0">
                 <a:solidFill>
                   <a:srgbClr val="1A1A1A"/>
                 </a:solidFill>
-                <a:latin typeface="Century Schoolbook"/>
+                <a:latin typeface="Lexend"/>
               </a:rPr>
               <a:t>Today's skills — all required</a:t>
             </a:r>
@@ -13776,11 +14822,11 @@
           <a:p>
             <a:pPr algn="l"/>
             <a:r>
-              <a:rPr sz="1900" b="0" i="0">
+              <a:rPr sz="1810" b="0" i="0">
                 <a:solidFill>
                   <a:srgbClr val="1A1A1A"/>
                 </a:solidFill>
-                <a:latin typeface="Century Schoolbook"/>
+                <a:latin typeface="Lexend"/>
               </a:rPr>
               <a:t>Evaluate radical expressions — D8J</a:t>
             </a:r>
@@ -13829,11 +14875,11 @@
           <a:p>
             <a:pPr algn="l"/>
             <a:r>
-              <a:rPr sz="3600" b="1" i="0">
+              <a:rPr sz="3420" b="1" i="0">
                 <a:solidFill>
                   <a:srgbClr val="1A1A1A"/>
                 </a:solidFill>
-                <a:latin typeface="Century Schoolbook"/>
+                <a:latin typeface="Lexend"/>
               </a:rPr>
               <a:t>Notes</a:t>
             </a:r>
@@ -13969,11 +15015,11 @@
           <a:p>
             <a:pPr algn="l"/>
             <a:r>
-              <a:rPr sz="1100" b="0" i="1">
+              <a:rPr sz="1040" b="0" i="0">
                 <a:solidFill>
                   <a:srgbClr val="6B6B6B"/>
                 </a:solidFill>
-                <a:latin typeface="Century Schoolbook"/>
+                <a:latin typeface="Lexend"/>
               </a:rPr>
               <a:t>Grade 7 Accelerated · Unit 4 · Lesson 6 — Order of Operations with Radicals</a:t>
             </a:r>
@@ -14004,11 +15050,11 @@
           <a:p>
             <a:pPr algn="r"/>
             <a:r>
-              <a:rPr sz="1100" b="0" i="0">
+              <a:rPr sz="1040" b="0" i="0">
                 <a:solidFill>
                   <a:srgbClr val="6B6B6B"/>
                 </a:solidFill>
-                <a:latin typeface="Century Schoolbook"/>
+                <a:latin typeface="Lexend"/>
               </a:rPr>
               <a:t>4</a:t>
             </a:r>
@@ -14039,11 +15085,11 @@
           <a:p>
             <a:pPr algn="l"/>
             <a:r>
-              <a:rPr sz="2500" b="1" i="0">
+              <a:rPr sz="2380" b="1" i="0">
                 <a:solidFill>
                   <a:srgbClr val="1A1A1A"/>
                 </a:solidFill>
-                <a:latin typeface="Century Schoolbook"/>
+                <a:latin typeface="Lexend"/>
               </a:rPr>
               <a:t>I.  The structure, not a mnemonic</a:t>
             </a:r>
@@ -14154,11 +15200,11 @@
                     <a:p>
                       <a:pPr algn="ctr"/>
                       <a:r>
-                        <a:rPr sz="1500" b="1">
+                        <a:rPr sz="1420" b="1">
                           <a:solidFill>
                             <a:srgbClr val="1A1A1A"/>
                           </a:solidFill>
-                          <a:latin typeface="Century Schoolbook"/>
+                          <a:latin typeface="Lexend"/>
                         </a:rPr>
                         <a:t>Level</a:t>
                       </a:r>
@@ -14201,11 +15247,11 @@
                     <a:p>
                       <a:pPr algn="ctr"/>
                       <a:r>
-                        <a:rPr sz="1500" b="1">
+                        <a:rPr sz="1420" b="1">
                           <a:solidFill>
                             <a:srgbClr val="1A1A1A"/>
                           </a:solidFill>
-                          <a:latin typeface="Century Schoolbook"/>
+                          <a:latin typeface="Lexend"/>
                         </a:rPr>
                         <a:t>What it means</a:t>
                       </a:r>
@@ -14250,11 +15296,11 @@
                     <a:p>
                       <a:pPr algn="ctr"/>
                       <a:r>
-                        <a:rPr sz="1500" b="0">
+                        <a:rPr sz="1420" b="0">
                           <a:solidFill>
                             <a:srgbClr val="1A1A1A"/>
                           </a:solidFill>
-                          <a:latin typeface="Century Schoolbook"/>
+                          <a:latin typeface="Lexend"/>
                         </a:rPr>
                         <a:t>1</a:t>
                       </a:r>
@@ -14297,11 +15343,11 @@
                     <a:p>
                       <a:pPr algn="ctr"/>
                       <a:r>
-                        <a:rPr sz="1500" b="0">
+                        <a:rPr sz="1420" b="0">
                           <a:solidFill>
                             <a:srgbClr val="1A1A1A"/>
                           </a:solidFill>
-                          <a:latin typeface="Century Schoolbook"/>
+                          <a:latin typeface="Lexend"/>
                         </a:rPr>
                         <a:t>Grouping symbols</a:t>
                       </a:r>
@@ -14344,11 +15390,11 @@
                     <a:p>
                       <a:pPr algn="ctr"/>
                       <a:r>
-                        <a:rPr sz="1500" b="0">
+                        <a:rPr sz="1420" b="0">
                           <a:solidFill>
                             <a:srgbClr val="1A1A1A"/>
                           </a:solidFill>
-                          <a:latin typeface="Century Schoolbook"/>
+                          <a:latin typeface="Lexend"/>
                         </a:rPr>
                         <a:t>( ), [ ], the radical bar, the fraction bar</a:t>
                       </a:r>
@@ -14393,11 +15439,11 @@
                     <a:p>
                       <a:pPr algn="ctr"/>
                       <a:r>
-                        <a:rPr sz="1500" b="0">
+                        <a:rPr sz="1420" b="0">
                           <a:solidFill>
                             <a:srgbClr val="1A1A1A"/>
                           </a:solidFill>
-                          <a:latin typeface="Century Schoolbook"/>
+                          <a:latin typeface="Lexend"/>
                         </a:rPr>
                         <a:t>2</a:t>
                       </a:r>
@@ -14440,11 +15486,11 @@
                     <a:p>
                       <a:pPr algn="ctr"/>
                       <a:r>
-                        <a:rPr sz="1500" b="0">
+                        <a:rPr sz="1420" b="0">
                           <a:solidFill>
                             <a:srgbClr val="1A1A1A"/>
                           </a:solidFill>
-                          <a:latin typeface="Century Schoolbook"/>
+                          <a:latin typeface="Lexend"/>
                         </a:rPr>
                         <a:t>Powers and roots</a:t>
                       </a:r>
@@ -14487,11 +15533,11 @@
                     <a:p>
                       <a:pPr algn="ctr"/>
                       <a:r>
-                        <a:rPr sz="1500" b="0">
+                        <a:rPr sz="1420" b="0">
                           <a:solidFill>
                             <a:srgbClr val="1A1A1A"/>
                           </a:solidFill>
-                          <a:latin typeface="Century Schoolbook"/>
+                          <a:latin typeface="Lexend"/>
                         </a:rPr>
                         <a:t>the same level as each other</a:t>
                       </a:r>
@@ -14536,11 +15582,11 @@
                     <a:p>
                       <a:pPr algn="ctr"/>
                       <a:r>
-                        <a:rPr sz="1500" b="0">
+                        <a:rPr sz="1420" b="0">
                           <a:solidFill>
                             <a:srgbClr val="1A1A1A"/>
                           </a:solidFill>
-                          <a:latin typeface="Century Schoolbook"/>
+                          <a:latin typeface="Lexend"/>
                         </a:rPr>
                         <a:t>3</a:t>
                       </a:r>
@@ -14583,11 +15629,11 @@
                     <a:p>
                       <a:pPr algn="ctr"/>
                       <a:r>
-                        <a:rPr sz="1500" b="0">
+                        <a:rPr sz="1420" b="0">
                           <a:solidFill>
                             <a:srgbClr val="1A1A1A"/>
                           </a:solidFill>
-                          <a:latin typeface="Century Schoolbook"/>
+                          <a:latin typeface="Lexend"/>
                         </a:rPr>
                         <a:t>Multiply and divide</a:t>
                       </a:r>
@@ -14630,11 +15676,11 @@
                     <a:p>
                       <a:pPr algn="ctr"/>
                       <a:r>
-                        <a:rPr sz="1500" b="0">
+                        <a:rPr sz="1420" b="0">
                           <a:solidFill>
                             <a:srgbClr val="1A1A1A"/>
                           </a:solidFill>
-                          <a:latin typeface="Century Schoolbook"/>
+                          <a:latin typeface="Lexend"/>
                         </a:rPr>
                         <a:t>left to right</a:t>
                       </a:r>
@@ -14679,11 +15725,11 @@
                     <a:p>
                       <a:pPr algn="ctr"/>
                       <a:r>
-                        <a:rPr sz="1500" b="0">
+                        <a:rPr sz="1420" b="0">
                           <a:solidFill>
                             <a:srgbClr val="1A1A1A"/>
                           </a:solidFill>
-                          <a:latin typeface="Century Schoolbook"/>
+                          <a:latin typeface="Lexend"/>
                         </a:rPr>
                         <a:t>4</a:t>
                       </a:r>
@@ -14726,11 +15772,11 @@
                     <a:p>
                       <a:pPr algn="ctr"/>
                       <a:r>
-                        <a:rPr sz="1500" b="0">
+                        <a:rPr sz="1420" b="0">
                           <a:solidFill>
                             <a:srgbClr val="1A1A1A"/>
                           </a:solidFill>
-                          <a:latin typeface="Century Schoolbook"/>
+                          <a:latin typeface="Lexend"/>
                         </a:rPr>
                         <a:t>Add and subtract</a:t>
                       </a:r>
@@ -14773,11 +15819,11 @@
                     <a:p>
                       <a:pPr algn="ctr"/>
                       <a:r>
-                        <a:rPr sz="1500" b="0">
+                        <a:rPr sz="1420" b="0">
                           <a:solidFill>
                             <a:srgbClr val="1A1A1A"/>
                           </a:solidFill>
-                          <a:latin typeface="Century Schoolbook"/>
+                          <a:latin typeface="Lexend"/>
                         </a:rPr>
                         <a:t>left to right</a:t>
                       </a:r>
@@ -14842,11 +15888,11 @@
           <a:p>
             <a:pPr algn="l"/>
             <a:r>
-              <a:rPr sz="2300" b="1" i="0">
+              <a:rPr sz="2180" b="1" i="0">
                 <a:solidFill>
                   <a:srgbClr val="1A1A1A"/>
                 </a:solidFill>
-                <a:latin typeface="Century Schoolbook"/>
+                <a:latin typeface="Lexend"/>
               </a:rPr>
               <a:t>Innermost grouping symbol first, then out.</a:t>
             </a:r>
@@ -14895,11 +15941,11 @@
           <a:p>
             <a:pPr algn="l"/>
             <a:r>
-              <a:rPr sz="3600" b="1" i="0">
+              <a:rPr sz="3420" b="1" i="0">
                 <a:solidFill>
                   <a:srgbClr val="1A1A1A"/>
                 </a:solidFill>
-                <a:latin typeface="Century Schoolbook"/>
+                <a:latin typeface="Lexend"/>
               </a:rPr>
               <a:t>Notes</a:t>
             </a:r>
@@ -15035,11 +16081,11 @@
           <a:p>
             <a:pPr algn="l"/>
             <a:r>
-              <a:rPr sz="1100" b="0" i="1">
+              <a:rPr sz="1040" b="0" i="0">
                 <a:solidFill>
                   <a:srgbClr val="6B6B6B"/>
                 </a:solidFill>
-                <a:latin typeface="Century Schoolbook"/>
+                <a:latin typeface="Lexend"/>
               </a:rPr>
               <a:t>Grade 7 Accelerated · Unit 4 · Lesson 6 — Order of Operations with Radicals</a:t>
             </a:r>
@@ -15070,11 +16116,11 @@
           <a:p>
             <a:pPr algn="r"/>
             <a:r>
-              <a:rPr sz="1100" b="0" i="0">
+              <a:rPr sz="1040" b="0" i="0">
                 <a:solidFill>
                   <a:srgbClr val="6B6B6B"/>
                 </a:solidFill>
-                <a:latin typeface="Century Schoolbook"/>
+                <a:latin typeface="Lexend"/>
               </a:rPr>
               <a:t>5</a:t>
             </a:r>
@@ -15105,11 +16151,11 @@
           <a:p>
             <a:pPr algn="l"/>
             <a:r>
-              <a:rPr sz="2500" b="1" i="0">
+              <a:rPr sz="2380" b="1" i="0">
                 <a:solidFill>
                   <a:srgbClr val="1A1A1A"/>
                 </a:solidFill>
-                <a:latin typeface="Century Schoolbook"/>
+                <a:latin typeface="Lexend"/>
               </a:rPr>
               <a:t>II.  Left to right means left to right</a:t>
             </a:r>
@@ -15153,7 +16199,7 @@
       </p:cxnSp>
       <p:pic>
         <p:nvPicPr>
-          <p:cNvPr id="10" name="Picture 9" descr="e75470b2ad78cf1c.png"/>
+          <p:cNvPr id="10" name="Picture 9" descr="2201d3ee15bc2ba8.png"/>
           <p:cNvPicPr>
             <a:picLocks noChangeAspect="1"/>
           </p:cNvPicPr>
@@ -15167,8 +16213,8 @@
         </p:blipFill>
         <p:spPr>
           <a:xfrm>
-            <a:off x="2928001" y="2058924"/>
-            <a:ext cx="2962656" cy="280416"/>
+            <a:off x="2912347" y="2060448"/>
+            <a:ext cx="3008376" cy="277368"/>
           </a:xfrm>
           <a:prstGeom prst="rect">
             <a:avLst/>
@@ -15183,8 +16229,8 @@
         </p:nvSpPr>
         <p:spPr>
           <a:xfrm>
-            <a:off x="5890657" y="1970532"/>
-            <a:ext cx="1977357" cy="457200"/>
+            <a:off x="5920723" y="1970532"/>
+            <a:ext cx="1947704" cy="457200"/>
           </a:xfrm>
           <a:prstGeom prst="rect">
             <a:avLst/>
@@ -15199,11 +16245,11 @@
           <a:p>
             <a:pPr algn="l"/>
             <a:r>
-              <a:rPr sz="2600" b="0" i="0">
+              <a:rPr sz="2470" b="0" i="0">
                 <a:solidFill>
                   <a:srgbClr val="1A1A1A"/>
                 </a:solidFill>
-                <a:latin typeface="Century Schoolbook"/>
+                <a:latin typeface="Lexend"/>
               </a:rPr>
               <a:t>,     never   </a:t>
             </a:r>
@@ -15212,7 +16258,7 @@
       </p:sp>
       <p:pic>
         <p:nvPicPr>
-          <p:cNvPr id="12" name="Picture 11" descr="0c14e80cd2eaab69.png"/>
+          <p:cNvPr id="12" name="Picture 11" descr="f0147313abe6d96f.png"/>
           <p:cNvPicPr>
             <a:picLocks noChangeAspect="1"/>
           </p:cNvPicPr>
@@ -15226,8 +16272,8 @@
         </p:blipFill>
         <p:spPr>
           <a:xfrm>
-            <a:off x="7730854" y="2055876"/>
-            <a:ext cx="1502664" cy="286512"/>
+            <a:off x="7731268" y="2060448"/>
+            <a:ext cx="1517904" cy="277368"/>
           </a:xfrm>
           <a:prstGeom prst="rect">
             <a:avLst/>
@@ -15236,7 +16282,7 @@
       </p:pic>
       <p:pic>
         <p:nvPicPr>
-          <p:cNvPr id="13" name="Picture 12" descr="c6cb11828cf70896.png"/>
+          <p:cNvPr id="13" name="Picture 12" descr="0ee3a056470a442f.png"/>
           <p:cNvPicPr>
             <a:picLocks noChangeAspect="1"/>
           </p:cNvPicPr>
@@ -15250,8 +16296,8 @@
         </p:blipFill>
         <p:spPr>
           <a:xfrm>
-            <a:off x="2722261" y="2737104"/>
-            <a:ext cx="3343656" cy="295656"/>
+            <a:off x="2772139" y="2744724"/>
+            <a:ext cx="3285744" cy="280416"/>
           </a:xfrm>
           <a:prstGeom prst="rect">
             <a:avLst/>
@@ -15266,8 +16312,8 @@
         </p:nvSpPr>
         <p:spPr>
           <a:xfrm>
-            <a:off x="6065917" y="2656332"/>
-            <a:ext cx="1977357" cy="457200"/>
+            <a:off x="6057883" y="2656332"/>
+            <a:ext cx="1947704" cy="457200"/>
           </a:xfrm>
           <a:prstGeom prst="rect">
             <a:avLst/>
@@ -15282,11 +16328,11 @@
           <a:p>
             <a:pPr algn="l"/>
             <a:r>
-              <a:rPr sz="2600" b="0" i="0">
+              <a:rPr sz="2470" b="0" i="0">
                 <a:solidFill>
                   <a:srgbClr val="1A1A1A"/>
                 </a:solidFill>
-                <a:latin typeface="Century Schoolbook"/>
+                <a:latin typeface="Lexend"/>
               </a:rPr>
               <a:t>,     never   </a:t>
             </a:r>
@@ -15295,7 +16341,7 @@
       </p:sp>
       <p:pic>
         <p:nvPicPr>
-          <p:cNvPr id="15" name="Picture 14" descr="3d97c3435e5f9260.png"/>
+          <p:cNvPr id="15" name="Picture 14" descr="b927c0f461bb714c.png"/>
           <p:cNvPicPr>
             <a:picLocks noChangeAspect="1"/>
           </p:cNvPicPr>
@@ -15309,8 +16355,8 @@
         </p:blipFill>
         <p:spPr>
           <a:xfrm>
-            <a:off x="7906114" y="2744724"/>
-            <a:ext cx="1533144" cy="280416"/>
+            <a:off x="7868428" y="2746248"/>
+            <a:ext cx="1520952" cy="277368"/>
           </a:xfrm>
           <a:prstGeom prst="rect">
             <a:avLst/>
@@ -15341,11 +16387,11 @@
           <a:p>
             <a:pPr algn="l"/>
             <a:r>
-              <a:rPr sz="2300" b="1" i="0">
+              <a:rPr sz="2180" b="1" i="0">
                 <a:solidFill>
                   <a:srgbClr val="1A1A1A"/>
                 </a:solidFill>
-                <a:latin typeface="Century Schoolbook"/>
+                <a:latin typeface="Lexend"/>
               </a:rPr>
               <a:t>Multiplication and division are one level. Addition and subtraction are one level. Left to right, both times.</a:t>
             </a:r>
@@ -15394,11 +16440,11 @@
           <a:p>
             <a:pPr algn="l"/>
             <a:r>
-              <a:rPr sz="3600" b="1" i="0">
+              <a:rPr sz="3420" b="1" i="0">
                 <a:solidFill>
                   <a:srgbClr val="1A1A1A"/>
                 </a:solidFill>
-                <a:latin typeface="Century Schoolbook"/>
+                <a:latin typeface="Lexend"/>
               </a:rPr>
               <a:t>Notes</a:t>
             </a:r>
@@ -15534,11 +16580,11 @@
           <a:p>
             <a:pPr algn="l"/>
             <a:r>
-              <a:rPr sz="1100" b="0" i="1">
+              <a:rPr sz="1040" b="0" i="0">
                 <a:solidFill>
                   <a:srgbClr val="6B6B6B"/>
                 </a:solidFill>
-                <a:latin typeface="Century Schoolbook"/>
+                <a:latin typeface="Lexend"/>
               </a:rPr>
               <a:t>Grade 7 Accelerated · Unit 4 · Lesson 6 — Order of Operations with Radicals</a:t>
             </a:r>
@@ -15569,11 +16615,11 @@
           <a:p>
             <a:pPr algn="r"/>
             <a:r>
-              <a:rPr sz="1100" b="0" i="0">
+              <a:rPr sz="1040" b="0" i="0">
                 <a:solidFill>
                   <a:srgbClr val="6B6B6B"/>
                 </a:solidFill>
-                <a:latin typeface="Century Schoolbook"/>
+                <a:latin typeface="Lexend"/>
               </a:rPr>
               <a:t>6</a:t>
             </a:r>
@@ -15604,11 +16650,11 @@
           <a:p>
             <a:pPr algn="l"/>
             <a:r>
-              <a:rPr sz="2500" b="1" i="0">
+              <a:rPr sz="2380" b="1" i="0">
                 <a:solidFill>
                   <a:srgbClr val="1A1A1A"/>
                 </a:solidFill>
-                <a:latin typeface="Century Schoolbook"/>
+                <a:latin typeface="Lexend"/>
               </a:rPr>
               <a:t>III.  The fraction bar groups, top and bottom</a:t>
             </a:r>
@@ -15652,7 +16698,7 @@
       </p:cxnSp>
       <p:pic>
         <p:nvPicPr>
-          <p:cNvPr id="10" name="Picture 9" descr="152b1d3b1e5b1c23.png"/>
+          <p:cNvPr id="10" name="Picture 9" descr="b676b63d56095f05.png"/>
           <p:cNvPicPr>
             <a:picLocks noChangeAspect="1"/>
           </p:cNvPicPr>
@@ -15666,8 +16712,8 @@
         </p:blipFill>
         <p:spPr>
           <a:xfrm>
-            <a:off x="4844796" y="1993392"/>
-            <a:ext cx="2471928" cy="810768"/>
+            <a:off x="4881372" y="1993392"/>
+            <a:ext cx="2398776" cy="792480"/>
           </a:xfrm>
           <a:prstGeom prst="rect">
             <a:avLst/>
@@ -15676,7 +16722,7 @@
       </p:pic>
       <p:pic>
         <p:nvPicPr>
-          <p:cNvPr id="11" name="Picture 10" descr="ffadcec50e54c83e.png"/>
+          <p:cNvPr id="11" name="Picture 10" descr="fb1e10d5d1f5e973.png"/>
           <p:cNvPicPr>
             <a:picLocks noChangeAspect="1"/>
           </p:cNvPicPr>
@@ -15690,8 +16736,8 @@
         </p:blipFill>
         <p:spPr>
           <a:xfrm>
-            <a:off x="3494532" y="3078480"/>
-            <a:ext cx="5172456" cy="871728"/>
+            <a:off x="3587496" y="3060192"/>
+            <a:ext cx="4986528" cy="847344"/>
           </a:xfrm>
           <a:prstGeom prst="rect">
             <a:avLst/>
@@ -15706,7 +16752,7 @@
         </p:nvSpPr>
         <p:spPr>
           <a:xfrm>
-            <a:off x="987552" y="4288536"/>
+            <a:off x="987552" y="4245864"/>
             <a:ext cx="10131551" cy="475488"/>
           </a:xfrm>
           <a:prstGeom prst="rect">
@@ -15722,11 +16768,11 @@
           <a:p>
             <a:pPr algn="l"/>
             <a:r>
-              <a:rPr sz="2300" b="1" i="0">
+              <a:rPr sz="2180" b="1" i="0">
                 <a:solidFill>
                   <a:srgbClr val="1A1A1A"/>
                 </a:solidFill>
-                <a:latin typeface="Century Schoolbook"/>
+                <a:latin typeface="Lexend"/>
               </a:rPr>
               <a:t>Finish the numerator and finish the denominator before you divide.</a:t>
             </a:r>
@@ -15775,11 +16821,11 @@
           <a:p>
             <a:pPr algn="l"/>
             <a:r>
-              <a:rPr sz="3600" b="1" i="0">
+              <a:rPr sz="3420" b="1" i="0">
                 <a:solidFill>
                   <a:srgbClr val="1A1A1A"/>
                 </a:solidFill>
-                <a:latin typeface="Century Schoolbook"/>
+                <a:latin typeface="Lexend"/>
               </a:rPr>
               <a:t>Example 1</a:t>
             </a:r>
@@ -15915,11 +16961,11 @@
           <a:p>
             <a:pPr algn="l"/>
             <a:r>
-              <a:rPr sz="1100" b="0" i="1">
+              <a:rPr sz="1040" b="0" i="0">
                 <a:solidFill>
                   <a:srgbClr val="6B6B6B"/>
                 </a:solidFill>
-                <a:latin typeface="Century Schoolbook"/>
+                <a:latin typeface="Lexend"/>
               </a:rPr>
               <a:t>Grade 7 Accelerated · Unit 4 · Lesson 6 — Order of Operations with Radicals</a:t>
             </a:r>
@@ -15950,11 +16996,11 @@
           <a:p>
             <a:pPr algn="r"/>
             <a:r>
-              <a:rPr sz="1100" b="0" i="0">
+              <a:rPr sz="1040" b="0" i="0">
                 <a:solidFill>
                   <a:srgbClr val="6B6B6B"/>
                 </a:solidFill>
-                <a:latin typeface="Century Schoolbook"/>
+                <a:latin typeface="Lexend"/>
               </a:rPr>
               <a:t>7</a:t>
             </a:r>
@@ -15963,7 +17009,7 @@
       </p:sp>
       <p:pic>
         <p:nvPicPr>
-          <p:cNvPr id="8" name="Picture 7" descr="4b1ef9fa2dcb4dee.png"/>
+          <p:cNvPr id="8" name="Picture 7" descr="6b6fcd5e7b2e7212.png"/>
           <p:cNvPicPr>
             <a:picLocks noChangeAspect="1"/>
           </p:cNvPicPr>
@@ -15977,8 +17023,8 @@
         </p:blipFill>
         <p:spPr>
           <a:xfrm>
-            <a:off x="4098036" y="2103120"/>
-            <a:ext cx="3965448" cy="502920"/>
+            <a:off x="4102607" y="2103120"/>
+            <a:ext cx="3956304" cy="478536"/>
           </a:xfrm>
           <a:prstGeom prst="rect">
             <a:avLst/>
@@ -15993,7 +17039,7 @@
         </p:nvSpPr>
         <p:spPr>
           <a:xfrm>
-            <a:off x="777240" y="3108960"/>
+            <a:off x="777240" y="3084576"/>
             <a:ext cx="10607040" cy="429370"/>
           </a:xfrm>
           <a:prstGeom prst="rect">
@@ -16009,11 +17055,11 @@
           <a:p>
             <a:pPr algn="ctr"/>
             <a:r>
-              <a:rPr sz="2400" b="1" i="0">
+              <a:rPr sz="2280" b="1" i="0">
                 <a:solidFill>
                   <a:srgbClr val="1A1A1A"/>
                 </a:solidFill>
-                <a:latin typeface="Century Schoolbook"/>
+                <a:latin typeface="Lexend"/>
               </a:rPr>
               <a:t>Evaluate.</a:t>
             </a:r>
@@ -16062,11 +17108,11 @@
           <a:p>
             <a:pPr algn="l"/>
             <a:r>
-              <a:rPr sz="3600" b="1" i="0">
+              <a:rPr sz="3420" b="1" i="0">
                 <a:solidFill>
                   <a:srgbClr val="1A1A1A"/>
                 </a:solidFill>
-                <a:latin typeface="Century Schoolbook"/>
+                <a:latin typeface="Lexend"/>
               </a:rPr>
               <a:t>Example 1</a:t>
             </a:r>
@@ -16202,11 +17248,11 @@
           <a:p>
             <a:pPr algn="l"/>
             <a:r>
-              <a:rPr sz="1100" b="0" i="1">
+              <a:rPr sz="1040" b="0" i="0">
                 <a:solidFill>
                   <a:srgbClr val="6B6B6B"/>
                 </a:solidFill>
-                <a:latin typeface="Century Schoolbook"/>
+                <a:latin typeface="Lexend"/>
               </a:rPr>
               <a:t>Grade 7 Accelerated · Unit 4 · Lesson 6 — Order of Operations with Radicals</a:t>
             </a:r>
@@ -16237,11 +17283,11 @@
           <a:p>
             <a:pPr algn="r"/>
             <a:r>
-              <a:rPr sz="1100" b="0" i="0">
+              <a:rPr sz="1040" b="0" i="0">
                 <a:solidFill>
                   <a:srgbClr val="6B6B6B"/>
                 </a:solidFill>
-                <a:latin typeface="Century Schoolbook"/>
+                <a:latin typeface="Lexend"/>
               </a:rPr>
               <a:t>8</a:t>
             </a:r>
@@ -16250,7 +17296,7 @@
       </p:sp>
       <p:pic>
         <p:nvPicPr>
-          <p:cNvPr id="8" name="Picture 7" descr="353dd49f16316f6f.png"/>
+          <p:cNvPr id="8" name="Picture 7" descr="04e54fe9a1540954.png"/>
           <p:cNvPicPr>
             <a:picLocks noChangeAspect="1"/>
           </p:cNvPicPr>
@@ -16265,7 +17311,7 @@
         <p:spPr>
           <a:xfrm>
             <a:off x="1828800" y="1920240"/>
-            <a:ext cx="2231136" cy="405384"/>
+            <a:ext cx="2249424" cy="411480"/>
           </a:xfrm>
           <a:prstGeom prst="rect">
             <a:avLst/>
@@ -16274,7 +17320,7 @@
       </p:pic>
       <p:pic>
         <p:nvPicPr>
-          <p:cNvPr id="9" name="Picture 8" descr="340b208cd1f74313.png"/>
+          <p:cNvPr id="9" name="Picture 8" descr="21bef9986283dc49.png"/>
           <p:cNvPicPr>
             <a:picLocks noChangeAspect="1"/>
           </p:cNvPicPr>
@@ -16288,8 +17334,8 @@
         </p:blipFill>
         <p:spPr>
           <a:xfrm>
-            <a:off x="1828800" y="2599944"/>
-            <a:ext cx="6973824" cy="350520"/>
+            <a:off x="1828800" y="2606040"/>
+            <a:ext cx="6989064" cy="353568"/>
           </a:xfrm>
           <a:prstGeom prst="rect">
             <a:avLst/>
@@ -16298,7 +17344,7 @@
       </p:pic>
       <p:pic>
         <p:nvPicPr>
-          <p:cNvPr id="10" name="Picture 9" descr="90bf680791a0f62d.png"/>
+          <p:cNvPr id="10" name="Picture 9" descr="09e7e44a6e73f257.png"/>
           <p:cNvPicPr>
             <a:picLocks noChangeAspect="1"/>
           </p:cNvPicPr>
@@ -16312,8 +17358,8 @@
         </p:blipFill>
         <p:spPr>
           <a:xfrm>
-            <a:off x="1828800" y="3224783"/>
-            <a:ext cx="2944368" cy="295656"/>
+            <a:off x="1828800" y="3233928"/>
+            <a:ext cx="2910840" cy="280416"/>
           </a:xfrm>
           <a:prstGeom prst="rect">
             <a:avLst/>
@@ -16344,11 +17390,11 @@
           <a:p>
             <a:pPr algn="ctr"/>
             <a:r>
-              <a:rPr sz="3200" b="1" i="0">
+              <a:rPr sz="3040" b="1" i="0">
                 <a:solidFill>
                   <a:srgbClr val="9E1B32"/>
                 </a:solidFill>
-                <a:latin typeface="Century Schoolbook"/>
+                <a:latin typeface="Lexend"/>
               </a:rPr>
               <a:t>Answer:   −1.44</a:t>
             </a:r>
@@ -16397,11 +17443,11 @@
           <a:p>
             <a:pPr algn="l"/>
             <a:r>
-              <a:rPr sz="3600" b="1" i="0">
+              <a:rPr sz="3420" b="1" i="0">
                 <a:solidFill>
                   <a:srgbClr val="1A1A1A"/>
                 </a:solidFill>
-                <a:latin typeface="Century Schoolbook"/>
+                <a:latin typeface="Lexend"/>
               </a:rPr>
               <a:t>Your Turn</a:t>
             </a:r>
@@ -16537,11 +17583,11 @@
           <a:p>
             <a:pPr algn="l"/>
             <a:r>
-              <a:rPr sz="1100" b="0" i="1">
+              <a:rPr sz="1040" b="0" i="0">
                 <a:solidFill>
                   <a:srgbClr val="6B6B6B"/>
                 </a:solidFill>
-                <a:latin typeface="Century Schoolbook"/>
+                <a:latin typeface="Lexend"/>
               </a:rPr>
               <a:t>Grade 7 Accelerated · Unit 4 · Lesson 6 — Order of Operations with Radicals</a:t>
             </a:r>
@@ -16572,11 +17618,11 @@
           <a:p>
             <a:pPr algn="r"/>
             <a:r>
-              <a:rPr sz="1100" b="0" i="0">
+              <a:rPr sz="1040" b="0" i="0">
                 <a:solidFill>
                   <a:srgbClr val="6B6B6B"/>
                 </a:solidFill>
-                <a:latin typeface="Century Schoolbook"/>
+                <a:latin typeface="Lexend"/>
               </a:rPr>
               <a:t>9</a:t>
             </a:r>
@@ -16585,7 +17631,7 @@
       </p:sp>
       <p:pic>
         <p:nvPicPr>
-          <p:cNvPr id="8" name="Picture 7" descr="dcc7e91a07786a42.png"/>
+          <p:cNvPr id="8" name="Picture 7" descr="47f83e2b495dac09.png"/>
           <p:cNvPicPr>
             <a:picLocks noChangeAspect="1"/>
           </p:cNvPicPr>
@@ -16599,8 +17645,8 @@
         </p:blipFill>
         <p:spPr>
           <a:xfrm>
-            <a:off x="3811523" y="2194560"/>
-            <a:ext cx="4538472" cy="630936"/>
+            <a:off x="3806952" y="1600200"/>
+            <a:ext cx="4547616" cy="594360"/>
           </a:xfrm>
           <a:prstGeom prst="rect">
             <a:avLst/>
@@ -16615,7 +17661,7 @@
         </p:nvSpPr>
         <p:spPr>
           <a:xfrm>
-            <a:off x="777240" y="3328416"/>
+            <a:off x="777240" y="2697480"/>
             <a:ext cx="10607040" cy="429370"/>
           </a:xfrm>
           <a:prstGeom prst="rect">
@@ -16631,11 +17677,11 @@
           <a:p>
             <a:pPr algn="ctr"/>
             <a:r>
-              <a:rPr sz="2400" b="1" i="0">
+              <a:rPr sz="2280" b="1" i="0">
                 <a:solidFill>
                   <a:srgbClr val="1A1A1A"/>
                 </a:solidFill>
-                <a:latin typeface="Century Schoolbook"/>
+                <a:latin typeface="Lexend"/>
               </a:rPr>
               <a:t>Evaluate.</a:t>
             </a:r>

--- a/a7/build/out/u4/A7 4.06 Order of Operations with Radicals - Slides.pptx
+++ b/a7/build/out/u4/A7 4.06 Order of Operations with Radicals - Slides.pptx
@@ -5492,7 +5492,7 @@
       </p:sp>
       <p:pic>
         <p:nvPicPr>
-          <p:cNvPr id="8" name="Picture 7" descr="8c31237e42b535d9.png"/>
+          <p:cNvPr id="8" name="Picture 7" descr="25a7622aecf1eba0.png"/>
           <p:cNvPicPr>
             <a:picLocks noChangeAspect="1"/>
           </p:cNvPicPr>
@@ -5506,8 +5506,8 @@
         </p:blipFill>
         <p:spPr>
           <a:xfrm>
-            <a:off x="5388863" y="2261616"/>
-            <a:ext cx="1383792" cy="277368"/>
+            <a:off x="5352287" y="2260092"/>
+            <a:ext cx="1456944" cy="280416"/>
           </a:xfrm>
           <a:prstGeom prst="rect">
             <a:avLst/>
@@ -5779,7 +5779,7 @@
       </p:sp>
       <p:pic>
         <p:nvPicPr>
-          <p:cNvPr id="8" name="Picture 7" descr="0cd271b4ffb0792f.png"/>
+          <p:cNvPr id="8" name="Picture 7" descr="36fd5fdafeb181a4.png"/>
           <p:cNvPicPr>
             <a:picLocks noChangeAspect="1"/>
           </p:cNvPicPr>
@@ -5793,8 +5793,8 @@
         </p:blipFill>
         <p:spPr>
           <a:xfrm>
-            <a:off x="5388863" y="2170175"/>
-            <a:ext cx="1383792" cy="277368"/>
+            <a:off x="5352287" y="2168652"/>
+            <a:ext cx="1456944" cy="280416"/>
           </a:xfrm>
           <a:prstGeom prst="rect">
             <a:avLst/>
@@ -5809,7 +5809,7 @@
         </p:nvSpPr>
         <p:spPr>
           <a:xfrm>
-            <a:off x="4126026" y="2839212"/>
+            <a:off x="4011726" y="2839212"/>
             <a:ext cx="2656738" cy="457200"/>
           </a:xfrm>
           <a:prstGeom prst="rect">
@@ -5838,7 +5838,7 @@
       </p:sp>
       <p:pic>
         <p:nvPicPr>
-          <p:cNvPr id="10" name="Picture 9" descr="2908f8b113149456.png"/>
+          <p:cNvPr id="10" name="Picture 9" descr="12ac90fe8177c5f9.png"/>
           <p:cNvPicPr>
             <a:picLocks noChangeAspect="1"/>
           </p:cNvPicPr>
@@ -5852,8 +5852,8 @@
         </p:blipFill>
         <p:spPr>
           <a:xfrm>
-            <a:off x="6645605" y="2941320"/>
-            <a:ext cx="1389888" cy="252984"/>
+            <a:off x="6531305" y="2941320"/>
+            <a:ext cx="1621536" cy="252984"/>
           </a:xfrm>
           <a:prstGeom prst="rect">
             <a:avLst/>
@@ -5862,7 +5862,7 @@
       </p:pic>
       <p:pic>
         <p:nvPicPr>
-          <p:cNvPr id="11" name="Picture 10" descr="be3a0b78acc2ca7a.png"/>
+          <p:cNvPr id="11" name="Picture 10" descr="58b50d1f788fe127.png"/>
           <p:cNvPicPr>
             <a:picLocks noChangeAspect="1"/>
           </p:cNvPicPr>
@@ -5876,8 +5876,8 @@
         </p:blipFill>
         <p:spPr>
           <a:xfrm>
-            <a:off x="4180890" y="3482340"/>
-            <a:ext cx="1127760" cy="249935"/>
+            <a:off x="4066590" y="3480816"/>
+            <a:ext cx="1478280" cy="252984"/>
           </a:xfrm>
           <a:prstGeom prst="rect">
             <a:avLst/>
@@ -5914,7 +5914,7 @@
                 </a:solidFill>
                 <a:latin typeface="Lexend"/>
               </a:rPr>
-              <a:t>Answer:   8</a:t>
+              <a:t>Answer:   54</a:t>
             </a:r>
           </a:p>
         </p:txBody>
@@ -7086,7 +7086,7 @@
       </p:sp>
       <p:pic>
         <p:nvPicPr>
-          <p:cNvPr id="8" name="Picture 7" descr="599215668496d9fa.png"/>
+          <p:cNvPr id="8" name="Picture 7" descr="7d69da8346cb7cdc.png"/>
           <p:cNvPicPr>
             <a:picLocks noChangeAspect="1"/>
           </p:cNvPicPr>
@@ -7100,8 +7100,8 @@
         </p:blipFill>
         <p:spPr>
           <a:xfrm>
-            <a:off x="5300471" y="2261616"/>
-            <a:ext cx="1560576" cy="277368"/>
+            <a:off x="5303520" y="2260092"/>
+            <a:ext cx="1554480" cy="280416"/>
           </a:xfrm>
           <a:prstGeom prst="rect">
             <a:avLst/>
@@ -7813,7 +7813,7 @@
       </p:sp>
       <p:pic>
         <p:nvPicPr>
-          <p:cNvPr id="8" name="Picture 7" descr="599215668496d9fa.png"/>
+          <p:cNvPr id="8" name="Picture 7" descr="9dc4fd86eed7f2ed.png"/>
           <p:cNvPicPr>
             <a:picLocks noChangeAspect="1"/>
           </p:cNvPicPr>
@@ -7827,8 +7827,8 @@
         </p:blipFill>
         <p:spPr>
           <a:xfrm>
-            <a:off x="5300471" y="2170175"/>
-            <a:ext cx="1560576" cy="277368"/>
+            <a:off x="5303520" y="2168652"/>
+            <a:ext cx="1554480" cy="280416"/>
           </a:xfrm>
           <a:prstGeom prst="rect">
             <a:avLst/>
@@ -7843,7 +7843,7 @@
         </p:nvSpPr>
         <p:spPr>
           <a:xfrm>
-            <a:off x="4112310" y="2839212"/>
+            <a:off x="4057446" y="2839212"/>
             <a:ext cx="2656738" cy="457200"/>
           </a:xfrm>
           <a:prstGeom prst="rect">
@@ -7872,7 +7872,7 @@
       </p:sp>
       <p:pic>
         <p:nvPicPr>
-          <p:cNvPr id="10" name="Picture 9" descr="ed3cc0ad086b1417.png"/>
+          <p:cNvPr id="10" name="Picture 9" descr="5215752a2994fdfe.png"/>
           <p:cNvPicPr>
             <a:picLocks noChangeAspect="1"/>
           </p:cNvPicPr>
@@ -7886,8 +7886,8 @@
         </p:blipFill>
         <p:spPr>
           <a:xfrm>
-            <a:off x="6631889" y="2939796"/>
-            <a:ext cx="1417320" cy="256032"/>
+            <a:off x="6577025" y="2939796"/>
+            <a:ext cx="1530096" cy="256032"/>
           </a:xfrm>
           <a:prstGeom prst="rect">
             <a:avLst/>
@@ -7896,7 +7896,7 @@
       </p:pic>
       <p:pic>
         <p:nvPicPr>
-          <p:cNvPr id="11" name="Picture 10" descr="2f02af02afef75ab.png"/>
+          <p:cNvPr id="11" name="Picture 10" descr="1f8367c1c48b4347.png"/>
           <p:cNvPicPr>
             <a:picLocks noChangeAspect="1"/>
           </p:cNvPicPr>
@@ -7910,8 +7910,8 @@
         </p:blipFill>
         <p:spPr>
           <a:xfrm>
-            <a:off x="4167174" y="3479291"/>
-            <a:ext cx="1210056" cy="256032"/>
+            <a:off x="4112310" y="3480816"/>
+            <a:ext cx="1554480" cy="252984"/>
           </a:xfrm>
           <a:prstGeom prst="rect">
             <a:avLst/>
@@ -7948,7 +7948,7 @@
                 </a:solidFill>
                 <a:latin typeface="Lexend"/>
               </a:rPr>
-              <a:t>Answer:   9</a:t>
+              <a:t>Answer:   15</a:t>
             </a:r>
           </a:p>
         </p:txBody>
@@ -8183,7 +8183,7 @@
       </p:sp>
       <p:pic>
         <p:nvPicPr>
-          <p:cNvPr id="8" name="Picture 7" descr="0e3ec2124e9cdb64.png"/>
+          <p:cNvPr id="8" name="Picture 7" descr="2b230be022ca8b16.png"/>
           <p:cNvPicPr>
             <a:picLocks noChangeAspect="1"/>
           </p:cNvPicPr>
@@ -8197,8 +8197,8 @@
         </p:blipFill>
         <p:spPr>
           <a:xfrm>
-            <a:off x="5497067" y="2194560"/>
-            <a:ext cx="1167384" cy="792480"/>
+            <a:off x="5498591" y="2194560"/>
+            <a:ext cx="1164336" cy="795528"/>
           </a:xfrm>
           <a:prstGeom prst="rect">
             <a:avLst/>
@@ -8470,7 +8470,7 @@
       </p:sp>
       <p:pic>
         <p:nvPicPr>
-          <p:cNvPr id="8" name="Picture 7" descr="cbba9a177d472da8.png"/>
+          <p:cNvPr id="8" name="Picture 7" descr="0893d505426886e4.png"/>
           <p:cNvPicPr>
             <a:picLocks noChangeAspect="1"/>
           </p:cNvPicPr>
@@ -8484,8 +8484,8 @@
         </p:blipFill>
         <p:spPr>
           <a:xfrm>
-            <a:off x="5498591" y="2103120"/>
-            <a:ext cx="1164336" cy="792480"/>
+            <a:off x="5501639" y="2103120"/>
+            <a:ext cx="1158240" cy="798576"/>
           </a:xfrm>
           <a:prstGeom prst="rect">
             <a:avLst/>
@@ -8500,7 +8500,7 @@
         </p:nvSpPr>
         <p:spPr>
           <a:xfrm>
-            <a:off x="4103452" y="3220212"/>
+            <a:off x="4022680" y="3226307"/>
             <a:ext cx="996779" cy="457200"/>
           </a:xfrm>
           <a:prstGeom prst="rect">
@@ -8529,7 +8529,7 @@
       </p:sp>
       <p:pic>
         <p:nvPicPr>
-          <p:cNvPr id="10" name="Picture 9" descr="e89a91682f16b584.png"/>
+          <p:cNvPr id="10" name="Picture 9" descr="0f7f372429cfcbc3.png"/>
           <p:cNvPicPr>
             <a:picLocks noChangeAspect="1"/>
           </p:cNvPicPr>
@@ -8543,8 +8543,8 @@
         </p:blipFill>
         <p:spPr>
           <a:xfrm>
-            <a:off x="4963072" y="3320795"/>
-            <a:ext cx="2036064" cy="256032"/>
+            <a:off x="4882300" y="3326891"/>
+            <a:ext cx="2481072" cy="256032"/>
           </a:xfrm>
           <a:prstGeom prst="rect">
             <a:avLst/>
@@ -8559,7 +8559,7 @@
         </p:nvSpPr>
         <p:spPr>
           <a:xfrm>
-            <a:off x="4103452" y="3723131"/>
+            <a:off x="4022680" y="3729227"/>
             <a:ext cx="1583270" cy="457200"/>
           </a:xfrm>
           <a:prstGeom prst="rect">
@@ -8588,7 +8588,7 @@
       </p:sp>
       <p:pic>
         <p:nvPicPr>
-          <p:cNvPr id="12" name="Picture 11" descr="2d871f17c6a6883d.png"/>
+          <p:cNvPr id="12" name="Picture 11" descr="d59a91b1f76472ac.png"/>
           <p:cNvPicPr>
             <a:picLocks noChangeAspect="1"/>
           </p:cNvPicPr>
@@ -8602,8 +8602,8 @@
         </p:blipFill>
         <p:spPr>
           <a:xfrm>
-            <a:off x="5549563" y="3820668"/>
-            <a:ext cx="2511552" cy="262128"/>
+            <a:off x="5468791" y="3826763"/>
+            <a:ext cx="2670048" cy="262128"/>
           </a:xfrm>
           <a:prstGeom prst="rect">
             <a:avLst/>
@@ -8612,7 +8612,7 @@
       </p:pic>
       <p:pic>
         <p:nvPicPr>
-          <p:cNvPr id="13" name="Picture 12" descr="cf247a514e7944c6.png"/>
+          <p:cNvPr id="13" name="Picture 12" descr="3d14f1f915bfc614.png"/>
           <p:cNvPicPr>
             <a:picLocks noChangeAspect="1"/>
           </p:cNvPicPr>
@@ -8626,8 +8626,8 @@
         </p:blipFill>
         <p:spPr>
           <a:xfrm>
-            <a:off x="4158316" y="4248912"/>
-            <a:ext cx="633984" cy="515112"/>
+            <a:off x="4077544" y="4255007"/>
+            <a:ext cx="807720" cy="515112"/>
           </a:xfrm>
           <a:prstGeom prst="rect">
             <a:avLst/>
@@ -8642,7 +8642,7 @@
         </p:nvSpPr>
         <p:spPr>
           <a:xfrm>
-            <a:off x="777240" y="4901184"/>
+            <a:off x="777240" y="4907280"/>
             <a:ext cx="10607040" cy="548640"/>
           </a:xfrm>
           <a:prstGeom prst="rect">
@@ -8664,7 +8664,7 @@
                 </a:solidFill>
                 <a:latin typeface="Lexend"/>
               </a:rPr>
-              <a:t>Answer:   1/3</a:t>
+              <a:t>Answer:   3/5</a:t>
             </a:r>
           </a:p>
         </p:txBody>

--- a/a7/build/out/u4/A7 4.06 Order of Operations with Radicals - Slides.pptx
+++ b/a7/build/out/u4/A7 4.06 Order of Operations with Radicals - Slides.pptx
@@ -39,6 +39,7 @@
     <p:sldId id="287" r:id="rId38"/>
     <p:sldId id="288" r:id="rId39"/>
     <p:sldId id="289" r:id="rId40"/>
+    <p:sldId id="290" r:id="rId41"/>
   </p:sldIdLst>
   <p:sldSz cx="12191969" cy="6858000" type="screen4x3"/>
   <p:notesSz cx="6858000" cy="9144000"/>
@@ -3666,7 +3667,7 @@
       </p:sp>
       <p:pic>
         <p:nvPicPr>
-          <p:cNvPr id="8" name="Picture 7" descr="aac90390d93a983e.png"/>
+          <p:cNvPr id="8" name="Picture 7" descr="47f83e2b495dac09.png"/>
           <p:cNvPicPr>
             <a:picLocks noChangeAspect="1"/>
           </p:cNvPicPr>
@@ -3680,8 +3681,8 @@
         </p:blipFill>
         <p:spPr>
           <a:xfrm>
-            <a:off x="3809999" y="1600200"/>
-            <a:ext cx="4541520" cy="594360"/>
+            <a:off x="3806952" y="1600200"/>
+            <a:ext cx="4547616" cy="594360"/>
           </a:xfrm>
           <a:prstGeom prst="rect">
             <a:avLst/>
@@ -3719,242 +3720,6 @@
                 <a:latin typeface="Lexend"/>
               </a:rPr>
               <a:t>Evaluate.</a:t>
-            </a:r>
-          </a:p>
-        </p:txBody>
-      </p:sp>
-      <p:sp>
-        <p:nvSpPr>
-          <p:cNvPr id="10" name="TextBox 9"/>
-          <p:cNvSpPr txBox="1"/>
-          <p:nvPr/>
-        </p:nvSpPr>
-        <p:spPr>
-          <a:xfrm>
-            <a:off x="2695478" y="3286870"/>
-            <a:ext cx="3085266" cy="457200"/>
-          </a:xfrm>
-          <a:prstGeom prst="rect">
-            <a:avLst/>
-          </a:prstGeom>
-          <a:noFill/>
-        </p:spPr>
-        <p:txBody>
-          <a:bodyPr wrap="none" lIns="45720" rIns="45720" tIns="18288" bIns="18288" anchor="ctr">
-            <a:noAutofit/>
-          </a:bodyPr>
-          <a:lstStyle/>
-          <a:p>
-            <a:pPr algn="l"/>
-            <a:r>
-              <a:rPr sz="2330" b="0" i="0">
-                <a:solidFill>
-                  <a:srgbClr val="1A1A1A"/>
-                </a:solidFill>
-                <a:latin typeface="Lexend"/>
-              </a:rPr>
-              <a:t>Powers and roots:  </a:t>
-            </a:r>
-          </a:p>
-        </p:txBody>
-      </p:sp>
-      <p:pic>
-        <p:nvPicPr>
-          <p:cNvPr id="11" name="Picture 10" descr="f6d02763ee13a42e.png"/>
-          <p:cNvPicPr>
-            <a:picLocks noChangeAspect="1"/>
-          </p:cNvPicPr>
-          <p:nvPr/>
-        </p:nvPicPr>
-        <p:blipFill>
-          <a:blip r:embed="rId3"/>
-          <a:stretch>
-            <a:fillRect/>
-          </a:stretch>
-        </p:blipFill>
-        <p:spPr>
-          <a:xfrm>
-            <a:off x="5643584" y="3358498"/>
-            <a:ext cx="1548384" cy="313944"/>
-          </a:xfrm>
-          <a:prstGeom prst="rect">
-            <a:avLst/>
-          </a:prstGeom>
-        </p:spPr>
-      </p:pic>
-      <p:sp>
-        <p:nvSpPr>
-          <p:cNvPr id="12" name="TextBox 11"/>
-          <p:cNvSpPr txBox="1"/>
-          <p:nvPr/>
-        </p:nvSpPr>
-        <p:spPr>
-          <a:xfrm>
-            <a:off x="7191968" y="3286870"/>
-            <a:ext cx="1320048" cy="457200"/>
-          </a:xfrm>
-          <a:prstGeom prst="rect">
-            <a:avLst/>
-          </a:prstGeom>
-          <a:noFill/>
-        </p:spPr>
-        <p:txBody>
-          <a:bodyPr wrap="none" lIns="45720" rIns="45720" tIns="18288" bIns="18288" anchor="ctr">
-            <a:noAutofit/>
-          </a:bodyPr>
-          <a:lstStyle/>
-          <a:p>
-            <a:pPr algn="l"/>
-            <a:r>
-              <a:rPr sz="2330" b="0" i="0">
-                <a:solidFill>
-                  <a:srgbClr val="1A1A1A"/>
-                </a:solidFill>
-                <a:latin typeface="Lexend"/>
-              </a:rPr>
-              <a:t>   and   </a:t>
-            </a:r>
-          </a:p>
-        </p:txBody>
-      </p:sp>
-      <p:pic>
-        <p:nvPicPr>
-          <p:cNvPr id="13" name="Picture 12" descr="954e49d4ca9d8573.png"/>
-          <p:cNvPicPr>
-            <a:picLocks noChangeAspect="1"/>
-          </p:cNvPicPr>
-          <p:nvPr/>
-        </p:nvPicPr>
-        <p:blipFill>
-          <a:blip r:embed="rId4"/>
-          <a:stretch>
-            <a:fillRect/>
-          </a:stretch>
-        </p:blipFill>
-        <p:spPr>
-          <a:xfrm>
-            <a:off x="8374857" y="3331066"/>
-            <a:ext cx="1091184" cy="368808"/>
-          </a:xfrm>
-          <a:prstGeom prst="rect">
-            <a:avLst/>
-          </a:prstGeom>
-        </p:spPr>
-      </p:pic>
-      <p:sp>
-        <p:nvSpPr>
-          <p:cNvPr id="14" name="TextBox 13"/>
-          <p:cNvSpPr txBox="1"/>
-          <p:nvPr/>
-        </p:nvSpPr>
-        <p:spPr>
-          <a:xfrm>
-            <a:off x="2695478" y="3789790"/>
-            <a:ext cx="3938126" cy="457200"/>
-          </a:xfrm>
-          <a:prstGeom prst="rect">
-            <a:avLst/>
-          </a:prstGeom>
-          <a:noFill/>
-        </p:spPr>
-        <p:txBody>
-          <a:bodyPr wrap="none" lIns="45720" rIns="45720" tIns="18288" bIns="18288" anchor="ctr">
-            <a:noAutofit/>
-          </a:bodyPr>
-          <a:lstStyle/>
-          <a:p>
-            <a:pPr algn="l"/>
-            <a:r>
-              <a:rPr sz="2330" b="0" i="0">
-                <a:solidFill>
-                  <a:srgbClr val="1A1A1A"/>
-                </a:solidFill>
-                <a:latin typeface="Lexend"/>
-              </a:rPr>
-              <a:t>Inside the parentheses:  </a:t>
-            </a:r>
-          </a:p>
-        </p:txBody>
-      </p:sp>
-      <p:pic>
-        <p:nvPicPr>
-          <p:cNvPr id="15" name="Picture 14" descr="e7c4e03b1a074318.png"/>
-          <p:cNvPicPr>
-            <a:picLocks noChangeAspect="1"/>
-          </p:cNvPicPr>
-          <p:nvPr/>
-        </p:nvPicPr>
-        <p:blipFill>
-          <a:blip r:embed="rId5"/>
-          <a:stretch>
-            <a:fillRect/>
-          </a:stretch>
-        </p:blipFill>
-        <p:spPr>
-          <a:xfrm>
-            <a:off x="6496444" y="3911710"/>
-            <a:ext cx="2109216" cy="213360"/>
-          </a:xfrm>
-          <a:prstGeom prst="rect">
-            <a:avLst/>
-          </a:prstGeom>
-        </p:spPr>
-      </p:pic>
-      <p:pic>
-        <p:nvPicPr>
-          <p:cNvPr id="16" name="Picture 15" descr="9835c37dc0133d28.png"/>
-          <p:cNvPicPr>
-            <a:picLocks noChangeAspect="1"/>
-          </p:cNvPicPr>
-          <p:nvPr/>
-        </p:nvPicPr>
-        <p:blipFill>
-          <a:blip r:embed="rId6"/>
-          <a:stretch>
-            <a:fillRect/>
-          </a:stretch>
-        </p:blipFill>
-        <p:spPr>
-          <a:xfrm>
-            <a:off x="2750342" y="4414630"/>
-            <a:ext cx="3514344" cy="213360"/>
-          </a:xfrm>
-          <a:prstGeom prst="rect">
-            <a:avLst/>
-          </a:prstGeom>
-        </p:spPr>
-      </p:pic>
-      <p:sp>
-        <p:nvSpPr>
-          <p:cNvPr id="17" name="TextBox 16"/>
-          <p:cNvSpPr txBox="1"/>
-          <p:nvPr/>
-        </p:nvSpPr>
-        <p:spPr>
-          <a:xfrm>
-            <a:off x="777240" y="4864210"/>
-            <a:ext cx="10607040" cy="548640"/>
-          </a:xfrm>
-          <a:prstGeom prst="rect">
-            <a:avLst/>
-          </a:prstGeom>
-          <a:noFill/>
-        </p:spPr>
-        <p:txBody>
-          <a:bodyPr wrap="square" lIns="45720" rIns="45720" tIns="18288" bIns="18288" anchor="t">
-            <a:spAutoFit/>
-          </a:bodyPr>
-          <a:lstStyle/>
-          <a:p>
-            <a:pPr algn="ctr"/>
-            <a:r>
-              <a:rPr sz="3040" b="1" i="0">
-                <a:solidFill>
-                  <a:srgbClr val="9E1B32"/>
-                </a:solidFill>
-                <a:latin typeface="Lexend"/>
-              </a:rPr>
-              <a:t>Answer:   9.97</a:t>
             </a:r>
           </a:p>
         </p:txBody>
@@ -4007,7 +3772,7 @@
                 </a:solidFill>
                 <a:latin typeface="Lexend"/>
               </a:rPr>
-              <a:t>Example 2</a:t>
+              <a:t>Your Turn</a:t>
             </a:r>
           </a:p>
         </p:txBody>
@@ -4189,7 +3954,7 @@
       </p:sp>
       <p:pic>
         <p:nvPicPr>
-          <p:cNvPr id="8" name="Picture 7" descr="b808d9623aef050a.png"/>
+          <p:cNvPr id="8" name="Picture 7" descr="aac90390d93a983e.png"/>
           <p:cNvPicPr>
             <a:picLocks noChangeAspect="1"/>
           </p:cNvPicPr>
@@ -4203,8 +3968,8 @@
         </p:blipFill>
         <p:spPr>
           <a:xfrm>
-            <a:off x="4713731" y="2103120"/>
-            <a:ext cx="2734056" cy="847344"/>
+            <a:off x="3809999" y="1600200"/>
+            <a:ext cx="4541520" cy="594360"/>
           </a:xfrm>
           <a:prstGeom prst="rect">
             <a:avLst/>
@@ -4219,7 +3984,7 @@
         </p:nvSpPr>
         <p:spPr>
           <a:xfrm>
-            <a:off x="777240" y="3453384"/>
+            <a:off x="777240" y="2697480"/>
             <a:ext cx="10607040" cy="429370"/>
           </a:xfrm>
           <a:prstGeom prst="rect">
@@ -4242,6 +4007,242 @@
                 <a:latin typeface="Lexend"/>
               </a:rPr>
               <a:t>Evaluate.</a:t>
+            </a:r>
+          </a:p>
+        </p:txBody>
+      </p:sp>
+      <p:sp>
+        <p:nvSpPr>
+          <p:cNvPr id="10" name="TextBox 9"/>
+          <p:cNvSpPr txBox="1"/>
+          <p:nvPr/>
+        </p:nvSpPr>
+        <p:spPr>
+          <a:xfrm>
+            <a:off x="2695478" y="3286870"/>
+            <a:ext cx="3085266" cy="457200"/>
+          </a:xfrm>
+          <a:prstGeom prst="rect">
+            <a:avLst/>
+          </a:prstGeom>
+          <a:noFill/>
+        </p:spPr>
+        <p:txBody>
+          <a:bodyPr wrap="none" lIns="45720" rIns="45720" tIns="18288" bIns="18288" anchor="ctr">
+            <a:noAutofit/>
+          </a:bodyPr>
+          <a:lstStyle/>
+          <a:p>
+            <a:pPr algn="l"/>
+            <a:r>
+              <a:rPr sz="2330" b="0" i="0">
+                <a:solidFill>
+                  <a:srgbClr val="1A1A1A"/>
+                </a:solidFill>
+                <a:latin typeface="Lexend"/>
+              </a:rPr>
+              <a:t>Powers and roots:  </a:t>
+            </a:r>
+          </a:p>
+        </p:txBody>
+      </p:sp>
+      <p:pic>
+        <p:nvPicPr>
+          <p:cNvPr id="11" name="Picture 10" descr="f6d02763ee13a42e.png"/>
+          <p:cNvPicPr>
+            <a:picLocks noChangeAspect="1"/>
+          </p:cNvPicPr>
+          <p:nvPr/>
+        </p:nvPicPr>
+        <p:blipFill>
+          <a:blip r:embed="rId3"/>
+          <a:stretch>
+            <a:fillRect/>
+          </a:stretch>
+        </p:blipFill>
+        <p:spPr>
+          <a:xfrm>
+            <a:off x="5643584" y="3358498"/>
+            <a:ext cx="1548384" cy="313944"/>
+          </a:xfrm>
+          <a:prstGeom prst="rect">
+            <a:avLst/>
+          </a:prstGeom>
+        </p:spPr>
+      </p:pic>
+      <p:sp>
+        <p:nvSpPr>
+          <p:cNvPr id="12" name="TextBox 11"/>
+          <p:cNvSpPr txBox="1"/>
+          <p:nvPr/>
+        </p:nvSpPr>
+        <p:spPr>
+          <a:xfrm>
+            <a:off x="7191968" y="3286870"/>
+            <a:ext cx="1320048" cy="457200"/>
+          </a:xfrm>
+          <a:prstGeom prst="rect">
+            <a:avLst/>
+          </a:prstGeom>
+          <a:noFill/>
+        </p:spPr>
+        <p:txBody>
+          <a:bodyPr wrap="none" lIns="45720" rIns="45720" tIns="18288" bIns="18288" anchor="ctr">
+            <a:noAutofit/>
+          </a:bodyPr>
+          <a:lstStyle/>
+          <a:p>
+            <a:pPr algn="l"/>
+            <a:r>
+              <a:rPr sz="2330" b="0" i="0">
+                <a:solidFill>
+                  <a:srgbClr val="1A1A1A"/>
+                </a:solidFill>
+                <a:latin typeface="Lexend"/>
+              </a:rPr>
+              <a:t>   and   </a:t>
+            </a:r>
+          </a:p>
+        </p:txBody>
+      </p:sp>
+      <p:pic>
+        <p:nvPicPr>
+          <p:cNvPr id="13" name="Picture 12" descr="954e49d4ca9d8573.png"/>
+          <p:cNvPicPr>
+            <a:picLocks noChangeAspect="1"/>
+          </p:cNvPicPr>
+          <p:nvPr/>
+        </p:nvPicPr>
+        <p:blipFill>
+          <a:blip r:embed="rId4"/>
+          <a:stretch>
+            <a:fillRect/>
+          </a:stretch>
+        </p:blipFill>
+        <p:spPr>
+          <a:xfrm>
+            <a:off x="8374857" y="3331066"/>
+            <a:ext cx="1091184" cy="368808"/>
+          </a:xfrm>
+          <a:prstGeom prst="rect">
+            <a:avLst/>
+          </a:prstGeom>
+        </p:spPr>
+      </p:pic>
+      <p:sp>
+        <p:nvSpPr>
+          <p:cNvPr id="14" name="TextBox 13"/>
+          <p:cNvSpPr txBox="1"/>
+          <p:nvPr/>
+        </p:nvSpPr>
+        <p:spPr>
+          <a:xfrm>
+            <a:off x="2695478" y="3789790"/>
+            <a:ext cx="3938126" cy="457200"/>
+          </a:xfrm>
+          <a:prstGeom prst="rect">
+            <a:avLst/>
+          </a:prstGeom>
+          <a:noFill/>
+        </p:spPr>
+        <p:txBody>
+          <a:bodyPr wrap="none" lIns="45720" rIns="45720" tIns="18288" bIns="18288" anchor="ctr">
+            <a:noAutofit/>
+          </a:bodyPr>
+          <a:lstStyle/>
+          <a:p>
+            <a:pPr algn="l"/>
+            <a:r>
+              <a:rPr sz="2330" b="0" i="0">
+                <a:solidFill>
+                  <a:srgbClr val="1A1A1A"/>
+                </a:solidFill>
+                <a:latin typeface="Lexend"/>
+              </a:rPr>
+              <a:t>Inside the parentheses:  </a:t>
+            </a:r>
+          </a:p>
+        </p:txBody>
+      </p:sp>
+      <p:pic>
+        <p:nvPicPr>
+          <p:cNvPr id="15" name="Picture 14" descr="e7c4e03b1a074318.png"/>
+          <p:cNvPicPr>
+            <a:picLocks noChangeAspect="1"/>
+          </p:cNvPicPr>
+          <p:nvPr/>
+        </p:nvPicPr>
+        <p:blipFill>
+          <a:blip r:embed="rId5"/>
+          <a:stretch>
+            <a:fillRect/>
+          </a:stretch>
+        </p:blipFill>
+        <p:spPr>
+          <a:xfrm>
+            <a:off x="6496444" y="3911710"/>
+            <a:ext cx="2109216" cy="213360"/>
+          </a:xfrm>
+          <a:prstGeom prst="rect">
+            <a:avLst/>
+          </a:prstGeom>
+        </p:spPr>
+      </p:pic>
+      <p:pic>
+        <p:nvPicPr>
+          <p:cNvPr id="16" name="Picture 15" descr="9835c37dc0133d28.png"/>
+          <p:cNvPicPr>
+            <a:picLocks noChangeAspect="1"/>
+          </p:cNvPicPr>
+          <p:nvPr/>
+        </p:nvPicPr>
+        <p:blipFill>
+          <a:blip r:embed="rId6"/>
+          <a:stretch>
+            <a:fillRect/>
+          </a:stretch>
+        </p:blipFill>
+        <p:spPr>
+          <a:xfrm>
+            <a:off x="2750342" y="4414630"/>
+            <a:ext cx="3514344" cy="213360"/>
+          </a:xfrm>
+          <a:prstGeom prst="rect">
+            <a:avLst/>
+          </a:prstGeom>
+        </p:spPr>
+      </p:pic>
+      <p:sp>
+        <p:nvSpPr>
+          <p:cNvPr id="17" name="TextBox 16"/>
+          <p:cNvSpPr txBox="1"/>
+          <p:nvPr/>
+        </p:nvSpPr>
+        <p:spPr>
+          <a:xfrm>
+            <a:off x="777240" y="4864210"/>
+            <a:ext cx="10607040" cy="548640"/>
+          </a:xfrm>
+          <a:prstGeom prst="rect">
+            <a:avLst/>
+          </a:prstGeom>
+          <a:noFill/>
+        </p:spPr>
+        <p:txBody>
+          <a:bodyPr wrap="square" lIns="45720" rIns="45720" tIns="18288" bIns="18288" anchor="t">
+            <a:spAutoFit/>
+          </a:bodyPr>
+          <a:lstStyle/>
+          <a:p>
+            <a:pPr algn="ctr"/>
+            <a:r>
+              <a:rPr sz="3040" b="1" i="0">
+                <a:solidFill>
+                  <a:srgbClr val="9E1B32"/>
+                </a:solidFill>
+                <a:latin typeface="Lexend"/>
+              </a:rPr>
+              <a:t>Answer:   9.97</a:t>
             </a:r>
           </a:p>
         </p:txBody>
@@ -4476,7 +4477,7 @@
       </p:sp>
       <p:pic>
         <p:nvPicPr>
-          <p:cNvPr id="8" name="Picture 7" descr="9aec3c395596e363.png"/>
+          <p:cNvPr id="8" name="Picture 7" descr="b808d9623aef050a.png"/>
           <p:cNvPicPr>
             <a:picLocks noChangeAspect="1"/>
           </p:cNvPicPr>
@@ -4490,72 +4491,24 @@
         </p:blipFill>
         <p:spPr>
           <a:xfrm>
-            <a:off x="1828800" y="1920240"/>
-            <a:ext cx="2593848" cy="792480"/>
+            <a:off x="4713731" y="2103120"/>
+            <a:ext cx="2734056" cy="847344"/>
           </a:xfrm>
           <a:prstGeom prst="rect">
             <a:avLst/>
           </a:prstGeom>
         </p:spPr>
       </p:pic>
-      <p:pic>
-        <p:nvPicPr>
-          <p:cNvPr id="9" name="Picture 8" descr="fd77386a9e66a339.png"/>
-          <p:cNvPicPr>
-            <a:picLocks noChangeAspect="1"/>
-          </p:cNvPicPr>
-          <p:nvPr/>
-        </p:nvPicPr>
-        <p:blipFill>
-          <a:blip r:embed="rId3"/>
-          <a:stretch>
-            <a:fillRect/>
-          </a:stretch>
-        </p:blipFill>
-        <p:spPr>
-          <a:xfrm>
-            <a:off x="1828800" y="2987040"/>
-            <a:ext cx="3694176" cy="789432"/>
-          </a:xfrm>
-          <a:prstGeom prst="rect">
-            <a:avLst/>
-          </a:prstGeom>
-        </p:spPr>
-      </p:pic>
-      <p:pic>
-        <p:nvPicPr>
-          <p:cNvPr id="10" name="Picture 9" descr="69a6d692b4cc56e3.png"/>
-          <p:cNvPicPr>
-            <a:picLocks noChangeAspect="1"/>
-          </p:cNvPicPr>
-          <p:nvPr/>
-        </p:nvPicPr>
-        <p:blipFill>
-          <a:blip r:embed="rId4"/>
-          <a:stretch>
-            <a:fillRect/>
-          </a:stretch>
-        </p:blipFill>
-        <p:spPr>
-          <a:xfrm>
-            <a:off x="1828800" y="4050791"/>
-            <a:ext cx="1895856" cy="670560"/>
-          </a:xfrm>
-          <a:prstGeom prst="rect">
-            <a:avLst/>
-          </a:prstGeom>
-        </p:spPr>
-      </p:pic>
-      <p:sp>
-        <p:nvSpPr>
-          <p:cNvPr id="11" name="TextBox 10"/>
-          <p:cNvSpPr txBox="1"/>
-          <p:nvPr/>
-        </p:nvSpPr>
-        <p:spPr>
-          <a:xfrm>
-            <a:off x="777240" y="5178552"/>
-            <a:ext cx="10607040" cy="548640"/>
+      <p:sp>
+        <p:nvSpPr>
+          <p:cNvPr id="9" name="TextBox 8"/>
+          <p:cNvSpPr txBox="1"/>
+          <p:nvPr/>
+        </p:nvSpPr>
+        <p:spPr>
+          <a:xfrm>
+            <a:off x="777240" y="3453384"/>
+            <a:ext cx="10607040" cy="429370"/>
           </a:xfrm>
           <a:prstGeom prst="rect">
             <a:avLst/>
@@ -4570,13 +4523,13 @@
           <a:p>
             <a:pPr algn="ctr"/>
             <a:r>
-              <a:rPr sz="3040" b="1" i="0">
-                <a:solidFill>
-                  <a:srgbClr val="9E1B32"/>
-                </a:solidFill>
-                <a:latin typeface="Lexend"/>
-              </a:rPr>
-              <a:t>Answer:   −1/4</a:t>
+              <a:rPr sz="2280" b="1" i="0">
+                <a:solidFill>
+                  <a:srgbClr val="1A1A1A"/>
+                </a:solidFill>
+                <a:latin typeface="Lexend"/>
+              </a:rPr>
+              <a:t>Evaluate.</a:t>
             </a:r>
           </a:p>
         </p:txBody>
@@ -4629,7 +4582,7 @@
                 </a:solidFill>
                 <a:latin typeface="Lexend"/>
               </a:rPr>
-              <a:t>Your Turn</a:t>
+              <a:t>Example 2</a:t>
             </a:r>
           </a:p>
         </p:txBody>
@@ -4811,7 +4764,7 @@
       </p:sp>
       <p:pic>
         <p:nvPicPr>
-          <p:cNvPr id="8" name="Picture 7" descr="a0165d764fa8474e.png"/>
+          <p:cNvPr id="8" name="Picture 7" descr="9aec3c395596e363.png"/>
           <p:cNvPicPr>
             <a:picLocks noChangeAspect="1"/>
           </p:cNvPicPr>
@@ -4825,24 +4778,72 @@
         </p:blipFill>
         <p:spPr>
           <a:xfrm>
-            <a:off x="4539996" y="1481328"/>
-            <a:ext cx="3081528" cy="847344"/>
+            <a:off x="1828800" y="1920240"/>
+            <a:ext cx="2593848" cy="792480"/>
           </a:xfrm>
           <a:prstGeom prst="rect">
             <a:avLst/>
           </a:prstGeom>
         </p:spPr>
       </p:pic>
-      <p:sp>
-        <p:nvSpPr>
-          <p:cNvPr id="9" name="TextBox 8"/>
-          <p:cNvSpPr txBox="1"/>
-          <p:nvPr/>
-        </p:nvSpPr>
-        <p:spPr>
-          <a:xfrm>
-            <a:off x="777240" y="2831592"/>
-            <a:ext cx="10607040" cy="429370"/>
+      <p:pic>
+        <p:nvPicPr>
+          <p:cNvPr id="9" name="Picture 8" descr="fd77386a9e66a339.png"/>
+          <p:cNvPicPr>
+            <a:picLocks noChangeAspect="1"/>
+          </p:cNvPicPr>
+          <p:nvPr/>
+        </p:nvPicPr>
+        <p:blipFill>
+          <a:blip r:embed="rId3"/>
+          <a:stretch>
+            <a:fillRect/>
+          </a:stretch>
+        </p:blipFill>
+        <p:spPr>
+          <a:xfrm>
+            <a:off x="1828800" y="2987040"/>
+            <a:ext cx="3694176" cy="789432"/>
+          </a:xfrm>
+          <a:prstGeom prst="rect">
+            <a:avLst/>
+          </a:prstGeom>
+        </p:spPr>
+      </p:pic>
+      <p:pic>
+        <p:nvPicPr>
+          <p:cNvPr id="10" name="Picture 9" descr="69a6d692b4cc56e3.png"/>
+          <p:cNvPicPr>
+            <a:picLocks noChangeAspect="1"/>
+          </p:cNvPicPr>
+          <p:nvPr/>
+        </p:nvPicPr>
+        <p:blipFill>
+          <a:blip r:embed="rId4"/>
+          <a:stretch>
+            <a:fillRect/>
+          </a:stretch>
+        </p:blipFill>
+        <p:spPr>
+          <a:xfrm>
+            <a:off x="1828800" y="4050791"/>
+            <a:ext cx="1895856" cy="670560"/>
+          </a:xfrm>
+          <a:prstGeom prst="rect">
+            <a:avLst/>
+          </a:prstGeom>
+        </p:spPr>
+      </p:pic>
+      <p:sp>
+        <p:nvSpPr>
+          <p:cNvPr id="11" name="TextBox 10"/>
+          <p:cNvSpPr txBox="1"/>
+          <p:nvPr/>
+        </p:nvSpPr>
+        <p:spPr>
+          <a:xfrm>
+            <a:off x="777240" y="5178552"/>
+            <a:ext cx="10607040" cy="548640"/>
           </a:xfrm>
           <a:prstGeom prst="rect">
             <a:avLst/>
@@ -4857,13 +4858,13 @@
           <a:p>
             <a:pPr algn="ctr"/>
             <a:r>
-              <a:rPr sz="2280" b="1" i="0">
-                <a:solidFill>
-                  <a:srgbClr val="1A1A1A"/>
-                </a:solidFill>
-                <a:latin typeface="Lexend"/>
-              </a:rPr>
-              <a:t>Evaluate.</a:t>
+              <a:rPr sz="3040" b="1" i="0">
+                <a:solidFill>
+                  <a:srgbClr val="9E1B32"/>
+                </a:solidFill>
+                <a:latin typeface="Lexend"/>
+              </a:rPr>
+              <a:t>Answer:   −1/4</a:t>
             </a:r>
           </a:p>
         </p:txBody>
@@ -5098,7 +5099,7 @@
       </p:sp>
       <p:pic>
         <p:nvPicPr>
-          <p:cNvPr id="8" name="Picture 7" descr="93f2d6cae19f4401.png"/>
+          <p:cNvPr id="8" name="Picture 7" descr="a0165d764fa8474e.png"/>
           <p:cNvPicPr>
             <a:picLocks noChangeAspect="1"/>
           </p:cNvPicPr>
@@ -5112,8 +5113,8 @@
         </p:blipFill>
         <p:spPr>
           <a:xfrm>
-            <a:off x="4541519" y="1481328"/>
-            <a:ext cx="3078480" cy="847344"/>
+            <a:off x="4539996" y="1481328"/>
+            <a:ext cx="3081528" cy="847344"/>
           </a:xfrm>
           <a:prstGeom prst="rect">
             <a:avLst/>
@@ -5151,113 +5152,6 @@
                 <a:latin typeface="Lexend"/>
               </a:rPr>
               <a:t>Evaluate.</a:t>
-            </a:r>
-          </a:p>
-        </p:txBody>
-      </p:sp>
-      <p:pic>
-        <p:nvPicPr>
-          <p:cNvPr id="10" name="Picture 9" descr="6565c690921d94d1.png"/>
-          <p:cNvPicPr>
-            <a:picLocks noChangeAspect="1"/>
-          </p:cNvPicPr>
-          <p:nvPr/>
-        </p:nvPicPr>
-        <p:blipFill>
-          <a:blip r:embed="rId3"/>
-          <a:stretch>
-            <a:fillRect/>
-          </a:stretch>
-        </p:blipFill>
-        <p:spPr>
-          <a:xfrm>
-            <a:off x="4527803" y="3443842"/>
-            <a:ext cx="1810512" cy="609600"/>
-          </a:xfrm>
-          <a:prstGeom prst="rect">
-            <a:avLst/>
-          </a:prstGeom>
-        </p:spPr>
-      </p:pic>
-      <p:pic>
-        <p:nvPicPr>
-          <p:cNvPr id="11" name="Picture 10" descr="a2173ad1551df9c2.png"/>
-          <p:cNvPicPr>
-            <a:picLocks noChangeAspect="1"/>
-          </p:cNvPicPr>
-          <p:nvPr/>
-        </p:nvPicPr>
-        <p:blipFill>
-          <a:blip r:embed="rId4"/>
-          <a:stretch>
-            <a:fillRect/>
-          </a:stretch>
-        </p:blipFill>
-        <p:spPr>
-          <a:xfrm>
-            <a:off x="4527803" y="4144882"/>
-            <a:ext cx="3212592" cy="612648"/>
-          </a:xfrm>
-          <a:prstGeom prst="rect">
-            <a:avLst/>
-          </a:prstGeom>
-        </p:spPr>
-      </p:pic>
-      <p:pic>
-        <p:nvPicPr>
-          <p:cNvPr id="12" name="Picture 11" descr="03d6a17384790a95.png"/>
-          <p:cNvPicPr>
-            <a:picLocks noChangeAspect="1"/>
-          </p:cNvPicPr>
-          <p:nvPr/>
-        </p:nvPicPr>
-        <p:blipFill>
-          <a:blip r:embed="rId5"/>
-          <a:stretch>
-            <a:fillRect/>
-          </a:stretch>
-        </p:blipFill>
-        <p:spPr>
-          <a:xfrm>
-            <a:off x="4527803" y="4848970"/>
-            <a:ext cx="1091184" cy="512064"/>
-          </a:xfrm>
-          <a:prstGeom prst="rect">
-            <a:avLst/>
-          </a:prstGeom>
-        </p:spPr>
-      </p:pic>
-      <p:sp>
-        <p:nvSpPr>
-          <p:cNvPr id="13" name="TextBox 12"/>
-          <p:cNvSpPr txBox="1"/>
-          <p:nvPr/>
-        </p:nvSpPr>
-        <p:spPr>
-          <a:xfrm>
-            <a:off x="777240" y="5498194"/>
-            <a:ext cx="10607040" cy="548640"/>
-          </a:xfrm>
-          <a:prstGeom prst="rect">
-            <a:avLst/>
-          </a:prstGeom>
-          <a:noFill/>
-        </p:spPr>
-        <p:txBody>
-          <a:bodyPr wrap="square" lIns="45720" rIns="45720" tIns="18288" bIns="18288" anchor="t">
-            <a:spAutoFit/>
-          </a:bodyPr>
-          <a:lstStyle/>
-          <a:p>
-            <a:pPr algn="ctr"/>
-            <a:r>
-              <a:rPr sz="3040" b="1" i="0">
-                <a:solidFill>
-                  <a:srgbClr val="9E1B32"/>
-                </a:solidFill>
-                <a:latin typeface="Lexend"/>
-              </a:rPr>
-              <a:t>Answer:   1</a:t>
             </a:r>
           </a:p>
         </p:txBody>
@@ -5304,13 +5198,13 @@
           <a:p>
             <a:pPr algn="l"/>
             <a:r>
-              <a:rPr sz="3229" b="1" i="0">
+              <a:rPr sz="3420" b="1" i="0">
                 <a:solidFill>
                   <a:srgbClr val="1A1A1A"/>
                 </a:solidFill>
                 <a:latin typeface="Lexend"/>
               </a:rPr>
-              <a:t>Whiteboards   ·   Question 1 of 9</a:t>
+              <a:t>Your Turn</a:t>
             </a:r>
           </a:p>
         </p:txBody>
@@ -5492,7 +5386,7 @@
       </p:sp>
       <p:pic>
         <p:nvPicPr>
-          <p:cNvPr id="8" name="Picture 7" descr="25a7622aecf1eba0.png"/>
+          <p:cNvPr id="8" name="Picture 7" descr="93f2d6cae19f4401.png"/>
           <p:cNvPicPr>
             <a:picLocks noChangeAspect="1"/>
           </p:cNvPicPr>
@@ -5506,8 +5400,8 @@
         </p:blipFill>
         <p:spPr>
           <a:xfrm>
-            <a:off x="5352287" y="2260092"/>
-            <a:ext cx="1456944" cy="280416"/>
+            <a:off x="4541519" y="1481328"/>
+            <a:ext cx="3078480" cy="847344"/>
           </a:xfrm>
           <a:prstGeom prst="rect">
             <a:avLst/>
@@ -5522,8 +5416,8 @@
         </p:nvSpPr>
         <p:spPr>
           <a:xfrm>
-            <a:off x="777240" y="4343400"/>
-            <a:ext cx="10607040" cy="457200"/>
+            <a:off x="777240" y="2831592"/>
+            <a:ext cx="10607040" cy="429370"/>
           </a:xfrm>
           <a:prstGeom prst="rect">
             <a:avLst/>
@@ -5538,13 +5432,120 @@
           <a:p>
             <a:pPr algn="ctr"/>
             <a:r>
-              <a:rPr sz="2470" b="1" i="0">
+              <a:rPr sz="2280" b="1" i="0">
                 <a:solidFill>
                   <a:srgbClr val="1A1A1A"/>
                 </a:solidFill>
                 <a:latin typeface="Lexend"/>
               </a:rPr>
-              <a:t>Answer it.</a:t>
+              <a:t>Evaluate.</a:t>
+            </a:r>
+          </a:p>
+        </p:txBody>
+      </p:sp>
+      <p:pic>
+        <p:nvPicPr>
+          <p:cNvPr id="10" name="Picture 9" descr="6565c690921d94d1.png"/>
+          <p:cNvPicPr>
+            <a:picLocks noChangeAspect="1"/>
+          </p:cNvPicPr>
+          <p:nvPr/>
+        </p:nvPicPr>
+        <p:blipFill>
+          <a:blip r:embed="rId3"/>
+          <a:stretch>
+            <a:fillRect/>
+          </a:stretch>
+        </p:blipFill>
+        <p:spPr>
+          <a:xfrm>
+            <a:off x="4527803" y="3443842"/>
+            <a:ext cx="1810512" cy="609600"/>
+          </a:xfrm>
+          <a:prstGeom prst="rect">
+            <a:avLst/>
+          </a:prstGeom>
+        </p:spPr>
+      </p:pic>
+      <p:pic>
+        <p:nvPicPr>
+          <p:cNvPr id="11" name="Picture 10" descr="a2173ad1551df9c2.png"/>
+          <p:cNvPicPr>
+            <a:picLocks noChangeAspect="1"/>
+          </p:cNvPicPr>
+          <p:nvPr/>
+        </p:nvPicPr>
+        <p:blipFill>
+          <a:blip r:embed="rId4"/>
+          <a:stretch>
+            <a:fillRect/>
+          </a:stretch>
+        </p:blipFill>
+        <p:spPr>
+          <a:xfrm>
+            <a:off x="4527803" y="4144882"/>
+            <a:ext cx="3212592" cy="612648"/>
+          </a:xfrm>
+          <a:prstGeom prst="rect">
+            <a:avLst/>
+          </a:prstGeom>
+        </p:spPr>
+      </p:pic>
+      <p:pic>
+        <p:nvPicPr>
+          <p:cNvPr id="12" name="Picture 11" descr="03d6a17384790a95.png"/>
+          <p:cNvPicPr>
+            <a:picLocks noChangeAspect="1"/>
+          </p:cNvPicPr>
+          <p:nvPr/>
+        </p:nvPicPr>
+        <p:blipFill>
+          <a:blip r:embed="rId5"/>
+          <a:stretch>
+            <a:fillRect/>
+          </a:stretch>
+        </p:blipFill>
+        <p:spPr>
+          <a:xfrm>
+            <a:off x="4527803" y="4848970"/>
+            <a:ext cx="1091184" cy="512064"/>
+          </a:xfrm>
+          <a:prstGeom prst="rect">
+            <a:avLst/>
+          </a:prstGeom>
+        </p:spPr>
+      </p:pic>
+      <p:sp>
+        <p:nvSpPr>
+          <p:cNvPr id="13" name="TextBox 12"/>
+          <p:cNvSpPr txBox="1"/>
+          <p:nvPr/>
+        </p:nvSpPr>
+        <p:spPr>
+          <a:xfrm>
+            <a:off x="777240" y="5498194"/>
+            <a:ext cx="10607040" cy="548640"/>
+          </a:xfrm>
+          <a:prstGeom prst="rect">
+            <a:avLst/>
+          </a:prstGeom>
+          <a:noFill/>
+        </p:spPr>
+        <p:txBody>
+          <a:bodyPr wrap="square" lIns="45720" rIns="45720" tIns="18288" bIns="18288" anchor="t">
+            <a:spAutoFit/>
+          </a:bodyPr>
+          <a:lstStyle/>
+          <a:p>
+            <a:pPr algn="ctr"/>
+            <a:r>
+              <a:rPr sz="3040" b="1" i="0">
+                <a:solidFill>
+                  <a:srgbClr val="9E1B32"/>
+                </a:solidFill>
+                <a:latin typeface="Lexend"/>
+              </a:rPr>
+              <a:t>Answer:   1</a:t>
             </a:r>
           </a:p>
         </p:txBody>
@@ -5779,7 +5780,7 @@
       </p:sp>
       <p:pic>
         <p:nvPicPr>
-          <p:cNvPr id="8" name="Picture 7" descr="36fd5fdafeb181a4.png"/>
+          <p:cNvPr id="8" name="Picture 7" descr="25a7622aecf1eba0.png"/>
           <p:cNvPicPr>
             <a:picLocks noChangeAspect="1"/>
           </p:cNvPicPr>
@@ -5793,7 +5794,7 @@
         </p:blipFill>
         <p:spPr>
           <a:xfrm>
-            <a:off x="5352287" y="2168652"/>
+            <a:off x="5352287" y="2260092"/>
             <a:ext cx="1456944" cy="280416"/>
           </a:xfrm>
           <a:prstGeom prst="rect">
@@ -5809,91 +5810,8 @@
         </p:nvSpPr>
         <p:spPr>
           <a:xfrm>
-            <a:off x="4011726" y="2839212"/>
-            <a:ext cx="2656738" cy="457200"/>
-          </a:xfrm>
-          <a:prstGeom prst="rect">
-            <a:avLst/>
-          </a:prstGeom>
-          <a:noFill/>
-        </p:spPr>
-        <p:txBody>
-          <a:bodyPr wrap="none" lIns="45720" rIns="45720" tIns="18288" bIns="18288" anchor="ctr">
-            <a:noAutofit/>
-          </a:bodyPr>
-          <a:lstStyle/>
-          <a:p>
-            <a:pPr algn="l"/>
-            <a:r>
-              <a:rPr sz="2750" b="0" i="0">
-                <a:solidFill>
-                  <a:srgbClr val="1A1A1A"/>
-                </a:solidFill>
-                <a:latin typeface="Lexend"/>
-              </a:rPr>
-              <a:t>Left to right:  </a:t>
-            </a:r>
-          </a:p>
-        </p:txBody>
-      </p:sp>
-      <p:pic>
-        <p:nvPicPr>
-          <p:cNvPr id="10" name="Picture 9" descr="12ac90fe8177c5f9.png"/>
-          <p:cNvPicPr>
-            <a:picLocks noChangeAspect="1"/>
-          </p:cNvPicPr>
-          <p:nvPr/>
-        </p:nvPicPr>
-        <p:blipFill>
-          <a:blip r:embed="rId3"/>
-          <a:stretch>
-            <a:fillRect/>
-          </a:stretch>
-        </p:blipFill>
-        <p:spPr>
-          <a:xfrm>
-            <a:off x="6531305" y="2941320"/>
-            <a:ext cx="1621536" cy="252984"/>
-          </a:xfrm>
-          <a:prstGeom prst="rect">
-            <a:avLst/>
-          </a:prstGeom>
-        </p:spPr>
-      </p:pic>
-      <p:pic>
-        <p:nvPicPr>
-          <p:cNvPr id="11" name="Picture 10" descr="58b50d1f788fe127.png"/>
-          <p:cNvPicPr>
-            <a:picLocks noChangeAspect="1"/>
-          </p:cNvPicPr>
-          <p:nvPr/>
-        </p:nvPicPr>
-        <p:blipFill>
-          <a:blip r:embed="rId4"/>
-          <a:stretch>
-            <a:fillRect/>
-          </a:stretch>
-        </p:blipFill>
-        <p:spPr>
-          <a:xfrm>
-            <a:off x="4066590" y="3480816"/>
-            <a:ext cx="1478280" cy="252984"/>
-          </a:xfrm>
-          <a:prstGeom prst="rect">
-            <a:avLst/>
-          </a:prstGeom>
-        </p:spPr>
-      </p:pic>
-      <p:sp>
-        <p:nvSpPr>
-          <p:cNvPr id="12" name="TextBox 11"/>
-          <p:cNvSpPr txBox="1"/>
-          <p:nvPr/>
-        </p:nvSpPr>
-        <p:spPr>
-          <a:xfrm>
-            <a:off x="777240" y="4663440"/>
-            <a:ext cx="10607040" cy="548640"/>
+            <a:off x="777240" y="4343400"/>
+            <a:ext cx="10607040" cy="457200"/>
           </a:xfrm>
           <a:prstGeom prst="rect">
             <a:avLst/>
@@ -5908,13 +5826,13 @@
           <a:p>
             <a:pPr algn="ctr"/>
             <a:r>
-              <a:rPr sz="3040" b="1" i="0">
-                <a:solidFill>
-                  <a:srgbClr val="9E1B32"/>
-                </a:solidFill>
-                <a:latin typeface="Lexend"/>
-              </a:rPr>
-              <a:t>Answer:   54</a:t>
+              <a:rPr sz="2470" b="1" i="0">
+                <a:solidFill>
+                  <a:srgbClr val="1A1A1A"/>
+                </a:solidFill>
+                <a:latin typeface="Lexend"/>
+              </a:rPr>
+              <a:t>Answer it.</a:t>
             </a:r>
           </a:p>
         </p:txBody>
@@ -5967,7 +5885,7 @@
                 </a:solidFill>
                 <a:latin typeface="Lexend"/>
               </a:rPr>
-              <a:t>Whiteboards   ·   Question 2 of 9</a:t>
+              <a:t>Whiteboards   ·   Question 1 of 9</a:t>
             </a:r>
           </a:p>
         </p:txBody>
@@ -6147,44 +6065,9 @@
           </a:p>
         </p:txBody>
       </p:sp>
-      <p:sp>
-        <p:nvSpPr>
-          <p:cNvPr id="8" name="TextBox 7"/>
-          <p:cNvSpPr txBox="1"/>
-          <p:nvPr/>
-        </p:nvSpPr>
-        <p:spPr>
-          <a:xfrm>
-            <a:off x="1234440" y="1851660"/>
-            <a:ext cx="3545617" cy="457200"/>
-          </a:xfrm>
-          <a:prstGeom prst="rect">
-            <a:avLst/>
-          </a:prstGeom>
-          <a:noFill/>
-        </p:spPr>
-        <p:txBody>
-          <a:bodyPr wrap="none" lIns="45720" rIns="45720" tIns="18288" bIns="18288" anchor="ctr">
-            <a:noAutofit/>
-          </a:bodyPr>
-          <a:lstStyle/>
-          <a:p>
-            <a:pPr algn="l"/>
-            <a:r>
-              <a:rPr sz="2280" b="0" i="0">
-                <a:solidFill>
-                  <a:srgbClr val="1A1A1A"/>
-                </a:solidFill>
-                <a:latin typeface="Lexend"/>
-              </a:rPr>
-              <a:t>A square tile has side  </a:t>
-            </a:r>
-          </a:p>
-        </p:txBody>
-      </p:sp>
       <p:pic>
         <p:nvPicPr>
-          <p:cNvPr id="9" name="Picture 8" descr="97c530a75d29d302.png"/>
+          <p:cNvPr id="8" name="Picture 7" descr="36fd5fdafeb181a4.png"/>
           <p:cNvPicPr>
             <a:picLocks noChangeAspect="1"/>
           </p:cNvPicPr>
@@ -6198,8 +6081,8 @@
         </p:blipFill>
         <p:spPr>
           <a:xfrm>
-            <a:off x="4642897" y="1885187"/>
-            <a:ext cx="844296" cy="390144"/>
+            <a:off x="5352287" y="2168652"/>
+            <a:ext cx="1456944" cy="280416"/>
           </a:xfrm>
           <a:prstGeom prst="rect">
             <a:avLst/>
@@ -6208,14 +6091,14 @@
       </p:pic>
       <p:sp>
         <p:nvSpPr>
-          <p:cNvPr id="10" name="TextBox 9"/>
-          <p:cNvSpPr txBox="1"/>
-          <p:nvPr/>
-        </p:nvSpPr>
-        <p:spPr>
-          <a:xfrm>
-            <a:off x="5487193" y="1851660"/>
-            <a:ext cx="2211425" cy="457200"/>
+          <p:cNvPr id="9" name="TextBox 8"/>
+          <p:cNvSpPr txBox="1"/>
+          <p:nvPr/>
+        </p:nvSpPr>
+        <p:spPr>
+          <a:xfrm>
+            <a:off x="4011726" y="2839212"/>
+            <a:ext cx="2656738" cy="457200"/>
           </a:xfrm>
           <a:prstGeom prst="rect">
             <a:avLst/>
@@ -6230,27 +6113,75 @@
           <a:p>
             <a:pPr algn="l"/>
             <a:r>
-              <a:rPr sz="2280" b="0" i="0">
+              <a:rPr sz="2750" b="0" i="0">
                 <a:solidFill>
                   <a:srgbClr val="1A1A1A"/>
                 </a:solidFill>
                 <a:latin typeface="Lexend"/>
               </a:rPr>
-              <a:t>  centimeters.</a:t>
-            </a:r>
-          </a:p>
-        </p:txBody>
-      </p:sp>
-      <p:sp>
-        <p:nvSpPr>
-          <p:cNvPr id="11" name="TextBox 10"/>
-          <p:cNvSpPr txBox="1"/>
-          <p:nvPr/>
-        </p:nvSpPr>
-        <p:spPr>
-          <a:xfrm>
-            <a:off x="1234440" y="2487168"/>
-            <a:ext cx="10058400" cy="429370"/>
+              <a:t>Left to right:  </a:t>
+            </a:r>
+          </a:p>
+        </p:txBody>
+      </p:sp>
+      <p:pic>
+        <p:nvPicPr>
+          <p:cNvPr id="10" name="Picture 9" descr="12ac90fe8177c5f9.png"/>
+          <p:cNvPicPr>
+            <a:picLocks noChangeAspect="1"/>
+          </p:cNvPicPr>
+          <p:nvPr/>
+        </p:nvPicPr>
+        <p:blipFill>
+          <a:blip r:embed="rId3"/>
+          <a:stretch>
+            <a:fillRect/>
+          </a:stretch>
+        </p:blipFill>
+        <p:spPr>
+          <a:xfrm>
+            <a:off x="6531305" y="2941320"/>
+            <a:ext cx="1621536" cy="252984"/>
+          </a:xfrm>
+          <a:prstGeom prst="rect">
+            <a:avLst/>
+          </a:prstGeom>
+        </p:spPr>
+      </p:pic>
+      <p:pic>
+        <p:nvPicPr>
+          <p:cNvPr id="11" name="Picture 10" descr="58b50d1f788fe127.png"/>
+          <p:cNvPicPr>
+            <a:picLocks noChangeAspect="1"/>
+          </p:cNvPicPr>
+          <p:nvPr/>
+        </p:nvPicPr>
+        <p:blipFill>
+          <a:blip r:embed="rId4"/>
+          <a:stretch>
+            <a:fillRect/>
+          </a:stretch>
+        </p:blipFill>
+        <p:spPr>
+          <a:xfrm>
+            <a:off x="4066590" y="3480816"/>
+            <a:ext cx="1478280" cy="252984"/>
+          </a:xfrm>
+          <a:prstGeom prst="rect">
+            <a:avLst/>
+          </a:prstGeom>
+        </p:spPr>
+      </p:pic>
+      <p:sp>
+        <p:nvSpPr>
+          <p:cNvPr id="12" name="TextBox 11"/>
+          <p:cNvSpPr txBox="1"/>
+          <p:nvPr/>
+        </p:nvSpPr>
+        <p:spPr>
+          <a:xfrm>
+            <a:off x="777240" y="4663440"/>
+            <a:ext cx="10607040" cy="548640"/>
           </a:xfrm>
           <a:prstGeom prst="rect">
             <a:avLst/>
@@ -6263,85 +6194,15 @@
           </a:bodyPr>
           <a:lstStyle/>
           <a:p>
-            <a:pPr algn="l"/>
-            <a:r>
-              <a:rPr sz="2280" b="0" i="0">
-                <a:solidFill>
-                  <a:srgbClr val="1A1A1A"/>
-                </a:solidFill>
-                <a:latin typeface="Lexend"/>
-              </a:rPr>
-              <a:t>Its diagonal is about 19.8 centimeters.</a:t>
-            </a:r>
-          </a:p>
-        </p:txBody>
-      </p:sp>
-      <p:sp>
-        <p:nvSpPr>
-          <p:cNvPr id="12" name="TextBox 11"/>
-          <p:cNvSpPr txBox="1"/>
-          <p:nvPr/>
-        </p:nvSpPr>
-        <p:spPr>
-          <a:xfrm>
-            <a:off x="1234440" y="3026266"/>
-            <a:ext cx="10058400" cy="429370"/>
-          </a:xfrm>
-          <a:prstGeom prst="rect">
-            <a:avLst/>
-          </a:prstGeom>
-          <a:noFill/>
-        </p:spPr>
-        <p:txBody>
-          <a:bodyPr wrap="square" lIns="45720" rIns="45720" tIns="18288" bIns="18288" anchor="t">
-            <a:spAutoFit/>
-          </a:bodyPr>
-          <a:lstStyle/>
-          <a:p>
-            <a:pPr algn="l"/>
-            <a:r>
-              <a:rPr sz="2280" b="1" i="0">
-                <a:solidFill>
-                  <a:srgbClr val="1A1A1A"/>
-                </a:solidFill>
-                <a:latin typeface="Lexend"/>
-              </a:rPr>
-              <a:t>What is the perimeter of the tile?</a:t>
-            </a:r>
-          </a:p>
-        </p:txBody>
-      </p:sp>
-      <p:sp>
-        <p:nvSpPr>
-          <p:cNvPr id="13" name="TextBox 12"/>
-          <p:cNvSpPr txBox="1"/>
-          <p:nvPr/>
-        </p:nvSpPr>
-        <p:spPr>
-          <a:xfrm>
-            <a:off x="777240" y="4343400"/>
-            <a:ext cx="10607040" cy="457200"/>
-          </a:xfrm>
-          <a:prstGeom prst="rect">
-            <a:avLst/>
-          </a:prstGeom>
-          <a:noFill/>
-        </p:spPr>
-        <p:txBody>
-          <a:bodyPr wrap="square" lIns="45720" rIns="45720" tIns="18288" bIns="18288" anchor="t">
-            <a:spAutoFit/>
-          </a:bodyPr>
-          <a:lstStyle/>
-          <a:p>
             <a:pPr algn="ctr"/>
             <a:r>
-              <a:rPr sz="2470" b="1" i="0">
-                <a:solidFill>
-                  <a:srgbClr val="1A1A1A"/>
-                </a:solidFill>
-                <a:latin typeface="Lexend"/>
-              </a:rPr>
-              <a:t>Answer it.</a:t>
+              <a:rPr sz="3040" b="1" i="0">
+                <a:solidFill>
+                  <a:srgbClr val="9E1B32"/>
+                </a:solidFill>
+                <a:latin typeface="Lexend"/>
+              </a:rPr>
+              <a:t>Answer:   54</a:t>
             </a:r>
           </a:p>
         </p:txBody>
@@ -6611,7 +6472,7 @@
       </p:sp>
       <p:pic>
         <p:nvPicPr>
-          <p:cNvPr id="9" name="Picture 8" descr="8dd3731dd90336b5.png"/>
+          <p:cNvPr id="9" name="Picture 8" descr="97c530a75d29d302.png"/>
           <p:cNvPicPr>
             <a:picLocks noChangeAspect="1"/>
           </p:cNvPicPr>
@@ -6626,7 +6487,7 @@
         <p:spPr>
           <a:xfrm>
             <a:off x="4642897" y="1885187"/>
-            <a:ext cx="838200" cy="390144"/>
+            <a:ext cx="844296" cy="390144"/>
           </a:xfrm>
           <a:prstGeom prst="rect">
             <a:avLst/>
@@ -6641,7 +6502,7 @@
         </p:nvSpPr>
         <p:spPr>
           <a:xfrm>
-            <a:off x="5481097" y="1851660"/>
+            <a:off x="5487193" y="1851660"/>
             <a:ext cx="2211425" cy="457200"/>
           </a:xfrm>
           <a:prstGeom prst="rect">
@@ -6738,99 +6599,16 @@
           </a:p>
         </p:txBody>
       </p:sp>
-      <p:pic>
-        <p:nvPicPr>
-          <p:cNvPr id="13" name="Picture 12" descr="fe182c84c4bdb5f5.png"/>
-          <p:cNvPicPr>
-            <a:picLocks noChangeAspect="1"/>
-          </p:cNvPicPr>
-          <p:nvPr/>
-        </p:nvPicPr>
-        <p:blipFill>
-          <a:blip r:embed="rId3"/>
-          <a:stretch>
-            <a:fillRect/>
-          </a:stretch>
-        </p:blipFill>
-        <p:spPr>
-          <a:xfrm>
-            <a:off x="4267467" y="3684236"/>
-            <a:ext cx="1642872" cy="432816"/>
-          </a:xfrm>
-          <a:prstGeom prst="rect">
-            <a:avLst/>
-          </a:prstGeom>
-        </p:spPr>
-      </p:pic>
-      <p:sp>
-        <p:nvSpPr>
-          <p:cNvPr id="14" name="TextBox 13"/>
-          <p:cNvSpPr txBox="1"/>
-          <p:nvPr/>
-        </p:nvSpPr>
-        <p:spPr>
-          <a:xfrm>
-            <a:off x="4212603" y="4222208"/>
-            <a:ext cx="2270224" cy="457200"/>
-          </a:xfrm>
-          <a:prstGeom prst="rect">
-            <a:avLst/>
-          </a:prstGeom>
-          <a:noFill/>
-        </p:spPr>
-        <p:txBody>
-          <a:bodyPr wrap="none" lIns="45720" rIns="45720" tIns="18288" bIns="18288" anchor="ctr">
-            <a:noAutofit/>
-          </a:bodyPr>
-          <a:lstStyle/>
-          <a:p>
-            <a:pPr algn="l"/>
-            <a:r>
-              <a:rPr sz="2750" b="0" i="0">
-                <a:solidFill>
-                  <a:srgbClr val="1A1A1A"/>
-                </a:solidFill>
-                <a:latin typeface="Lexend"/>
-              </a:rPr>
-              <a:t>Perimeter:  </a:t>
-            </a:r>
-          </a:p>
-        </p:txBody>
-      </p:sp>
-      <p:pic>
-        <p:nvPicPr>
-          <p:cNvPr id="15" name="Picture 14" descr="b92290561e20c8b3.png"/>
-          <p:cNvPicPr>
-            <a:picLocks noChangeAspect="1"/>
-          </p:cNvPicPr>
-          <p:nvPr/>
-        </p:nvPicPr>
-        <p:blipFill>
-          <a:blip r:embed="rId4"/>
-          <a:stretch>
-            <a:fillRect/>
-          </a:stretch>
-        </p:blipFill>
-        <p:spPr>
-          <a:xfrm>
-            <a:off x="6345668" y="4322792"/>
-            <a:ext cx="1609344" cy="256032"/>
-          </a:xfrm>
-          <a:prstGeom prst="rect">
-            <a:avLst/>
-          </a:prstGeom>
-        </p:spPr>
-      </p:pic>
-      <p:sp>
-        <p:nvSpPr>
-          <p:cNvPr id="16" name="TextBox 15"/>
-          <p:cNvSpPr txBox="1"/>
-          <p:nvPr/>
-        </p:nvSpPr>
-        <p:spPr>
-          <a:xfrm>
-            <a:off x="777240" y="4793708"/>
-            <a:ext cx="10607040" cy="548640"/>
+      <p:sp>
+        <p:nvSpPr>
+          <p:cNvPr id="13" name="TextBox 12"/>
+          <p:cNvSpPr txBox="1"/>
+          <p:nvPr/>
+        </p:nvSpPr>
+        <p:spPr>
+          <a:xfrm>
+            <a:off x="777240" y="4343400"/>
+            <a:ext cx="10607040" cy="457200"/>
           </a:xfrm>
           <a:prstGeom prst="rect">
             <a:avLst/>
@@ -6845,13 +6623,13 @@
           <a:p>
             <a:pPr algn="ctr"/>
             <a:r>
-              <a:rPr sz="3040" b="1" i="0">
-                <a:solidFill>
-                  <a:srgbClr val="9E1B32"/>
-                </a:solidFill>
-                <a:latin typeface="Lexend"/>
-              </a:rPr>
-              <a:t>Answer:   56 centimeters</a:t>
+              <a:rPr sz="2470" b="1" i="0">
+                <a:solidFill>
+                  <a:srgbClr val="1A1A1A"/>
+                </a:solidFill>
+                <a:latin typeface="Lexend"/>
+              </a:rPr>
+              <a:t>Answer it.</a:t>
             </a:r>
           </a:p>
         </p:txBody>
@@ -6904,7 +6682,7 @@
                 </a:solidFill>
                 <a:latin typeface="Lexend"/>
               </a:rPr>
-              <a:t>Whiteboards   ·   Question 3 of 9</a:t>
+              <a:t>Whiteboards   ·   Question 2 of 9</a:t>
             </a:r>
           </a:p>
         </p:txBody>
@@ -7084,9 +6862,44 @@
           </a:p>
         </p:txBody>
       </p:sp>
+      <p:sp>
+        <p:nvSpPr>
+          <p:cNvPr id="8" name="TextBox 7"/>
+          <p:cNvSpPr txBox="1"/>
+          <p:nvPr/>
+        </p:nvSpPr>
+        <p:spPr>
+          <a:xfrm>
+            <a:off x="1234440" y="1851660"/>
+            <a:ext cx="3545617" cy="457200"/>
+          </a:xfrm>
+          <a:prstGeom prst="rect">
+            <a:avLst/>
+          </a:prstGeom>
+          <a:noFill/>
+        </p:spPr>
+        <p:txBody>
+          <a:bodyPr wrap="none" lIns="45720" rIns="45720" tIns="18288" bIns="18288" anchor="ctr">
+            <a:noAutofit/>
+          </a:bodyPr>
+          <a:lstStyle/>
+          <a:p>
+            <a:pPr algn="l"/>
+            <a:r>
+              <a:rPr sz="2280" b="0" i="0">
+                <a:solidFill>
+                  <a:srgbClr val="1A1A1A"/>
+                </a:solidFill>
+                <a:latin typeface="Lexend"/>
+              </a:rPr>
+              <a:t>A square tile has side  </a:t>
+            </a:r>
+          </a:p>
+        </p:txBody>
+      </p:sp>
       <p:pic>
         <p:nvPicPr>
-          <p:cNvPr id="8" name="Picture 7" descr="7d69da8346cb7cdc.png"/>
+          <p:cNvPr id="9" name="Picture 8" descr="8dd3731dd90336b5.png"/>
           <p:cNvPicPr>
             <a:picLocks noChangeAspect="1"/>
           </p:cNvPicPr>
@@ -7100,8 +6913,8 @@
         </p:blipFill>
         <p:spPr>
           <a:xfrm>
-            <a:off x="5303520" y="2260092"/>
-            <a:ext cx="1554480" cy="280416"/>
+            <a:off x="4642897" y="1885187"/>
+            <a:ext cx="838200" cy="390144"/>
           </a:xfrm>
           <a:prstGeom prst="rect">
             <a:avLst/>
@@ -7110,14 +6923,49 @@
       </p:pic>
       <p:sp>
         <p:nvSpPr>
-          <p:cNvPr id="9" name="TextBox 8"/>
-          <p:cNvSpPr txBox="1"/>
-          <p:nvPr/>
-        </p:nvSpPr>
-        <p:spPr>
-          <a:xfrm>
-            <a:off x="777240" y="4343400"/>
-            <a:ext cx="10607040" cy="457200"/>
+          <p:cNvPr id="10" name="TextBox 9"/>
+          <p:cNvSpPr txBox="1"/>
+          <p:nvPr/>
+        </p:nvSpPr>
+        <p:spPr>
+          <a:xfrm>
+            <a:off x="5481097" y="1851660"/>
+            <a:ext cx="2211425" cy="457200"/>
+          </a:xfrm>
+          <a:prstGeom prst="rect">
+            <a:avLst/>
+          </a:prstGeom>
+          <a:noFill/>
+        </p:spPr>
+        <p:txBody>
+          <a:bodyPr wrap="none" lIns="45720" rIns="45720" tIns="18288" bIns="18288" anchor="ctr">
+            <a:noAutofit/>
+          </a:bodyPr>
+          <a:lstStyle/>
+          <a:p>
+            <a:pPr algn="l"/>
+            <a:r>
+              <a:rPr sz="2280" b="0" i="0">
+                <a:solidFill>
+                  <a:srgbClr val="1A1A1A"/>
+                </a:solidFill>
+                <a:latin typeface="Lexend"/>
+              </a:rPr>
+              <a:t>  centimeters.</a:t>
+            </a:r>
+          </a:p>
+        </p:txBody>
+      </p:sp>
+      <p:sp>
+        <p:nvSpPr>
+          <p:cNvPr id="11" name="TextBox 10"/>
+          <p:cNvSpPr txBox="1"/>
+          <p:nvPr/>
+        </p:nvSpPr>
+        <p:spPr>
+          <a:xfrm>
+            <a:off x="1234440" y="2487168"/>
+            <a:ext cx="10058400" cy="429370"/>
           </a:xfrm>
           <a:prstGeom prst="rect">
             <a:avLst/>
@@ -7130,15 +6978,168 @@
           </a:bodyPr>
           <a:lstStyle/>
           <a:p>
+            <a:pPr algn="l"/>
+            <a:r>
+              <a:rPr sz="2280" b="0" i="0">
+                <a:solidFill>
+                  <a:srgbClr val="1A1A1A"/>
+                </a:solidFill>
+                <a:latin typeface="Lexend"/>
+              </a:rPr>
+              <a:t>Its diagonal is about 19.8 centimeters.</a:t>
+            </a:r>
+          </a:p>
+        </p:txBody>
+      </p:sp>
+      <p:sp>
+        <p:nvSpPr>
+          <p:cNvPr id="12" name="TextBox 11"/>
+          <p:cNvSpPr txBox="1"/>
+          <p:nvPr/>
+        </p:nvSpPr>
+        <p:spPr>
+          <a:xfrm>
+            <a:off x="1234440" y="3026266"/>
+            <a:ext cx="10058400" cy="429370"/>
+          </a:xfrm>
+          <a:prstGeom prst="rect">
+            <a:avLst/>
+          </a:prstGeom>
+          <a:noFill/>
+        </p:spPr>
+        <p:txBody>
+          <a:bodyPr wrap="square" lIns="45720" rIns="45720" tIns="18288" bIns="18288" anchor="t">
+            <a:spAutoFit/>
+          </a:bodyPr>
+          <a:lstStyle/>
+          <a:p>
+            <a:pPr algn="l"/>
+            <a:r>
+              <a:rPr sz="2280" b="1" i="0">
+                <a:solidFill>
+                  <a:srgbClr val="1A1A1A"/>
+                </a:solidFill>
+                <a:latin typeface="Lexend"/>
+              </a:rPr>
+              <a:t>What is the perimeter of the tile?</a:t>
+            </a:r>
+          </a:p>
+        </p:txBody>
+      </p:sp>
+      <p:pic>
+        <p:nvPicPr>
+          <p:cNvPr id="13" name="Picture 12" descr="fe182c84c4bdb5f5.png"/>
+          <p:cNvPicPr>
+            <a:picLocks noChangeAspect="1"/>
+          </p:cNvPicPr>
+          <p:nvPr/>
+        </p:nvPicPr>
+        <p:blipFill>
+          <a:blip r:embed="rId3"/>
+          <a:stretch>
+            <a:fillRect/>
+          </a:stretch>
+        </p:blipFill>
+        <p:spPr>
+          <a:xfrm>
+            <a:off x="4267467" y="3684236"/>
+            <a:ext cx="1642872" cy="432816"/>
+          </a:xfrm>
+          <a:prstGeom prst="rect">
+            <a:avLst/>
+          </a:prstGeom>
+        </p:spPr>
+      </p:pic>
+      <p:sp>
+        <p:nvSpPr>
+          <p:cNvPr id="14" name="TextBox 13"/>
+          <p:cNvSpPr txBox="1"/>
+          <p:nvPr/>
+        </p:nvSpPr>
+        <p:spPr>
+          <a:xfrm>
+            <a:off x="4212603" y="4222208"/>
+            <a:ext cx="2270224" cy="457200"/>
+          </a:xfrm>
+          <a:prstGeom prst="rect">
+            <a:avLst/>
+          </a:prstGeom>
+          <a:noFill/>
+        </p:spPr>
+        <p:txBody>
+          <a:bodyPr wrap="none" lIns="45720" rIns="45720" tIns="18288" bIns="18288" anchor="ctr">
+            <a:noAutofit/>
+          </a:bodyPr>
+          <a:lstStyle/>
+          <a:p>
+            <a:pPr algn="l"/>
+            <a:r>
+              <a:rPr sz="2750" b="0" i="0">
+                <a:solidFill>
+                  <a:srgbClr val="1A1A1A"/>
+                </a:solidFill>
+                <a:latin typeface="Lexend"/>
+              </a:rPr>
+              <a:t>Perimeter:  </a:t>
+            </a:r>
+          </a:p>
+        </p:txBody>
+      </p:sp>
+      <p:pic>
+        <p:nvPicPr>
+          <p:cNvPr id="15" name="Picture 14" descr="b92290561e20c8b3.png"/>
+          <p:cNvPicPr>
+            <a:picLocks noChangeAspect="1"/>
+          </p:cNvPicPr>
+          <p:nvPr/>
+        </p:nvPicPr>
+        <p:blipFill>
+          <a:blip r:embed="rId4"/>
+          <a:stretch>
+            <a:fillRect/>
+          </a:stretch>
+        </p:blipFill>
+        <p:spPr>
+          <a:xfrm>
+            <a:off x="6345668" y="4322792"/>
+            <a:ext cx="1609344" cy="256032"/>
+          </a:xfrm>
+          <a:prstGeom prst="rect">
+            <a:avLst/>
+          </a:prstGeom>
+        </p:spPr>
+      </p:pic>
+      <p:sp>
+        <p:nvSpPr>
+          <p:cNvPr id="16" name="TextBox 15"/>
+          <p:cNvSpPr txBox="1"/>
+          <p:nvPr/>
+        </p:nvSpPr>
+        <p:spPr>
+          <a:xfrm>
+            <a:off x="777240" y="4793708"/>
+            <a:ext cx="10607040" cy="548640"/>
+          </a:xfrm>
+          <a:prstGeom prst="rect">
+            <a:avLst/>
+          </a:prstGeom>
+          <a:noFill/>
+        </p:spPr>
+        <p:txBody>
+          <a:bodyPr wrap="square" lIns="45720" rIns="45720" tIns="18288" bIns="18288" anchor="t">
+            <a:spAutoFit/>
+          </a:bodyPr>
+          <a:lstStyle/>
+          <a:p>
             <a:pPr algn="ctr"/>
             <a:r>
-              <a:rPr sz="2470" b="1" i="0">
-                <a:solidFill>
-                  <a:srgbClr val="1A1A1A"/>
-                </a:solidFill>
-                <a:latin typeface="Lexend"/>
-              </a:rPr>
-              <a:t>Answer it.</a:t>
+              <a:rPr sz="3040" b="1" i="0">
+                <a:solidFill>
+                  <a:srgbClr val="9E1B32"/>
+                </a:solidFill>
+                <a:latin typeface="Lexend"/>
+              </a:rPr>
+              <a:t>Answer:   56 centimeters</a:t>
             </a:r>
           </a:p>
         </p:txBody>
@@ -7813,7 +7814,7 @@
       </p:sp>
       <p:pic>
         <p:nvPicPr>
-          <p:cNvPr id="8" name="Picture 7" descr="9dc4fd86eed7f2ed.png"/>
+          <p:cNvPr id="8" name="Picture 7" descr="7d69da8346cb7cdc.png"/>
           <p:cNvPicPr>
             <a:picLocks noChangeAspect="1"/>
           </p:cNvPicPr>
@@ -7827,7 +7828,7 @@
         </p:blipFill>
         <p:spPr>
           <a:xfrm>
-            <a:off x="5303520" y="2168652"/>
+            <a:off x="5303520" y="2260092"/>
             <a:ext cx="1554480" cy="280416"/>
           </a:xfrm>
           <a:prstGeom prst="rect">
@@ -7843,91 +7844,8 @@
         </p:nvSpPr>
         <p:spPr>
           <a:xfrm>
-            <a:off x="4057446" y="2839212"/>
-            <a:ext cx="2656738" cy="457200"/>
-          </a:xfrm>
-          <a:prstGeom prst="rect">
-            <a:avLst/>
-          </a:prstGeom>
-          <a:noFill/>
-        </p:spPr>
-        <p:txBody>
-          <a:bodyPr wrap="none" lIns="45720" rIns="45720" tIns="18288" bIns="18288" anchor="ctr">
-            <a:noAutofit/>
-          </a:bodyPr>
-          <a:lstStyle/>
-          <a:p>
-            <a:pPr algn="l"/>
-            <a:r>
-              <a:rPr sz="2750" b="0" i="0">
-                <a:solidFill>
-                  <a:srgbClr val="1A1A1A"/>
-                </a:solidFill>
-                <a:latin typeface="Lexend"/>
-              </a:rPr>
-              <a:t>Left to right:  </a:t>
-            </a:r>
-          </a:p>
-        </p:txBody>
-      </p:sp>
-      <p:pic>
-        <p:nvPicPr>
-          <p:cNvPr id="10" name="Picture 9" descr="5215752a2994fdfe.png"/>
-          <p:cNvPicPr>
-            <a:picLocks noChangeAspect="1"/>
-          </p:cNvPicPr>
-          <p:nvPr/>
-        </p:nvPicPr>
-        <p:blipFill>
-          <a:blip r:embed="rId3"/>
-          <a:stretch>
-            <a:fillRect/>
-          </a:stretch>
-        </p:blipFill>
-        <p:spPr>
-          <a:xfrm>
-            <a:off x="6577025" y="2939796"/>
-            <a:ext cx="1530096" cy="256032"/>
-          </a:xfrm>
-          <a:prstGeom prst="rect">
-            <a:avLst/>
-          </a:prstGeom>
-        </p:spPr>
-      </p:pic>
-      <p:pic>
-        <p:nvPicPr>
-          <p:cNvPr id="11" name="Picture 10" descr="1f8367c1c48b4347.png"/>
-          <p:cNvPicPr>
-            <a:picLocks noChangeAspect="1"/>
-          </p:cNvPicPr>
-          <p:nvPr/>
-        </p:nvPicPr>
-        <p:blipFill>
-          <a:blip r:embed="rId4"/>
-          <a:stretch>
-            <a:fillRect/>
-          </a:stretch>
-        </p:blipFill>
-        <p:spPr>
-          <a:xfrm>
-            <a:off x="4112310" y="3480816"/>
-            <a:ext cx="1554480" cy="252984"/>
-          </a:xfrm>
-          <a:prstGeom prst="rect">
-            <a:avLst/>
-          </a:prstGeom>
-        </p:spPr>
-      </p:pic>
-      <p:sp>
-        <p:nvSpPr>
-          <p:cNvPr id="12" name="TextBox 11"/>
-          <p:cNvSpPr txBox="1"/>
-          <p:nvPr/>
-        </p:nvSpPr>
-        <p:spPr>
-          <a:xfrm>
-            <a:off x="777240" y="4663440"/>
-            <a:ext cx="10607040" cy="548640"/>
+            <a:off x="777240" y="4343400"/>
+            <a:ext cx="10607040" cy="457200"/>
           </a:xfrm>
           <a:prstGeom prst="rect">
             <a:avLst/>
@@ -7942,13 +7860,13 @@
           <a:p>
             <a:pPr algn="ctr"/>
             <a:r>
-              <a:rPr sz="3040" b="1" i="0">
-                <a:solidFill>
-                  <a:srgbClr val="9E1B32"/>
-                </a:solidFill>
-                <a:latin typeface="Lexend"/>
-              </a:rPr>
-              <a:t>Answer:   15</a:t>
+              <a:rPr sz="2470" b="1" i="0">
+                <a:solidFill>
+                  <a:srgbClr val="1A1A1A"/>
+                </a:solidFill>
+                <a:latin typeface="Lexend"/>
+              </a:rPr>
+              <a:t>Answer it.</a:t>
             </a:r>
           </a:p>
         </p:txBody>
@@ -8001,7 +7919,7 @@
                 </a:solidFill>
                 <a:latin typeface="Lexend"/>
               </a:rPr>
-              <a:t>Whiteboards   ·   Question 4 of 9</a:t>
+              <a:t>Whiteboards   ·   Question 3 of 9</a:t>
             </a:r>
           </a:p>
         </p:txBody>
@@ -8183,7 +8101,7 @@
       </p:sp>
       <p:pic>
         <p:nvPicPr>
-          <p:cNvPr id="8" name="Picture 7" descr="2b230be022ca8b16.png"/>
+          <p:cNvPr id="8" name="Picture 7" descr="9dc4fd86eed7f2ed.png"/>
           <p:cNvPicPr>
             <a:picLocks noChangeAspect="1"/>
           </p:cNvPicPr>
@@ -8197,8 +8115,8 @@
         </p:blipFill>
         <p:spPr>
           <a:xfrm>
-            <a:off x="5498591" y="2194560"/>
-            <a:ext cx="1164336" cy="795528"/>
+            <a:off x="5303520" y="2168652"/>
+            <a:ext cx="1554480" cy="280416"/>
           </a:xfrm>
           <a:prstGeom prst="rect">
             <a:avLst/>
@@ -8213,8 +8131,91 @@
         </p:nvSpPr>
         <p:spPr>
           <a:xfrm>
-            <a:off x="777240" y="4343400"/>
-            <a:ext cx="10607040" cy="457200"/>
+            <a:off x="4057446" y="2839212"/>
+            <a:ext cx="2656738" cy="457200"/>
+          </a:xfrm>
+          <a:prstGeom prst="rect">
+            <a:avLst/>
+          </a:prstGeom>
+          <a:noFill/>
+        </p:spPr>
+        <p:txBody>
+          <a:bodyPr wrap="none" lIns="45720" rIns="45720" tIns="18288" bIns="18288" anchor="ctr">
+            <a:noAutofit/>
+          </a:bodyPr>
+          <a:lstStyle/>
+          <a:p>
+            <a:pPr algn="l"/>
+            <a:r>
+              <a:rPr sz="2750" b="0" i="0">
+                <a:solidFill>
+                  <a:srgbClr val="1A1A1A"/>
+                </a:solidFill>
+                <a:latin typeface="Lexend"/>
+              </a:rPr>
+              <a:t>Left to right:  </a:t>
+            </a:r>
+          </a:p>
+        </p:txBody>
+      </p:sp>
+      <p:pic>
+        <p:nvPicPr>
+          <p:cNvPr id="10" name="Picture 9" descr="5215752a2994fdfe.png"/>
+          <p:cNvPicPr>
+            <a:picLocks noChangeAspect="1"/>
+          </p:cNvPicPr>
+          <p:nvPr/>
+        </p:nvPicPr>
+        <p:blipFill>
+          <a:blip r:embed="rId3"/>
+          <a:stretch>
+            <a:fillRect/>
+          </a:stretch>
+        </p:blipFill>
+        <p:spPr>
+          <a:xfrm>
+            <a:off x="6577025" y="2939796"/>
+            <a:ext cx="1530096" cy="256032"/>
+          </a:xfrm>
+          <a:prstGeom prst="rect">
+            <a:avLst/>
+          </a:prstGeom>
+        </p:spPr>
+      </p:pic>
+      <p:pic>
+        <p:nvPicPr>
+          <p:cNvPr id="11" name="Picture 10" descr="1f8367c1c48b4347.png"/>
+          <p:cNvPicPr>
+            <a:picLocks noChangeAspect="1"/>
+          </p:cNvPicPr>
+          <p:nvPr/>
+        </p:nvPicPr>
+        <p:blipFill>
+          <a:blip r:embed="rId4"/>
+          <a:stretch>
+            <a:fillRect/>
+          </a:stretch>
+        </p:blipFill>
+        <p:spPr>
+          <a:xfrm>
+            <a:off x="4112310" y="3480816"/>
+            <a:ext cx="1554480" cy="252984"/>
+          </a:xfrm>
+          <a:prstGeom prst="rect">
+            <a:avLst/>
+          </a:prstGeom>
+        </p:spPr>
+      </p:pic>
+      <p:sp>
+        <p:nvSpPr>
+          <p:cNvPr id="12" name="TextBox 11"/>
+          <p:cNvSpPr txBox="1"/>
+          <p:nvPr/>
+        </p:nvSpPr>
+        <p:spPr>
+          <a:xfrm>
+            <a:off x="777240" y="4663440"/>
+            <a:ext cx="10607040" cy="548640"/>
           </a:xfrm>
           <a:prstGeom prst="rect">
             <a:avLst/>
@@ -8229,13 +8230,13 @@
           <a:p>
             <a:pPr algn="ctr"/>
             <a:r>
-              <a:rPr sz="2470" b="1" i="0">
-                <a:solidFill>
-                  <a:srgbClr val="1A1A1A"/>
-                </a:solidFill>
-                <a:latin typeface="Lexend"/>
-              </a:rPr>
-              <a:t>Answer it.</a:t>
+              <a:rPr sz="3040" b="1" i="0">
+                <a:solidFill>
+                  <a:srgbClr val="9E1B32"/>
+                </a:solidFill>
+                <a:latin typeface="Lexend"/>
+              </a:rPr>
+              <a:t>Answer:   15</a:t>
             </a:r>
           </a:p>
         </p:txBody>
@@ -8470,7 +8471,7 @@
       </p:sp>
       <p:pic>
         <p:nvPicPr>
-          <p:cNvPr id="8" name="Picture 7" descr="0893d505426886e4.png"/>
+          <p:cNvPr id="8" name="Picture 7" descr="2b230be022ca8b16.png"/>
           <p:cNvPicPr>
             <a:picLocks noChangeAspect="1"/>
           </p:cNvPicPr>
@@ -8484,8 +8485,8 @@
         </p:blipFill>
         <p:spPr>
           <a:xfrm>
-            <a:off x="5501639" y="2103120"/>
-            <a:ext cx="1158240" cy="798576"/>
+            <a:off x="5498591" y="2194560"/>
+            <a:ext cx="1164336" cy="795528"/>
           </a:xfrm>
           <a:prstGeom prst="rect">
             <a:avLst/>
@@ -8500,150 +8501,8 @@
         </p:nvSpPr>
         <p:spPr>
           <a:xfrm>
-            <a:off x="4022680" y="3226307"/>
-            <a:ext cx="996779" cy="457200"/>
-          </a:xfrm>
-          <a:prstGeom prst="rect">
-            <a:avLst/>
-          </a:prstGeom>
-          <a:noFill/>
-        </p:spPr>
-        <p:txBody>
-          <a:bodyPr wrap="none" lIns="45720" rIns="45720" tIns="18288" bIns="18288" anchor="ctr">
-            <a:noAutofit/>
-          </a:bodyPr>
-          <a:lstStyle/>
-          <a:p>
-            <a:pPr algn="l"/>
-            <a:r>
-              <a:rPr sz="2330" b="0" i="0">
-                <a:solidFill>
-                  <a:srgbClr val="1A1A1A"/>
-                </a:solidFill>
-                <a:latin typeface="Lexend"/>
-              </a:rPr>
-              <a:t>Top:  </a:t>
-            </a:r>
-          </a:p>
-        </p:txBody>
-      </p:sp>
-      <p:pic>
-        <p:nvPicPr>
-          <p:cNvPr id="10" name="Picture 9" descr="0f7f372429cfcbc3.png"/>
-          <p:cNvPicPr>
-            <a:picLocks noChangeAspect="1"/>
-          </p:cNvPicPr>
-          <p:nvPr/>
-        </p:nvPicPr>
-        <p:blipFill>
-          <a:blip r:embed="rId3"/>
-          <a:stretch>
-            <a:fillRect/>
-          </a:stretch>
-        </p:blipFill>
-        <p:spPr>
-          <a:xfrm>
-            <a:off x="4882300" y="3326891"/>
-            <a:ext cx="2481072" cy="256032"/>
-          </a:xfrm>
-          <a:prstGeom prst="rect">
-            <a:avLst/>
-          </a:prstGeom>
-        </p:spPr>
-      </p:pic>
-      <p:sp>
-        <p:nvSpPr>
-          <p:cNvPr id="11" name="TextBox 10"/>
-          <p:cNvSpPr txBox="1"/>
-          <p:nvPr/>
-        </p:nvSpPr>
-        <p:spPr>
-          <a:xfrm>
-            <a:off x="4022680" y="3729227"/>
-            <a:ext cx="1583270" cy="457200"/>
-          </a:xfrm>
-          <a:prstGeom prst="rect">
-            <a:avLst/>
-          </a:prstGeom>
-          <a:noFill/>
-        </p:spPr>
-        <p:txBody>
-          <a:bodyPr wrap="none" lIns="45720" rIns="45720" tIns="18288" bIns="18288" anchor="ctr">
-            <a:noAutofit/>
-          </a:bodyPr>
-          <a:lstStyle/>
-          <a:p>
-            <a:pPr algn="l"/>
-            <a:r>
-              <a:rPr sz="2330" b="0" i="0">
-                <a:solidFill>
-                  <a:srgbClr val="1A1A1A"/>
-                </a:solidFill>
-                <a:latin typeface="Lexend"/>
-              </a:rPr>
-              <a:t>Bottom:  </a:t>
-            </a:r>
-          </a:p>
-        </p:txBody>
-      </p:sp>
-      <p:pic>
-        <p:nvPicPr>
-          <p:cNvPr id="12" name="Picture 11" descr="d59a91b1f76472ac.png"/>
-          <p:cNvPicPr>
-            <a:picLocks noChangeAspect="1"/>
-          </p:cNvPicPr>
-          <p:nvPr/>
-        </p:nvPicPr>
-        <p:blipFill>
-          <a:blip r:embed="rId4"/>
-          <a:stretch>
-            <a:fillRect/>
-          </a:stretch>
-        </p:blipFill>
-        <p:spPr>
-          <a:xfrm>
-            <a:off x="5468791" y="3826763"/>
-            <a:ext cx="2670048" cy="262128"/>
-          </a:xfrm>
-          <a:prstGeom prst="rect">
-            <a:avLst/>
-          </a:prstGeom>
-        </p:spPr>
-      </p:pic>
-      <p:pic>
-        <p:nvPicPr>
-          <p:cNvPr id="13" name="Picture 12" descr="3d14f1f915bfc614.png"/>
-          <p:cNvPicPr>
-            <a:picLocks noChangeAspect="1"/>
-          </p:cNvPicPr>
-          <p:nvPr/>
-        </p:nvPicPr>
-        <p:blipFill>
-          <a:blip r:embed="rId5"/>
-          <a:stretch>
-            <a:fillRect/>
-          </a:stretch>
-        </p:blipFill>
-        <p:spPr>
-          <a:xfrm>
-            <a:off x="4077544" y="4255007"/>
-            <a:ext cx="807720" cy="515112"/>
-          </a:xfrm>
-          <a:prstGeom prst="rect">
-            <a:avLst/>
-          </a:prstGeom>
-        </p:spPr>
-      </p:pic>
-      <p:sp>
-        <p:nvSpPr>
-          <p:cNvPr id="14" name="TextBox 13"/>
-          <p:cNvSpPr txBox="1"/>
-          <p:nvPr/>
-        </p:nvSpPr>
-        <p:spPr>
-          <a:xfrm>
-            <a:off x="777240" y="4907280"/>
-            <a:ext cx="10607040" cy="548640"/>
+            <a:off x="777240" y="4343400"/>
+            <a:ext cx="10607040" cy="457200"/>
           </a:xfrm>
           <a:prstGeom prst="rect">
             <a:avLst/>
@@ -8658,13 +8517,13 @@
           <a:p>
             <a:pPr algn="ctr"/>
             <a:r>
-              <a:rPr sz="3040" b="1" i="0">
-                <a:solidFill>
-                  <a:srgbClr val="9E1B32"/>
-                </a:solidFill>
-                <a:latin typeface="Lexend"/>
-              </a:rPr>
-              <a:t>Answer:   3/5</a:t>
+              <a:rPr sz="2470" b="1" i="0">
+                <a:solidFill>
+                  <a:srgbClr val="1A1A1A"/>
+                </a:solidFill>
+                <a:latin typeface="Lexend"/>
+              </a:rPr>
+              <a:t>Answer it.</a:t>
             </a:r>
           </a:p>
         </p:txBody>
@@ -8717,7 +8576,7 @@
                 </a:solidFill>
                 <a:latin typeface="Lexend"/>
               </a:rPr>
-              <a:t>Whiteboards   ·   Question 5 of 9</a:t>
+              <a:t>Whiteboards   ·   Question 4 of 9</a:t>
             </a:r>
           </a:p>
         </p:txBody>
@@ -8899,7 +8758,7 @@
       </p:sp>
       <p:pic>
         <p:nvPicPr>
-          <p:cNvPr id="8" name="Picture 7" descr="594d57048b4fb9ac.png"/>
+          <p:cNvPr id="8" name="Picture 7" descr="0893d505426886e4.png"/>
           <p:cNvPicPr>
             <a:picLocks noChangeAspect="1"/>
           </p:cNvPicPr>
@@ -8913,8 +8772,8 @@
         </p:blipFill>
         <p:spPr>
           <a:xfrm>
-            <a:off x="5387339" y="2229612"/>
-            <a:ext cx="1386840" cy="341376"/>
+            <a:off x="5501639" y="2103120"/>
+            <a:ext cx="1158240" cy="798576"/>
           </a:xfrm>
           <a:prstGeom prst="rect">
             <a:avLst/>
@@ -8929,8 +8788,150 @@
         </p:nvSpPr>
         <p:spPr>
           <a:xfrm>
-            <a:off x="777240" y="2880360"/>
-            <a:ext cx="10607040" cy="465151"/>
+            <a:off x="4022680" y="3226307"/>
+            <a:ext cx="996779" cy="457200"/>
+          </a:xfrm>
+          <a:prstGeom prst="rect">
+            <a:avLst/>
+          </a:prstGeom>
+          <a:noFill/>
+        </p:spPr>
+        <p:txBody>
+          <a:bodyPr wrap="none" lIns="45720" rIns="45720" tIns="18288" bIns="18288" anchor="ctr">
+            <a:noAutofit/>
+          </a:bodyPr>
+          <a:lstStyle/>
+          <a:p>
+            <a:pPr algn="l"/>
+            <a:r>
+              <a:rPr sz="2330" b="0" i="0">
+                <a:solidFill>
+                  <a:srgbClr val="1A1A1A"/>
+                </a:solidFill>
+                <a:latin typeface="Lexend"/>
+              </a:rPr>
+              <a:t>Top:  </a:t>
+            </a:r>
+          </a:p>
+        </p:txBody>
+      </p:sp>
+      <p:pic>
+        <p:nvPicPr>
+          <p:cNvPr id="10" name="Picture 9" descr="0f7f372429cfcbc3.png"/>
+          <p:cNvPicPr>
+            <a:picLocks noChangeAspect="1"/>
+          </p:cNvPicPr>
+          <p:nvPr/>
+        </p:nvPicPr>
+        <p:blipFill>
+          <a:blip r:embed="rId3"/>
+          <a:stretch>
+            <a:fillRect/>
+          </a:stretch>
+        </p:blipFill>
+        <p:spPr>
+          <a:xfrm>
+            <a:off x="4882300" y="3326891"/>
+            <a:ext cx="2481072" cy="256032"/>
+          </a:xfrm>
+          <a:prstGeom prst="rect">
+            <a:avLst/>
+          </a:prstGeom>
+        </p:spPr>
+      </p:pic>
+      <p:sp>
+        <p:nvSpPr>
+          <p:cNvPr id="11" name="TextBox 10"/>
+          <p:cNvSpPr txBox="1"/>
+          <p:nvPr/>
+        </p:nvSpPr>
+        <p:spPr>
+          <a:xfrm>
+            <a:off x="4022680" y="3729227"/>
+            <a:ext cx="1583270" cy="457200"/>
+          </a:xfrm>
+          <a:prstGeom prst="rect">
+            <a:avLst/>
+          </a:prstGeom>
+          <a:noFill/>
+        </p:spPr>
+        <p:txBody>
+          <a:bodyPr wrap="none" lIns="45720" rIns="45720" tIns="18288" bIns="18288" anchor="ctr">
+            <a:noAutofit/>
+          </a:bodyPr>
+          <a:lstStyle/>
+          <a:p>
+            <a:pPr algn="l"/>
+            <a:r>
+              <a:rPr sz="2330" b="0" i="0">
+                <a:solidFill>
+                  <a:srgbClr val="1A1A1A"/>
+                </a:solidFill>
+                <a:latin typeface="Lexend"/>
+              </a:rPr>
+              <a:t>Bottom:  </a:t>
+            </a:r>
+          </a:p>
+        </p:txBody>
+      </p:sp>
+      <p:pic>
+        <p:nvPicPr>
+          <p:cNvPr id="12" name="Picture 11" descr="d59a91b1f76472ac.png"/>
+          <p:cNvPicPr>
+            <a:picLocks noChangeAspect="1"/>
+          </p:cNvPicPr>
+          <p:nvPr/>
+        </p:nvPicPr>
+        <p:blipFill>
+          <a:blip r:embed="rId4"/>
+          <a:stretch>
+            <a:fillRect/>
+          </a:stretch>
+        </p:blipFill>
+        <p:spPr>
+          <a:xfrm>
+            <a:off x="5468791" y="3826763"/>
+            <a:ext cx="2670048" cy="262128"/>
+          </a:xfrm>
+          <a:prstGeom prst="rect">
+            <a:avLst/>
+          </a:prstGeom>
+        </p:spPr>
+      </p:pic>
+      <p:pic>
+        <p:nvPicPr>
+          <p:cNvPr id="13" name="Picture 12" descr="3d14f1f915bfc614.png"/>
+          <p:cNvPicPr>
+            <a:picLocks noChangeAspect="1"/>
+          </p:cNvPicPr>
+          <p:nvPr/>
+        </p:nvPicPr>
+        <p:blipFill>
+          <a:blip r:embed="rId5"/>
+          <a:stretch>
+            <a:fillRect/>
+          </a:stretch>
+        </p:blipFill>
+        <p:spPr>
+          <a:xfrm>
+            <a:off x="4077544" y="4255007"/>
+            <a:ext cx="807720" cy="515112"/>
+          </a:xfrm>
+          <a:prstGeom prst="rect">
+            <a:avLst/>
+          </a:prstGeom>
+        </p:spPr>
+      </p:pic>
+      <p:sp>
+        <p:nvSpPr>
+          <p:cNvPr id="14" name="TextBox 13"/>
+          <p:cNvSpPr txBox="1"/>
+          <p:nvPr/>
+        </p:nvSpPr>
+        <p:spPr>
+          <a:xfrm>
+            <a:off x="777240" y="4907280"/>
+            <a:ext cx="10607040" cy="548640"/>
           </a:xfrm>
           <a:prstGeom prst="rect">
             <a:avLst/>
@@ -8945,224 +8946,13 @@
           <a:p>
             <a:pPr algn="ctr"/>
             <a:r>
-              <a:rPr sz="2470" b="0" i="0">
-                <a:solidFill>
-                  <a:srgbClr val="1A1A1A"/>
-                </a:solidFill>
-                <a:latin typeface="Lexend"/>
-              </a:rPr>
-              <a:t>Which is the value?</a:t>
-            </a:r>
-          </a:p>
-        </p:txBody>
-      </p:sp>
-      <p:sp>
-        <p:nvSpPr>
-          <p:cNvPr id="10" name="TextBox 9"/>
-          <p:cNvSpPr txBox="1"/>
-          <p:nvPr/>
-        </p:nvSpPr>
-        <p:spPr>
-          <a:xfrm>
-            <a:off x="1874519" y="3546679"/>
-            <a:ext cx="4572000" cy="548640"/>
-          </a:xfrm>
-          <a:prstGeom prst="rect">
-            <a:avLst/>
-          </a:prstGeom>
-          <a:noFill/>
-        </p:spPr>
-        <p:txBody>
-          <a:bodyPr wrap="square" lIns="45720" rIns="45720" tIns="18288" bIns="18288" anchor="t">
-            <a:spAutoFit/>
-          </a:bodyPr>
-          <a:lstStyle/>
-          <a:p>
-            <a:pPr algn="l"/>
-            <a:r>
-              <a:rPr sz="2280" b="1" i="0">
-                <a:solidFill>
-                  <a:srgbClr val="1A1A1A"/>
-                </a:solidFill>
-                <a:latin typeface="Lexend"/>
-              </a:rPr>
-              <a:t>A.   </a:t>
-            </a:r>
-            <a:r>
-              <a:rPr sz="2280" b="0" i="0">
-                <a:solidFill>
-                  <a:srgbClr val="1A1A1A"/>
-                </a:solidFill>
-                <a:latin typeface="Lexend"/>
-              </a:rPr>
-              <a:t>146</a:t>
-            </a:r>
-          </a:p>
-        </p:txBody>
-      </p:sp>
-      <p:sp>
-        <p:nvSpPr>
-          <p:cNvPr id="11" name="TextBox 10"/>
-          <p:cNvSpPr txBox="1"/>
-          <p:nvPr/>
-        </p:nvSpPr>
-        <p:spPr>
-          <a:xfrm>
-            <a:off x="6629400" y="3546679"/>
-            <a:ext cx="4572000" cy="548640"/>
-          </a:xfrm>
-          <a:prstGeom prst="rect">
-            <a:avLst/>
-          </a:prstGeom>
-          <a:noFill/>
-        </p:spPr>
-        <p:txBody>
-          <a:bodyPr wrap="square" lIns="45720" rIns="45720" tIns="18288" bIns="18288" anchor="t">
-            <a:spAutoFit/>
-          </a:bodyPr>
-          <a:lstStyle/>
-          <a:p>
-            <a:pPr algn="l"/>
-            <a:r>
-              <a:rPr sz="2280" b="1" i="0">
-                <a:solidFill>
-                  <a:srgbClr val="1A1A1A"/>
-                </a:solidFill>
-                <a:latin typeface="Lexend"/>
-              </a:rPr>
-              <a:t>B.   </a:t>
-            </a:r>
-            <a:r>
-              <a:rPr sz="2280" b="0" i="0">
-                <a:solidFill>
-                  <a:srgbClr val="1A1A1A"/>
-                </a:solidFill>
-                <a:latin typeface="Lexend"/>
-              </a:rPr>
-              <a:t>50</a:t>
-            </a:r>
-          </a:p>
-        </p:txBody>
-      </p:sp>
-      <p:sp>
-        <p:nvSpPr>
-          <p:cNvPr id="12" name="TextBox 11"/>
-          <p:cNvSpPr txBox="1"/>
-          <p:nvPr/>
-        </p:nvSpPr>
-        <p:spPr>
-          <a:xfrm>
-            <a:off x="1874519" y="4232479"/>
-            <a:ext cx="4572000" cy="548640"/>
-          </a:xfrm>
-          <a:prstGeom prst="rect">
-            <a:avLst/>
-          </a:prstGeom>
-          <a:noFill/>
-        </p:spPr>
-        <p:txBody>
-          <a:bodyPr wrap="square" lIns="45720" rIns="45720" tIns="18288" bIns="18288" anchor="t">
-            <a:spAutoFit/>
-          </a:bodyPr>
-          <a:lstStyle/>
-          <a:p>
-            <a:pPr algn="l"/>
-            <a:r>
-              <a:rPr sz="2280" b="1" i="0">
-                <a:solidFill>
-                  <a:srgbClr val="1A1A1A"/>
-                </a:solidFill>
-                <a:latin typeface="Lexend"/>
-              </a:rPr>
-              <a:t>C.   </a:t>
-            </a:r>
-            <a:r>
-              <a:rPr sz="2280" b="0" i="0">
-                <a:solidFill>
-                  <a:srgbClr val="1A1A1A"/>
-                </a:solidFill>
-                <a:latin typeface="Lexend"/>
-              </a:rPr>
-              <a:t>26</a:t>
-            </a:r>
-          </a:p>
-        </p:txBody>
-      </p:sp>
-      <p:sp>
-        <p:nvSpPr>
-          <p:cNvPr id="13" name="TextBox 12"/>
-          <p:cNvSpPr txBox="1"/>
-          <p:nvPr/>
-        </p:nvSpPr>
-        <p:spPr>
-          <a:xfrm>
-            <a:off x="6629400" y="4232479"/>
-            <a:ext cx="4572000" cy="548640"/>
-          </a:xfrm>
-          <a:prstGeom prst="rect">
-            <a:avLst/>
-          </a:prstGeom>
-          <a:noFill/>
-        </p:spPr>
-        <p:txBody>
-          <a:bodyPr wrap="square" lIns="45720" rIns="45720" tIns="18288" bIns="18288" anchor="t">
-            <a:spAutoFit/>
-          </a:bodyPr>
-          <a:lstStyle/>
-          <a:p>
-            <a:pPr algn="l"/>
-            <a:r>
-              <a:rPr sz="2280" b="1" i="0">
-                <a:solidFill>
-                  <a:srgbClr val="1A1A1A"/>
-                </a:solidFill>
-                <a:latin typeface="Lexend"/>
-              </a:rPr>
-              <a:t>D.   </a:t>
-            </a:r>
-            <a:r>
-              <a:rPr sz="2280" b="0" i="0">
-                <a:solidFill>
-                  <a:srgbClr val="1A1A1A"/>
-                </a:solidFill>
-                <a:latin typeface="Lexend"/>
-              </a:rPr>
-              <a:t>80</a:t>
-            </a:r>
-          </a:p>
-        </p:txBody>
-      </p:sp>
-      <p:sp>
-        <p:nvSpPr>
-          <p:cNvPr id="14" name="TextBox 13"/>
-          <p:cNvSpPr txBox="1"/>
-          <p:nvPr/>
-        </p:nvSpPr>
-        <p:spPr>
-          <a:xfrm>
-            <a:off x="777240" y="5238319"/>
-            <a:ext cx="10607040" cy="457200"/>
-          </a:xfrm>
-          <a:prstGeom prst="rect">
-            <a:avLst/>
-          </a:prstGeom>
-          <a:noFill/>
-        </p:spPr>
-        <p:txBody>
-          <a:bodyPr wrap="square" lIns="45720" rIns="45720" tIns="18288" bIns="18288" anchor="t">
-            <a:spAutoFit/>
-          </a:bodyPr>
-          <a:lstStyle/>
-          <a:p>
-            <a:pPr algn="ctr"/>
-            <a:r>
-              <a:rPr sz="2470" b="1" i="0">
-                <a:solidFill>
-                  <a:srgbClr val="1A1A1A"/>
-                </a:solidFill>
-                <a:latin typeface="Lexend"/>
-              </a:rPr>
-              <a:t>Answer it.</a:t>
+              <a:rPr sz="3040" b="1" i="0">
+                <a:solidFill>
+                  <a:srgbClr val="9E1B32"/>
+                </a:solidFill>
+                <a:latin typeface="Lexend"/>
+              </a:rPr>
+              <a:t>Answer:   3/5</a:t>
             </a:r>
           </a:p>
         </p:txBody>
@@ -9397,7 +9187,7 @@
       </p:sp>
       <p:pic>
         <p:nvPicPr>
-          <p:cNvPr id="8" name="Picture 7" descr="53291355aab2c4ad.png"/>
+          <p:cNvPr id="8" name="Picture 7" descr="594d57048b4fb9ac.png"/>
           <p:cNvPicPr>
             <a:picLocks noChangeAspect="1"/>
           </p:cNvPicPr>
@@ -9411,8 +9201,8 @@
         </p:blipFill>
         <p:spPr>
           <a:xfrm>
-            <a:off x="5385816" y="2138171"/>
-            <a:ext cx="1389888" cy="341376"/>
+            <a:off x="5387339" y="2229612"/>
+            <a:ext cx="1386840" cy="341376"/>
           </a:xfrm>
           <a:prstGeom prst="rect">
             <a:avLst/>
@@ -9427,7 +9217,7 @@
         </p:nvSpPr>
         <p:spPr>
           <a:xfrm>
-            <a:off x="777240" y="2788920"/>
+            <a:off x="777240" y="2880360"/>
             <a:ext cx="10607040" cy="465151"/>
           </a:xfrm>
           <a:prstGeom prst="rect">
@@ -9462,185 +9252,8 @@
         </p:nvSpPr>
         <p:spPr>
           <a:xfrm>
-            <a:off x="4270490" y="3414091"/>
-            <a:ext cx="2089630" cy="457200"/>
-          </a:xfrm>
-          <a:prstGeom prst="rect">
-            <a:avLst/>
-          </a:prstGeom>
-          <a:noFill/>
-        </p:spPr>
-        <p:txBody>
-          <a:bodyPr wrap="none" lIns="45720" rIns="45720" tIns="18288" bIns="18288" anchor="ctr">
-            <a:noAutofit/>
-          </a:bodyPr>
-          <a:lstStyle/>
-          <a:p>
-            <a:pPr algn="l"/>
-            <a:r>
-              <a:rPr sz="2330" b="0" i="0">
-                <a:solidFill>
-                  <a:srgbClr val="1A1A1A"/>
-                </a:solidFill>
-                <a:latin typeface="Lexend"/>
-              </a:rPr>
-              <a:t>Power first:  </a:t>
-            </a:r>
-          </a:p>
-        </p:txBody>
-      </p:sp>
-      <p:pic>
-        <p:nvPicPr>
-          <p:cNvPr id="11" name="Picture 10" descr="6bee3a4a6e96719d.png"/>
-          <p:cNvPicPr>
-            <a:picLocks noChangeAspect="1"/>
-          </p:cNvPicPr>
-          <p:nvPr/>
-        </p:nvPicPr>
-        <p:blipFill>
-          <a:blip r:embed="rId3"/>
-          <a:stretch>
-            <a:fillRect/>
-          </a:stretch>
-        </p:blipFill>
-        <p:spPr>
-          <a:xfrm>
-            <a:off x="6222961" y="3513151"/>
-            <a:ext cx="880872" cy="259080"/>
-          </a:xfrm>
-          <a:prstGeom prst="rect">
-            <a:avLst/>
-          </a:prstGeom>
-        </p:spPr>
-      </p:pic>
-      <p:sp>
-        <p:nvSpPr>
-          <p:cNvPr id="12" name="TextBox 11"/>
-          <p:cNvSpPr txBox="1"/>
-          <p:nvPr/>
-        </p:nvSpPr>
-        <p:spPr>
-          <a:xfrm>
-            <a:off x="4270490" y="3917011"/>
-            <a:ext cx="2498875" cy="457200"/>
-          </a:xfrm>
-          <a:prstGeom prst="rect">
-            <a:avLst/>
-          </a:prstGeom>
-          <a:noFill/>
-        </p:spPr>
-        <p:txBody>
-          <a:bodyPr wrap="none" lIns="45720" rIns="45720" tIns="18288" bIns="18288" anchor="ctr">
-            <a:noAutofit/>
-          </a:bodyPr>
-          <a:lstStyle/>
-          <a:p>
-            <a:pPr algn="l"/>
-            <a:r>
-              <a:rPr sz="2330" b="0" i="0">
-                <a:solidFill>
-                  <a:srgbClr val="1A1A1A"/>
-                </a:solidFill>
-                <a:latin typeface="Lexend"/>
-              </a:rPr>
-              <a:t>Then multiply:  </a:t>
-            </a:r>
-          </a:p>
-        </p:txBody>
-      </p:sp>
-      <p:pic>
-        <p:nvPicPr>
-          <p:cNvPr id="13" name="Picture 12" descr="521cfcdc4e4431f2.png"/>
-          <p:cNvPicPr>
-            <a:picLocks noChangeAspect="1"/>
-          </p:cNvPicPr>
-          <p:nvPr/>
-        </p:nvPicPr>
-        <p:blipFill>
-          <a:blip r:embed="rId4"/>
-          <a:stretch>
-            <a:fillRect/>
-          </a:stretch>
-        </p:blipFill>
-        <p:spPr>
-          <a:xfrm>
-            <a:off x="6632205" y="4038931"/>
-            <a:ext cx="1255776" cy="213360"/>
-          </a:xfrm>
-          <a:prstGeom prst="rect">
-            <a:avLst/>
-          </a:prstGeom>
-        </p:spPr>
-      </p:pic>
-      <p:sp>
-        <p:nvSpPr>
-          <p:cNvPr id="14" name="TextBox 13"/>
-          <p:cNvSpPr txBox="1"/>
-          <p:nvPr/>
-        </p:nvSpPr>
-        <p:spPr>
-          <a:xfrm>
-            <a:off x="4270490" y="4419931"/>
-            <a:ext cx="1877465" cy="457200"/>
-          </a:xfrm>
-          <a:prstGeom prst="rect">
-            <a:avLst/>
-          </a:prstGeom>
-          <a:noFill/>
-        </p:spPr>
-        <p:txBody>
-          <a:bodyPr wrap="none" lIns="45720" rIns="45720" tIns="18288" bIns="18288" anchor="ctr">
-            <a:noAutofit/>
-          </a:bodyPr>
-          <a:lstStyle/>
-          <a:p>
-            <a:pPr algn="l"/>
-            <a:r>
-              <a:rPr sz="2330" b="0" i="0">
-                <a:solidFill>
-                  <a:srgbClr val="1A1A1A"/>
-                </a:solidFill>
-                <a:latin typeface="Lexend"/>
-              </a:rPr>
-              <a:t>Then add:  </a:t>
-            </a:r>
-          </a:p>
-        </p:txBody>
-      </p:sp>
-      <p:pic>
-        <p:nvPicPr>
-          <p:cNvPr id="15" name="Picture 14" descr="c52f3646b69457bb.png"/>
-          <p:cNvPicPr>
-            <a:picLocks noChangeAspect="1"/>
-          </p:cNvPicPr>
-          <p:nvPr/>
-        </p:nvPicPr>
-        <p:blipFill>
-          <a:blip r:embed="rId5"/>
-          <a:stretch>
-            <a:fillRect/>
-          </a:stretch>
-        </p:blipFill>
-        <p:spPr>
-          <a:xfrm>
-            <a:off x="6010795" y="4541851"/>
-            <a:ext cx="1399032" cy="213360"/>
-          </a:xfrm>
-          <a:prstGeom prst="rect">
-            <a:avLst/>
-          </a:prstGeom>
-        </p:spPr>
-      </p:pic>
-      <p:sp>
-        <p:nvSpPr>
-          <p:cNvPr id="16" name="TextBox 15"/>
-          <p:cNvSpPr txBox="1"/>
-          <p:nvPr/>
-        </p:nvSpPr>
-        <p:spPr>
-          <a:xfrm>
-            <a:off x="777240" y="4991431"/>
-            <a:ext cx="10607040" cy="548640"/>
+            <a:off x="1874519" y="3546679"/>
+            <a:ext cx="4572000" cy="548640"/>
           </a:xfrm>
           <a:prstGeom prst="rect">
             <a:avLst/>
@@ -9653,15 +9266,191 @@
           </a:bodyPr>
           <a:lstStyle/>
           <a:p>
+            <a:pPr algn="l"/>
+            <a:r>
+              <a:rPr sz="2280" b="1" i="0">
+                <a:solidFill>
+                  <a:srgbClr val="1A1A1A"/>
+                </a:solidFill>
+                <a:latin typeface="Lexend"/>
+              </a:rPr>
+              <a:t>A.   </a:t>
+            </a:r>
+            <a:r>
+              <a:rPr sz="2280" b="0" i="0">
+                <a:solidFill>
+                  <a:srgbClr val="1A1A1A"/>
+                </a:solidFill>
+                <a:latin typeface="Lexend"/>
+              </a:rPr>
+              <a:t>146</a:t>
+            </a:r>
+          </a:p>
+        </p:txBody>
+      </p:sp>
+      <p:sp>
+        <p:nvSpPr>
+          <p:cNvPr id="11" name="TextBox 10"/>
+          <p:cNvSpPr txBox="1"/>
+          <p:nvPr/>
+        </p:nvSpPr>
+        <p:spPr>
+          <a:xfrm>
+            <a:off x="6629400" y="3546679"/>
+            <a:ext cx="4572000" cy="548640"/>
+          </a:xfrm>
+          <a:prstGeom prst="rect">
+            <a:avLst/>
+          </a:prstGeom>
+          <a:noFill/>
+        </p:spPr>
+        <p:txBody>
+          <a:bodyPr wrap="square" lIns="45720" rIns="45720" tIns="18288" bIns="18288" anchor="t">
+            <a:spAutoFit/>
+          </a:bodyPr>
+          <a:lstStyle/>
+          <a:p>
+            <a:pPr algn="l"/>
+            <a:r>
+              <a:rPr sz="2280" b="1" i="0">
+                <a:solidFill>
+                  <a:srgbClr val="1A1A1A"/>
+                </a:solidFill>
+                <a:latin typeface="Lexend"/>
+              </a:rPr>
+              <a:t>B.   </a:t>
+            </a:r>
+            <a:r>
+              <a:rPr sz="2280" b="0" i="0">
+                <a:solidFill>
+                  <a:srgbClr val="1A1A1A"/>
+                </a:solidFill>
+                <a:latin typeface="Lexend"/>
+              </a:rPr>
+              <a:t>50</a:t>
+            </a:r>
+          </a:p>
+        </p:txBody>
+      </p:sp>
+      <p:sp>
+        <p:nvSpPr>
+          <p:cNvPr id="12" name="TextBox 11"/>
+          <p:cNvSpPr txBox="1"/>
+          <p:nvPr/>
+        </p:nvSpPr>
+        <p:spPr>
+          <a:xfrm>
+            <a:off x="1874519" y="4232479"/>
+            <a:ext cx="4572000" cy="548640"/>
+          </a:xfrm>
+          <a:prstGeom prst="rect">
+            <a:avLst/>
+          </a:prstGeom>
+          <a:noFill/>
+        </p:spPr>
+        <p:txBody>
+          <a:bodyPr wrap="square" lIns="45720" rIns="45720" tIns="18288" bIns="18288" anchor="t">
+            <a:spAutoFit/>
+          </a:bodyPr>
+          <a:lstStyle/>
+          <a:p>
+            <a:pPr algn="l"/>
+            <a:r>
+              <a:rPr sz="2280" b="1" i="0">
+                <a:solidFill>
+                  <a:srgbClr val="1A1A1A"/>
+                </a:solidFill>
+                <a:latin typeface="Lexend"/>
+              </a:rPr>
+              <a:t>C.   </a:t>
+            </a:r>
+            <a:r>
+              <a:rPr sz="2280" b="0" i="0">
+                <a:solidFill>
+                  <a:srgbClr val="1A1A1A"/>
+                </a:solidFill>
+                <a:latin typeface="Lexend"/>
+              </a:rPr>
+              <a:t>26</a:t>
+            </a:r>
+          </a:p>
+        </p:txBody>
+      </p:sp>
+      <p:sp>
+        <p:nvSpPr>
+          <p:cNvPr id="13" name="TextBox 12"/>
+          <p:cNvSpPr txBox="1"/>
+          <p:nvPr/>
+        </p:nvSpPr>
+        <p:spPr>
+          <a:xfrm>
+            <a:off x="6629400" y="4232479"/>
+            <a:ext cx="4572000" cy="548640"/>
+          </a:xfrm>
+          <a:prstGeom prst="rect">
+            <a:avLst/>
+          </a:prstGeom>
+          <a:noFill/>
+        </p:spPr>
+        <p:txBody>
+          <a:bodyPr wrap="square" lIns="45720" rIns="45720" tIns="18288" bIns="18288" anchor="t">
+            <a:spAutoFit/>
+          </a:bodyPr>
+          <a:lstStyle/>
+          <a:p>
+            <a:pPr algn="l"/>
+            <a:r>
+              <a:rPr sz="2280" b="1" i="0">
+                <a:solidFill>
+                  <a:srgbClr val="1A1A1A"/>
+                </a:solidFill>
+                <a:latin typeface="Lexend"/>
+              </a:rPr>
+              <a:t>D.   </a:t>
+            </a:r>
+            <a:r>
+              <a:rPr sz="2280" b="0" i="0">
+                <a:solidFill>
+                  <a:srgbClr val="1A1A1A"/>
+                </a:solidFill>
+                <a:latin typeface="Lexend"/>
+              </a:rPr>
+              <a:t>80</a:t>
+            </a:r>
+          </a:p>
+        </p:txBody>
+      </p:sp>
+      <p:sp>
+        <p:nvSpPr>
+          <p:cNvPr id="14" name="TextBox 13"/>
+          <p:cNvSpPr txBox="1"/>
+          <p:nvPr/>
+        </p:nvSpPr>
+        <p:spPr>
+          <a:xfrm>
+            <a:off x="777240" y="5238319"/>
+            <a:ext cx="10607040" cy="457200"/>
+          </a:xfrm>
+          <a:prstGeom prst="rect">
+            <a:avLst/>
+          </a:prstGeom>
+          <a:noFill/>
+        </p:spPr>
+        <p:txBody>
+          <a:bodyPr wrap="square" lIns="45720" rIns="45720" tIns="18288" bIns="18288" anchor="t">
+            <a:spAutoFit/>
+          </a:bodyPr>
+          <a:lstStyle/>
+          <a:p>
             <a:pPr algn="ctr"/>
             <a:r>
-              <a:rPr sz="3040" b="1" i="0">
-                <a:solidFill>
-                  <a:srgbClr val="9E1B32"/>
-                </a:solidFill>
-                <a:latin typeface="Lexend"/>
-              </a:rPr>
-              <a:t>Answer:   B — 50</a:t>
+              <a:rPr sz="2470" b="1" i="0">
+                <a:solidFill>
+                  <a:srgbClr val="1A1A1A"/>
+                </a:solidFill>
+                <a:latin typeface="Lexend"/>
+              </a:rPr>
+              <a:t>Answer it.</a:t>
             </a:r>
           </a:p>
         </p:txBody>
@@ -9714,7 +9503,7 @@
                 </a:solidFill>
                 <a:latin typeface="Lexend"/>
               </a:rPr>
-              <a:t>Whiteboards   ·   Question 6 of 9</a:t>
+              <a:t>Whiteboards   ·   Question 5 of 9</a:t>
             </a:r>
           </a:p>
         </p:txBody>
@@ -9896,7 +9685,7 @@
       </p:sp>
       <p:pic>
         <p:nvPicPr>
-          <p:cNvPr id="8" name="Picture 7" descr="266fcce5418af23c.png"/>
+          <p:cNvPr id="8" name="Picture 7" descr="53291355aab2c4ad.png"/>
           <p:cNvPicPr>
             <a:picLocks noChangeAspect="1"/>
           </p:cNvPicPr>
@@ -9910,8 +9699,8 @@
         </p:blipFill>
         <p:spPr>
           <a:xfrm>
-            <a:off x="5586983" y="2194560"/>
-            <a:ext cx="987552" cy="792480"/>
+            <a:off x="5385816" y="2138171"/>
+            <a:ext cx="1389888" cy="341376"/>
           </a:xfrm>
           <a:prstGeom prst="rect">
             <a:avLst/>
@@ -9926,7 +9715,7 @@
         </p:nvSpPr>
         <p:spPr>
           <a:xfrm>
-            <a:off x="777240" y="3261360"/>
+            <a:off x="777240" y="2788920"/>
             <a:ext cx="10607040" cy="465151"/>
           </a:xfrm>
           <a:prstGeom prst="rect">
@@ -9961,8 +9750,185 @@
         </p:nvSpPr>
         <p:spPr>
           <a:xfrm>
-            <a:off x="1874519" y="3927679"/>
-            <a:ext cx="4572000" cy="548640"/>
+            <a:off x="4270490" y="3414091"/>
+            <a:ext cx="2089630" cy="457200"/>
+          </a:xfrm>
+          <a:prstGeom prst="rect">
+            <a:avLst/>
+          </a:prstGeom>
+          <a:noFill/>
+        </p:spPr>
+        <p:txBody>
+          <a:bodyPr wrap="none" lIns="45720" rIns="45720" tIns="18288" bIns="18288" anchor="ctr">
+            <a:noAutofit/>
+          </a:bodyPr>
+          <a:lstStyle/>
+          <a:p>
+            <a:pPr algn="l"/>
+            <a:r>
+              <a:rPr sz="2330" b="0" i="0">
+                <a:solidFill>
+                  <a:srgbClr val="1A1A1A"/>
+                </a:solidFill>
+                <a:latin typeface="Lexend"/>
+              </a:rPr>
+              <a:t>Power first:  </a:t>
+            </a:r>
+          </a:p>
+        </p:txBody>
+      </p:sp>
+      <p:pic>
+        <p:nvPicPr>
+          <p:cNvPr id="11" name="Picture 10" descr="6bee3a4a6e96719d.png"/>
+          <p:cNvPicPr>
+            <a:picLocks noChangeAspect="1"/>
+          </p:cNvPicPr>
+          <p:nvPr/>
+        </p:nvPicPr>
+        <p:blipFill>
+          <a:blip r:embed="rId3"/>
+          <a:stretch>
+            <a:fillRect/>
+          </a:stretch>
+        </p:blipFill>
+        <p:spPr>
+          <a:xfrm>
+            <a:off x="6222961" y="3513151"/>
+            <a:ext cx="880872" cy="259080"/>
+          </a:xfrm>
+          <a:prstGeom prst="rect">
+            <a:avLst/>
+          </a:prstGeom>
+        </p:spPr>
+      </p:pic>
+      <p:sp>
+        <p:nvSpPr>
+          <p:cNvPr id="12" name="TextBox 11"/>
+          <p:cNvSpPr txBox="1"/>
+          <p:nvPr/>
+        </p:nvSpPr>
+        <p:spPr>
+          <a:xfrm>
+            <a:off x="4270490" y="3917011"/>
+            <a:ext cx="2498875" cy="457200"/>
+          </a:xfrm>
+          <a:prstGeom prst="rect">
+            <a:avLst/>
+          </a:prstGeom>
+          <a:noFill/>
+        </p:spPr>
+        <p:txBody>
+          <a:bodyPr wrap="none" lIns="45720" rIns="45720" tIns="18288" bIns="18288" anchor="ctr">
+            <a:noAutofit/>
+          </a:bodyPr>
+          <a:lstStyle/>
+          <a:p>
+            <a:pPr algn="l"/>
+            <a:r>
+              <a:rPr sz="2330" b="0" i="0">
+                <a:solidFill>
+                  <a:srgbClr val="1A1A1A"/>
+                </a:solidFill>
+                <a:latin typeface="Lexend"/>
+              </a:rPr>
+              <a:t>Then multiply:  </a:t>
+            </a:r>
+          </a:p>
+        </p:txBody>
+      </p:sp>
+      <p:pic>
+        <p:nvPicPr>
+          <p:cNvPr id="13" name="Picture 12" descr="521cfcdc4e4431f2.png"/>
+          <p:cNvPicPr>
+            <a:picLocks noChangeAspect="1"/>
+          </p:cNvPicPr>
+          <p:nvPr/>
+        </p:nvPicPr>
+        <p:blipFill>
+          <a:blip r:embed="rId4"/>
+          <a:stretch>
+            <a:fillRect/>
+          </a:stretch>
+        </p:blipFill>
+        <p:spPr>
+          <a:xfrm>
+            <a:off x="6632205" y="4038931"/>
+            <a:ext cx="1255776" cy="213360"/>
+          </a:xfrm>
+          <a:prstGeom prst="rect">
+            <a:avLst/>
+          </a:prstGeom>
+        </p:spPr>
+      </p:pic>
+      <p:sp>
+        <p:nvSpPr>
+          <p:cNvPr id="14" name="TextBox 13"/>
+          <p:cNvSpPr txBox="1"/>
+          <p:nvPr/>
+        </p:nvSpPr>
+        <p:spPr>
+          <a:xfrm>
+            <a:off x="4270490" y="4419931"/>
+            <a:ext cx="1877465" cy="457200"/>
+          </a:xfrm>
+          <a:prstGeom prst="rect">
+            <a:avLst/>
+          </a:prstGeom>
+          <a:noFill/>
+        </p:spPr>
+        <p:txBody>
+          <a:bodyPr wrap="none" lIns="45720" rIns="45720" tIns="18288" bIns="18288" anchor="ctr">
+            <a:noAutofit/>
+          </a:bodyPr>
+          <a:lstStyle/>
+          <a:p>
+            <a:pPr algn="l"/>
+            <a:r>
+              <a:rPr sz="2330" b="0" i="0">
+                <a:solidFill>
+                  <a:srgbClr val="1A1A1A"/>
+                </a:solidFill>
+                <a:latin typeface="Lexend"/>
+              </a:rPr>
+              <a:t>Then add:  </a:t>
+            </a:r>
+          </a:p>
+        </p:txBody>
+      </p:sp>
+      <p:pic>
+        <p:nvPicPr>
+          <p:cNvPr id="15" name="Picture 14" descr="c52f3646b69457bb.png"/>
+          <p:cNvPicPr>
+            <a:picLocks noChangeAspect="1"/>
+          </p:cNvPicPr>
+          <p:nvPr/>
+        </p:nvPicPr>
+        <p:blipFill>
+          <a:blip r:embed="rId5"/>
+          <a:stretch>
+            <a:fillRect/>
+          </a:stretch>
+        </p:blipFill>
+        <p:spPr>
+          <a:xfrm>
+            <a:off x="6010795" y="4541851"/>
+            <a:ext cx="1399032" cy="213360"/>
+          </a:xfrm>
+          <a:prstGeom prst="rect">
+            <a:avLst/>
+          </a:prstGeom>
+        </p:spPr>
+      </p:pic>
+      <p:sp>
+        <p:nvSpPr>
+          <p:cNvPr id="16" name="TextBox 15"/>
+          <p:cNvSpPr txBox="1"/>
+          <p:nvPr/>
+        </p:nvSpPr>
+        <p:spPr>
+          <a:xfrm>
+            <a:off x="777240" y="4991431"/>
+            <a:ext cx="10607040" cy="548640"/>
           </a:xfrm>
           <a:prstGeom prst="rect">
             <a:avLst/>
@@ -9975,191 +9941,15 @@
           </a:bodyPr>
           <a:lstStyle/>
           <a:p>
-            <a:pPr algn="l"/>
-            <a:r>
-              <a:rPr sz="2280" b="1" i="0">
-                <a:solidFill>
-                  <a:srgbClr val="1A1A1A"/>
-                </a:solidFill>
-                <a:latin typeface="Lexend"/>
-              </a:rPr>
-              <a:t>A.   </a:t>
-            </a:r>
-            <a:r>
-              <a:rPr sz="2280" b="0" i="0">
-                <a:solidFill>
-                  <a:srgbClr val="1A1A1A"/>
-                </a:solidFill>
-                <a:latin typeface="Lexend"/>
-              </a:rPr>
-              <a:t>4</a:t>
-            </a:r>
-          </a:p>
-        </p:txBody>
-      </p:sp>
-      <p:sp>
-        <p:nvSpPr>
-          <p:cNvPr id="11" name="TextBox 10"/>
-          <p:cNvSpPr txBox="1"/>
-          <p:nvPr/>
-        </p:nvSpPr>
-        <p:spPr>
-          <a:xfrm>
-            <a:off x="6629400" y="3927679"/>
-            <a:ext cx="4572000" cy="548640"/>
-          </a:xfrm>
-          <a:prstGeom prst="rect">
-            <a:avLst/>
-          </a:prstGeom>
-          <a:noFill/>
-        </p:spPr>
-        <p:txBody>
-          <a:bodyPr wrap="square" lIns="45720" rIns="45720" tIns="18288" bIns="18288" anchor="t">
-            <a:spAutoFit/>
-          </a:bodyPr>
-          <a:lstStyle/>
-          <a:p>
-            <a:pPr algn="l"/>
-            <a:r>
-              <a:rPr sz="2280" b="1" i="0">
-                <a:solidFill>
-                  <a:srgbClr val="1A1A1A"/>
-                </a:solidFill>
-                <a:latin typeface="Lexend"/>
-              </a:rPr>
-              <a:t>B.   </a:t>
-            </a:r>
-            <a:r>
-              <a:rPr sz="2280" b="0" i="0">
-                <a:solidFill>
-                  <a:srgbClr val="1A1A1A"/>
-                </a:solidFill>
-                <a:latin typeface="Lexend"/>
-              </a:rPr>
-              <a:t>35.5</a:t>
-            </a:r>
-          </a:p>
-        </p:txBody>
-      </p:sp>
-      <p:sp>
-        <p:nvSpPr>
-          <p:cNvPr id="12" name="TextBox 11"/>
-          <p:cNvSpPr txBox="1"/>
-          <p:nvPr/>
-        </p:nvSpPr>
-        <p:spPr>
-          <a:xfrm>
-            <a:off x="1874519" y="4613479"/>
-            <a:ext cx="4572000" cy="548640"/>
-          </a:xfrm>
-          <a:prstGeom prst="rect">
-            <a:avLst/>
-          </a:prstGeom>
-          <a:noFill/>
-        </p:spPr>
-        <p:txBody>
-          <a:bodyPr wrap="square" lIns="45720" rIns="45720" tIns="18288" bIns="18288" anchor="t">
-            <a:spAutoFit/>
-          </a:bodyPr>
-          <a:lstStyle/>
-          <a:p>
-            <a:pPr algn="l"/>
-            <a:r>
-              <a:rPr sz="2280" b="1" i="0">
-                <a:solidFill>
-                  <a:srgbClr val="1A1A1A"/>
-                </a:solidFill>
-                <a:latin typeface="Lexend"/>
-              </a:rPr>
-              <a:t>C.   </a:t>
-            </a:r>
-            <a:r>
-              <a:rPr sz="2280" b="0" i="0">
-                <a:solidFill>
-                  <a:srgbClr val="1A1A1A"/>
-                </a:solidFill>
-                <a:latin typeface="Lexend"/>
-              </a:rPr>
-              <a:t>0.5</a:t>
-            </a:r>
-          </a:p>
-        </p:txBody>
-      </p:sp>
-      <p:sp>
-        <p:nvSpPr>
-          <p:cNvPr id="13" name="TextBox 12"/>
-          <p:cNvSpPr txBox="1"/>
-          <p:nvPr/>
-        </p:nvSpPr>
-        <p:spPr>
-          <a:xfrm>
-            <a:off x="6629400" y="4613479"/>
-            <a:ext cx="4572000" cy="548640"/>
-          </a:xfrm>
-          <a:prstGeom prst="rect">
-            <a:avLst/>
-          </a:prstGeom>
-          <a:noFill/>
-        </p:spPr>
-        <p:txBody>
-          <a:bodyPr wrap="square" lIns="45720" rIns="45720" tIns="18288" bIns="18288" anchor="t">
-            <a:spAutoFit/>
-          </a:bodyPr>
-          <a:lstStyle/>
-          <a:p>
-            <a:pPr algn="l"/>
-            <a:r>
-              <a:rPr sz="2280" b="1" i="0">
-                <a:solidFill>
-                  <a:srgbClr val="1A1A1A"/>
-                </a:solidFill>
-                <a:latin typeface="Lexend"/>
-              </a:rPr>
-              <a:t>D.   </a:t>
-            </a:r>
-            <a:r>
-              <a:rPr sz="2280" b="0" i="0">
-                <a:solidFill>
-                  <a:srgbClr val="1A1A1A"/>
-                </a:solidFill>
-                <a:latin typeface="Lexend"/>
-              </a:rPr>
-              <a:t>256</a:t>
-            </a:r>
-          </a:p>
-        </p:txBody>
-      </p:sp>
-      <p:sp>
-        <p:nvSpPr>
-          <p:cNvPr id="14" name="TextBox 13"/>
-          <p:cNvSpPr txBox="1"/>
-          <p:nvPr/>
-        </p:nvSpPr>
-        <p:spPr>
-          <a:xfrm>
-            <a:off x="777240" y="5619319"/>
-            <a:ext cx="10607040" cy="457200"/>
-          </a:xfrm>
-          <a:prstGeom prst="rect">
-            <a:avLst/>
-          </a:prstGeom>
-          <a:noFill/>
-        </p:spPr>
-        <p:txBody>
-          <a:bodyPr wrap="square" lIns="45720" rIns="45720" tIns="18288" bIns="18288" anchor="t">
-            <a:spAutoFit/>
-          </a:bodyPr>
-          <a:lstStyle/>
-          <a:p>
             <a:pPr algn="ctr"/>
             <a:r>
-              <a:rPr sz="2470" b="1" i="0">
-                <a:solidFill>
-                  <a:srgbClr val="1A1A1A"/>
-                </a:solidFill>
-                <a:latin typeface="Lexend"/>
-              </a:rPr>
-              <a:t>Answer it.</a:t>
+              <a:rPr sz="3040" b="1" i="0">
+                <a:solidFill>
+                  <a:srgbClr val="9E1B32"/>
+                </a:solidFill>
+                <a:latin typeface="Lexend"/>
+              </a:rPr>
+              <a:t>Answer:   B — 50</a:t>
             </a:r>
           </a:p>
         </p:txBody>
@@ -10394,7 +10184,7 @@
       </p:sp>
       <p:pic>
         <p:nvPicPr>
-          <p:cNvPr id="8" name="Picture 7" descr="286b5294f6ed7d81.png"/>
+          <p:cNvPr id="8" name="Picture 7" descr="266fcce5418af23c.png"/>
           <p:cNvPicPr>
             <a:picLocks noChangeAspect="1"/>
           </p:cNvPicPr>
@@ -10408,8 +10198,8 @@
         </p:blipFill>
         <p:spPr>
           <a:xfrm>
-            <a:off x="5590032" y="2103120"/>
-            <a:ext cx="981455" cy="789432"/>
+            <a:off x="5586983" y="2194560"/>
+            <a:ext cx="987552" cy="792480"/>
           </a:xfrm>
           <a:prstGeom prst="rect">
             <a:avLst/>
@@ -10424,7 +10214,7 @@
         </p:nvSpPr>
         <p:spPr>
           <a:xfrm>
-            <a:off x="777240" y="3166871"/>
+            <a:off x="777240" y="3261360"/>
             <a:ext cx="10607040" cy="465151"/>
           </a:xfrm>
           <a:prstGeom prst="rect">
@@ -10459,150 +10249,8 @@
         </p:nvSpPr>
         <p:spPr>
           <a:xfrm>
-            <a:off x="4457658" y="3792043"/>
-            <a:ext cx="996779" cy="457200"/>
-          </a:xfrm>
-          <a:prstGeom prst="rect">
-            <a:avLst/>
-          </a:prstGeom>
-          <a:noFill/>
-        </p:spPr>
-        <p:txBody>
-          <a:bodyPr wrap="none" lIns="45720" rIns="45720" tIns="18288" bIns="18288" anchor="ctr">
-            <a:noAutofit/>
-          </a:bodyPr>
-          <a:lstStyle/>
-          <a:p>
-            <a:pPr algn="l"/>
-            <a:r>
-              <a:rPr sz="2330" b="0" i="0">
-                <a:solidFill>
-                  <a:srgbClr val="1A1A1A"/>
-                </a:solidFill>
-                <a:latin typeface="Lexend"/>
-              </a:rPr>
-              <a:t>Top:  </a:t>
-            </a:r>
-          </a:p>
-        </p:txBody>
-      </p:sp>
-      <p:pic>
-        <p:nvPicPr>
-          <p:cNvPr id="11" name="Picture 10" descr="f5cf47236f59dc77.png"/>
-          <p:cNvPicPr>
-            <a:picLocks noChangeAspect="1"/>
-          </p:cNvPicPr>
-          <p:nvPr/>
-        </p:nvPicPr>
-        <p:blipFill>
-          <a:blip r:embed="rId3"/>
-          <a:stretch>
-            <a:fillRect/>
-          </a:stretch>
-        </p:blipFill>
-        <p:spPr>
-          <a:xfrm>
-            <a:off x="5317277" y="3889579"/>
-            <a:ext cx="2389632" cy="262128"/>
-          </a:xfrm>
-          <a:prstGeom prst="rect">
-            <a:avLst/>
-          </a:prstGeom>
-        </p:spPr>
-      </p:pic>
-      <p:sp>
-        <p:nvSpPr>
-          <p:cNvPr id="12" name="TextBox 11"/>
-          <p:cNvSpPr txBox="1"/>
-          <p:nvPr/>
-        </p:nvSpPr>
-        <p:spPr>
-          <a:xfrm>
-            <a:off x="4457658" y="4294963"/>
-            <a:ext cx="1583270" cy="457200"/>
-          </a:xfrm>
-          <a:prstGeom prst="rect">
-            <a:avLst/>
-          </a:prstGeom>
-          <a:noFill/>
-        </p:spPr>
-        <p:txBody>
-          <a:bodyPr wrap="none" lIns="45720" rIns="45720" tIns="18288" bIns="18288" anchor="ctr">
-            <a:noAutofit/>
-          </a:bodyPr>
-          <a:lstStyle/>
-          <a:p>
-            <a:pPr algn="l"/>
-            <a:r>
-              <a:rPr sz="2330" b="0" i="0">
-                <a:solidFill>
-                  <a:srgbClr val="1A1A1A"/>
-                </a:solidFill>
-                <a:latin typeface="Lexend"/>
-              </a:rPr>
-              <a:t>Bottom:  </a:t>
-            </a:r>
-          </a:p>
-        </p:txBody>
-      </p:sp>
-      <p:pic>
-        <p:nvPicPr>
-          <p:cNvPr id="13" name="Picture 12" descr="b8964d2fa5cae649.png"/>
-          <p:cNvPicPr>
-            <a:picLocks noChangeAspect="1"/>
-          </p:cNvPicPr>
-          <p:nvPr/>
-        </p:nvPicPr>
-        <p:blipFill>
-          <a:blip r:embed="rId4"/>
-          <a:stretch>
-            <a:fillRect/>
-          </a:stretch>
-        </p:blipFill>
-        <p:spPr>
-          <a:xfrm>
-            <a:off x="5903768" y="4397071"/>
-            <a:ext cx="697992" cy="252984"/>
-          </a:xfrm>
-          <a:prstGeom prst="rect">
-            <a:avLst/>
-          </a:prstGeom>
-        </p:spPr>
-      </p:pic>
-      <p:pic>
-        <p:nvPicPr>
-          <p:cNvPr id="14" name="Picture 13" descr="e3ce27ebfe1bfdde.png"/>
-          <p:cNvPicPr>
-            <a:picLocks noChangeAspect="1"/>
-          </p:cNvPicPr>
-          <p:nvPr/>
-        </p:nvPicPr>
-        <p:blipFill>
-          <a:blip r:embed="rId5"/>
-          <a:stretch>
-            <a:fillRect/>
-          </a:stretch>
-        </p:blipFill>
-        <p:spPr>
-          <a:xfrm>
-            <a:off x="4512522" y="4919803"/>
-            <a:ext cx="1219200" cy="213360"/>
-          </a:xfrm>
-          <a:prstGeom prst="rect">
-            <a:avLst/>
-          </a:prstGeom>
-        </p:spPr>
-      </p:pic>
-      <p:sp>
-        <p:nvSpPr>
-          <p:cNvPr id="15" name="TextBox 14"/>
-          <p:cNvSpPr txBox="1"/>
-          <p:nvPr/>
-        </p:nvSpPr>
-        <p:spPr>
-          <a:xfrm>
-            <a:off x="777240" y="5369383"/>
-            <a:ext cx="10607040" cy="548640"/>
+            <a:off x="1874519" y="3927679"/>
+            <a:ext cx="4572000" cy="548640"/>
           </a:xfrm>
           <a:prstGeom prst="rect">
             <a:avLst/>
@@ -10615,15 +10263,191 @@
           </a:bodyPr>
           <a:lstStyle/>
           <a:p>
+            <a:pPr algn="l"/>
+            <a:r>
+              <a:rPr sz="2280" b="1" i="0">
+                <a:solidFill>
+                  <a:srgbClr val="1A1A1A"/>
+                </a:solidFill>
+                <a:latin typeface="Lexend"/>
+              </a:rPr>
+              <a:t>A.   </a:t>
+            </a:r>
+            <a:r>
+              <a:rPr sz="2280" b="0" i="0">
+                <a:solidFill>
+                  <a:srgbClr val="1A1A1A"/>
+                </a:solidFill>
+                <a:latin typeface="Lexend"/>
+              </a:rPr>
+              <a:t>4</a:t>
+            </a:r>
+          </a:p>
+        </p:txBody>
+      </p:sp>
+      <p:sp>
+        <p:nvSpPr>
+          <p:cNvPr id="11" name="TextBox 10"/>
+          <p:cNvSpPr txBox="1"/>
+          <p:nvPr/>
+        </p:nvSpPr>
+        <p:spPr>
+          <a:xfrm>
+            <a:off x="6629400" y="3927679"/>
+            <a:ext cx="4572000" cy="548640"/>
+          </a:xfrm>
+          <a:prstGeom prst="rect">
+            <a:avLst/>
+          </a:prstGeom>
+          <a:noFill/>
+        </p:spPr>
+        <p:txBody>
+          <a:bodyPr wrap="square" lIns="45720" rIns="45720" tIns="18288" bIns="18288" anchor="t">
+            <a:spAutoFit/>
+          </a:bodyPr>
+          <a:lstStyle/>
+          <a:p>
+            <a:pPr algn="l"/>
+            <a:r>
+              <a:rPr sz="2280" b="1" i="0">
+                <a:solidFill>
+                  <a:srgbClr val="1A1A1A"/>
+                </a:solidFill>
+                <a:latin typeface="Lexend"/>
+              </a:rPr>
+              <a:t>B.   </a:t>
+            </a:r>
+            <a:r>
+              <a:rPr sz="2280" b="0" i="0">
+                <a:solidFill>
+                  <a:srgbClr val="1A1A1A"/>
+                </a:solidFill>
+                <a:latin typeface="Lexend"/>
+              </a:rPr>
+              <a:t>35.5</a:t>
+            </a:r>
+          </a:p>
+        </p:txBody>
+      </p:sp>
+      <p:sp>
+        <p:nvSpPr>
+          <p:cNvPr id="12" name="TextBox 11"/>
+          <p:cNvSpPr txBox="1"/>
+          <p:nvPr/>
+        </p:nvSpPr>
+        <p:spPr>
+          <a:xfrm>
+            <a:off x="1874519" y="4613479"/>
+            <a:ext cx="4572000" cy="548640"/>
+          </a:xfrm>
+          <a:prstGeom prst="rect">
+            <a:avLst/>
+          </a:prstGeom>
+          <a:noFill/>
+        </p:spPr>
+        <p:txBody>
+          <a:bodyPr wrap="square" lIns="45720" rIns="45720" tIns="18288" bIns="18288" anchor="t">
+            <a:spAutoFit/>
+          </a:bodyPr>
+          <a:lstStyle/>
+          <a:p>
+            <a:pPr algn="l"/>
+            <a:r>
+              <a:rPr sz="2280" b="1" i="0">
+                <a:solidFill>
+                  <a:srgbClr val="1A1A1A"/>
+                </a:solidFill>
+                <a:latin typeface="Lexend"/>
+              </a:rPr>
+              <a:t>C.   </a:t>
+            </a:r>
+            <a:r>
+              <a:rPr sz="2280" b="0" i="0">
+                <a:solidFill>
+                  <a:srgbClr val="1A1A1A"/>
+                </a:solidFill>
+                <a:latin typeface="Lexend"/>
+              </a:rPr>
+              <a:t>0.5</a:t>
+            </a:r>
+          </a:p>
+        </p:txBody>
+      </p:sp>
+      <p:sp>
+        <p:nvSpPr>
+          <p:cNvPr id="13" name="TextBox 12"/>
+          <p:cNvSpPr txBox="1"/>
+          <p:nvPr/>
+        </p:nvSpPr>
+        <p:spPr>
+          <a:xfrm>
+            <a:off x="6629400" y="4613479"/>
+            <a:ext cx="4572000" cy="548640"/>
+          </a:xfrm>
+          <a:prstGeom prst="rect">
+            <a:avLst/>
+          </a:prstGeom>
+          <a:noFill/>
+        </p:spPr>
+        <p:txBody>
+          <a:bodyPr wrap="square" lIns="45720" rIns="45720" tIns="18288" bIns="18288" anchor="t">
+            <a:spAutoFit/>
+          </a:bodyPr>
+          <a:lstStyle/>
+          <a:p>
+            <a:pPr algn="l"/>
+            <a:r>
+              <a:rPr sz="2280" b="1" i="0">
+                <a:solidFill>
+                  <a:srgbClr val="1A1A1A"/>
+                </a:solidFill>
+                <a:latin typeface="Lexend"/>
+              </a:rPr>
+              <a:t>D.   </a:t>
+            </a:r>
+            <a:r>
+              <a:rPr sz="2280" b="0" i="0">
+                <a:solidFill>
+                  <a:srgbClr val="1A1A1A"/>
+                </a:solidFill>
+                <a:latin typeface="Lexend"/>
+              </a:rPr>
+              <a:t>256</a:t>
+            </a:r>
+          </a:p>
+        </p:txBody>
+      </p:sp>
+      <p:sp>
+        <p:nvSpPr>
+          <p:cNvPr id="14" name="TextBox 13"/>
+          <p:cNvSpPr txBox="1"/>
+          <p:nvPr/>
+        </p:nvSpPr>
+        <p:spPr>
+          <a:xfrm>
+            <a:off x="777240" y="5619319"/>
+            <a:ext cx="10607040" cy="457200"/>
+          </a:xfrm>
+          <a:prstGeom prst="rect">
+            <a:avLst/>
+          </a:prstGeom>
+          <a:noFill/>
+        </p:spPr>
+        <p:txBody>
+          <a:bodyPr wrap="square" lIns="45720" rIns="45720" tIns="18288" bIns="18288" anchor="t">
+            <a:spAutoFit/>
+          </a:bodyPr>
+          <a:lstStyle/>
+          <a:p>
             <a:pPr algn="ctr"/>
             <a:r>
-              <a:rPr sz="3040" b="1" i="0">
-                <a:solidFill>
-                  <a:srgbClr val="9E1B32"/>
-                </a:solidFill>
-                <a:latin typeface="Lexend"/>
-              </a:rPr>
-              <a:t>Answer:   A — 4</a:t>
+              <a:rPr sz="2470" b="1" i="0">
+                <a:solidFill>
+                  <a:srgbClr val="1A1A1A"/>
+                </a:solidFill>
+                <a:latin typeface="Lexend"/>
+              </a:rPr>
+              <a:t>Answer it.</a:t>
             </a:r>
           </a:p>
         </p:txBody>
@@ -10676,7 +10500,7 @@
                 </a:solidFill>
                 <a:latin typeface="Lexend"/>
               </a:rPr>
-              <a:t>Whiteboards   ·   Question 7 of 9</a:t>
+              <a:t>Whiteboards   ·   Question 6 of 9</a:t>
             </a:r>
           </a:p>
         </p:txBody>
@@ -10858,7 +10682,7 @@
       </p:sp>
       <p:pic>
         <p:nvPicPr>
-          <p:cNvPr id="8" name="Picture 7" descr="6ce0d9f4982b6995.png"/>
+          <p:cNvPr id="8" name="Picture 7" descr="286b5294f6ed7d81.png"/>
           <p:cNvPicPr>
             <a:picLocks noChangeAspect="1"/>
           </p:cNvPicPr>
@@ -10872,8 +10696,8 @@
         </p:blipFill>
         <p:spPr>
           <a:xfrm>
-            <a:off x="5175503" y="2194560"/>
-            <a:ext cx="1810512" cy="411480"/>
+            <a:off x="5590032" y="2103120"/>
+            <a:ext cx="981455" cy="789432"/>
           </a:xfrm>
           <a:prstGeom prst="rect">
             <a:avLst/>
@@ -10888,8 +10712,8 @@
         </p:nvSpPr>
         <p:spPr>
           <a:xfrm>
-            <a:off x="777240" y="4343400"/>
-            <a:ext cx="10607040" cy="457200"/>
+            <a:off x="777240" y="3166871"/>
+            <a:ext cx="10607040" cy="465151"/>
           </a:xfrm>
           <a:prstGeom prst="rect">
             <a:avLst/>
@@ -10904,13 +10728,190 @@
           <a:p>
             <a:pPr algn="ctr"/>
             <a:r>
-              <a:rPr sz="2470" b="1" i="0">
+              <a:rPr sz="2470" b="0" i="0">
                 <a:solidFill>
                   <a:srgbClr val="1A1A1A"/>
                 </a:solidFill>
                 <a:latin typeface="Lexend"/>
               </a:rPr>
-              <a:t>Answer it.</a:t>
+              <a:t>Which is the value?</a:t>
+            </a:r>
+          </a:p>
+        </p:txBody>
+      </p:sp>
+      <p:sp>
+        <p:nvSpPr>
+          <p:cNvPr id="10" name="TextBox 9"/>
+          <p:cNvSpPr txBox="1"/>
+          <p:nvPr/>
+        </p:nvSpPr>
+        <p:spPr>
+          <a:xfrm>
+            <a:off x="4457658" y="3792043"/>
+            <a:ext cx="996779" cy="457200"/>
+          </a:xfrm>
+          <a:prstGeom prst="rect">
+            <a:avLst/>
+          </a:prstGeom>
+          <a:noFill/>
+        </p:spPr>
+        <p:txBody>
+          <a:bodyPr wrap="none" lIns="45720" rIns="45720" tIns="18288" bIns="18288" anchor="ctr">
+            <a:noAutofit/>
+          </a:bodyPr>
+          <a:lstStyle/>
+          <a:p>
+            <a:pPr algn="l"/>
+            <a:r>
+              <a:rPr sz="2330" b="0" i="0">
+                <a:solidFill>
+                  <a:srgbClr val="1A1A1A"/>
+                </a:solidFill>
+                <a:latin typeface="Lexend"/>
+              </a:rPr>
+              <a:t>Top:  </a:t>
+            </a:r>
+          </a:p>
+        </p:txBody>
+      </p:sp>
+      <p:pic>
+        <p:nvPicPr>
+          <p:cNvPr id="11" name="Picture 10" descr="f5cf47236f59dc77.png"/>
+          <p:cNvPicPr>
+            <a:picLocks noChangeAspect="1"/>
+          </p:cNvPicPr>
+          <p:nvPr/>
+        </p:nvPicPr>
+        <p:blipFill>
+          <a:blip r:embed="rId3"/>
+          <a:stretch>
+            <a:fillRect/>
+          </a:stretch>
+        </p:blipFill>
+        <p:spPr>
+          <a:xfrm>
+            <a:off x="5317277" y="3889579"/>
+            <a:ext cx="2389632" cy="262128"/>
+          </a:xfrm>
+          <a:prstGeom prst="rect">
+            <a:avLst/>
+          </a:prstGeom>
+        </p:spPr>
+      </p:pic>
+      <p:sp>
+        <p:nvSpPr>
+          <p:cNvPr id="12" name="TextBox 11"/>
+          <p:cNvSpPr txBox="1"/>
+          <p:nvPr/>
+        </p:nvSpPr>
+        <p:spPr>
+          <a:xfrm>
+            <a:off x="4457658" y="4294963"/>
+            <a:ext cx="1583270" cy="457200"/>
+          </a:xfrm>
+          <a:prstGeom prst="rect">
+            <a:avLst/>
+          </a:prstGeom>
+          <a:noFill/>
+        </p:spPr>
+        <p:txBody>
+          <a:bodyPr wrap="none" lIns="45720" rIns="45720" tIns="18288" bIns="18288" anchor="ctr">
+            <a:noAutofit/>
+          </a:bodyPr>
+          <a:lstStyle/>
+          <a:p>
+            <a:pPr algn="l"/>
+            <a:r>
+              <a:rPr sz="2330" b="0" i="0">
+                <a:solidFill>
+                  <a:srgbClr val="1A1A1A"/>
+                </a:solidFill>
+                <a:latin typeface="Lexend"/>
+              </a:rPr>
+              <a:t>Bottom:  </a:t>
+            </a:r>
+          </a:p>
+        </p:txBody>
+      </p:sp>
+      <p:pic>
+        <p:nvPicPr>
+          <p:cNvPr id="13" name="Picture 12" descr="b8964d2fa5cae649.png"/>
+          <p:cNvPicPr>
+            <a:picLocks noChangeAspect="1"/>
+          </p:cNvPicPr>
+          <p:nvPr/>
+        </p:nvPicPr>
+        <p:blipFill>
+          <a:blip r:embed="rId4"/>
+          <a:stretch>
+            <a:fillRect/>
+          </a:stretch>
+        </p:blipFill>
+        <p:spPr>
+          <a:xfrm>
+            <a:off x="5903768" y="4397071"/>
+            <a:ext cx="697992" cy="252984"/>
+          </a:xfrm>
+          <a:prstGeom prst="rect">
+            <a:avLst/>
+          </a:prstGeom>
+        </p:spPr>
+      </p:pic>
+      <p:pic>
+        <p:nvPicPr>
+          <p:cNvPr id="14" name="Picture 13" descr="e3ce27ebfe1bfdde.png"/>
+          <p:cNvPicPr>
+            <a:picLocks noChangeAspect="1"/>
+          </p:cNvPicPr>
+          <p:nvPr/>
+        </p:nvPicPr>
+        <p:blipFill>
+          <a:blip r:embed="rId5"/>
+          <a:stretch>
+            <a:fillRect/>
+          </a:stretch>
+        </p:blipFill>
+        <p:spPr>
+          <a:xfrm>
+            <a:off x="4512522" y="4919803"/>
+            <a:ext cx="1219200" cy="213360"/>
+          </a:xfrm>
+          <a:prstGeom prst="rect">
+            <a:avLst/>
+          </a:prstGeom>
+        </p:spPr>
+      </p:pic>
+      <p:sp>
+        <p:nvSpPr>
+          <p:cNvPr id="15" name="TextBox 14"/>
+          <p:cNvSpPr txBox="1"/>
+          <p:nvPr/>
+        </p:nvSpPr>
+        <p:spPr>
+          <a:xfrm>
+            <a:off x="777240" y="5369383"/>
+            <a:ext cx="10607040" cy="548640"/>
+          </a:xfrm>
+          <a:prstGeom prst="rect">
+            <a:avLst/>
+          </a:prstGeom>
+          <a:noFill/>
+        </p:spPr>
+        <p:txBody>
+          <a:bodyPr wrap="square" lIns="45720" rIns="45720" tIns="18288" bIns="18288" anchor="t">
+            <a:spAutoFit/>
+          </a:bodyPr>
+          <a:lstStyle/>
+          <a:p>
+            <a:pPr algn="ctr"/>
+            <a:r>
+              <a:rPr sz="3040" b="1" i="0">
+                <a:solidFill>
+                  <a:srgbClr val="9E1B32"/>
+                </a:solidFill>
+                <a:latin typeface="Lexend"/>
+              </a:rPr>
+              <a:t>Answer:   A — 4</a:t>
             </a:r>
           </a:p>
         </p:txBody>
@@ -11145,7 +11146,7 @@
       </p:sp>
       <p:pic>
         <p:nvPicPr>
-          <p:cNvPr id="8" name="Picture 7" descr="74e67f9444e64508.png"/>
+          <p:cNvPr id="8" name="Picture 7" descr="6ce0d9f4982b6995.png"/>
           <p:cNvPicPr>
             <a:picLocks noChangeAspect="1"/>
           </p:cNvPicPr>
@@ -11159,131 +11160,24 @@
         </p:blipFill>
         <p:spPr>
           <a:xfrm>
-            <a:off x="5173980" y="2103120"/>
-            <a:ext cx="1813560" cy="411480"/>
+            <a:off x="5175503" y="2194560"/>
+            <a:ext cx="1810512" cy="411480"/>
           </a:xfrm>
           <a:prstGeom prst="rect">
             <a:avLst/>
           </a:prstGeom>
         </p:spPr>
       </p:pic>
-      <p:pic>
-        <p:nvPicPr>
-          <p:cNvPr id="9" name="Picture 8" descr="068d9a19700e1389.png"/>
-          <p:cNvPicPr>
-            <a:picLocks noChangeAspect="1"/>
-          </p:cNvPicPr>
-          <p:nvPr/>
-        </p:nvPicPr>
-        <p:blipFill>
-          <a:blip r:embed="rId3"/>
-          <a:stretch>
-            <a:fillRect/>
-          </a:stretch>
-        </p:blipFill>
-        <p:spPr>
-          <a:xfrm>
-            <a:off x="3055152" y="2938272"/>
-            <a:ext cx="1066800" cy="259080"/>
-          </a:xfrm>
-          <a:prstGeom prst="rect">
-            <a:avLst/>
-          </a:prstGeom>
-        </p:spPr>
-      </p:pic>
-      <p:sp>
-        <p:nvSpPr>
-          <p:cNvPr id="10" name="TextBox 9"/>
-          <p:cNvSpPr txBox="1"/>
-          <p:nvPr/>
-        </p:nvSpPr>
-        <p:spPr>
-          <a:xfrm>
-            <a:off x="4121952" y="2839212"/>
-            <a:ext cx="5234351" cy="457200"/>
-          </a:xfrm>
-          <a:prstGeom prst="rect">
-            <a:avLst/>
-          </a:prstGeom>
-          <a:noFill/>
-        </p:spPr>
-        <p:txBody>
-          <a:bodyPr wrap="none" lIns="45720" rIns="45720" tIns="18288" bIns="18288" anchor="ctr">
-            <a:noAutofit/>
-          </a:bodyPr>
-          <a:lstStyle/>
-          <a:p>
-            <a:pPr algn="l"/>
-            <a:r>
-              <a:rPr sz="2330" b="0" i="0">
-                <a:solidFill>
-                  <a:srgbClr val="1A1A1A"/>
-                </a:solidFill>
-                <a:latin typeface="Lexend"/>
-              </a:rPr>
-              <a:t>     (the exponent is on the 2 only)</a:t>
-            </a:r>
-          </a:p>
-        </p:txBody>
-      </p:sp>
-      <p:pic>
-        <p:nvPicPr>
-          <p:cNvPr id="11" name="Picture 10" descr="a8317bc2e11e2fea.png"/>
-          <p:cNvPicPr>
-            <a:picLocks noChangeAspect="1"/>
-          </p:cNvPicPr>
-          <p:nvPr/>
-        </p:nvPicPr>
-        <p:blipFill>
-          <a:blip r:embed="rId4"/>
-          <a:stretch>
-            <a:fillRect/>
-          </a:stretch>
-        </p:blipFill>
-        <p:spPr>
-          <a:xfrm>
-            <a:off x="3055152" y="3413759"/>
-            <a:ext cx="1115568" cy="313944"/>
-          </a:xfrm>
-          <a:prstGeom prst="rect">
-            <a:avLst/>
-          </a:prstGeom>
-        </p:spPr>
-      </p:pic>
-      <p:pic>
-        <p:nvPicPr>
-          <p:cNvPr id="12" name="Picture 11" descr="ab059e2234c19043.png"/>
-          <p:cNvPicPr>
-            <a:picLocks noChangeAspect="1"/>
-          </p:cNvPicPr>
-          <p:nvPr/>
-        </p:nvPicPr>
-        <p:blipFill>
-          <a:blip r:embed="rId5"/>
-          <a:stretch>
-            <a:fillRect/>
-          </a:stretch>
-        </p:blipFill>
-        <p:spPr>
-          <a:xfrm>
-            <a:off x="3055152" y="3966971"/>
-            <a:ext cx="1252728" cy="213360"/>
-          </a:xfrm>
-          <a:prstGeom prst="rect">
-            <a:avLst/>
-          </a:prstGeom>
-        </p:spPr>
-      </p:pic>
-      <p:sp>
-        <p:nvSpPr>
-          <p:cNvPr id="13" name="TextBox 12"/>
-          <p:cNvSpPr txBox="1"/>
-          <p:nvPr/>
-        </p:nvSpPr>
-        <p:spPr>
-          <a:xfrm>
-            <a:off x="777240" y="4663440"/>
-            <a:ext cx="10607040" cy="548640"/>
+      <p:sp>
+        <p:nvSpPr>
+          <p:cNvPr id="9" name="TextBox 8"/>
+          <p:cNvSpPr txBox="1"/>
+          <p:nvPr/>
+        </p:nvSpPr>
+        <p:spPr>
+          <a:xfrm>
+            <a:off x="777240" y="4343400"/>
+            <a:ext cx="10607040" cy="457200"/>
           </a:xfrm>
           <a:prstGeom prst="rect">
             <a:avLst/>
@@ -11298,13 +11192,13 @@
           <a:p>
             <a:pPr algn="ctr"/>
             <a:r>
-              <a:rPr sz="3040" b="1" i="0">
-                <a:solidFill>
-                  <a:srgbClr val="9E1B32"/>
-                </a:solidFill>
-                <a:latin typeface="Lexend"/>
-              </a:rPr>
-              <a:t>Answer:   0</a:t>
+              <a:rPr sz="2470" b="1" i="0">
+                <a:solidFill>
+                  <a:srgbClr val="1A1A1A"/>
+                </a:solidFill>
+                <a:latin typeface="Lexend"/>
+              </a:rPr>
+              <a:t>Answer it.</a:t>
             </a:r>
           </a:p>
         </p:txBody>
@@ -11357,7 +11251,7 @@
                 </a:solidFill>
                 <a:latin typeface="Lexend"/>
               </a:rPr>
-              <a:t>Whiteboards   ·   Question 8 of 9</a:t>
+              <a:t>Whiteboards   ·   Question 7 of 9</a:t>
             </a:r>
           </a:p>
         </p:txBody>
@@ -11539,7 +11433,7 @@
       </p:sp>
       <p:pic>
         <p:nvPicPr>
-          <p:cNvPr id="8" name="Picture 7" descr="f06e7d140296346b.png"/>
+          <p:cNvPr id="8" name="Picture 7" descr="74e67f9444e64508.png"/>
           <p:cNvPicPr>
             <a:picLocks noChangeAspect="1"/>
           </p:cNvPicPr>
@@ -11553,24 +11447,131 @@
         </p:blipFill>
         <p:spPr>
           <a:xfrm>
-            <a:off x="4832603" y="2194560"/>
-            <a:ext cx="2496312" cy="667512"/>
+            <a:off x="5173980" y="2103120"/>
+            <a:ext cx="1813560" cy="411480"/>
           </a:xfrm>
           <a:prstGeom prst="rect">
             <a:avLst/>
           </a:prstGeom>
         </p:spPr>
       </p:pic>
-      <p:sp>
-        <p:nvSpPr>
-          <p:cNvPr id="9" name="TextBox 8"/>
-          <p:cNvSpPr txBox="1"/>
-          <p:nvPr/>
-        </p:nvSpPr>
-        <p:spPr>
-          <a:xfrm>
-            <a:off x="777240" y="4343400"/>
-            <a:ext cx="10607040" cy="457200"/>
+      <p:pic>
+        <p:nvPicPr>
+          <p:cNvPr id="9" name="Picture 8" descr="068d9a19700e1389.png"/>
+          <p:cNvPicPr>
+            <a:picLocks noChangeAspect="1"/>
+          </p:cNvPicPr>
+          <p:nvPr/>
+        </p:nvPicPr>
+        <p:blipFill>
+          <a:blip r:embed="rId3"/>
+          <a:stretch>
+            <a:fillRect/>
+          </a:stretch>
+        </p:blipFill>
+        <p:spPr>
+          <a:xfrm>
+            <a:off x="3055152" y="2938272"/>
+            <a:ext cx="1066800" cy="259080"/>
+          </a:xfrm>
+          <a:prstGeom prst="rect">
+            <a:avLst/>
+          </a:prstGeom>
+        </p:spPr>
+      </p:pic>
+      <p:sp>
+        <p:nvSpPr>
+          <p:cNvPr id="10" name="TextBox 9"/>
+          <p:cNvSpPr txBox="1"/>
+          <p:nvPr/>
+        </p:nvSpPr>
+        <p:spPr>
+          <a:xfrm>
+            <a:off x="4121952" y="2839212"/>
+            <a:ext cx="5234351" cy="457200"/>
+          </a:xfrm>
+          <a:prstGeom prst="rect">
+            <a:avLst/>
+          </a:prstGeom>
+          <a:noFill/>
+        </p:spPr>
+        <p:txBody>
+          <a:bodyPr wrap="none" lIns="45720" rIns="45720" tIns="18288" bIns="18288" anchor="ctr">
+            <a:noAutofit/>
+          </a:bodyPr>
+          <a:lstStyle/>
+          <a:p>
+            <a:pPr algn="l"/>
+            <a:r>
+              <a:rPr sz="2330" b="0" i="0">
+                <a:solidFill>
+                  <a:srgbClr val="1A1A1A"/>
+                </a:solidFill>
+                <a:latin typeface="Lexend"/>
+              </a:rPr>
+              <a:t>     (the exponent is on the 2 only)</a:t>
+            </a:r>
+          </a:p>
+        </p:txBody>
+      </p:sp>
+      <p:pic>
+        <p:nvPicPr>
+          <p:cNvPr id="11" name="Picture 10" descr="a8317bc2e11e2fea.png"/>
+          <p:cNvPicPr>
+            <a:picLocks noChangeAspect="1"/>
+          </p:cNvPicPr>
+          <p:nvPr/>
+        </p:nvPicPr>
+        <p:blipFill>
+          <a:blip r:embed="rId4"/>
+          <a:stretch>
+            <a:fillRect/>
+          </a:stretch>
+        </p:blipFill>
+        <p:spPr>
+          <a:xfrm>
+            <a:off x="3055152" y="3413759"/>
+            <a:ext cx="1115568" cy="313944"/>
+          </a:xfrm>
+          <a:prstGeom prst="rect">
+            <a:avLst/>
+          </a:prstGeom>
+        </p:spPr>
+      </p:pic>
+      <p:pic>
+        <p:nvPicPr>
+          <p:cNvPr id="12" name="Picture 11" descr="ab059e2234c19043.png"/>
+          <p:cNvPicPr>
+            <a:picLocks noChangeAspect="1"/>
+          </p:cNvPicPr>
+          <p:nvPr/>
+        </p:nvPicPr>
+        <p:blipFill>
+          <a:blip r:embed="rId5"/>
+          <a:stretch>
+            <a:fillRect/>
+          </a:stretch>
+        </p:blipFill>
+        <p:spPr>
+          <a:xfrm>
+            <a:off x="3055152" y="3966971"/>
+            <a:ext cx="1252728" cy="213360"/>
+          </a:xfrm>
+          <a:prstGeom prst="rect">
+            <a:avLst/>
+          </a:prstGeom>
+        </p:spPr>
+      </p:pic>
+      <p:sp>
+        <p:nvSpPr>
+          <p:cNvPr id="13" name="TextBox 12"/>
+          <p:cNvSpPr txBox="1"/>
+          <p:nvPr/>
+        </p:nvSpPr>
+        <p:spPr>
+          <a:xfrm>
+            <a:off x="777240" y="4663440"/>
+            <a:ext cx="10607040" cy="548640"/>
           </a:xfrm>
           <a:prstGeom prst="rect">
             <a:avLst/>
@@ -11585,13 +11586,13 @@
           <a:p>
             <a:pPr algn="ctr"/>
             <a:r>
-              <a:rPr sz="2470" b="1" i="0">
-                <a:solidFill>
-                  <a:srgbClr val="1A1A1A"/>
-                </a:solidFill>
-                <a:latin typeface="Lexend"/>
-              </a:rPr>
-              <a:t>Answer it.</a:t>
+              <a:rPr sz="3040" b="1" i="0">
+                <a:solidFill>
+                  <a:srgbClr val="9E1B32"/>
+                </a:solidFill>
+                <a:latin typeface="Lexend"/>
+              </a:rPr>
+              <a:t>Answer:   0</a:t>
             </a:r>
           </a:p>
         </p:txBody>
@@ -12406,7 +12407,7 @@
       </p:sp>
       <p:pic>
         <p:nvPicPr>
-          <p:cNvPr id="8" name="Picture 7" descr="3edde1adf91d2fc9.png"/>
+          <p:cNvPr id="8" name="Picture 7" descr="f06e7d140296346b.png"/>
           <p:cNvPicPr>
             <a:picLocks noChangeAspect="1"/>
           </p:cNvPicPr>
@@ -12420,155 +12421,24 @@
         </p:blipFill>
         <p:spPr>
           <a:xfrm>
-            <a:off x="4831080" y="2103120"/>
-            <a:ext cx="2499360" cy="673608"/>
+            <a:off x="4832603" y="2194560"/>
+            <a:ext cx="2496312" cy="667512"/>
           </a:xfrm>
           <a:prstGeom prst="rect">
             <a:avLst/>
           </a:prstGeom>
         </p:spPr>
       </p:pic>
-      <p:pic>
-        <p:nvPicPr>
-          <p:cNvPr id="9" name="Picture 8" descr="dcdd245aeaaf1b55.png"/>
-          <p:cNvPicPr>
-            <a:picLocks noChangeAspect="1"/>
-          </p:cNvPicPr>
-          <p:nvPr/>
-        </p:nvPicPr>
-        <p:blipFill>
-          <a:blip r:embed="rId3"/>
-          <a:stretch>
-            <a:fillRect/>
-          </a:stretch>
-        </p:blipFill>
-        <p:spPr>
-          <a:xfrm>
-            <a:off x="4417755" y="3124200"/>
-            <a:ext cx="1057656" cy="515112"/>
-          </a:xfrm>
-          <a:prstGeom prst="rect">
-            <a:avLst/>
-          </a:prstGeom>
-        </p:spPr>
-      </p:pic>
-      <p:sp>
-        <p:nvSpPr>
-          <p:cNvPr id="10" name="TextBox 9"/>
-          <p:cNvSpPr txBox="1"/>
-          <p:nvPr/>
-        </p:nvSpPr>
-        <p:spPr>
-          <a:xfrm>
-            <a:off x="5475411" y="3153156"/>
-            <a:ext cx="1670944" cy="457200"/>
-          </a:xfrm>
-          <a:prstGeom prst="rect">
-            <a:avLst/>
-          </a:prstGeom>
-          <a:noFill/>
-        </p:spPr>
-        <p:txBody>
-          <a:bodyPr wrap="none" lIns="45720" rIns="45720" tIns="18288" bIns="18288" anchor="ctr">
-            <a:noAutofit/>
-          </a:bodyPr>
-          <a:lstStyle/>
-          <a:p>
-            <a:pPr algn="l"/>
-            <a:r>
-              <a:rPr sz="2330" b="0" i="0">
-                <a:solidFill>
-                  <a:srgbClr val="1A1A1A"/>
-                </a:solidFill>
-                <a:latin typeface="Lexend"/>
-              </a:rPr>
-              <a:t>     and     </a:t>
-            </a:r>
-          </a:p>
-        </p:txBody>
-      </p:sp>
-      <p:pic>
-        <p:nvPicPr>
-          <p:cNvPr id="11" name="Picture 10" descr="91dc20afadb1aea1.png"/>
-          <p:cNvPicPr>
-            <a:picLocks noChangeAspect="1"/>
-          </p:cNvPicPr>
-          <p:nvPr/>
-        </p:nvPicPr>
-        <p:blipFill>
-          <a:blip r:embed="rId4"/>
-          <a:stretch>
-            <a:fillRect/>
-          </a:stretch>
-        </p:blipFill>
-        <p:spPr>
-          <a:xfrm>
-            <a:off x="7009196" y="3124200"/>
-            <a:ext cx="829056" cy="515112"/>
-          </a:xfrm>
-          <a:prstGeom prst="rect">
-            <a:avLst/>
-          </a:prstGeom>
-        </p:spPr>
-      </p:pic>
-      <p:pic>
-        <p:nvPicPr>
-          <p:cNvPr id="12" name="Picture 11" descr="116226914234f125.png"/>
-          <p:cNvPicPr>
-            <a:picLocks noChangeAspect="1"/>
-          </p:cNvPicPr>
-          <p:nvPr/>
-        </p:nvPicPr>
-        <p:blipFill>
-          <a:blip r:embed="rId5"/>
-          <a:stretch>
-            <a:fillRect/>
-          </a:stretch>
-        </p:blipFill>
-        <p:spPr>
-          <a:xfrm>
-            <a:off x="4417755" y="3730752"/>
-            <a:ext cx="2569464" cy="515112"/>
-          </a:xfrm>
-          <a:prstGeom prst="rect">
-            <a:avLst/>
-          </a:prstGeom>
-        </p:spPr>
-      </p:pic>
-      <p:pic>
-        <p:nvPicPr>
-          <p:cNvPr id="13" name="Picture 12" descr="ea27676c0bb85836.png"/>
-          <p:cNvPicPr>
-            <a:picLocks noChangeAspect="1"/>
-          </p:cNvPicPr>
-          <p:nvPr/>
-        </p:nvPicPr>
-        <p:blipFill>
-          <a:blip r:embed="rId6"/>
-          <a:stretch>
-            <a:fillRect/>
-          </a:stretch>
-        </p:blipFill>
-        <p:spPr>
-          <a:xfrm>
-            <a:off x="4417755" y="4337304"/>
-            <a:ext cx="1481328" cy="512064"/>
-          </a:xfrm>
-          <a:prstGeom prst="rect">
-            <a:avLst/>
-          </a:prstGeom>
-        </p:spPr>
-      </p:pic>
-      <p:sp>
-        <p:nvSpPr>
-          <p:cNvPr id="14" name="TextBox 13"/>
-          <p:cNvSpPr txBox="1"/>
-          <p:nvPr/>
-        </p:nvSpPr>
-        <p:spPr>
-          <a:xfrm>
-            <a:off x="777240" y="4986528"/>
-            <a:ext cx="10607040" cy="548640"/>
+      <p:sp>
+        <p:nvSpPr>
+          <p:cNvPr id="9" name="TextBox 8"/>
+          <p:cNvSpPr txBox="1"/>
+          <p:nvPr/>
+        </p:nvSpPr>
+        <p:spPr>
+          <a:xfrm>
+            <a:off x="777240" y="4343400"/>
+            <a:ext cx="10607040" cy="457200"/>
           </a:xfrm>
           <a:prstGeom prst="rect">
             <a:avLst/>
@@ -12583,13 +12453,13 @@
           <a:p>
             <a:pPr algn="ctr"/>
             <a:r>
-              <a:rPr sz="3040" b="1" i="0">
-                <a:solidFill>
-                  <a:srgbClr val="9E1B32"/>
-                </a:solidFill>
-                <a:latin typeface="Lexend"/>
-              </a:rPr>
-              <a:t>Answer:   17/6</a:t>
+              <a:rPr sz="2470" b="1" i="0">
+                <a:solidFill>
+                  <a:srgbClr val="1A1A1A"/>
+                </a:solidFill>
+                <a:latin typeface="Lexend"/>
+              </a:rPr>
+              <a:t>Answer it.</a:t>
             </a:r>
           </a:p>
         </p:txBody>
@@ -12642,7 +12512,7 @@
                 </a:solidFill>
                 <a:latin typeface="Lexend"/>
               </a:rPr>
-              <a:t>Whiteboards   ·   Question 9 of 9</a:t>
+              <a:t>Whiteboards   ·   Question 8 of 9</a:t>
             </a:r>
           </a:p>
         </p:txBody>
@@ -12822,44 +12692,9 @@
           </a:p>
         </p:txBody>
       </p:sp>
-      <p:sp>
-        <p:nvSpPr>
-          <p:cNvPr id="8" name="TextBox 7"/>
-          <p:cNvSpPr txBox="1"/>
-          <p:nvPr/>
-        </p:nvSpPr>
-        <p:spPr>
-          <a:xfrm>
-            <a:off x="2055986" y="2215896"/>
-            <a:ext cx="3126680" cy="457200"/>
-          </a:xfrm>
-          <a:prstGeom prst="rect">
-            <a:avLst/>
-          </a:prstGeom>
-          <a:noFill/>
-        </p:spPr>
-        <p:txBody>
-          <a:bodyPr wrap="none" lIns="45720" rIns="45720" tIns="18288" bIns="18288" anchor="ctr">
-            <a:noAutofit/>
-          </a:bodyPr>
-          <a:lstStyle/>
-          <a:p>
-            <a:pPr algn="l"/>
-            <a:r>
-              <a:rPr sz="2470" b="0" i="0">
-                <a:solidFill>
-                  <a:srgbClr val="1A1A1A"/>
-                </a:solidFill>
-                <a:latin typeface="Lexend"/>
-              </a:rPr>
-              <a:t>Roscoe says that  </a:t>
-            </a:r>
-          </a:p>
-        </p:txBody>
-      </p:sp>
       <p:pic>
         <p:nvPicPr>
-          <p:cNvPr id="9" name="Picture 8" descr="c79d4acb3ae0bdb0.png"/>
+          <p:cNvPr id="8" name="Picture 7" descr="3edde1adf91d2fc9.png"/>
           <p:cNvPicPr>
             <a:picLocks noChangeAspect="1"/>
           </p:cNvPicPr>
@@ -12873,122 +12708,17 @@
         </p:blipFill>
         <p:spPr>
           <a:xfrm>
-            <a:off x="5045507" y="2194560"/>
-            <a:ext cx="1901952" cy="499871"/>
+            <a:off x="4831080" y="2103120"/>
+            <a:ext cx="2499360" cy="673608"/>
           </a:xfrm>
           <a:prstGeom prst="rect">
             <a:avLst/>
           </a:prstGeom>
         </p:spPr>
       </p:pic>
-      <p:sp>
-        <p:nvSpPr>
-          <p:cNvPr id="10" name="TextBox 9"/>
-          <p:cNvSpPr txBox="1"/>
-          <p:nvPr/>
-        </p:nvSpPr>
-        <p:spPr>
-          <a:xfrm>
-            <a:off x="6947459" y="2215896"/>
-            <a:ext cx="3295234" cy="457200"/>
-          </a:xfrm>
-          <a:prstGeom prst="rect">
-            <a:avLst/>
-          </a:prstGeom>
-          <a:noFill/>
-        </p:spPr>
-        <p:txBody>
-          <a:bodyPr wrap="none" lIns="45720" rIns="45720" tIns="18288" bIns="18288" anchor="ctr">
-            <a:noAutofit/>
-          </a:bodyPr>
-          <a:lstStyle/>
-          <a:p>
-            <a:pPr algn="l"/>
-            <a:r>
-              <a:rPr sz="2470" b="0" i="0">
-                <a:solidFill>
-                  <a:srgbClr val="1A1A1A"/>
-                </a:solidFill>
-                <a:latin typeface="Lexend"/>
-              </a:rPr>
-              <a:t>  is always positive,</a:t>
-            </a:r>
-          </a:p>
-        </p:txBody>
-      </p:sp>
-      <p:sp>
-        <p:nvSpPr>
-          <p:cNvPr id="11" name="TextBox 10"/>
-          <p:cNvSpPr txBox="1"/>
-          <p:nvPr/>
-        </p:nvSpPr>
-        <p:spPr>
-          <a:xfrm>
-            <a:off x="777240" y="2968751"/>
-            <a:ext cx="10607040" cy="465151"/>
-          </a:xfrm>
-          <a:prstGeom prst="rect">
-            <a:avLst/>
-          </a:prstGeom>
-          <a:noFill/>
-        </p:spPr>
-        <p:txBody>
-          <a:bodyPr wrap="square" lIns="45720" rIns="45720" tIns="18288" bIns="18288" anchor="t">
-            <a:spAutoFit/>
-          </a:bodyPr>
-          <a:lstStyle/>
-          <a:p>
-            <a:pPr algn="ctr"/>
-            <a:r>
-              <a:rPr sz="2470" b="0" i="0">
-                <a:solidFill>
-                  <a:srgbClr val="1A1A1A"/>
-                </a:solidFill>
-                <a:latin typeface="Lexend"/>
-              </a:rPr>
-              <a:t>because a square is always positive.</a:t>
-            </a:r>
-          </a:p>
-        </p:txBody>
-      </p:sp>
-      <p:sp>
-        <p:nvSpPr>
-          <p:cNvPr id="12" name="TextBox 11"/>
-          <p:cNvSpPr txBox="1"/>
-          <p:nvPr/>
-        </p:nvSpPr>
-        <p:spPr>
-          <a:xfrm>
-            <a:off x="2557533" y="3520771"/>
-            <a:ext cx="4651007" cy="457200"/>
-          </a:xfrm>
-          <a:prstGeom prst="rect">
-            <a:avLst/>
-          </a:prstGeom>
-          <a:noFill/>
-        </p:spPr>
-        <p:txBody>
-          <a:bodyPr wrap="none" lIns="45720" rIns="45720" tIns="18288" bIns="18288" anchor="ctr">
-            <a:noAutofit/>
-          </a:bodyPr>
-          <a:lstStyle/>
-          <a:p>
-            <a:pPr algn="l"/>
-            <a:r>
-              <a:rPr sz="2470" b="0" i="0">
-                <a:solidFill>
-                  <a:srgbClr val="1A1A1A"/>
-                </a:solidFill>
-                <a:latin typeface="Lexend"/>
-              </a:rPr>
-              <a:t>Is he right? Give a value of </a:t>
-            </a:r>
-          </a:p>
-        </p:txBody>
-      </p:sp>
       <p:pic>
         <p:nvPicPr>
-          <p:cNvPr id="13" name="Picture 12" descr="f14fce7cf077cd07.png"/>
+          <p:cNvPr id="9" name="Picture 8" descr="dcdd245aeaaf1b55.png"/>
           <p:cNvPicPr>
             <a:picLocks noChangeAspect="1"/>
           </p:cNvPicPr>
@@ -13002,8 +12732,8 @@
         </p:blipFill>
         <p:spPr>
           <a:xfrm>
-            <a:off x="7071381" y="3645739"/>
-            <a:ext cx="176784" cy="207264"/>
+            <a:off x="4417755" y="3124200"/>
+            <a:ext cx="1057656" cy="515112"/>
           </a:xfrm>
           <a:prstGeom prst="rect">
             <a:avLst/>
@@ -13012,14 +12742,14 @@
       </p:pic>
       <p:sp>
         <p:nvSpPr>
-          <p:cNvPr id="14" name="TextBox 13"/>
-          <p:cNvSpPr txBox="1"/>
-          <p:nvPr/>
-        </p:nvSpPr>
-        <p:spPr>
-          <a:xfrm>
-            <a:off x="7248165" y="3520771"/>
-            <a:ext cx="2492980" cy="457200"/>
+          <p:cNvPr id="10" name="TextBox 9"/>
+          <p:cNvSpPr txBox="1"/>
+          <p:nvPr/>
+        </p:nvSpPr>
+        <p:spPr>
+          <a:xfrm>
+            <a:off x="5475411" y="3153156"/>
+            <a:ext cx="1670944" cy="457200"/>
           </a:xfrm>
           <a:prstGeom prst="rect">
             <a:avLst/>
@@ -13034,27 +12764,99 @@
           <a:p>
             <a:pPr algn="l"/>
             <a:r>
-              <a:rPr sz="2470" b="0" i="0">
+              <a:rPr sz="2330" b="0" i="0">
                 <a:solidFill>
                   <a:srgbClr val="1A1A1A"/>
                 </a:solidFill>
                 <a:latin typeface="Lexend"/>
               </a:rPr>
-              <a:t> that settles it.</a:t>
-            </a:r>
-          </a:p>
-        </p:txBody>
-      </p:sp>
-      <p:sp>
-        <p:nvSpPr>
-          <p:cNvPr id="15" name="TextBox 14"/>
-          <p:cNvSpPr txBox="1"/>
-          <p:nvPr/>
-        </p:nvSpPr>
-        <p:spPr>
-          <a:xfrm>
-            <a:off x="777240" y="4366591"/>
-            <a:ext cx="10607040" cy="457200"/>
+              <a:t>     and     </a:t>
+            </a:r>
+          </a:p>
+        </p:txBody>
+      </p:sp>
+      <p:pic>
+        <p:nvPicPr>
+          <p:cNvPr id="11" name="Picture 10" descr="91dc20afadb1aea1.png"/>
+          <p:cNvPicPr>
+            <a:picLocks noChangeAspect="1"/>
+          </p:cNvPicPr>
+          <p:nvPr/>
+        </p:nvPicPr>
+        <p:blipFill>
+          <a:blip r:embed="rId4"/>
+          <a:stretch>
+            <a:fillRect/>
+          </a:stretch>
+        </p:blipFill>
+        <p:spPr>
+          <a:xfrm>
+            <a:off x="7009196" y="3124200"/>
+            <a:ext cx="829056" cy="515112"/>
+          </a:xfrm>
+          <a:prstGeom prst="rect">
+            <a:avLst/>
+          </a:prstGeom>
+        </p:spPr>
+      </p:pic>
+      <p:pic>
+        <p:nvPicPr>
+          <p:cNvPr id="12" name="Picture 11" descr="116226914234f125.png"/>
+          <p:cNvPicPr>
+            <a:picLocks noChangeAspect="1"/>
+          </p:cNvPicPr>
+          <p:nvPr/>
+        </p:nvPicPr>
+        <p:blipFill>
+          <a:blip r:embed="rId5"/>
+          <a:stretch>
+            <a:fillRect/>
+          </a:stretch>
+        </p:blipFill>
+        <p:spPr>
+          <a:xfrm>
+            <a:off x="4417755" y="3730752"/>
+            <a:ext cx="2569464" cy="515112"/>
+          </a:xfrm>
+          <a:prstGeom prst="rect">
+            <a:avLst/>
+          </a:prstGeom>
+        </p:spPr>
+      </p:pic>
+      <p:pic>
+        <p:nvPicPr>
+          <p:cNvPr id="13" name="Picture 12" descr="ea27676c0bb85836.png"/>
+          <p:cNvPicPr>
+            <a:picLocks noChangeAspect="1"/>
+          </p:cNvPicPr>
+          <p:nvPr/>
+        </p:nvPicPr>
+        <p:blipFill>
+          <a:blip r:embed="rId6"/>
+          <a:stretch>
+            <a:fillRect/>
+          </a:stretch>
+        </p:blipFill>
+        <p:spPr>
+          <a:xfrm>
+            <a:off x="4417755" y="4337304"/>
+            <a:ext cx="1481328" cy="512064"/>
+          </a:xfrm>
+          <a:prstGeom prst="rect">
+            <a:avLst/>
+          </a:prstGeom>
+        </p:spPr>
+      </p:pic>
+      <p:sp>
+        <p:nvSpPr>
+          <p:cNvPr id="14" name="TextBox 13"/>
+          <p:cNvSpPr txBox="1"/>
+          <p:nvPr/>
+        </p:nvSpPr>
+        <p:spPr>
+          <a:xfrm>
+            <a:off x="777240" y="4986528"/>
+            <a:ext cx="10607040" cy="548640"/>
           </a:xfrm>
           <a:prstGeom prst="rect">
             <a:avLst/>
@@ -13069,13 +12871,13 @@
           <a:p>
             <a:pPr algn="ctr"/>
             <a:r>
-              <a:rPr sz="2470" b="1" i="0">
-                <a:solidFill>
-                  <a:srgbClr val="1A1A1A"/>
-                </a:solidFill>
-                <a:latin typeface="Lexend"/>
-              </a:rPr>
-              <a:t>Write your answer in sentences.</a:t>
+              <a:rPr sz="3040" b="1" i="0">
+                <a:solidFill>
+                  <a:srgbClr val="9E1B32"/>
+                </a:solidFill>
+                <a:latin typeface="Lexend"/>
+              </a:rPr>
+              <a:t>Answer:   17/6</a:t>
             </a:r>
           </a:p>
         </p:txBody>
@@ -13316,7 +13118,7 @@
         </p:nvSpPr>
         <p:spPr>
           <a:xfrm>
-            <a:off x="2054462" y="2124456"/>
+            <a:off x="2055986" y="2215896"/>
             <a:ext cx="3126680" cy="457200"/>
           </a:xfrm>
           <a:prstGeom prst="rect">
@@ -13345,7 +13147,7 @@
       </p:sp>
       <p:pic>
         <p:nvPicPr>
-          <p:cNvPr id="9" name="Picture 8" descr="349a51316d69c510.png"/>
+          <p:cNvPr id="9" name="Picture 8" descr="c79d4acb3ae0bdb0.png"/>
           <p:cNvPicPr>
             <a:picLocks noChangeAspect="1"/>
           </p:cNvPicPr>
@@ -13359,8 +13161,8 @@
         </p:blipFill>
         <p:spPr>
           <a:xfrm>
-            <a:off x="5043983" y="2103120"/>
-            <a:ext cx="1905000" cy="499871"/>
+            <a:off x="5045507" y="2194560"/>
+            <a:ext cx="1901952" cy="499871"/>
           </a:xfrm>
           <a:prstGeom prst="rect">
             <a:avLst/>
@@ -13375,7 +13177,7 @@
         </p:nvSpPr>
         <p:spPr>
           <a:xfrm>
-            <a:off x="6948983" y="2124456"/>
+            <a:off x="6947459" y="2215896"/>
             <a:ext cx="3295234" cy="457200"/>
           </a:xfrm>
           <a:prstGeom prst="rect">
@@ -13410,7 +13212,7 @@
         </p:nvSpPr>
         <p:spPr>
           <a:xfrm>
-            <a:off x="777240" y="2877312"/>
+            <a:off x="777240" y="2968751"/>
             <a:ext cx="10607040" cy="465151"/>
           </a:xfrm>
           <a:prstGeom prst="rect">
@@ -13445,7 +13247,7 @@
         </p:nvSpPr>
         <p:spPr>
           <a:xfrm>
-            <a:off x="2557533" y="3429331"/>
+            <a:off x="2557533" y="3520771"/>
             <a:ext cx="4651007" cy="457200"/>
           </a:xfrm>
           <a:prstGeom prst="rect">
@@ -13488,7 +13290,7 @@
         </p:blipFill>
         <p:spPr>
           <a:xfrm>
-            <a:off x="7071381" y="3554299"/>
+            <a:off x="7071381" y="3645739"/>
             <a:ext cx="176784" cy="207264"/>
           </a:xfrm>
           <a:prstGeom prst="rect">
@@ -13504,7 +13306,7 @@
         </p:nvSpPr>
         <p:spPr>
           <a:xfrm>
-            <a:off x="7248165" y="3429331"/>
+            <a:off x="7248165" y="3520771"/>
             <a:ext cx="2492980" cy="457200"/>
           </a:xfrm>
           <a:prstGeom prst="rect">
@@ -13539,185 +13341,8 @@
         </p:nvSpPr>
         <p:spPr>
           <a:xfrm>
-            <a:off x="2988076" y="4198951"/>
-            <a:ext cx="1342179" cy="457200"/>
-          </a:xfrm>
-          <a:prstGeom prst="rect">
-            <a:avLst/>
-          </a:prstGeom>
-          <a:noFill/>
-        </p:spPr>
-        <p:txBody>
-          <a:bodyPr wrap="none" lIns="45720" rIns="45720" tIns="18288" bIns="18288" anchor="ctr">
-            <a:noAutofit/>
-          </a:bodyPr>
-          <a:lstStyle/>
-          <a:p>
-            <a:pPr algn="l"/>
-            <a:r>
-              <a:rPr sz="2750" b="0" i="0">
-                <a:solidFill>
-                  <a:srgbClr val="1A1A1A"/>
-                </a:solidFill>
-                <a:latin typeface="Lexend"/>
-              </a:rPr>
-              <a:t>When </a:t>
-            </a:r>
-          </a:p>
-        </p:txBody>
-      </p:sp>
-      <p:pic>
-        <p:nvPicPr>
-          <p:cNvPr id="16" name="Picture 15" descr="da0bec38e3107c39.png"/>
-          <p:cNvPicPr>
-            <a:picLocks noChangeAspect="1"/>
-          </p:cNvPicPr>
-          <p:nvPr/>
-        </p:nvPicPr>
-        <p:blipFill>
-          <a:blip r:embed="rId4"/>
-          <a:stretch>
-            <a:fillRect/>
-          </a:stretch>
-        </p:blipFill>
-        <p:spPr>
-          <a:xfrm>
-            <a:off x="4193095" y="4302583"/>
-            <a:ext cx="1036320" cy="249935"/>
-          </a:xfrm>
-          <a:prstGeom prst="rect">
-            <a:avLst/>
-          </a:prstGeom>
-        </p:spPr>
-      </p:pic>
-      <p:sp>
-        <p:nvSpPr>
-          <p:cNvPr id="17" name="TextBox 16"/>
-          <p:cNvSpPr txBox="1"/>
-          <p:nvPr/>
-        </p:nvSpPr>
-        <p:spPr>
-          <a:xfrm>
-            <a:off x="5229415" y="4198951"/>
-            <a:ext cx="606468" cy="457200"/>
-          </a:xfrm>
-          <a:prstGeom prst="rect">
-            <a:avLst/>
-          </a:prstGeom>
-          <a:noFill/>
-        </p:spPr>
-        <p:txBody>
-          <a:bodyPr wrap="none" lIns="45720" rIns="45720" tIns="18288" bIns="18288" anchor="ctr">
-            <a:noAutofit/>
-          </a:bodyPr>
-          <a:lstStyle/>
-          <a:p>
-            <a:pPr algn="l"/>
-            <a:r>
-              <a:rPr sz="2750" b="0" i="0">
-                <a:solidFill>
-                  <a:srgbClr val="1A1A1A"/>
-                </a:solidFill>
-                <a:latin typeface="Lexend"/>
-              </a:rPr>
-              <a:t>:   </a:t>
-            </a:r>
-          </a:p>
-        </p:txBody>
-      </p:sp>
-      <p:pic>
-        <p:nvPicPr>
-          <p:cNvPr id="18" name="Picture 17" descr="c90e576750902fbb.png"/>
-          <p:cNvPicPr>
-            <a:picLocks noChangeAspect="1"/>
-          </p:cNvPicPr>
-          <p:nvPr/>
-        </p:nvPicPr>
-        <p:blipFill>
-          <a:blip r:embed="rId5"/>
-          <a:stretch>
-            <a:fillRect/>
-          </a:stretch>
-        </p:blipFill>
-        <p:spPr>
-          <a:xfrm>
-            <a:off x="5698723" y="4211143"/>
-            <a:ext cx="3477768" cy="432816"/>
-          </a:xfrm>
-          <a:prstGeom prst="rect">
-            <a:avLst/>
-          </a:prstGeom>
-        </p:spPr>
-      </p:pic>
-      <p:pic>
-        <p:nvPicPr>
-          <p:cNvPr id="19" name="Picture 18" descr="ff74c5c7fd2cbb83.png"/>
-          <p:cNvPicPr>
-            <a:picLocks noChangeAspect="1"/>
-          </p:cNvPicPr>
-          <p:nvPr/>
-        </p:nvPicPr>
-        <p:blipFill>
-          <a:blip r:embed="rId6"/>
-          <a:stretch>
-            <a:fillRect/>
-          </a:stretch>
-        </p:blipFill>
-        <p:spPr>
-          <a:xfrm>
-            <a:off x="3042940" y="4825315"/>
-            <a:ext cx="868680" cy="304800"/>
-          </a:xfrm>
-          <a:prstGeom prst="rect">
-            <a:avLst/>
-          </a:prstGeom>
-        </p:spPr>
-      </p:pic>
-      <p:sp>
-        <p:nvSpPr>
-          <p:cNvPr id="20" name="TextBox 19"/>
-          <p:cNvSpPr txBox="1"/>
-          <p:nvPr/>
-        </p:nvSpPr>
-        <p:spPr>
-          <a:xfrm>
-            <a:off x="3911620" y="4749115"/>
-            <a:ext cx="4321243" cy="457200"/>
-          </a:xfrm>
-          <a:prstGeom prst="rect">
-            <a:avLst/>
-          </a:prstGeom>
-          <a:noFill/>
-        </p:spPr>
-        <p:txBody>
-          <a:bodyPr wrap="none" lIns="45720" rIns="45720" tIns="18288" bIns="18288" anchor="ctr">
-            <a:noAutofit/>
-          </a:bodyPr>
-          <a:lstStyle/>
-          <a:p>
-            <a:pPr algn="l"/>
-            <a:r>
-              <a:rPr sz="2750" b="0" i="0">
-                <a:solidFill>
-                  <a:srgbClr val="1A1A1A"/>
-                </a:solidFill>
-                <a:latin typeface="Lexend"/>
-              </a:rPr>
-              <a:t>,   and 0 is not positive.</a:t>
-            </a:r>
-          </a:p>
-        </p:txBody>
-      </p:sp>
-      <p:sp>
-        <p:nvSpPr>
-          <p:cNvPr id="21" name="TextBox 20"/>
-          <p:cNvSpPr txBox="1"/>
-          <p:nvPr/>
-        </p:nvSpPr>
-        <p:spPr>
-          <a:xfrm>
-            <a:off x="777240" y="5320615"/>
-            <a:ext cx="10607040" cy="548640"/>
+            <a:off x="777240" y="4366591"/>
+            <a:ext cx="10607040" cy="457200"/>
           </a:xfrm>
           <a:prstGeom prst="rect">
             <a:avLst/>
@@ -13732,13 +13357,13 @@
           <a:p>
             <a:pPr algn="ctr"/>
             <a:r>
-              <a:rPr sz="3040" b="1" i="0">
-                <a:solidFill>
-                  <a:srgbClr val="9E1B32"/>
-                </a:solidFill>
-                <a:latin typeface="Lexend"/>
-              </a:rPr>
-              <a:t>Answer:   No — at n = 121 the value is 0</a:t>
+              <a:rPr sz="2470" b="1" i="0">
+                <a:solidFill>
+                  <a:srgbClr val="1A1A1A"/>
+                </a:solidFill>
+                <a:latin typeface="Lexend"/>
+              </a:rPr>
+              <a:t>Write your answer in sentences.</a:t>
             </a:r>
           </a:p>
         </p:txBody>
@@ -13785,13 +13410,13 @@
           <a:p>
             <a:pPr algn="l"/>
             <a:r>
-              <a:rPr sz="3420" b="1" i="0">
+              <a:rPr sz="3229" b="1" i="0">
                 <a:solidFill>
                   <a:srgbClr val="1A1A1A"/>
                 </a:solidFill>
                 <a:latin typeface="Lexend"/>
               </a:rPr>
-              <a:t>Independent Set</a:t>
+              <a:t>Whiteboards   ·   Question 9 of 9</a:t>
             </a:r>
           </a:p>
         </p:txBody>
@@ -13979,36 +13604,36 @@
         </p:nvSpPr>
         <p:spPr>
           <a:xfrm>
-            <a:off x="960120" y="1495043"/>
-            <a:ext cx="548640" cy="457200"/>
-          </a:xfrm>
-          <a:prstGeom prst="rect">
-            <a:avLst/>
-          </a:prstGeom>
-          <a:noFill/>
-        </p:spPr>
-        <p:txBody>
-          <a:bodyPr wrap="square" lIns="45720" rIns="45720" tIns="18288" bIns="18288" anchor="ctr">
-            <a:spAutoFit/>
+            <a:off x="2054462" y="2124456"/>
+            <a:ext cx="3126680" cy="457200"/>
+          </a:xfrm>
+          <a:prstGeom prst="rect">
+            <a:avLst/>
+          </a:prstGeom>
+          <a:noFill/>
+        </p:spPr>
+        <p:txBody>
+          <a:bodyPr wrap="none" lIns="45720" rIns="45720" tIns="18288" bIns="18288" anchor="ctr">
+            <a:noAutofit/>
           </a:bodyPr>
           <a:lstStyle/>
           <a:p>
             <a:pPr algn="l"/>
             <a:r>
-              <a:rPr sz="2180" b="1" i="0">
-                <a:solidFill>
-                  <a:srgbClr val="0B5394"/>
-                </a:solidFill>
-                <a:latin typeface="Lexend"/>
-              </a:rPr>
-              <a:t>1.</a:t>
+              <a:rPr sz="2470" b="0" i="0">
+                <a:solidFill>
+                  <a:srgbClr val="1A1A1A"/>
+                </a:solidFill>
+                <a:latin typeface="Lexend"/>
+              </a:rPr>
+              <a:t>Roscoe says that  </a:t>
             </a:r>
           </a:p>
         </p:txBody>
       </p:sp>
       <p:pic>
         <p:nvPicPr>
-          <p:cNvPr id="9" name="Picture 8" descr="7297de9a2fe9374c.png"/>
+          <p:cNvPr id="9" name="Picture 8" descr="349a51316d69c510.png"/>
           <p:cNvPicPr>
             <a:picLocks noChangeAspect="1"/>
           </p:cNvPicPr>
@@ -14022,8 +13647,8 @@
         </p:blipFill>
         <p:spPr>
           <a:xfrm>
-            <a:off x="1627632" y="1610867"/>
-            <a:ext cx="1676400" cy="225552"/>
+            <a:off x="5043983" y="2103120"/>
+            <a:ext cx="1905000" cy="499871"/>
           </a:xfrm>
           <a:prstGeom prst="rect">
             <a:avLst/>
@@ -14038,36 +13663,106 @@
         </p:nvSpPr>
         <p:spPr>
           <a:xfrm>
-            <a:off x="960120" y="2089403"/>
-            <a:ext cx="548640" cy="457200"/>
-          </a:xfrm>
-          <a:prstGeom prst="rect">
-            <a:avLst/>
-          </a:prstGeom>
-          <a:noFill/>
-        </p:spPr>
-        <p:txBody>
-          <a:bodyPr wrap="square" lIns="45720" rIns="45720" tIns="18288" bIns="18288" anchor="ctr">
+            <a:off x="6948983" y="2124456"/>
+            <a:ext cx="3295234" cy="457200"/>
+          </a:xfrm>
+          <a:prstGeom prst="rect">
+            <a:avLst/>
+          </a:prstGeom>
+          <a:noFill/>
+        </p:spPr>
+        <p:txBody>
+          <a:bodyPr wrap="none" lIns="45720" rIns="45720" tIns="18288" bIns="18288" anchor="ctr">
+            <a:noAutofit/>
+          </a:bodyPr>
+          <a:lstStyle/>
+          <a:p>
+            <a:pPr algn="l"/>
+            <a:r>
+              <a:rPr sz="2470" b="0" i="0">
+                <a:solidFill>
+                  <a:srgbClr val="1A1A1A"/>
+                </a:solidFill>
+                <a:latin typeface="Lexend"/>
+              </a:rPr>
+              <a:t>  is always positive,</a:t>
+            </a:r>
+          </a:p>
+        </p:txBody>
+      </p:sp>
+      <p:sp>
+        <p:nvSpPr>
+          <p:cNvPr id="11" name="TextBox 10"/>
+          <p:cNvSpPr txBox="1"/>
+          <p:nvPr/>
+        </p:nvSpPr>
+        <p:spPr>
+          <a:xfrm>
+            <a:off x="777240" y="2877312"/>
+            <a:ext cx="10607040" cy="465151"/>
+          </a:xfrm>
+          <a:prstGeom prst="rect">
+            <a:avLst/>
+          </a:prstGeom>
+          <a:noFill/>
+        </p:spPr>
+        <p:txBody>
+          <a:bodyPr wrap="square" lIns="45720" rIns="45720" tIns="18288" bIns="18288" anchor="t">
             <a:spAutoFit/>
           </a:bodyPr>
           <a:lstStyle/>
           <a:p>
+            <a:pPr algn="ctr"/>
+            <a:r>
+              <a:rPr sz="2470" b="0" i="0">
+                <a:solidFill>
+                  <a:srgbClr val="1A1A1A"/>
+                </a:solidFill>
+                <a:latin typeface="Lexend"/>
+              </a:rPr>
+              <a:t>because a square is always positive.</a:t>
+            </a:r>
+          </a:p>
+        </p:txBody>
+      </p:sp>
+      <p:sp>
+        <p:nvSpPr>
+          <p:cNvPr id="12" name="TextBox 11"/>
+          <p:cNvSpPr txBox="1"/>
+          <p:nvPr/>
+        </p:nvSpPr>
+        <p:spPr>
+          <a:xfrm>
+            <a:off x="2557533" y="3429331"/>
+            <a:ext cx="4651007" cy="457200"/>
+          </a:xfrm>
+          <a:prstGeom prst="rect">
+            <a:avLst/>
+          </a:prstGeom>
+          <a:noFill/>
+        </p:spPr>
+        <p:txBody>
+          <a:bodyPr wrap="none" lIns="45720" rIns="45720" tIns="18288" bIns="18288" anchor="ctr">
+            <a:noAutofit/>
+          </a:bodyPr>
+          <a:lstStyle/>
+          <a:p>
             <a:pPr algn="l"/>
             <a:r>
-              <a:rPr sz="2180" b="1" i="0">
-                <a:solidFill>
-                  <a:srgbClr val="0B5394"/>
-                </a:solidFill>
-                <a:latin typeface="Lexend"/>
-              </a:rPr>
-              <a:t>2.</a:t>
+              <a:rPr sz="2470" b="0" i="0">
+                <a:solidFill>
+                  <a:srgbClr val="1A1A1A"/>
+                </a:solidFill>
+                <a:latin typeface="Lexend"/>
+              </a:rPr>
+              <a:t>Is he right? Give a value of </a:t>
             </a:r>
           </a:p>
         </p:txBody>
       </p:sp>
       <p:pic>
         <p:nvPicPr>
-          <p:cNvPr id="11" name="Picture 10" descr="503ca8bbf5ad0378.png"/>
+          <p:cNvPr id="13" name="Picture 12" descr="f14fce7cf077cd07.png"/>
           <p:cNvPicPr>
             <a:picLocks noChangeAspect="1"/>
           </p:cNvPicPr>
@@ -14081,8 +13776,8 @@
         </p:blipFill>
         <p:spPr>
           <a:xfrm>
-            <a:off x="1627632" y="2205227"/>
-            <a:ext cx="1167384" cy="225552"/>
+            <a:off x="7071381" y="3554299"/>
+            <a:ext cx="176784" cy="207264"/>
           </a:xfrm>
           <a:prstGeom prst="rect">
             <a:avLst/>
@@ -14091,42 +13786,77 @@
       </p:pic>
       <p:sp>
         <p:nvSpPr>
-          <p:cNvPr id="12" name="TextBox 11"/>
-          <p:cNvSpPr txBox="1"/>
-          <p:nvPr/>
-        </p:nvSpPr>
-        <p:spPr>
-          <a:xfrm>
-            <a:off x="960120" y="2683763"/>
-            <a:ext cx="548640" cy="457200"/>
-          </a:xfrm>
-          <a:prstGeom prst="rect">
-            <a:avLst/>
-          </a:prstGeom>
-          <a:noFill/>
-        </p:spPr>
-        <p:txBody>
-          <a:bodyPr wrap="square" lIns="45720" rIns="45720" tIns="18288" bIns="18288" anchor="ctr">
-            <a:spAutoFit/>
+          <p:cNvPr id="14" name="TextBox 13"/>
+          <p:cNvSpPr txBox="1"/>
+          <p:nvPr/>
+        </p:nvSpPr>
+        <p:spPr>
+          <a:xfrm>
+            <a:off x="7248165" y="3429331"/>
+            <a:ext cx="2492980" cy="457200"/>
+          </a:xfrm>
+          <a:prstGeom prst="rect">
+            <a:avLst/>
+          </a:prstGeom>
+          <a:noFill/>
+        </p:spPr>
+        <p:txBody>
+          <a:bodyPr wrap="none" lIns="45720" rIns="45720" tIns="18288" bIns="18288" anchor="ctr">
+            <a:noAutofit/>
           </a:bodyPr>
           <a:lstStyle/>
           <a:p>
             <a:pPr algn="l"/>
             <a:r>
-              <a:rPr sz="2180" b="1" i="0">
-                <a:solidFill>
-                  <a:srgbClr val="0B5394"/>
-                </a:solidFill>
-                <a:latin typeface="Lexend"/>
-              </a:rPr>
-              <a:t>3.</a:t>
+              <a:rPr sz="2470" b="0" i="0">
+                <a:solidFill>
+                  <a:srgbClr val="1A1A1A"/>
+                </a:solidFill>
+                <a:latin typeface="Lexend"/>
+              </a:rPr>
+              <a:t> that settles it.</a:t>
+            </a:r>
+          </a:p>
+        </p:txBody>
+      </p:sp>
+      <p:sp>
+        <p:nvSpPr>
+          <p:cNvPr id="15" name="TextBox 14"/>
+          <p:cNvSpPr txBox="1"/>
+          <p:nvPr/>
+        </p:nvSpPr>
+        <p:spPr>
+          <a:xfrm>
+            <a:off x="2988076" y="4198951"/>
+            <a:ext cx="1342179" cy="457200"/>
+          </a:xfrm>
+          <a:prstGeom prst="rect">
+            <a:avLst/>
+          </a:prstGeom>
+          <a:noFill/>
+        </p:spPr>
+        <p:txBody>
+          <a:bodyPr wrap="none" lIns="45720" rIns="45720" tIns="18288" bIns="18288" anchor="ctr">
+            <a:noAutofit/>
+          </a:bodyPr>
+          <a:lstStyle/>
+          <a:p>
+            <a:pPr algn="l"/>
+            <a:r>
+              <a:rPr sz="2750" b="0" i="0">
+                <a:solidFill>
+                  <a:srgbClr val="1A1A1A"/>
+                </a:solidFill>
+                <a:latin typeface="Lexend"/>
+              </a:rPr>
+              <a:t>When </a:t>
             </a:r>
           </a:p>
         </p:txBody>
       </p:sp>
       <p:pic>
         <p:nvPicPr>
-          <p:cNvPr id="13" name="Picture 12" descr="fee2d71f7c46e5ad.png"/>
+          <p:cNvPr id="16" name="Picture 15" descr="da0bec38e3107c39.png"/>
           <p:cNvPicPr>
             <a:picLocks noChangeAspect="1"/>
           </p:cNvPicPr>
@@ -14140,8 +13870,8 @@
         </p:blipFill>
         <p:spPr>
           <a:xfrm>
-            <a:off x="1627632" y="2744723"/>
-            <a:ext cx="1630680" cy="335280"/>
+            <a:off x="4193095" y="4302583"/>
+            <a:ext cx="1036320" cy="249935"/>
           </a:xfrm>
           <a:prstGeom prst="rect">
             <a:avLst/>
@@ -14150,42 +13880,42 @@
       </p:pic>
       <p:sp>
         <p:nvSpPr>
-          <p:cNvPr id="14" name="TextBox 13"/>
-          <p:cNvSpPr txBox="1"/>
-          <p:nvPr/>
-        </p:nvSpPr>
-        <p:spPr>
-          <a:xfrm>
-            <a:off x="960120" y="3395471"/>
-            <a:ext cx="548640" cy="457200"/>
-          </a:xfrm>
-          <a:prstGeom prst="rect">
-            <a:avLst/>
-          </a:prstGeom>
-          <a:noFill/>
-        </p:spPr>
-        <p:txBody>
-          <a:bodyPr wrap="square" lIns="45720" rIns="45720" tIns="18288" bIns="18288" anchor="ctr">
-            <a:spAutoFit/>
+          <p:cNvPr id="17" name="TextBox 16"/>
+          <p:cNvSpPr txBox="1"/>
+          <p:nvPr/>
+        </p:nvSpPr>
+        <p:spPr>
+          <a:xfrm>
+            <a:off x="5229415" y="4198951"/>
+            <a:ext cx="606468" cy="457200"/>
+          </a:xfrm>
+          <a:prstGeom prst="rect">
+            <a:avLst/>
+          </a:prstGeom>
+          <a:noFill/>
+        </p:spPr>
+        <p:txBody>
+          <a:bodyPr wrap="none" lIns="45720" rIns="45720" tIns="18288" bIns="18288" anchor="ctr">
+            <a:noAutofit/>
           </a:bodyPr>
           <a:lstStyle/>
           <a:p>
             <a:pPr algn="l"/>
             <a:r>
-              <a:rPr sz="2180" b="1" i="0">
-                <a:solidFill>
-                  <a:srgbClr val="0B5394"/>
-                </a:solidFill>
-                <a:latin typeface="Lexend"/>
-              </a:rPr>
-              <a:t>4.</a:t>
+              <a:rPr sz="2750" b="0" i="0">
+                <a:solidFill>
+                  <a:srgbClr val="1A1A1A"/>
+                </a:solidFill>
+                <a:latin typeface="Lexend"/>
+              </a:rPr>
+              <a:t>:   </a:t>
             </a:r>
           </a:p>
         </p:txBody>
       </p:sp>
       <p:pic>
         <p:nvPicPr>
-          <p:cNvPr id="15" name="Picture 14" descr="4e620423e0fdea84.png"/>
+          <p:cNvPr id="18" name="Picture 17" descr="c90e576750902fbb.png"/>
           <p:cNvPicPr>
             <a:picLocks noChangeAspect="1"/>
           </p:cNvPicPr>
@@ -14199,52 +13929,17 @@
         </p:blipFill>
         <p:spPr>
           <a:xfrm>
-            <a:off x="1627632" y="3300983"/>
-            <a:ext cx="780288" cy="646176"/>
+            <a:off x="5698723" y="4211143"/>
+            <a:ext cx="3477768" cy="432816"/>
           </a:xfrm>
           <a:prstGeom prst="rect">
             <a:avLst/>
           </a:prstGeom>
         </p:spPr>
       </p:pic>
-      <p:sp>
-        <p:nvSpPr>
-          <p:cNvPr id="16" name="TextBox 15"/>
-          <p:cNvSpPr txBox="1"/>
-          <p:nvPr/>
-        </p:nvSpPr>
-        <p:spPr>
-          <a:xfrm>
-            <a:off x="960120" y="4107179"/>
-            <a:ext cx="548640" cy="457200"/>
-          </a:xfrm>
-          <a:prstGeom prst="rect">
-            <a:avLst/>
-          </a:prstGeom>
-          <a:noFill/>
-        </p:spPr>
-        <p:txBody>
-          <a:bodyPr wrap="square" lIns="45720" rIns="45720" tIns="18288" bIns="18288" anchor="ctr">
-            <a:spAutoFit/>
-          </a:bodyPr>
-          <a:lstStyle/>
-          <a:p>
-            <a:pPr algn="l"/>
-            <a:r>
-              <a:rPr sz="2180" b="1" i="0">
-                <a:solidFill>
-                  <a:srgbClr val="0B5394"/>
-                </a:solidFill>
-                <a:latin typeface="Lexend"/>
-              </a:rPr>
-              <a:t>5.</a:t>
-            </a:r>
-          </a:p>
-        </p:txBody>
-      </p:sp>
       <p:pic>
         <p:nvPicPr>
-          <p:cNvPr id="17" name="Picture 16" descr="749d7946d074ee2f.png"/>
+          <p:cNvPr id="19" name="Picture 18" descr="ff74c5c7fd2cbb83.png"/>
           <p:cNvPicPr>
             <a:picLocks noChangeAspect="1"/>
           </p:cNvPicPr>
@@ -14258,8 +13953,8 @@
         </p:blipFill>
         <p:spPr>
           <a:xfrm>
-            <a:off x="1627632" y="4168139"/>
-            <a:ext cx="1514856" cy="335280"/>
+            <a:off x="3042940" y="4825315"/>
+            <a:ext cx="868680" cy="304800"/>
           </a:xfrm>
           <a:prstGeom prst="rect">
             <a:avLst/>
@@ -14268,63 +13963,74 @@
       </p:pic>
       <p:sp>
         <p:nvSpPr>
-          <p:cNvPr id="18" name="TextBox 17"/>
-          <p:cNvSpPr txBox="1"/>
-          <p:nvPr/>
-        </p:nvSpPr>
-        <p:spPr>
-          <a:xfrm>
-            <a:off x="960120" y="4701539"/>
-            <a:ext cx="548640" cy="457200"/>
-          </a:xfrm>
-          <a:prstGeom prst="rect">
-            <a:avLst/>
-          </a:prstGeom>
-          <a:noFill/>
-        </p:spPr>
-        <p:txBody>
-          <a:bodyPr wrap="square" lIns="45720" rIns="45720" tIns="18288" bIns="18288" anchor="ctr">
+          <p:cNvPr id="20" name="TextBox 19"/>
+          <p:cNvSpPr txBox="1"/>
+          <p:nvPr/>
+        </p:nvSpPr>
+        <p:spPr>
+          <a:xfrm>
+            <a:off x="3911620" y="4749115"/>
+            <a:ext cx="4321243" cy="457200"/>
+          </a:xfrm>
+          <a:prstGeom prst="rect">
+            <a:avLst/>
+          </a:prstGeom>
+          <a:noFill/>
+        </p:spPr>
+        <p:txBody>
+          <a:bodyPr wrap="none" lIns="45720" rIns="45720" tIns="18288" bIns="18288" anchor="ctr">
+            <a:noAutofit/>
+          </a:bodyPr>
+          <a:lstStyle/>
+          <a:p>
+            <a:pPr algn="l"/>
+            <a:r>
+              <a:rPr sz="2750" b="0" i="0">
+                <a:solidFill>
+                  <a:srgbClr val="1A1A1A"/>
+                </a:solidFill>
+                <a:latin typeface="Lexend"/>
+              </a:rPr>
+              <a:t>,   and 0 is not positive.</a:t>
+            </a:r>
+          </a:p>
+        </p:txBody>
+      </p:sp>
+      <p:sp>
+        <p:nvSpPr>
+          <p:cNvPr id="21" name="TextBox 20"/>
+          <p:cNvSpPr txBox="1"/>
+          <p:nvPr/>
+        </p:nvSpPr>
+        <p:spPr>
+          <a:xfrm>
+            <a:off x="777240" y="5320615"/>
+            <a:ext cx="10607040" cy="548640"/>
+          </a:xfrm>
+          <a:prstGeom prst="rect">
+            <a:avLst/>
+          </a:prstGeom>
+          <a:noFill/>
+        </p:spPr>
+        <p:txBody>
+          <a:bodyPr wrap="square" lIns="45720" rIns="45720" tIns="18288" bIns="18288" anchor="t">
             <a:spAutoFit/>
           </a:bodyPr>
           <a:lstStyle/>
           <a:p>
-            <a:pPr algn="l"/>
-            <a:r>
-              <a:rPr sz="2180" b="1" i="0">
-                <a:solidFill>
-                  <a:srgbClr val="0B5394"/>
-                </a:solidFill>
-                <a:latin typeface="Lexend"/>
-              </a:rPr>
-              <a:t>6.</a:t>
-            </a:r>
-          </a:p>
-        </p:txBody>
-      </p:sp>
-      <p:pic>
-        <p:nvPicPr>
-          <p:cNvPr id="19" name="Picture 18" descr="16b03c438ff63fe5.png"/>
-          <p:cNvPicPr>
-            <a:picLocks noChangeAspect="1"/>
-          </p:cNvPicPr>
-          <p:nvPr/>
-        </p:nvPicPr>
-        <p:blipFill>
-          <a:blip r:embed="rId7"/>
-          <a:stretch>
-            <a:fillRect/>
-          </a:stretch>
-        </p:blipFill>
-        <p:spPr>
-          <a:xfrm>
-            <a:off x="1627632" y="4735067"/>
-            <a:ext cx="2215896" cy="390144"/>
-          </a:xfrm>
-          <a:prstGeom prst="rect">
-            <a:avLst/>
-          </a:prstGeom>
-        </p:spPr>
-      </p:pic>
+            <a:pPr algn="ctr"/>
+            <a:r>
+              <a:rPr sz="3040" b="1" i="0">
+                <a:solidFill>
+                  <a:srgbClr val="9E1B32"/>
+                </a:solidFill>
+                <a:latin typeface="Lexend"/>
+              </a:rPr>
+              <a:t>Answer:   No — at n = 121 the value is 0</a:t>
+            </a:r>
+          </a:p>
+        </p:txBody>
+      </p:sp>
     </p:spTree>
   </p:cSld>
   <p:clrMapOvr>
@@ -14373,7 +14079,7 @@
                 </a:solidFill>
                 <a:latin typeface="Lexend"/>
               </a:rPr>
-              <a:t>IXL</a:t>
+              <a:t>Independent Set</a:t>
             </a:r>
           </a:p>
         </p:txBody>
@@ -14549,6 +14255,588 @@
                 <a:latin typeface="Lexend"/>
               </a:rPr>
               <a:t>34</a:t>
+            </a:r>
+          </a:p>
+        </p:txBody>
+      </p:sp>
+      <p:sp>
+        <p:nvSpPr>
+          <p:cNvPr id="8" name="TextBox 7"/>
+          <p:cNvSpPr txBox="1"/>
+          <p:nvPr/>
+        </p:nvSpPr>
+        <p:spPr>
+          <a:xfrm>
+            <a:off x="960120" y="1495043"/>
+            <a:ext cx="548640" cy="457200"/>
+          </a:xfrm>
+          <a:prstGeom prst="rect">
+            <a:avLst/>
+          </a:prstGeom>
+          <a:noFill/>
+        </p:spPr>
+        <p:txBody>
+          <a:bodyPr wrap="square" lIns="45720" rIns="45720" tIns="18288" bIns="18288" anchor="ctr">
+            <a:spAutoFit/>
+          </a:bodyPr>
+          <a:lstStyle/>
+          <a:p>
+            <a:pPr algn="l"/>
+            <a:r>
+              <a:rPr sz="2180" b="1" i="0">
+                <a:solidFill>
+                  <a:srgbClr val="0B5394"/>
+                </a:solidFill>
+                <a:latin typeface="Lexend"/>
+              </a:rPr>
+              <a:t>1.</a:t>
+            </a:r>
+          </a:p>
+        </p:txBody>
+      </p:sp>
+      <p:pic>
+        <p:nvPicPr>
+          <p:cNvPr id="9" name="Picture 8" descr="7297de9a2fe9374c.png"/>
+          <p:cNvPicPr>
+            <a:picLocks noChangeAspect="1"/>
+          </p:cNvPicPr>
+          <p:nvPr/>
+        </p:nvPicPr>
+        <p:blipFill>
+          <a:blip r:embed="rId2"/>
+          <a:stretch>
+            <a:fillRect/>
+          </a:stretch>
+        </p:blipFill>
+        <p:spPr>
+          <a:xfrm>
+            <a:off x="1627632" y="1610867"/>
+            <a:ext cx="1676400" cy="225552"/>
+          </a:xfrm>
+          <a:prstGeom prst="rect">
+            <a:avLst/>
+          </a:prstGeom>
+        </p:spPr>
+      </p:pic>
+      <p:sp>
+        <p:nvSpPr>
+          <p:cNvPr id="10" name="TextBox 9"/>
+          <p:cNvSpPr txBox="1"/>
+          <p:nvPr/>
+        </p:nvSpPr>
+        <p:spPr>
+          <a:xfrm>
+            <a:off x="960120" y="2089403"/>
+            <a:ext cx="548640" cy="457200"/>
+          </a:xfrm>
+          <a:prstGeom prst="rect">
+            <a:avLst/>
+          </a:prstGeom>
+          <a:noFill/>
+        </p:spPr>
+        <p:txBody>
+          <a:bodyPr wrap="square" lIns="45720" rIns="45720" tIns="18288" bIns="18288" anchor="ctr">
+            <a:spAutoFit/>
+          </a:bodyPr>
+          <a:lstStyle/>
+          <a:p>
+            <a:pPr algn="l"/>
+            <a:r>
+              <a:rPr sz="2180" b="1" i="0">
+                <a:solidFill>
+                  <a:srgbClr val="0B5394"/>
+                </a:solidFill>
+                <a:latin typeface="Lexend"/>
+              </a:rPr>
+              <a:t>2.</a:t>
+            </a:r>
+          </a:p>
+        </p:txBody>
+      </p:sp>
+      <p:pic>
+        <p:nvPicPr>
+          <p:cNvPr id="11" name="Picture 10" descr="503ca8bbf5ad0378.png"/>
+          <p:cNvPicPr>
+            <a:picLocks noChangeAspect="1"/>
+          </p:cNvPicPr>
+          <p:nvPr/>
+        </p:nvPicPr>
+        <p:blipFill>
+          <a:blip r:embed="rId3"/>
+          <a:stretch>
+            <a:fillRect/>
+          </a:stretch>
+        </p:blipFill>
+        <p:spPr>
+          <a:xfrm>
+            <a:off x="1627632" y="2205227"/>
+            <a:ext cx="1167384" cy="225552"/>
+          </a:xfrm>
+          <a:prstGeom prst="rect">
+            <a:avLst/>
+          </a:prstGeom>
+        </p:spPr>
+      </p:pic>
+      <p:sp>
+        <p:nvSpPr>
+          <p:cNvPr id="12" name="TextBox 11"/>
+          <p:cNvSpPr txBox="1"/>
+          <p:nvPr/>
+        </p:nvSpPr>
+        <p:spPr>
+          <a:xfrm>
+            <a:off x="960120" y="2683763"/>
+            <a:ext cx="548640" cy="457200"/>
+          </a:xfrm>
+          <a:prstGeom prst="rect">
+            <a:avLst/>
+          </a:prstGeom>
+          <a:noFill/>
+        </p:spPr>
+        <p:txBody>
+          <a:bodyPr wrap="square" lIns="45720" rIns="45720" tIns="18288" bIns="18288" anchor="ctr">
+            <a:spAutoFit/>
+          </a:bodyPr>
+          <a:lstStyle/>
+          <a:p>
+            <a:pPr algn="l"/>
+            <a:r>
+              <a:rPr sz="2180" b="1" i="0">
+                <a:solidFill>
+                  <a:srgbClr val="0B5394"/>
+                </a:solidFill>
+                <a:latin typeface="Lexend"/>
+              </a:rPr>
+              <a:t>3.</a:t>
+            </a:r>
+          </a:p>
+        </p:txBody>
+      </p:sp>
+      <p:pic>
+        <p:nvPicPr>
+          <p:cNvPr id="13" name="Picture 12" descr="fee2d71f7c46e5ad.png"/>
+          <p:cNvPicPr>
+            <a:picLocks noChangeAspect="1"/>
+          </p:cNvPicPr>
+          <p:nvPr/>
+        </p:nvPicPr>
+        <p:blipFill>
+          <a:blip r:embed="rId4"/>
+          <a:stretch>
+            <a:fillRect/>
+          </a:stretch>
+        </p:blipFill>
+        <p:spPr>
+          <a:xfrm>
+            <a:off x="1627632" y="2744723"/>
+            <a:ext cx="1630680" cy="335280"/>
+          </a:xfrm>
+          <a:prstGeom prst="rect">
+            <a:avLst/>
+          </a:prstGeom>
+        </p:spPr>
+      </p:pic>
+      <p:sp>
+        <p:nvSpPr>
+          <p:cNvPr id="14" name="TextBox 13"/>
+          <p:cNvSpPr txBox="1"/>
+          <p:nvPr/>
+        </p:nvSpPr>
+        <p:spPr>
+          <a:xfrm>
+            <a:off x="960120" y="3395471"/>
+            <a:ext cx="548640" cy="457200"/>
+          </a:xfrm>
+          <a:prstGeom prst="rect">
+            <a:avLst/>
+          </a:prstGeom>
+          <a:noFill/>
+        </p:spPr>
+        <p:txBody>
+          <a:bodyPr wrap="square" lIns="45720" rIns="45720" tIns="18288" bIns="18288" anchor="ctr">
+            <a:spAutoFit/>
+          </a:bodyPr>
+          <a:lstStyle/>
+          <a:p>
+            <a:pPr algn="l"/>
+            <a:r>
+              <a:rPr sz="2180" b="1" i="0">
+                <a:solidFill>
+                  <a:srgbClr val="0B5394"/>
+                </a:solidFill>
+                <a:latin typeface="Lexend"/>
+              </a:rPr>
+              <a:t>4.</a:t>
+            </a:r>
+          </a:p>
+        </p:txBody>
+      </p:sp>
+      <p:pic>
+        <p:nvPicPr>
+          <p:cNvPr id="15" name="Picture 14" descr="4e620423e0fdea84.png"/>
+          <p:cNvPicPr>
+            <a:picLocks noChangeAspect="1"/>
+          </p:cNvPicPr>
+          <p:nvPr/>
+        </p:nvPicPr>
+        <p:blipFill>
+          <a:blip r:embed="rId5"/>
+          <a:stretch>
+            <a:fillRect/>
+          </a:stretch>
+        </p:blipFill>
+        <p:spPr>
+          <a:xfrm>
+            <a:off x="1627632" y="3300983"/>
+            <a:ext cx="780288" cy="646176"/>
+          </a:xfrm>
+          <a:prstGeom prst="rect">
+            <a:avLst/>
+          </a:prstGeom>
+        </p:spPr>
+      </p:pic>
+      <p:sp>
+        <p:nvSpPr>
+          <p:cNvPr id="16" name="TextBox 15"/>
+          <p:cNvSpPr txBox="1"/>
+          <p:nvPr/>
+        </p:nvSpPr>
+        <p:spPr>
+          <a:xfrm>
+            <a:off x="960120" y="4107179"/>
+            <a:ext cx="548640" cy="457200"/>
+          </a:xfrm>
+          <a:prstGeom prst="rect">
+            <a:avLst/>
+          </a:prstGeom>
+          <a:noFill/>
+        </p:spPr>
+        <p:txBody>
+          <a:bodyPr wrap="square" lIns="45720" rIns="45720" tIns="18288" bIns="18288" anchor="ctr">
+            <a:spAutoFit/>
+          </a:bodyPr>
+          <a:lstStyle/>
+          <a:p>
+            <a:pPr algn="l"/>
+            <a:r>
+              <a:rPr sz="2180" b="1" i="0">
+                <a:solidFill>
+                  <a:srgbClr val="0B5394"/>
+                </a:solidFill>
+                <a:latin typeface="Lexend"/>
+              </a:rPr>
+              <a:t>5.</a:t>
+            </a:r>
+          </a:p>
+        </p:txBody>
+      </p:sp>
+      <p:pic>
+        <p:nvPicPr>
+          <p:cNvPr id="17" name="Picture 16" descr="749d7946d074ee2f.png"/>
+          <p:cNvPicPr>
+            <a:picLocks noChangeAspect="1"/>
+          </p:cNvPicPr>
+          <p:nvPr/>
+        </p:nvPicPr>
+        <p:blipFill>
+          <a:blip r:embed="rId6"/>
+          <a:stretch>
+            <a:fillRect/>
+          </a:stretch>
+        </p:blipFill>
+        <p:spPr>
+          <a:xfrm>
+            <a:off x="1627632" y="4168139"/>
+            <a:ext cx="1514856" cy="335280"/>
+          </a:xfrm>
+          <a:prstGeom prst="rect">
+            <a:avLst/>
+          </a:prstGeom>
+        </p:spPr>
+      </p:pic>
+      <p:sp>
+        <p:nvSpPr>
+          <p:cNvPr id="18" name="TextBox 17"/>
+          <p:cNvSpPr txBox="1"/>
+          <p:nvPr/>
+        </p:nvSpPr>
+        <p:spPr>
+          <a:xfrm>
+            <a:off x="960120" y="4701539"/>
+            <a:ext cx="548640" cy="457200"/>
+          </a:xfrm>
+          <a:prstGeom prst="rect">
+            <a:avLst/>
+          </a:prstGeom>
+          <a:noFill/>
+        </p:spPr>
+        <p:txBody>
+          <a:bodyPr wrap="square" lIns="45720" rIns="45720" tIns="18288" bIns="18288" anchor="ctr">
+            <a:spAutoFit/>
+          </a:bodyPr>
+          <a:lstStyle/>
+          <a:p>
+            <a:pPr algn="l"/>
+            <a:r>
+              <a:rPr sz="2180" b="1" i="0">
+                <a:solidFill>
+                  <a:srgbClr val="0B5394"/>
+                </a:solidFill>
+                <a:latin typeface="Lexend"/>
+              </a:rPr>
+              <a:t>6.</a:t>
+            </a:r>
+          </a:p>
+        </p:txBody>
+      </p:sp>
+      <p:pic>
+        <p:nvPicPr>
+          <p:cNvPr id="19" name="Picture 18" descr="16b03c438ff63fe5.png"/>
+          <p:cNvPicPr>
+            <a:picLocks noChangeAspect="1"/>
+          </p:cNvPicPr>
+          <p:nvPr/>
+        </p:nvPicPr>
+        <p:blipFill>
+          <a:blip r:embed="rId7"/>
+          <a:stretch>
+            <a:fillRect/>
+          </a:stretch>
+        </p:blipFill>
+        <p:spPr>
+          <a:xfrm>
+            <a:off x="1627632" y="4735067"/>
+            <a:ext cx="2215896" cy="390144"/>
+          </a:xfrm>
+          <a:prstGeom prst="rect">
+            <a:avLst/>
+          </a:prstGeom>
+        </p:spPr>
+      </p:pic>
+    </p:spTree>
+  </p:cSld>
+  <p:clrMapOvr>
+    <a:masterClrMapping/>
+  </p:clrMapOvr>
+</p:sld>
+</file>
+
+<file path=ppt/slides/slide35.xml><?xml version="1.0" encoding="utf-8"?>
+<p:sld xmlns:a="http://schemas.openxmlformats.org/drawingml/2006/main" xmlns:p="http://schemas.openxmlformats.org/presentationml/2006/main" xmlns:r="http://schemas.openxmlformats.org/officeDocument/2006/relationships">
+  <p:cSld>
+    <p:spTree>
+      <p:nvGrpSpPr>
+        <p:cNvPr id="1" name=""/>
+        <p:cNvGrpSpPr/>
+        <p:nvPr/>
+      </p:nvGrpSpPr>
+      <p:grpSpPr/>
+      <p:sp>
+        <p:nvSpPr>
+          <p:cNvPr id="2" name="TextBox 1"/>
+          <p:cNvSpPr txBox="1"/>
+          <p:nvPr/>
+        </p:nvSpPr>
+        <p:spPr>
+          <a:xfrm>
+            <a:off x="777240" y="365760"/>
+            <a:ext cx="10607040" cy="640080"/>
+          </a:xfrm>
+          <a:prstGeom prst="rect">
+            <a:avLst/>
+          </a:prstGeom>
+          <a:noFill/>
+        </p:spPr>
+        <p:txBody>
+          <a:bodyPr wrap="square" lIns="45720" rIns="45720" tIns="18288" bIns="18288" anchor="t">
+            <a:spAutoFit/>
+          </a:bodyPr>
+          <a:lstStyle/>
+          <a:p>
+            <a:pPr algn="l"/>
+            <a:r>
+              <a:rPr sz="3420" b="1" i="0">
+                <a:solidFill>
+                  <a:srgbClr val="1A1A1A"/>
+                </a:solidFill>
+                <a:latin typeface="Lexend"/>
+              </a:rPr>
+              <a:t>IXL</a:t>
+            </a:r>
+          </a:p>
+        </p:txBody>
+      </p:sp>
+      <p:cxnSp>
+        <p:nvCxnSpPr>
+          <p:cNvPr id="3" name="Connector 2"/>
+          <p:cNvCxnSpPr/>
+          <p:nvPr/>
+        </p:nvCxnSpPr>
+        <p:spPr>
+          <a:xfrm>
+            <a:off x="777240" y="1097280"/>
+            <a:ext cx="10607040" cy="0"/>
+          </a:xfrm>
+          <a:prstGeom prst="line">
+            <a:avLst/>
+          </a:prstGeom>
+          <a:ln w="19050">
+            <a:solidFill>
+              <a:srgbClr val="1A1A1A"/>
+            </a:solidFill>
+          </a:ln>
+        </p:spPr>
+        <p:style>
+          <a:lnRef idx="2">
+            <a:schemeClr val="accent1"/>
+          </a:lnRef>
+          <a:fillRef idx="0">
+            <a:schemeClr val="accent1"/>
+          </a:fillRef>
+          <a:effectRef idx="1">
+            <a:schemeClr val="accent1"/>
+          </a:effectRef>
+          <a:fontRef idx="minor">
+            <a:schemeClr val="tx1"/>
+          </a:fontRef>
+        </p:style>
+      </p:cxnSp>
+      <p:cxnSp>
+        <p:nvCxnSpPr>
+          <p:cNvPr id="4" name="Connector 3"/>
+          <p:cNvCxnSpPr/>
+          <p:nvPr/>
+        </p:nvCxnSpPr>
+        <p:spPr>
+          <a:xfrm>
+            <a:off x="777240" y="1179576"/>
+            <a:ext cx="10607040" cy="0"/>
+          </a:xfrm>
+          <a:prstGeom prst="line">
+            <a:avLst/>
+          </a:prstGeom>
+          <a:ln w="9525">
+            <a:solidFill>
+              <a:srgbClr val="1A1A1A"/>
+            </a:solidFill>
+          </a:ln>
+        </p:spPr>
+        <p:style>
+          <a:lnRef idx="2">
+            <a:schemeClr val="accent1"/>
+          </a:lnRef>
+          <a:fillRef idx="0">
+            <a:schemeClr val="accent1"/>
+          </a:fillRef>
+          <a:effectRef idx="1">
+            <a:schemeClr val="accent1"/>
+          </a:effectRef>
+          <a:fontRef idx="minor">
+            <a:schemeClr val="tx1"/>
+          </a:fontRef>
+        </p:style>
+      </p:cxnSp>
+      <p:cxnSp>
+        <p:nvCxnSpPr>
+          <p:cNvPr id="5" name="Connector 4"/>
+          <p:cNvCxnSpPr/>
+          <p:nvPr/>
+        </p:nvCxnSpPr>
+        <p:spPr>
+          <a:xfrm>
+            <a:off x="777240" y="6199632"/>
+            <a:ext cx="10607040" cy="0"/>
+          </a:xfrm>
+          <a:prstGeom prst="line">
+            <a:avLst/>
+          </a:prstGeom>
+          <a:ln w="9525">
+            <a:solidFill>
+              <a:srgbClr val="6B6B6B"/>
+            </a:solidFill>
+          </a:ln>
+        </p:spPr>
+        <p:style>
+          <a:lnRef idx="2">
+            <a:schemeClr val="accent1"/>
+          </a:lnRef>
+          <a:fillRef idx="0">
+            <a:schemeClr val="accent1"/>
+          </a:fillRef>
+          <a:effectRef idx="1">
+            <a:schemeClr val="accent1"/>
+          </a:effectRef>
+          <a:fontRef idx="minor">
+            <a:schemeClr val="tx1"/>
+          </a:fontRef>
+        </p:style>
+      </p:cxnSp>
+      <p:sp>
+        <p:nvSpPr>
+          <p:cNvPr id="6" name="TextBox 5"/>
+          <p:cNvSpPr txBox="1"/>
+          <p:nvPr/>
+        </p:nvSpPr>
+        <p:spPr>
+          <a:xfrm>
+            <a:off x="777240" y="6272784"/>
+            <a:ext cx="9692640" cy="274320"/>
+          </a:xfrm>
+          <a:prstGeom prst="rect">
+            <a:avLst/>
+          </a:prstGeom>
+          <a:noFill/>
+        </p:spPr>
+        <p:txBody>
+          <a:bodyPr wrap="square" lIns="45720" rIns="45720" tIns="18288" bIns="18288" anchor="t">
+            <a:spAutoFit/>
+          </a:bodyPr>
+          <a:lstStyle/>
+          <a:p>
+            <a:pPr algn="l"/>
+            <a:r>
+              <a:rPr sz="1040" b="0" i="0">
+                <a:solidFill>
+                  <a:srgbClr val="6B6B6B"/>
+                </a:solidFill>
+                <a:latin typeface="Lexend"/>
+              </a:rPr>
+              <a:t>Grade 7 Accelerated · Unit 4 · Lesson 6 — Order of Operations with Radicals</a:t>
+            </a:r>
+          </a:p>
+        </p:txBody>
+      </p:sp>
+      <p:sp>
+        <p:nvSpPr>
+          <p:cNvPr id="7" name="TextBox 6"/>
+          <p:cNvSpPr txBox="1"/>
+          <p:nvPr/>
+        </p:nvSpPr>
+        <p:spPr>
+          <a:xfrm>
+            <a:off x="10744200" y="6272784"/>
+            <a:ext cx="640080" cy="274320"/>
+          </a:xfrm>
+          <a:prstGeom prst="rect">
+            <a:avLst/>
+          </a:prstGeom>
+          <a:noFill/>
+        </p:spPr>
+        <p:txBody>
+          <a:bodyPr wrap="square" lIns="45720" rIns="45720" tIns="18288" bIns="18288" anchor="t">
+            <a:spAutoFit/>
+          </a:bodyPr>
+          <a:lstStyle/>
+          <a:p>
+            <a:pPr algn="r"/>
+            <a:r>
+              <a:rPr sz="1040" b="0" i="0">
+                <a:solidFill>
+                  <a:srgbClr val="6B6B6B"/>
+                </a:solidFill>
+                <a:latin typeface="Lexend"/>
+              </a:rPr>
+              <a:t>35</a:t>
             </a:r>
           </a:p>
         </p:txBody>
@@ -14881,7 +15169,7 @@
                 </a:solidFill>
                 <a:latin typeface="Lexend"/>
               </a:rPr>
-              <a:t>Notes</a:t>
+              <a:t>Vocabulary</a:t>
             </a:r>
           </a:p>
         </p:txBody>
@@ -15057,6 +15345,444 @@
                 <a:latin typeface="Lexend"/>
               </a:rPr>
               <a:t>4</a:t>
+            </a:r>
+          </a:p>
+        </p:txBody>
+      </p:sp>
+      <p:sp>
+        <p:nvSpPr>
+          <p:cNvPr id="8" name="TextBox 7"/>
+          <p:cNvSpPr txBox="1"/>
+          <p:nvPr/>
+        </p:nvSpPr>
+        <p:spPr>
+          <a:xfrm>
+            <a:off x="777240" y="1463040"/>
+            <a:ext cx="10607040" cy="429370"/>
+          </a:xfrm>
+          <a:prstGeom prst="rect">
+            <a:avLst/>
+          </a:prstGeom>
+          <a:noFill/>
+        </p:spPr>
+        <p:txBody>
+          <a:bodyPr wrap="square" lIns="45720" rIns="45720" tIns="18288" bIns="18288" anchor="t">
+            <a:spAutoFit/>
+          </a:bodyPr>
+          <a:lstStyle/>
+          <a:p>
+            <a:pPr algn="l"/>
+            <a:r>
+              <a:rPr sz="2280" b="1" i="0">
+                <a:solidFill>
+                  <a:srgbClr val="0B5394"/>
+                </a:solidFill>
+                <a:latin typeface="Lexend"/>
+              </a:rPr>
+              <a:t>grouping symbol</a:t>
+            </a:r>
+          </a:p>
+        </p:txBody>
+      </p:sp>
+      <p:sp>
+        <p:nvSpPr>
+          <p:cNvPr id="9" name="TextBox 8"/>
+          <p:cNvSpPr txBox="1"/>
+          <p:nvPr/>
+        </p:nvSpPr>
+        <p:spPr>
+          <a:xfrm>
+            <a:off x="1143000" y="1892410"/>
+            <a:ext cx="10241280" cy="787179"/>
+          </a:xfrm>
+          <a:prstGeom prst="rect">
+            <a:avLst/>
+          </a:prstGeom>
+          <a:noFill/>
+        </p:spPr>
+        <p:txBody>
+          <a:bodyPr wrap="square" lIns="45720" rIns="45720" tIns="18288" bIns="18288" anchor="t">
+            <a:spAutoFit/>
+          </a:bodyPr>
+          <a:lstStyle/>
+          <a:p>
+            <a:pPr algn="l"/>
+            <a:r>
+              <a:rPr sz="2090" b="0" i="0">
+                <a:solidFill>
+                  <a:srgbClr val="1A1A1A"/>
+                </a:solidFill>
+                <a:latin typeface="Lexend"/>
+              </a:rPr>
+              <a:t>anything that holds part of an expression together and is finished first: parentheses, brackets, the radical bar and the fraction bar</a:t>
+            </a:r>
+          </a:p>
+        </p:txBody>
+      </p:sp>
+      <p:sp>
+        <p:nvSpPr>
+          <p:cNvPr id="10" name="TextBox 9"/>
+          <p:cNvSpPr txBox="1"/>
+          <p:nvPr/>
+        </p:nvSpPr>
+        <p:spPr>
+          <a:xfrm>
+            <a:off x="777240" y="2917333"/>
+            <a:ext cx="10607040" cy="429370"/>
+          </a:xfrm>
+          <a:prstGeom prst="rect">
+            <a:avLst/>
+          </a:prstGeom>
+          <a:noFill/>
+        </p:spPr>
+        <p:txBody>
+          <a:bodyPr wrap="square" lIns="45720" rIns="45720" tIns="18288" bIns="18288" anchor="t">
+            <a:spAutoFit/>
+          </a:bodyPr>
+          <a:lstStyle/>
+          <a:p>
+            <a:pPr algn="l"/>
+            <a:r>
+              <a:rPr sz="2280" b="1" i="0">
+                <a:solidFill>
+                  <a:srgbClr val="0B5394"/>
+                </a:solidFill>
+                <a:latin typeface="Lexend"/>
+              </a:rPr>
+              <a:t>nested</a:t>
+            </a:r>
+          </a:p>
+        </p:txBody>
+      </p:sp>
+      <p:sp>
+        <p:nvSpPr>
+          <p:cNvPr id="11" name="TextBox 10"/>
+          <p:cNvSpPr txBox="1"/>
+          <p:nvPr/>
+        </p:nvSpPr>
+        <p:spPr>
+          <a:xfrm>
+            <a:off x="1143000" y="3346704"/>
+            <a:ext cx="10241280" cy="393589"/>
+          </a:xfrm>
+          <a:prstGeom prst="rect">
+            <a:avLst/>
+          </a:prstGeom>
+          <a:noFill/>
+        </p:spPr>
+        <p:txBody>
+          <a:bodyPr wrap="square" lIns="45720" rIns="45720" tIns="18288" bIns="18288" anchor="t">
+            <a:spAutoFit/>
+          </a:bodyPr>
+          <a:lstStyle/>
+          <a:p>
+            <a:pPr algn="l"/>
+            <a:r>
+              <a:rPr sz="2090" b="0" i="0">
+                <a:solidFill>
+                  <a:srgbClr val="1A1A1A"/>
+                </a:solidFill>
+                <a:latin typeface="Lexend"/>
+              </a:rPr>
+              <a:t>one grouping symbol inside another. The innermost one is finished first</a:t>
+            </a:r>
+          </a:p>
+        </p:txBody>
+      </p:sp>
+      <p:sp>
+        <p:nvSpPr>
+          <p:cNvPr id="12" name="TextBox 11"/>
+          <p:cNvSpPr txBox="1"/>
+          <p:nvPr/>
+        </p:nvSpPr>
+        <p:spPr>
+          <a:xfrm>
+            <a:off x="777240" y="3978037"/>
+            <a:ext cx="10607040" cy="429370"/>
+          </a:xfrm>
+          <a:prstGeom prst="rect">
+            <a:avLst/>
+          </a:prstGeom>
+          <a:noFill/>
+        </p:spPr>
+        <p:txBody>
+          <a:bodyPr wrap="square" lIns="45720" rIns="45720" tIns="18288" bIns="18288" anchor="t">
+            <a:spAutoFit/>
+          </a:bodyPr>
+          <a:lstStyle/>
+          <a:p>
+            <a:pPr algn="l"/>
+            <a:r>
+              <a:rPr sz="2280" b="1" i="0">
+                <a:solidFill>
+                  <a:srgbClr val="0B5394"/>
+                </a:solidFill>
+                <a:latin typeface="Lexend"/>
+              </a:rPr>
+              <a:t>multi-step expression</a:t>
+            </a:r>
+          </a:p>
+        </p:txBody>
+      </p:sp>
+      <p:sp>
+        <p:nvSpPr>
+          <p:cNvPr id="13" name="TextBox 12"/>
+          <p:cNvSpPr txBox="1"/>
+          <p:nvPr/>
+        </p:nvSpPr>
+        <p:spPr>
+          <a:xfrm>
+            <a:off x="1143000" y="4407407"/>
+            <a:ext cx="10241280" cy="787179"/>
+          </a:xfrm>
+          <a:prstGeom prst="rect">
+            <a:avLst/>
+          </a:prstGeom>
+          <a:noFill/>
+        </p:spPr>
+        <p:txBody>
+          <a:bodyPr wrap="square" lIns="45720" rIns="45720" tIns="18288" bIns="18288" anchor="t">
+            <a:spAutoFit/>
+          </a:bodyPr>
+          <a:lstStyle/>
+          <a:p>
+            <a:pPr algn="l"/>
+            <a:r>
+              <a:rPr sz="2090" b="0" i="0">
+                <a:solidFill>
+                  <a:srgbClr val="1A1A1A"/>
+                </a:solidFill>
+                <a:latin typeface="Lexend"/>
+              </a:rPr>
+              <a:t>one that takes more than one operation to evaluate. Everything in this unit takes six steps or fewer</a:t>
+            </a:r>
+          </a:p>
+        </p:txBody>
+      </p:sp>
+    </p:spTree>
+  </p:cSld>
+  <p:clrMapOvr>
+    <a:masterClrMapping/>
+  </p:clrMapOvr>
+</p:sld>
+</file>
+
+<file path=ppt/slides/slide5.xml><?xml version="1.0" encoding="utf-8"?>
+<p:sld xmlns:a="http://schemas.openxmlformats.org/drawingml/2006/main" xmlns:p="http://schemas.openxmlformats.org/presentationml/2006/main" xmlns:r="http://schemas.openxmlformats.org/officeDocument/2006/relationships">
+  <p:cSld>
+    <p:spTree>
+      <p:nvGrpSpPr>
+        <p:cNvPr id="1" name=""/>
+        <p:cNvGrpSpPr/>
+        <p:nvPr/>
+      </p:nvGrpSpPr>
+      <p:grpSpPr/>
+      <p:sp>
+        <p:nvSpPr>
+          <p:cNvPr id="2" name="TextBox 1"/>
+          <p:cNvSpPr txBox="1"/>
+          <p:nvPr/>
+        </p:nvSpPr>
+        <p:spPr>
+          <a:xfrm>
+            <a:off x="777240" y="365760"/>
+            <a:ext cx="10607040" cy="640080"/>
+          </a:xfrm>
+          <a:prstGeom prst="rect">
+            <a:avLst/>
+          </a:prstGeom>
+          <a:noFill/>
+        </p:spPr>
+        <p:txBody>
+          <a:bodyPr wrap="square" lIns="45720" rIns="45720" tIns="18288" bIns="18288" anchor="t">
+            <a:spAutoFit/>
+          </a:bodyPr>
+          <a:lstStyle/>
+          <a:p>
+            <a:pPr algn="l"/>
+            <a:r>
+              <a:rPr sz="3420" b="1" i="0">
+                <a:solidFill>
+                  <a:srgbClr val="1A1A1A"/>
+                </a:solidFill>
+                <a:latin typeface="Lexend"/>
+              </a:rPr>
+              <a:t>Notes</a:t>
+            </a:r>
+          </a:p>
+        </p:txBody>
+      </p:sp>
+      <p:cxnSp>
+        <p:nvCxnSpPr>
+          <p:cNvPr id="3" name="Connector 2"/>
+          <p:cNvCxnSpPr/>
+          <p:nvPr/>
+        </p:nvCxnSpPr>
+        <p:spPr>
+          <a:xfrm>
+            <a:off x="777240" y="1097280"/>
+            <a:ext cx="10607040" cy="0"/>
+          </a:xfrm>
+          <a:prstGeom prst="line">
+            <a:avLst/>
+          </a:prstGeom>
+          <a:ln w="19050">
+            <a:solidFill>
+              <a:srgbClr val="1A1A1A"/>
+            </a:solidFill>
+          </a:ln>
+        </p:spPr>
+        <p:style>
+          <a:lnRef idx="2">
+            <a:schemeClr val="accent1"/>
+          </a:lnRef>
+          <a:fillRef idx="0">
+            <a:schemeClr val="accent1"/>
+          </a:fillRef>
+          <a:effectRef idx="1">
+            <a:schemeClr val="accent1"/>
+          </a:effectRef>
+          <a:fontRef idx="minor">
+            <a:schemeClr val="tx1"/>
+          </a:fontRef>
+        </p:style>
+      </p:cxnSp>
+      <p:cxnSp>
+        <p:nvCxnSpPr>
+          <p:cNvPr id="4" name="Connector 3"/>
+          <p:cNvCxnSpPr/>
+          <p:nvPr/>
+        </p:nvCxnSpPr>
+        <p:spPr>
+          <a:xfrm>
+            <a:off x="777240" y="1179576"/>
+            <a:ext cx="10607040" cy="0"/>
+          </a:xfrm>
+          <a:prstGeom prst="line">
+            <a:avLst/>
+          </a:prstGeom>
+          <a:ln w="9525">
+            <a:solidFill>
+              <a:srgbClr val="1A1A1A"/>
+            </a:solidFill>
+          </a:ln>
+        </p:spPr>
+        <p:style>
+          <a:lnRef idx="2">
+            <a:schemeClr val="accent1"/>
+          </a:lnRef>
+          <a:fillRef idx="0">
+            <a:schemeClr val="accent1"/>
+          </a:fillRef>
+          <a:effectRef idx="1">
+            <a:schemeClr val="accent1"/>
+          </a:effectRef>
+          <a:fontRef idx="minor">
+            <a:schemeClr val="tx1"/>
+          </a:fontRef>
+        </p:style>
+      </p:cxnSp>
+      <p:cxnSp>
+        <p:nvCxnSpPr>
+          <p:cNvPr id="5" name="Connector 4"/>
+          <p:cNvCxnSpPr/>
+          <p:nvPr/>
+        </p:nvCxnSpPr>
+        <p:spPr>
+          <a:xfrm>
+            <a:off x="777240" y="6199632"/>
+            <a:ext cx="10607040" cy="0"/>
+          </a:xfrm>
+          <a:prstGeom prst="line">
+            <a:avLst/>
+          </a:prstGeom>
+          <a:ln w="9525">
+            <a:solidFill>
+              <a:srgbClr val="6B6B6B"/>
+            </a:solidFill>
+          </a:ln>
+        </p:spPr>
+        <p:style>
+          <a:lnRef idx="2">
+            <a:schemeClr val="accent1"/>
+          </a:lnRef>
+          <a:fillRef idx="0">
+            <a:schemeClr val="accent1"/>
+          </a:fillRef>
+          <a:effectRef idx="1">
+            <a:schemeClr val="accent1"/>
+          </a:effectRef>
+          <a:fontRef idx="minor">
+            <a:schemeClr val="tx1"/>
+          </a:fontRef>
+        </p:style>
+      </p:cxnSp>
+      <p:sp>
+        <p:nvSpPr>
+          <p:cNvPr id="6" name="TextBox 5"/>
+          <p:cNvSpPr txBox="1"/>
+          <p:nvPr/>
+        </p:nvSpPr>
+        <p:spPr>
+          <a:xfrm>
+            <a:off x="777240" y="6272784"/>
+            <a:ext cx="9692640" cy="274320"/>
+          </a:xfrm>
+          <a:prstGeom prst="rect">
+            <a:avLst/>
+          </a:prstGeom>
+          <a:noFill/>
+        </p:spPr>
+        <p:txBody>
+          <a:bodyPr wrap="square" lIns="45720" rIns="45720" tIns="18288" bIns="18288" anchor="t">
+            <a:spAutoFit/>
+          </a:bodyPr>
+          <a:lstStyle/>
+          <a:p>
+            <a:pPr algn="l"/>
+            <a:r>
+              <a:rPr sz="1040" b="0" i="0">
+                <a:solidFill>
+                  <a:srgbClr val="6B6B6B"/>
+                </a:solidFill>
+                <a:latin typeface="Lexend"/>
+              </a:rPr>
+              <a:t>Grade 7 Accelerated · Unit 4 · Lesson 6 — Order of Operations with Radicals</a:t>
+            </a:r>
+          </a:p>
+        </p:txBody>
+      </p:sp>
+      <p:sp>
+        <p:nvSpPr>
+          <p:cNvPr id="7" name="TextBox 6"/>
+          <p:cNvSpPr txBox="1"/>
+          <p:nvPr/>
+        </p:nvSpPr>
+        <p:spPr>
+          <a:xfrm>
+            <a:off x="10744200" y="6272784"/>
+            <a:ext cx="640080" cy="274320"/>
+          </a:xfrm>
+          <a:prstGeom prst="rect">
+            <a:avLst/>
+          </a:prstGeom>
+          <a:noFill/>
+        </p:spPr>
+        <p:txBody>
+          <a:bodyPr wrap="square" lIns="45720" rIns="45720" tIns="18288" bIns="18288" anchor="t">
+            <a:spAutoFit/>
+          </a:bodyPr>
+          <a:lstStyle/>
+          <a:p>
+            <a:pPr algn="r"/>
+            <a:r>
+              <a:rPr sz="1040" b="0" i="0">
+                <a:solidFill>
+                  <a:srgbClr val="6B6B6B"/>
+                </a:solidFill>
+                <a:latin typeface="Lexend"/>
+              </a:rPr>
+              <a:t>5</a:t>
             </a:r>
           </a:p>
         </p:txBody>
@@ -15907,7 +16633,7 @@
 </p:sld>
 </file>
 
-<file path=ppt/slides/slide5.xml><?xml version="1.0" encoding="utf-8"?>
+<file path=ppt/slides/slide6.xml><?xml version="1.0" encoding="utf-8"?>
 <p:sld xmlns:a="http://schemas.openxmlformats.org/drawingml/2006/main" xmlns:p="http://schemas.openxmlformats.org/presentationml/2006/main" xmlns:r="http://schemas.openxmlformats.org/officeDocument/2006/relationships">
   <p:cSld>
     <p:spTree>
@@ -16122,7 +16848,7 @@
                 </a:solidFill>
                 <a:latin typeface="Lexend"/>
               </a:rPr>
-              <a:t>5</a:t>
+              <a:t>6</a:t>
             </a:r>
           </a:p>
         </p:txBody>
@@ -16394,387 +17120,6 @@
                 <a:latin typeface="Lexend"/>
               </a:rPr>
               <a:t>Multiplication and division are one level. Addition and subtraction are one level. Left to right, both times.</a:t>
-            </a:r>
-          </a:p>
-        </p:txBody>
-      </p:sp>
-    </p:spTree>
-  </p:cSld>
-  <p:clrMapOvr>
-    <a:masterClrMapping/>
-  </p:clrMapOvr>
-</p:sld>
-</file>
-
-<file path=ppt/slides/slide6.xml><?xml version="1.0" encoding="utf-8"?>
-<p:sld xmlns:a="http://schemas.openxmlformats.org/drawingml/2006/main" xmlns:p="http://schemas.openxmlformats.org/presentationml/2006/main" xmlns:r="http://schemas.openxmlformats.org/officeDocument/2006/relationships">
-  <p:cSld>
-    <p:spTree>
-      <p:nvGrpSpPr>
-        <p:cNvPr id="1" name=""/>
-        <p:cNvGrpSpPr/>
-        <p:nvPr/>
-      </p:nvGrpSpPr>
-      <p:grpSpPr/>
-      <p:sp>
-        <p:nvSpPr>
-          <p:cNvPr id="2" name="TextBox 1"/>
-          <p:cNvSpPr txBox="1"/>
-          <p:nvPr/>
-        </p:nvSpPr>
-        <p:spPr>
-          <a:xfrm>
-            <a:off x="777240" y="365760"/>
-            <a:ext cx="10607040" cy="640080"/>
-          </a:xfrm>
-          <a:prstGeom prst="rect">
-            <a:avLst/>
-          </a:prstGeom>
-          <a:noFill/>
-        </p:spPr>
-        <p:txBody>
-          <a:bodyPr wrap="square" lIns="45720" rIns="45720" tIns="18288" bIns="18288" anchor="t">
-            <a:spAutoFit/>
-          </a:bodyPr>
-          <a:lstStyle/>
-          <a:p>
-            <a:pPr algn="l"/>
-            <a:r>
-              <a:rPr sz="3420" b="1" i="0">
-                <a:solidFill>
-                  <a:srgbClr val="1A1A1A"/>
-                </a:solidFill>
-                <a:latin typeface="Lexend"/>
-              </a:rPr>
-              <a:t>Notes</a:t>
-            </a:r>
-          </a:p>
-        </p:txBody>
-      </p:sp>
-      <p:cxnSp>
-        <p:nvCxnSpPr>
-          <p:cNvPr id="3" name="Connector 2"/>
-          <p:cNvCxnSpPr/>
-          <p:nvPr/>
-        </p:nvCxnSpPr>
-        <p:spPr>
-          <a:xfrm>
-            <a:off x="777240" y="1097280"/>
-            <a:ext cx="10607040" cy="0"/>
-          </a:xfrm>
-          <a:prstGeom prst="line">
-            <a:avLst/>
-          </a:prstGeom>
-          <a:ln w="19050">
-            <a:solidFill>
-              <a:srgbClr val="1A1A1A"/>
-            </a:solidFill>
-          </a:ln>
-        </p:spPr>
-        <p:style>
-          <a:lnRef idx="2">
-            <a:schemeClr val="accent1"/>
-          </a:lnRef>
-          <a:fillRef idx="0">
-            <a:schemeClr val="accent1"/>
-          </a:fillRef>
-          <a:effectRef idx="1">
-            <a:schemeClr val="accent1"/>
-          </a:effectRef>
-          <a:fontRef idx="minor">
-            <a:schemeClr val="tx1"/>
-          </a:fontRef>
-        </p:style>
-      </p:cxnSp>
-      <p:cxnSp>
-        <p:nvCxnSpPr>
-          <p:cNvPr id="4" name="Connector 3"/>
-          <p:cNvCxnSpPr/>
-          <p:nvPr/>
-        </p:nvCxnSpPr>
-        <p:spPr>
-          <a:xfrm>
-            <a:off x="777240" y="1179576"/>
-            <a:ext cx="10607040" cy="0"/>
-          </a:xfrm>
-          <a:prstGeom prst="line">
-            <a:avLst/>
-          </a:prstGeom>
-          <a:ln w="9525">
-            <a:solidFill>
-              <a:srgbClr val="1A1A1A"/>
-            </a:solidFill>
-          </a:ln>
-        </p:spPr>
-        <p:style>
-          <a:lnRef idx="2">
-            <a:schemeClr val="accent1"/>
-          </a:lnRef>
-          <a:fillRef idx="0">
-            <a:schemeClr val="accent1"/>
-          </a:fillRef>
-          <a:effectRef idx="1">
-            <a:schemeClr val="accent1"/>
-          </a:effectRef>
-          <a:fontRef idx="minor">
-            <a:schemeClr val="tx1"/>
-          </a:fontRef>
-        </p:style>
-      </p:cxnSp>
-      <p:cxnSp>
-        <p:nvCxnSpPr>
-          <p:cNvPr id="5" name="Connector 4"/>
-          <p:cNvCxnSpPr/>
-          <p:nvPr/>
-        </p:nvCxnSpPr>
-        <p:spPr>
-          <a:xfrm>
-            <a:off x="777240" y="6199632"/>
-            <a:ext cx="10607040" cy="0"/>
-          </a:xfrm>
-          <a:prstGeom prst="line">
-            <a:avLst/>
-          </a:prstGeom>
-          <a:ln w="9525">
-            <a:solidFill>
-              <a:srgbClr val="6B6B6B"/>
-            </a:solidFill>
-          </a:ln>
-        </p:spPr>
-        <p:style>
-          <a:lnRef idx="2">
-            <a:schemeClr val="accent1"/>
-          </a:lnRef>
-          <a:fillRef idx="0">
-            <a:schemeClr val="accent1"/>
-          </a:fillRef>
-          <a:effectRef idx="1">
-            <a:schemeClr val="accent1"/>
-          </a:effectRef>
-          <a:fontRef idx="minor">
-            <a:schemeClr val="tx1"/>
-          </a:fontRef>
-        </p:style>
-      </p:cxnSp>
-      <p:sp>
-        <p:nvSpPr>
-          <p:cNvPr id="6" name="TextBox 5"/>
-          <p:cNvSpPr txBox="1"/>
-          <p:nvPr/>
-        </p:nvSpPr>
-        <p:spPr>
-          <a:xfrm>
-            <a:off x="777240" y="6272784"/>
-            <a:ext cx="9692640" cy="274320"/>
-          </a:xfrm>
-          <a:prstGeom prst="rect">
-            <a:avLst/>
-          </a:prstGeom>
-          <a:noFill/>
-        </p:spPr>
-        <p:txBody>
-          <a:bodyPr wrap="square" lIns="45720" rIns="45720" tIns="18288" bIns="18288" anchor="t">
-            <a:spAutoFit/>
-          </a:bodyPr>
-          <a:lstStyle/>
-          <a:p>
-            <a:pPr algn="l"/>
-            <a:r>
-              <a:rPr sz="1040" b="0" i="0">
-                <a:solidFill>
-                  <a:srgbClr val="6B6B6B"/>
-                </a:solidFill>
-                <a:latin typeface="Lexend"/>
-              </a:rPr>
-              <a:t>Grade 7 Accelerated · Unit 4 · Lesson 6 — Order of Operations with Radicals</a:t>
-            </a:r>
-          </a:p>
-        </p:txBody>
-      </p:sp>
-      <p:sp>
-        <p:nvSpPr>
-          <p:cNvPr id="7" name="TextBox 6"/>
-          <p:cNvSpPr txBox="1"/>
-          <p:nvPr/>
-        </p:nvSpPr>
-        <p:spPr>
-          <a:xfrm>
-            <a:off x="10744200" y="6272784"/>
-            <a:ext cx="640080" cy="274320"/>
-          </a:xfrm>
-          <a:prstGeom prst="rect">
-            <a:avLst/>
-          </a:prstGeom>
-          <a:noFill/>
-        </p:spPr>
-        <p:txBody>
-          <a:bodyPr wrap="square" lIns="45720" rIns="45720" tIns="18288" bIns="18288" anchor="t">
-            <a:spAutoFit/>
-          </a:bodyPr>
-          <a:lstStyle/>
-          <a:p>
-            <a:pPr algn="r"/>
-            <a:r>
-              <a:rPr sz="1040" b="0" i="0">
-                <a:solidFill>
-                  <a:srgbClr val="6B6B6B"/>
-                </a:solidFill>
-                <a:latin typeface="Lexend"/>
-              </a:rPr>
-              <a:t>6</a:t>
-            </a:r>
-          </a:p>
-        </p:txBody>
-      </p:sp>
-      <p:sp>
-        <p:nvSpPr>
-          <p:cNvPr id="8" name="TextBox 7"/>
-          <p:cNvSpPr txBox="1"/>
-          <p:nvPr/>
-        </p:nvSpPr>
-        <p:spPr>
-          <a:xfrm>
-            <a:off x="777240" y="1389888"/>
-            <a:ext cx="10607040" cy="402336"/>
-          </a:xfrm>
-          <a:prstGeom prst="rect">
-            <a:avLst/>
-          </a:prstGeom>
-          <a:noFill/>
-        </p:spPr>
-        <p:txBody>
-          <a:bodyPr wrap="square" lIns="45720" rIns="45720" tIns="18288" bIns="18288" anchor="t">
-            <a:spAutoFit/>
-          </a:bodyPr>
-          <a:lstStyle/>
-          <a:p>
-            <a:pPr algn="l"/>
-            <a:r>
-              <a:rPr sz="2380" b="1" i="0">
-                <a:solidFill>
-                  <a:srgbClr val="1A1A1A"/>
-                </a:solidFill>
-                <a:latin typeface="Lexend"/>
-              </a:rPr>
-              <a:t>III.  The fraction bar groups, top and bottom</a:t>
-            </a:r>
-          </a:p>
-        </p:txBody>
-      </p:sp>
-      <p:cxnSp>
-        <p:nvCxnSpPr>
-          <p:cNvPr id="9" name="Connector 8"/>
-          <p:cNvCxnSpPr/>
-          <p:nvPr/>
-        </p:nvCxnSpPr>
-        <p:spPr>
-          <a:xfrm>
-            <a:off x="777240" y="1828800"/>
-            <a:ext cx="10607040" cy="0"/>
-          </a:xfrm>
-          <a:prstGeom prst="line">
-            <a:avLst/>
-          </a:prstGeom>
-          <a:ln w="9525">
-            <a:solidFill>
-              <a:srgbClr val="1A1A1A"/>
-            </a:solidFill>
-          </a:ln>
-        </p:spPr>
-        <p:style>
-          <a:lnRef idx="2">
-            <a:schemeClr val="accent1"/>
-          </a:lnRef>
-          <a:fillRef idx="0">
-            <a:schemeClr val="accent1"/>
-          </a:fillRef>
-          <a:effectRef idx="1">
-            <a:schemeClr val="accent1"/>
-          </a:effectRef>
-          <a:fontRef idx="minor">
-            <a:schemeClr val="tx1"/>
-          </a:fontRef>
-        </p:style>
-      </p:cxnSp>
-      <p:pic>
-        <p:nvPicPr>
-          <p:cNvPr id="10" name="Picture 9" descr="b676b63d56095f05.png"/>
-          <p:cNvPicPr>
-            <a:picLocks noChangeAspect="1"/>
-          </p:cNvPicPr>
-          <p:nvPr/>
-        </p:nvPicPr>
-        <p:blipFill>
-          <a:blip r:embed="rId2"/>
-          <a:stretch>
-            <a:fillRect/>
-          </a:stretch>
-        </p:blipFill>
-        <p:spPr>
-          <a:xfrm>
-            <a:off x="4881372" y="1993392"/>
-            <a:ext cx="2398776" cy="792480"/>
-          </a:xfrm>
-          <a:prstGeom prst="rect">
-            <a:avLst/>
-          </a:prstGeom>
-        </p:spPr>
-      </p:pic>
-      <p:pic>
-        <p:nvPicPr>
-          <p:cNvPr id="11" name="Picture 10" descr="fb1e10d5d1f5e973.png"/>
-          <p:cNvPicPr>
-            <a:picLocks noChangeAspect="1"/>
-          </p:cNvPicPr>
-          <p:nvPr/>
-        </p:nvPicPr>
-        <p:blipFill>
-          <a:blip r:embed="rId3"/>
-          <a:stretch>
-            <a:fillRect/>
-          </a:stretch>
-        </p:blipFill>
-        <p:spPr>
-          <a:xfrm>
-            <a:off x="3587496" y="3060192"/>
-            <a:ext cx="4986528" cy="847344"/>
-          </a:xfrm>
-          <a:prstGeom prst="rect">
-            <a:avLst/>
-          </a:prstGeom>
-        </p:spPr>
-      </p:pic>
-      <p:sp>
-        <p:nvSpPr>
-          <p:cNvPr id="12" name="TextBox 11"/>
-          <p:cNvSpPr txBox="1"/>
-          <p:nvPr/>
-        </p:nvSpPr>
-        <p:spPr>
-          <a:xfrm>
-            <a:off x="987552" y="4245864"/>
-            <a:ext cx="10131551" cy="475488"/>
-          </a:xfrm>
-          <a:prstGeom prst="rect">
-            <a:avLst/>
-          </a:prstGeom>
-          <a:noFill/>
-        </p:spPr>
-        <p:txBody>
-          <a:bodyPr wrap="square" lIns="45720" rIns="45720" tIns="18288" bIns="18288" anchor="t">
-            <a:spAutoFit/>
-          </a:bodyPr>
-          <a:lstStyle/>
-          <a:p>
-            <a:pPr algn="l"/>
-            <a:r>
-              <a:rPr sz="2180" b="1" i="0">
-                <a:solidFill>
-                  <a:srgbClr val="1A1A1A"/>
-                </a:solidFill>
-                <a:latin typeface="Lexend"/>
-              </a:rPr>
-              <a:t>Finish the numerator and finish the denominator before you divide.</a:t>
             </a:r>
           </a:p>
         </p:txBody>
@@ -16827,7 +17172,7 @@
                 </a:solidFill>
                 <a:latin typeface="Lexend"/>
               </a:rPr>
-              <a:t>Example 1</a:t>
+              <a:t>Notes</a:t>
             </a:r>
           </a:p>
         </p:txBody>
@@ -17007,9 +17352,79 @@
           </a:p>
         </p:txBody>
       </p:sp>
+      <p:sp>
+        <p:nvSpPr>
+          <p:cNvPr id="8" name="TextBox 7"/>
+          <p:cNvSpPr txBox="1"/>
+          <p:nvPr/>
+        </p:nvSpPr>
+        <p:spPr>
+          <a:xfrm>
+            <a:off x="777240" y="1389888"/>
+            <a:ext cx="10607040" cy="402336"/>
+          </a:xfrm>
+          <a:prstGeom prst="rect">
+            <a:avLst/>
+          </a:prstGeom>
+          <a:noFill/>
+        </p:spPr>
+        <p:txBody>
+          <a:bodyPr wrap="square" lIns="45720" rIns="45720" tIns="18288" bIns="18288" anchor="t">
+            <a:spAutoFit/>
+          </a:bodyPr>
+          <a:lstStyle/>
+          <a:p>
+            <a:pPr algn="l"/>
+            <a:r>
+              <a:rPr sz="2380" b="1" i="0">
+                <a:solidFill>
+                  <a:srgbClr val="1A1A1A"/>
+                </a:solidFill>
+                <a:latin typeface="Lexend"/>
+              </a:rPr>
+              <a:t>III.  The fraction bar groups, top and bottom</a:t>
+            </a:r>
+          </a:p>
+        </p:txBody>
+      </p:sp>
+      <p:cxnSp>
+        <p:nvCxnSpPr>
+          <p:cNvPr id="9" name="Connector 8"/>
+          <p:cNvCxnSpPr/>
+          <p:nvPr/>
+        </p:nvCxnSpPr>
+        <p:spPr>
+          <a:xfrm>
+            <a:off x="777240" y="1828800"/>
+            <a:ext cx="10607040" cy="0"/>
+          </a:xfrm>
+          <a:prstGeom prst="line">
+            <a:avLst/>
+          </a:prstGeom>
+          <a:ln w="9525">
+            <a:solidFill>
+              <a:srgbClr val="1A1A1A"/>
+            </a:solidFill>
+          </a:ln>
+        </p:spPr>
+        <p:style>
+          <a:lnRef idx="2">
+            <a:schemeClr val="accent1"/>
+          </a:lnRef>
+          <a:fillRef idx="0">
+            <a:schemeClr val="accent1"/>
+          </a:fillRef>
+          <a:effectRef idx="1">
+            <a:schemeClr val="accent1"/>
+          </a:effectRef>
+          <a:fontRef idx="minor">
+            <a:schemeClr val="tx1"/>
+          </a:fontRef>
+        </p:style>
+      </p:cxnSp>
       <p:pic>
         <p:nvPicPr>
-          <p:cNvPr id="8" name="Picture 7" descr="6b6fcd5e7b2e7212.png"/>
+          <p:cNvPr id="10" name="Picture 9" descr="b676b63d56095f05.png"/>
           <p:cNvPicPr>
             <a:picLocks noChangeAspect="1"/>
           </p:cNvPicPr>
@@ -17023,24 +17438,48 @@
         </p:blipFill>
         <p:spPr>
           <a:xfrm>
-            <a:off x="4102607" y="2103120"/>
-            <a:ext cx="3956304" cy="478536"/>
+            <a:off x="4881372" y="1993392"/>
+            <a:ext cx="2398776" cy="792480"/>
           </a:xfrm>
           <a:prstGeom prst="rect">
             <a:avLst/>
           </a:prstGeom>
         </p:spPr>
       </p:pic>
-      <p:sp>
-        <p:nvSpPr>
-          <p:cNvPr id="9" name="TextBox 8"/>
-          <p:cNvSpPr txBox="1"/>
-          <p:nvPr/>
-        </p:nvSpPr>
-        <p:spPr>
-          <a:xfrm>
-            <a:off x="777240" y="3084576"/>
-            <a:ext cx="10607040" cy="429370"/>
+      <p:pic>
+        <p:nvPicPr>
+          <p:cNvPr id="11" name="Picture 10" descr="fb1e10d5d1f5e973.png"/>
+          <p:cNvPicPr>
+            <a:picLocks noChangeAspect="1"/>
+          </p:cNvPicPr>
+          <p:nvPr/>
+        </p:nvPicPr>
+        <p:blipFill>
+          <a:blip r:embed="rId3"/>
+          <a:stretch>
+            <a:fillRect/>
+          </a:stretch>
+        </p:blipFill>
+        <p:spPr>
+          <a:xfrm>
+            <a:off x="3587496" y="3060192"/>
+            <a:ext cx="4986528" cy="847344"/>
+          </a:xfrm>
+          <a:prstGeom prst="rect">
+            <a:avLst/>
+          </a:prstGeom>
+        </p:spPr>
+      </p:pic>
+      <p:sp>
+        <p:nvSpPr>
+          <p:cNvPr id="12" name="TextBox 11"/>
+          <p:cNvSpPr txBox="1"/>
+          <p:nvPr/>
+        </p:nvSpPr>
+        <p:spPr>
+          <a:xfrm>
+            <a:off x="987552" y="4245864"/>
+            <a:ext cx="10131551" cy="475488"/>
           </a:xfrm>
           <a:prstGeom prst="rect">
             <a:avLst/>
@@ -17053,15 +17492,15 @@
           </a:bodyPr>
           <a:lstStyle/>
           <a:p>
-            <a:pPr algn="ctr"/>
-            <a:r>
-              <a:rPr sz="2280" b="1" i="0">
+            <a:pPr algn="l"/>
+            <a:r>
+              <a:rPr sz="2180" b="1" i="0">
                 <a:solidFill>
                   <a:srgbClr val="1A1A1A"/>
                 </a:solidFill>
                 <a:latin typeface="Lexend"/>
               </a:rPr>
-              <a:t>Evaluate.</a:t>
+              <a:t>Finish the numerator and finish the denominator before you divide.</a:t>
             </a:r>
           </a:p>
         </p:txBody>
@@ -17296,7 +17735,7 @@
       </p:sp>
       <p:pic>
         <p:nvPicPr>
-          <p:cNvPr id="8" name="Picture 7" descr="04e54fe9a1540954.png"/>
+          <p:cNvPr id="8" name="Picture 7" descr="6b6fcd5e7b2e7212.png"/>
           <p:cNvPicPr>
             <a:picLocks noChangeAspect="1"/>
           </p:cNvPicPr>
@@ -17310,72 +17749,24 @@
         </p:blipFill>
         <p:spPr>
           <a:xfrm>
-            <a:off x="1828800" y="1920240"/>
-            <a:ext cx="2249424" cy="411480"/>
+            <a:off x="4102607" y="2103120"/>
+            <a:ext cx="3956304" cy="478536"/>
           </a:xfrm>
           <a:prstGeom prst="rect">
             <a:avLst/>
           </a:prstGeom>
         </p:spPr>
       </p:pic>
-      <p:pic>
-        <p:nvPicPr>
-          <p:cNvPr id="9" name="Picture 8" descr="21bef9986283dc49.png"/>
-          <p:cNvPicPr>
-            <a:picLocks noChangeAspect="1"/>
-          </p:cNvPicPr>
-          <p:nvPr/>
-        </p:nvPicPr>
-        <p:blipFill>
-          <a:blip r:embed="rId3"/>
-          <a:stretch>
-            <a:fillRect/>
-          </a:stretch>
-        </p:blipFill>
-        <p:spPr>
-          <a:xfrm>
-            <a:off x="1828800" y="2606040"/>
-            <a:ext cx="6989064" cy="353568"/>
-          </a:xfrm>
-          <a:prstGeom prst="rect">
-            <a:avLst/>
-          </a:prstGeom>
-        </p:spPr>
-      </p:pic>
-      <p:pic>
-        <p:nvPicPr>
-          <p:cNvPr id="10" name="Picture 9" descr="09e7e44a6e73f257.png"/>
-          <p:cNvPicPr>
-            <a:picLocks noChangeAspect="1"/>
-          </p:cNvPicPr>
-          <p:nvPr/>
-        </p:nvPicPr>
-        <p:blipFill>
-          <a:blip r:embed="rId4"/>
-          <a:stretch>
-            <a:fillRect/>
-          </a:stretch>
-        </p:blipFill>
-        <p:spPr>
-          <a:xfrm>
-            <a:off x="1828800" y="3233928"/>
-            <a:ext cx="2910840" cy="280416"/>
-          </a:xfrm>
-          <a:prstGeom prst="rect">
-            <a:avLst/>
-          </a:prstGeom>
-        </p:spPr>
-      </p:pic>
-      <p:sp>
-        <p:nvSpPr>
-          <p:cNvPr id="11" name="TextBox 10"/>
-          <p:cNvSpPr txBox="1"/>
-          <p:nvPr/>
-        </p:nvSpPr>
-        <p:spPr>
-          <a:xfrm>
-            <a:off x="777240" y="4572000"/>
-            <a:ext cx="10607040" cy="548640"/>
+      <p:sp>
+        <p:nvSpPr>
+          <p:cNvPr id="9" name="TextBox 8"/>
+          <p:cNvSpPr txBox="1"/>
+          <p:nvPr/>
+        </p:nvSpPr>
+        <p:spPr>
+          <a:xfrm>
+            <a:off x="777240" y="3084576"/>
+            <a:ext cx="10607040" cy="429370"/>
           </a:xfrm>
           <a:prstGeom prst="rect">
             <a:avLst/>
@@ -17390,13 +17781,13 @@
           <a:p>
             <a:pPr algn="ctr"/>
             <a:r>
-              <a:rPr sz="3040" b="1" i="0">
-                <a:solidFill>
-                  <a:srgbClr val="9E1B32"/>
-                </a:solidFill>
-                <a:latin typeface="Lexend"/>
-              </a:rPr>
-              <a:t>Answer:   −1.44</a:t>
+              <a:rPr sz="2280" b="1" i="0">
+                <a:solidFill>
+                  <a:srgbClr val="1A1A1A"/>
+                </a:solidFill>
+                <a:latin typeface="Lexend"/>
+              </a:rPr>
+              <a:t>Evaluate.</a:t>
             </a:r>
           </a:p>
         </p:txBody>
@@ -17449,7 +17840,7 @@
                 </a:solidFill>
                 <a:latin typeface="Lexend"/>
               </a:rPr>
-              <a:t>Your Turn</a:t>
+              <a:t>Example 1</a:t>
             </a:r>
           </a:p>
         </p:txBody>
@@ -17631,7 +18022,7 @@
       </p:sp>
       <p:pic>
         <p:nvPicPr>
-          <p:cNvPr id="8" name="Picture 7" descr="47f83e2b495dac09.png"/>
+          <p:cNvPr id="8" name="Picture 7" descr="04e54fe9a1540954.png"/>
           <p:cNvPicPr>
             <a:picLocks noChangeAspect="1"/>
           </p:cNvPicPr>
@@ -17645,24 +18036,72 @@
         </p:blipFill>
         <p:spPr>
           <a:xfrm>
-            <a:off x="3806952" y="1600200"/>
-            <a:ext cx="4547616" cy="594360"/>
+            <a:off x="1828800" y="1920240"/>
+            <a:ext cx="2249424" cy="411480"/>
           </a:xfrm>
           <a:prstGeom prst="rect">
             <a:avLst/>
           </a:prstGeom>
         </p:spPr>
       </p:pic>
-      <p:sp>
-        <p:nvSpPr>
-          <p:cNvPr id="9" name="TextBox 8"/>
-          <p:cNvSpPr txBox="1"/>
-          <p:nvPr/>
-        </p:nvSpPr>
-        <p:spPr>
-          <a:xfrm>
-            <a:off x="777240" y="2697480"/>
-            <a:ext cx="10607040" cy="429370"/>
+      <p:pic>
+        <p:nvPicPr>
+          <p:cNvPr id="9" name="Picture 8" descr="21bef9986283dc49.png"/>
+          <p:cNvPicPr>
+            <a:picLocks noChangeAspect="1"/>
+          </p:cNvPicPr>
+          <p:nvPr/>
+        </p:nvPicPr>
+        <p:blipFill>
+          <a:blip r:embed="rId3"/>
+          <a:stretch>
+            <a:fillRect/>
+          </a:stretch>
+        </p:blipFill>
+        <p:spPr>
+          <a:xfrm>
+            <a:off x="1828800" y="2606040"/>
+            <a:ext cx="6989064" cy="353568"/>
+          </a:xfrm>
+          <a:prstGeom prst="rect">
+            <a:avLst/>
+          </a:prstGeom>
+        </p:spPr>
+      </p:pic>
+      <p:pic>
+        <p:nvPicPr>
+          <p:cNvPr id="10" name="Picture 9" descr="09e7e44a6e73f257.png"/>
+          <p:cNvPicPr>
+            <a:picLocks noChangeAspect="1"/>
+          </p:cNvPicPr>
+          <p:nvPr/>
+        </p:nvPicPr>
+        <p:blipFill>
+          <a:blip r:embed="rId4"/>
+          <a:stretch>
+            <a:fillRect/>
+          </a:stretch>
+        </p:blipFill>
+        <p:spPr>
+          <a:xfrm>
+            <a:off x="1828800" y="3233928"/>
+            <a:ext cx="2910840" cy="280416"/>
+          </a:xfrm>
+          <a:prstGeom prst="rect">
+            <a:avLst/>
+          </a:prstGeom>
+        </p:spPr>
+      </p:pic>
+      <p:sp>
+        <p:nvSpPr>
+          <p:cNvPr id="11" name="TextBox 10"/>
+          <p:cNvSpPr txBox="1"/>
+          <p:nvPr/>
+        </p:nvSpPr>
+        <p:spPr>
+          <a:xfrm>
+            <a:off x="777240" y="4572000"/>
+            <a:ext cx="10607040" cy="548640"/>
           </a:xfrm>
           <a:prstGeom prst="rect">
             <a:avLst/>
@@ -17677,13 +18116,13 @@
           <a:p>
             <a:pPr algn="ctr"/>
             <a:r>
-              <a:rPr sz="2280" b="1" i="0">
-                <a:solidFill>
-                  <a:srgbClr val="1A1A1A"/>
-                </a:solidFill>
-                <a:latin typeface="Lexend"/>
-              </a:rPr>
-              <a:t>Evaluate.</a:t>
+              <a:rPr sz="3040" b="1" i="0">
+                <a:solidFill>
+                  <a:srgbClr val="9E1B32"/>
+                </a:solidFill>
+                <a:latin typeface="Lexend"/>
+              </a:rPr>
+              <a:t>Answer:   −1.44</a:t>
             </a:r>
           </a:p>
         </p:txBody>

--- a/a7/build/out/u4/A7 4.06 Order of Operations with Radicals - Slides.pptx
+++ b/a7/build/out/u4/A7 4.06 Order of Operations with Radicals - Slides.pptx
@@ -4019,7 +4019,7 @@
         </p:nvSpPr>
         <p:spPr>
           <a:xfrm>
-            <a:off x="2695478" y="3286870"/>
+            <a:off x="2699097" y="3286870"/>
             <a:ext cx="3085266" cy="457200"/>
           </a:xfrm>
           <a:prstGeom prst="rect">
@@ -4048,7 +4048,7 @@
       </p:sp>
       <p:pic>
         <p:nvPicPr>
-          <p:cNvPr id="11" name="Picture 10" descr="f6d02763ee13a42e.png"/>
+          <p:cNvPr id="11" name="Picture 10" descr="7ac03a8924eefbd5.png"/>
           <p:cNvPicPr>
             <a:picLocks noChangeAspect="1"/>
           </p:cNvPicPr>
@@ -4062,8 +4062,8 @@
         </p:blipFill>
         <p:spPr>
           <a:xfrm>
-            <a:off x="5643584" y="3358498"/>
-            <a:ext cx="1548384" cy="313944"/>
+            <a:off x="5647204" y="3373119"/>
+            <a:ext cx="1549527" cy="315039"/>
           </a:xfrm>
           <a:prstGeom prst="rect">
             <a:avLst/>
@@ -4078,7 +4078,7 @@
         </p:nvSpPr>
         <p:spPr>
           <a:xfrm>
-            <a:off x="7191968" y="3286870"/>
+            <a:off x="7196731" y="3286870"/>
             <a:ext cx="1320048" cy="457200"/>
           </a:xfrm>
           <a:prstGeom prst="rect">
@@ -4107,7 +4107,7 @@
       </p:sp>
       <p:pic>
         <p:nvPicPr>
-          <p:cNvPr id="13" name="Picture 12" descr="954e49d4ca9d8573.png"/>
+          <p:cNvPr id="13" name="Picture 12" descr="14243ac5c29f503b.png"/>
           <p:cNvPicPr>
             <a:picLocks noChangeAspect="1"/>
           </p:cNvPicPr>
@@ -4121,8 +4121,8 @@
         </p:blipFill>
         <p:spPr>
           <a:xfrm>
-            <a:off x="8374857" y="3331066"/>
-            <a:ext cx="1091184" cy="368808"/>
+            <a:off x="8379620" y="3342782"/>
+            <a:ext cx="1089802" cy="366379"/>
           </a:xfrm>
           <a:prstGeom prst="rect">
             <a:avLst/>
@@ -4137,7 +4137,7 @@
         </p:nvSpPr>
         <p:spPr>
           <a:xfrm>
-            <a:off x="2695478" y="3789790"/>
+            <a:off x="2699097" y="3789790"/>
             <a:ext cx="3938126" cy="457200"/>
           </a:xfrm>
           <a:prstGeom prst="rect">
@@ -4166,7 +4166,7 @@
       </p:sp>
       <p:pic>
         <p:nvPicPr>
-          <p:cNvPr id="15" name="Picture 14" descr="e7c4e03b1a074318.png"/>
+          <p:cNvPr id="15" name="Picture 14" descr="50cf6f024a53d9bc.png"/>
           <p:cNvPicPr>
             <a:picLocks noChangeAspect="1"/>
           </p:cNvPicPr>
@@ -4180,8 +4180,8 @@
         </p:blipFill>
         <p:spPr>
           <a:xfrm>
-            <a:off x="6496444" y="3911710"/>
-            <a:ext cx="2109216" cy="213360"/>
+            <a:off x="6500064" y="3925045"/>
+            <a:ext cx="2109597" cy="214693"/>
           </a:xfrm>
           <a:prstGeom prst="rect">
             <a:avLst/>
@@ -4204,7 +4204,7 @@
         </p:blipFill>
         <p:spPr>
           <a:xfrm>
-            <a:off x="2750342" y="4414630"/>
+            <a:off x="2753961" y="4430727"/>
             <a:ext cx="3514344" cy="213360"/>
           </a:xfrm>
           <a:prstGeom prst="rect">
@@ -5794,7 +5794,7 @@
         </p:blipFill>
         <p:spPr>
           <a:xfrm>
-            <a:off x="5352287" y="2260092"/>
+            <a:off x="5352287" y="2249805"/>
             <a:ext cx="1456944" cy="280416"/>
           </a:xfrm>
           <a:prstGeom prst="rect">
@@ -6081,7 +6081,7 @@
         </p:blipFill>
         <p:spPr>
           <a:xfrm>
-            <a:off x="5352287" y="2168652"/>
+            <a:off x="5352287" y="2158365"/>
             <a:ext cx="1456944" cy="280416"/>
           </a:xfrm>
           <a:prstGeom prst="rect">
@@ -6097,7 +6097,7 @@
         </p:nvSpPr>
         <p:spPr>
           <a:xfrm>
-            <a:off x="4011726" y="2839212"/>
+            <a:off x="4011631" y="2839212"/>
             <a:ext cx="2656738" cy="457200"/>
           </a:xfrm>
           <a:prstGeom prst="rect">
@@ -6126,7 +6126,7 @@
       </p:sp>
       <p:pic>
         <p:nvPicPr>
-          <p:cNvPr id="10" name="Picture 9" descr="12ac90fe8177c5f9.png"/>
+          <p:cNvPr id="10" name="Picture 9" descr="eeef22e3ceb66026.png"/>
           <p:cNvPicPr>
             <a:picLocks noChangeAspect="1"/>
           </p:cNvPicPr>
@@ -6140,8 +6140,8 @@
         </p:blipFill>
         <p:spPr>
           <a:xfrm>
-            <a:off x="6531305" y="2941320"/>
-            <a:ext cx="1621536" cy="252984"/>
+            <a:off x="6531210" y="2957322"/>
+            <a:ext cx="1618678" cy="254126"/>
           </a:xfrm>
           <a:prstGeom prst="rect">
             <a:avLst/>
@@ -6164,7 +6164,7 @@
         </p:blipFill>
         <p:spPr>
           <a:xfrm>
-            <a:off x="4066590" y="3480816"/>
+            <a:off x="4066495" y="3498532"/>
             <a:ext cx="1478280" cy="252984"/>
           </a:xfrm>
           <a:prstGeom prst="rect">
@@ -6472,7 +6472,7 @@
       </p:sp>
       <p:pic>
         <p:nvPicPr>
-          <p:cNvPr id="9" name="Picture 8" descr="97c530a75d29d302.png"/>
+          <p:cNvPr id="9" name="Picture 8" descr="25d82099734b37e3.png"/>
           <p:cNvPicPr>
             <a:picLocks noChangeAspect="1"/>
           </p:cNvPicPr>
@@ -6486,8 +6486,8 @@
         </p:blipFill>
         <p:spPr>
           <a:xfrm>
-            <a:off x="4642897" y="1885187"/>
-            <a:ext cx="844296" cy="390144"/>
+            <a:off x="4642897" y="1887473"/>
+            <a:ext cx="842010" cy="388810"/>
           </a:xfrm>
           <a:prstGeom prst="rect">
             <a:avLst/>
@@ -6502,7 +6502,7 @@
         </p:nvSpPr>
         <p:spPr>
           <a:xfrm>
-            <a:off x="5487193" y="1851660"/>
+            <a:off x="5484907" y="1851660"/>
             <a:ext cx="2211425" cy="457200"/>
           </a:xfrm>
           <a:prstGeom prst="rect">
@@ -6899,7 +6899,7 @@
       </p:sp>
       <p:pic>
         <p:nvPicPr>
-          <p:cNvPr id="9" name="Picture 8" descr="8dd3731dd90336b5.png"/>
+          <p:cNvPr id="9" name="Picture 8" descr="6003818e495bb745.png"/>
           <p:cNvPicPr>
             <a:picLocks noChangeAspect="1"/>
           </p:cNvPicPr>
@@ -6913,8 +6913,8 @@
         </p:blipFill>
         <p:spPr>
           <a:xfrm>
-            <a:off x="4642897" y="1885187"/>
-            <a:ext cx="838200" cy="390144"/>
+            <a:off x="4642897" y="1887473"/>
+            <a:ext cx="839533" cy="388810"/>
           </a:xfrm>
           <a:prstGeom prst="rect">
             <a:avLst/>
@@ -6929,7 +6929,7 @@
         </p:nvSpPr>
         <p:spPr>
           <a:xfrm>
-            <a:off x="5481097" y="1851660"/>
+            <a:off x="5482430" y="1851660"/>
             <a:ext cx="2211425" cy="457200"/>
           </a:xfrm>
           <a:prstGeom prst="rect">
@@ -7042,7 +7042,7 @@
         </p:blipFill>
         <p:spPr>
           <a:xfrm>
-            <a:off x="4267467" y="3684236"/>
+            <a:off x="4265277" y="3684236"/>
             <a:ext cx="1642872" cy="432816"/>
           </a:xfrm>
           <a:prstGeom prst="rect">
@@ -7058,7 +7058,7 @@
         </p:nvSpPr>
         <p:spPr>
           <a:xfrm>
-            <a:off x="4212603" y="4222208"/>
+            <a:off x="4210413" y="4222208"/>
             <a:ext cx="2270224" cy="457200"/>
           </a:xfrm>
           <a:prstGeom prst="rect">
@@ -7087,7 +7087,7 @@
       </p:sp>
       <p:pic>
         <p:nvPicPr>
-          <p:cNvPr id="15" name="Picture 14" descr="b92290561e20c8b3.png"/>
+          <p:cNvPr id="15" name="Picture 14" descr="17f44b5618a9d36d.png"/>
           <p:cNvPicPr>
             <a:picLocks noChangeAspect="1"/>
           </p:cNvPicPr>
@@ -7101,8 +7101,8 @@
         </p:blipFill>
         <p:spPr>
           <a:xfrm>
-            <a:off x="6345668" y="4322792"/>
-            <a:ext cx="1609344" cy="256032"/>
+            <a:off x="6343477" y="4337556"/>
+            <a:ext cx="1607629" cy="254126"/>
           </a:xfrm>
           <a:prstGeom prst="rect">
             <a:avLst/>
@@ -7423,7 +7423,7 @@
         </p:blipFill>
         <p:spPr>
           <a:xfrm>
-            <a:off x="2408921" y="1473708"/>
+            <a:off x="2408921" y="1470469"/>
             <a:ext cx="1118616" cy="390144"/>
           </a:xfrm>
           <a:prstGeom prst="rect">
@@ -7474,7 +7474,7 @@
         </p:nvSpPr>
         <p:spPr>
           <a:xfrm>
-            <a:off x="1874519" y="2731008"/>
+            <a:off x="1874519" y="2719613"/>
             <a:ext cx="2930351" cy="457200"/>
           </a:xfrm>
           <a:prstGeom prst="rect">
@@ -7503,7 +7503,7 @@
       </p:sp>
       <p:pic>
         <p:nvPicPr>
-          <p:cNvPr id="12" name="Picture 11" descr="f3c8135f85cfec4f.png"/>
+          <p:cNvPr id="12" name="Picture 11" descr="45dfe0c1090fb1fd.png"/>
           <p:cNvPicPr>
             <a:picLocks noChangeAspect="1"/>
           </p:cNvPicPr>
@@ -7518,7 +7518,7 @@
         <p:spPr>
           <a:xfrm>
             <a:off x="4667711" y="2688336"/>
-            <a:ext cx="765048" cy="542544"/>
+            <a:ext cx="733353" cy="519755"/>
           </a:xfrm>
           <a:prstGeom prst="rect">
             <a:avLst/>
@@ -7533,7 +7533,7 @@
         </p:nvSpPr>
         <p:spPr>
           <a:xfrm>
-            <a:off x="1874519" y="3409188"/>
+            <a:off x="1874519" y="3386399"/>
             <a:ext cx="2185597" cy="457200"/>
           </a:xfrm>
           <a:prstGeom prst="rect">
@@ -7562,7 +7562,7 @@
       </p:sp>
       <p:pic>
         <p:nvPicPr>
-          <p:cNvPr id="14" name="Picture 13" descr="8de25ca1bc5f4d4f.png"/>
+          <p:cNvPr id="14" name="Picture 13" descr="8c31237e42b535d9.png"/>
           <p:cNvPicPr>
             <a:picLocks noChangeAspect="1"/>
           </p:cNvPicPr>
@@ -7576,8 +7576,8 @@
         </p:blipFill>
         <p:spPr>
           <a:xfrm>
-            <a:off x="3922957" y="3525012"/>
-            <a:ext cx="1127760" cy="225552"/>
+            <a:off x="3922957" y="3513312"/>
+            <a:ext cx="1077483" cy="215971"/>
           </a:xfrm>
           <a:prstGeom prst="rect">
             <a:avLst/>
@@ -7828,7 +7828,7 @@
         </p:blipFill>
         <p:spPr>
           <a:xfrm>
-            <a:off x="5303520" y="2260092"/>
+            <a:off x="5303520" y="2246757"/>
             <a:ext cx="1554480" cy="280416"/>
           </a:xfrm>
           <a:prstGeom prst="rect">
@@ -8115,7 +8115,7 @@
         </p:blipFill>
         <p:spPr>
           <a:xfrm>
-            <a:off x="5303520" y="2168652"/>
+            <a:off x="5303520" y="2155317"/>
             <a:ext cx="1554480" cy="280416"/>
           </a:xfrm>
           <a:prstGeom prst="rect">
@@ -8131,7 +8131,7 @@
         </p:nvSpPr>
         <p:spPr>
           <a:xfrm>
-            <a:off x="4057446" y="2839212"/>
+            <a:off x="4058589" y="2839212"/>
             <a:ext cx="2656738" cy="457200"/>
           </a:xfrm>
           <a:prstGeom prst="rect">
@@ -8160,7 +8160,7 @@
       </p:sp>
       <p:pic>
         <p:nvPicPr>
-          <p:cNvPr id="10" name="Picture 9" descr="5215752a2994fdfe.png"/>
+          <p:cNvPr id="10" name="Picture 9" descr="8d7f8b36a59e9cb7.png"/>
           <p:cNvPicPr>
             <a:picLocks noChangeAspect="1"/>
           </p:cNvPicPr>
@@ -8174,8 +8174,8 @@
         </p:blipFill>
         <p:spPr>
           <a:xfrm>
-            <a:off x="6577025" y="2939796"/>
-            <a:ext cx="1530096" cy="256032"/>
+            <a:off x="6578168" y="2954559"/>
+            <a:ext cx="1524762" cy="254126"/>
           </a:xfrm>
           <a:prstGeom prst="rect">
             <a:avLst/>
@@ -8198,7 +8198,7 @@
         </p:blipFill>
         <p:spPr>
           <a:xfrm>
-            <a:off x="4112310" y="3480816"/>
+            <a:off x="4113453" y="3495484"/>
             <a:ext cx="1554480" cy="252984"/>
           </a:xfrm>
           <a:prstGeom prst="rect">
@@ -8788,7 +8788,7 @@
         </p:nvSpPr>
         <p:spPr>
           <a:xfrm>
-            <a:off x="4022680" y="3226307"/>
+            <a:off x="4022871" y="3226307"/>
             <a:ext cx="996779" cy="457200"/>
           </a:xfrm>
           <a:prstGeom prst="rect">
@@ -8817,7 +8817,7 @@
       </p:sp>
       <p:pic>
         <p:nvPicPr>
-          <p:cNvPr id="10" name="Picture 9" descr="0f7f372429cfcbc3.png"/>
+          <p:cNvPr id="10" name="Picture 9" descr="abe72144a9717f4b.png"/>
           <p:cNvPicPr>
             <a:picLocks noChangeAspect="1"/>
           </p:cNvPicPr>
@@ -8831,8 +8831,8 @@
         </p:blipFill>
         <p:spPr>
           <a:xfrm>
-            <a:off x="4882300" y="3326891"/>
-            <a:ext cx="2481072" cy="256032"/>
+            <a:off x="4882490" y="3317224"/>
+            <a:ext cx="2482977" cy="259032"/>
           </a:xfrm>
           <a:prstGeom prst="rect">
             <a:avLst/>
@@ -8847,7 +8847,7 @@
         </p:nvSpPr>
         <p:spPr>
           <a:xfrm>
-            <a:off x="4022680" y="3729227"/>
+            <a:off x="4022871" y="3729227"/>
             <a:ext cx="1583270" cy="457200"/>
           </a:xfrm>
           <a:prstGeom prst="rect">
@@ -8876,7 +8876,7 @@
       </p:sp>
       <p:pic>
         <p:nvPicPr>
-          <p:cNvPr id="12" name="Picture 11" descr="d59a91b1f76472ac.png"/>
+          <p:cNvPr id="12" name="Picture 11" descr="c8750695812e336e.png"/>
           <p:cNvPicPr>
             <a:picLocks noChangeAspect="1"/>
           </p:cNvPicPr>
@@ -8890,8 +8890,8 @@
         </p:blipFill>
         <p:spPr>
           <a:xfrm>
-            <a:off x="5468791" y="3826763"/>
-            <a:ext cx="2670048" cy="262128"/>
+            <a:off x="5468981" y="3817810"/>
+            <a:ext cx="2672000" cy="261366"/>
           </a:xfrm>
           <a:prstGeom prst="rect">
             <a:avLst/>
@@ -8914,7 +8914,7 @@
         </p:blipFill>
         <p:spPr>
           <a:xfrm>
-            <a:off x="4077544" y="4255007"/>
+            <a:off x="4077735" y="4255007"/>
             <a:ext cx="807720" cy="515112"/>
           </a:xfrm>
           <a:prstGeom prst="rect">
@@ -9201,7 +9201,7 @@
         </p:blipFill>
         <p:spPr>
           <a:xfrm>
-            <a:off x="5387339" y="2229612"/>
+            <a:off x="5387339" y="2194560"/>
             <a:ext cx="1386840" cy="341376"/>
           </a:xfrm>
           <a:prstGeom prst="rect">
@@ -9699,7 +9699,7 @@
         </p:blipFill>
         <p:spPr>
           <a:xfrm>
-            <a:off x="5385816" y="2138171"/>
+            <a:off x="5385816" y="2103120"/>
             <a:ext cx="1389888" cy="341376"/>
           </a:xfrm>
           <a:prstGeom prst="rect">
@@ -9750,7 +9750,7 @@
         </p:nvSpPr>
         <p:spPr>
           <a:xfrm>
-            <a:off x="4270490" y="3414091"/>
+            <a:off x="4269823" y="3414091"/>
             <a:ext cx="2089630" cy="457200"/>
           </a:xfrm>
           <a:prstGeom prst="rect">
@@ -9779,7 +9779,7 @@
       </p:sp>
       <p:pic>
         <p:nvPicPr>
-          <p:cNvPr id="11" name="Picture 10" descr="6bee3a4a6e96719d.png"/>
+          <p:cNvPr id="11" name="Picture 10" descr="39ff18f997e09d88.png"/>
           <p:cNvPicPr>
             <a:picLocks noChangeAspect="1"/>
           </p:cNvPicPr>
@@ -9793,8 +9793,8 @@
         </p:blipFill>
         <p:spPr>
           <a:xfrm>
-            <a:off x="6222961" y="3513151"/>
-            <a:ext cx="880872" cy="259080"/>
+            <a:off x="6222294" y="3500340"/>
+            <a:ext cx="877443" cy="259032"/>
           </a:xfrm>
           <a:prstGeom prst="rect">
             <a:avLst/>
@@ -9809,7 +9809,7 @@
         </p:nvSpPr>
         <p:spPr>
           <a:xfrm>
-            <a:off x="4270490" y="3917011"/>
+            <a:off x="4269823" y="3917011"/>
             <a:ext cx="2498875" cy="457200"/>
           </a:xfrm>
           <a:prstGeom prst="rect">
@@ -9838,7 +9838,7 @@
       </p:sp>
       <p:pic>
         <p:nvPicPr>
-          <p:cNvPr id="13" name="Picture 12" descr="521cfcdc4e4431f2.png"/>
+          <p:cNvPr id="13" name="Picture 12" descr="1a56c2424612d0a6.png"/>
           <p:cNvPicPr>
             <a:picLocks noChangeAspect="1"/>
           </p:cNvPicPr>
@@ -9852,8 +9852,8 @@
         </p:blipFill>
         <p:spPr>
           <a:xfrm>
-            <a:off x="6632205" y="4038931"/>
-            <a:ext cx="1255776" cy="213360"/>
+            <a:off x="6631539" y="4052266"/>
+            <a:ext cx="1262491" cy="214693"/>
           </a:xfrm>
           <a:prstGeom prst="rect">
             <a:avLst/>
@@ -9868,7 +9868,7 @@
         </p:nvSpPr>
         <p:spPr>
           <a:xfrm>
-            <a:off x="4270490" y="4419931"/>
+            <a:off x="4269823" y="4419931"/>
             <a:ext cx="1877465" cy="457200"/>
           </a:xfrm>
           <a:prstGeom prst="rect">
@@ -9897,7 +9897,7 @@
       </p:sp>
       <p:pic>
         <p:nvPicPr>
-          <p:cNvPr id="15" name="Picture 14" descr="c52f3646b69457bb.png"/>
+          <p:cNvPr id="15" name="Picture 14" descr="345d1dacfb918cd3.png"/>
           <p:cNvPicPr>
             <a:picLocks noChangeAspect="1"/>
           </p:cNvPicPr>
@@ -9911,8 +9911,8 @@
         </p:blipFill>
         <p:spPr>
           <a:xfrm>
-            <a:off x="6010795" y="4541851"/>
-            <a:ext cx="1399032" cy="213360"/>
+            <a:off x="6010128" y="4557519"/>
+            <a:ext cx="1400175" cy="212359"/>
           </a:xfrm>
           <a:prstGeom prst="rect">
             <a:avLst/>
@@ -10747,7 +10747,7 @@
         </p:nvSpPr>
         <p:spPr>
           <a:xfrm>
-            <a:off x="4457658" y="3792043"/>
+            <a:off x="4458467" y="3792043"/>
             <a:ext cx="996779" cy="457200"/>
           </a:xfrm>
           <a:prstGeom prst="rect">
@@ -10776,7 +10776,7 @@
       </p:sp>
       <p:pic>
         <p:nvPicPr>
-          <p:cNvPr id="11" name="Picture 10" descr="f5cf47236f59dc77.png"/>
+          <p:cNvPr id="11" name="Picture 10" descr="57304b44759ca8cf.png"/>
           <p:cNvPicPr>
             <a:picLocks noChangeAspect="1"/>
           </p:cNvPicPr>
@@ -10790,8 +10790,8 @@
         </p:blipFill>
         <p:spPr>
           <a:xfrm>
-            <a:off x="5317277" y="3889579"/>
-            <a:ext cx="2389632" cy="262128"/>
+            <a:off x="5318087" y="3880625"/>
+            <a:ext cx="2387298" cy="261366"/>
           </a:xfrm>
           <a:prstGeom prst="rect">
             <a:avLst/>
@@ -10806,7 +10806,7 @@
         </p:nvSpPr>
         <p:spPr>
           <a:xfrm>
-            <a:off x="4457658" y="4294963"/>
+            <a:off x="4458467" y="4294963"/>
             <a:ext cx="1583270" cy="457200"/>
           </a:xfrm>
           <a:prstGeom prst="rect">
@@ -10835,7 +10835,7 @@
       </p:sp>
       <p:pic>
         <p:nvPicPr>
-          <p:cNvPr id="13" name="Picture 12" descr="b8964d2fa5cae649.png"/>
+          <p:cNvPr id="13" name="Picture 12" descr="8824add34145570d.png"/>
           <p:cNvPicPr>
             <a:picLocks noChangeAspect="1"/>
           </p:cNvPicPr>
@@ -10849,8 +10849,8 @@
         </p:blipFill>
         <p:spPr>
           <a:xfrm>
-            <a:off x="5903768" y="4397071"/>
-            <a:ext cx="697992" cy="252984"/>
+            <a:off x="5904578" y="4385879"/>
+            <a:ext cx="702421" cy="256698"/>
           </a:xfrm>
           <a:prstGeom prst="rect">
             <a:avLst/>
@@ -10873,7 +10873,7 @@
         </p:blipFill>
         <p:spPr>
           <a:xfrm>
-            <a:off x="4512522" y="4919803"/>
+            <a:off x="4513331" y="4932852"/>
             <a:ext cx="1219200" cy="213360"/>
           </a:xfrm>
           <a:prstGeom prst="rect">
@@ -11457,7 +11457,7 @@
       </p:pic>
       <p:pic>
         <p:nvPicPr>
-          <p:cNvPr id="9" name="Picture 8" descr="068d9a19700e1389.png"/>
+          <p:cNvPr id="9" name="Picture 8" descr="db68b18bfb41eb32.png"/>
           <p:cNvPicPr>
             <a:picLocks noChangeAspect="1"/>
           </p:cNvPicPr>
@@ -11471,8 +11471,8 @@
         </p:blipFill>
         <p:spPr>
           <a:xfrm>
-            <a:off x="3055152" y="2938272"/>
-            <a:ext cx="1066800" cy="259080"/>
+            <a:off x="3056128" y="2925460"/>
+            <a:ext cx="1066466" cy="259032"/>
           </a:xfrm>
           <a:prstGeom prst="rect">
             <a:avLst/>
@@ -11487,7 +11487,7 @@
         </p:nvSpPr>
         <p:spPr>
           <a:xfrm>
-            <a:off x="4121952" y="2839212"/>
+            <a:off x="4122595" y="2839212"/>
             <a:ext cx="5234351" cy="457200"/>
           </a:xfrm>
           <a:prstGeom prst="rect">
@@ -11530,7 +11530,7 @@
         </p:blipFill>
         <p:spPr>
           <a:xfrm>
-            <a:off x="3055152" y="3413759"/>
+            <a:off x="3056128" y="3431381"/>
             <a:ext cx="1115568" cy="313944"/>
           </a:xfrm>
           <a:prstGeom prst="rect">
@@ -11554,7 +11554,7 @@
         </p:blipFill>
         <p:spPr>
           <a:xfrm>
-            <a:off x="3055152" y="3966971"/>
+            <a:off x="3056128" y="3980021"/>
             <a:ext cx="1252728" cy="213360"/>
           </a:xfrm>
           <a:prstGeom prst="rect">
@@ -11876,7 +11876,7 @@
         </p:blipFill>
         <p:spPr>
           <a:xfrm>
-            <a:off x="2408921" y="1473708"/>
+            <a:off x="2408921" y="1470469"/>
             <a:ext cx="1118616" cy="390144"/>
           </a:xfrm>
           <a:prstGeom prst="rect">
@@ -11997,7 +11997,7 @@
         </p:nvSpPr>
         <p:spPr>
           <a:xfrm>
-            <a:off x="1874519" y="2731008"/>
+            <a:off x="1874519" y="2719613"/>
             <a:ext cx="2930351" cy="457200"/>
           </a:xfrm>
           <a:prstGeom prst="rect">
@@ -12026,7 +12026,7 @@
       </p:sp>
       <p:pic>
         <p:nvPicPr>
-          <p:cNvPr id="14" name="Picture 13" descr="f3c8135f85cfec4f.png"/>
+          <p:cNvPr id="14" name="Picture 13" descr="45dfe0c1090fb1fd.png"/>
           <p:cNvPicPr>
             <a:picLocks noChangeAspect="1"/>
           </p:cNvPicPr>
@@ -12041,7 +12041,7 @@
         <p:spPr>
           <a:xfrm>
             <a:off x="4667711" y="2688336"/>
-            <a:ext cx="765048" cy="542544"/>
+            <a:ext cx="733353" cy="519755"/>
           </a:xfrm>
           <a:prstGeom prst="rect">
             <a:avLst/>
@@ -12056,7 +12056,7 @@
         </p:nvSpPr>
         <p:spPr>
           <a:xfrm>
-            <a:off x="5981399" y="2665476"/>
+            <a:off x="5949704" y="2665476"/>
             <a:ext cx="717421" cy="457200"/>
           </a:xfrm>
           <a:prstGeom prst="rect">
@@ -12091,7 +12091,7 @@
         </p:nvSpPr>
         <p:spPr>
           <a:xfrm>
-            <a:off x="1874519" y="3409188"/>
+            <a:off x="1874519" y="3386399"/>
             <a:ext cx="2185597" cy="457200"/>
           </a:xfrm>
           <a:prstGeom prst="rect">
@@ -12120,7 +12120,7 @@
       </p:sp>
       <p:pic>
         <p:nvPicPr>
-          <p:cNvPr id="17" name="Picture 16" descr="8de25ca1bc5f4d4f.png"/>
+          <p:cNvPr id="17" name="Picture 16" descr="8c31237e42b535d9.png"/>
           <p:cNvPicPr>
             <a:picLocks noChangeAspect="1"/>
           </p:cNvPicPr>
@@ -12134,8 +12134,8 @@
         </p:blipFill>
         <p:spPr>
           <a:xfrm>
-            <a:off x="3922957" y="3525012"/>
-            <a:ext cx="1127760" cy="225552"/>
+            <a:off x="3922957" y="3513312"/>
+            <a:ext cx="1077483" cy="215971"/>
           </a:xfrm>
           <a:prstGeom prst="rect">
             <a:avLst/>
@@ -12150,7 +12150,7 @@
         </p:nvSpPr>
         <p:spPr>
           <a:xfrm>
-            <a:off x="5599357" y="3409188"/>
+            <a:off x="5549081" y="3386399"/>
             <a:ext cx="386509" cy="457200"/>
           </a:xfrm>
           <a:prstGeom prst="rect">
@@ -12718,7 +12718,7 @@
       </p:pic>
       <p:pic>
         <p:nvPicPr>
-          <p:cNvPr id="9" name="Picture 8" descr="dcdd245aeaaf1b55.png"/>
+          <p:cNvPr id="9" name="Picture 8" descr="3fa91d29a0671fb4.png"/>
           <p:cNvPicPr>
             <a:picLocks noChangeAspect="1"/>
           </p:cNvPicPr>
@@ -12732,8 +12732,8 @@
         </p:blipFill>
         <p:spPr>
           <a:xfrm>
-            <a:off x="4417755" y="3124200"/>
-            <a:ext cx="1057656" cy="515112"/>
+            <a:off x="4418946" y="3124200"/>
+            <a:ext cx="1061799" cy="515731"/>
           </a:xfrm>
           <a:prstGeom prst="rect">
             <a:avLst/>
@@ -12748,7 +12748,7 @@
         </p:nvSpPr>
         <p:spPr>
           <a:xfrm>
-            <a:off x="5475411" y="3153156"/>
+            <a:off x="5480745" y="3153465"/>
             <a:ext cx="1670944" cy="457200"/>
           </a:xfrm>
           <a:prstGeom prst="rect">
@@ -12777,7 +12777,7 @@
       </p:sp>
       <p:pic>
         <p:nvPicPr>
-          <p:cNvPr id="11" name="Picture 10" descr="91dc20afadb1aea1.png"/>
+          <p:cNvPr id="11" name="Picture 10" descr="8172b02b515cb196.png"/>
           <p:cNvPicPr>
             <a:picLocks noChangeAspect="1"/>
           </p:cNvPicPr>
@@ -12791,8 +12791,8 @@
         </p:blipFill>
         <p:spPr>
           <a:xfrm>
-            <a:off x="7009196" y="3124200"/>
-            <a:ext cx="829056" cy="515112"/>
+            <a:off x="7014530" y="3126533"/>
+            <a:ext cx="835437" cy="513397"/>
           </a:xfrm>
           <a:prstGeom prst="rect">
             <a:avLst/>
@@ -12815,7 +12815,7 @@
         </p:blipFill>
         <p:spPr>
           <a:xfrm>
-            <a:off x="4417755" y="3730752"/>
+            <a:off x="4418946" y="3731371"/>
             <a:ext cx="2569464" cy="515112"/>
           </a:xfrm>
           <a:prstGeom prst="rect">
@@ -12839,7 +12839,7 @@
         </p:blipFill>
         <p:spPr>
           <a:xfrm>
-            <a:off x="4417755" y="4337304"/>
+            <a:off x="4418946" y="4337923"/>
             <a:ext cx="1481328" cy="512064"/>
           </a:xfrm>
           <a:prstGeom prst="rect">
@@ -12855,7 +12855,7 @@
         </p:nvSpPr>
         <p:spPr>
           <a:xfrm>
-            <a:off x="777240" y="4986528"/>
+            <a:off x="777240" y="4987147"/>
             <a:ext cx="10607040" cy="548640"/>
           </a:xfrm>
           <a:prstGeom prst="rect">
@@ -13118,8 +13118,8 @@
         </p:nvSpPr>
         <p:spPr>
           <a:xfrm>
-            <a:off x="2055986" y="2215896"/>
-            <a:ext cx="3126680" cy="457200"/>
+            <a:off x="2465069" y="2171700"/>
+            <a:ext cx="2902375" cy="457200"/>
           </a:xfrm>
           <a:prstGeom prst="rect">
             <a:avLst/>
@@ -13134,7 +13134,7 @@
           <a:p>
             <a:pPr algn="l"/>
             <a:r>
-              <a:rPr sz="2470" b="0" i="0">
+              <a:rPr sz="2280" b="0" i="0">
                 <a:solidFill>
                   <a:srgbClr val="1A1A1A"/>
                 </a:solidFill>
@@ -13161,8 +13161,8 @@
         </p:blipFill>
         <p:spPr>
           <a:xfrm>
-            <a:off x="5045507" y="2194560"/>
-            <a:ext cx="1901952" cy="499871"/>
+            <a:off x="5230284" y="2194560"/>
+            <a:ext cx="1545336" cy="406146"/>
           </a:xfrm>
           <a:prstGeom prst="rect">
             <a:avLst/>
@@ -13177,8 +13177,8 @@
         </p:nvSpPr>
         <p:spPr>
           <a:xfrm>
-            <a:off x="6947459" y="2215896"/>
-            <a:ext cx="3295234" cy="457200"/>
+            <a:off x="6775620" y="2171700"/>
+            <a:ext cx="3057990" cy="457200"/>
           </a:xfrm>
           <a:prstGeom prst="rect">
             <a:avLst/>
@@ -13193,7 +13193,7 @@
           <a:p>
             <a:pPr algn="l"/>
             <a:r>
-              <a:rPr sz="2470" b="0" i="0">
+              <a:rPr sz="2280" b="0" i="0">
                 <a:solidFill>
                   <a:srgbClr val="1A1A1A"/>
                 </a:solidFill>
@@ -13212,7 +13212,7 @@
         </p:nvSpPr>
         <p:spPr>
           <a:xfrm>
-            <a:off x="777240" y="2968751"/>
+            <a:off x="777240" y="2880360"/>
             <a:ext cx="10607040" cy="465151"/>
           </a:xfrm>
           <a:prstGeom prst="rect">
@@ -13247,8 +13247,8 @@
         </p:nvSpPr>
         <p:spPr>
           <a:xfrm>
-            <a:off x="2557533" y="3520771"/>
-            <a:ext cx="4651007" cy="457200"/>
+            <a:off x="2832807" y="3432379"/>
+            <a:ext cx="4309304" cy="457200"/>
           </a:xfrm>
           <a:prstGeom prst="rect">
             <a:avLst/>
@@ -13263,7 +13263,7 @@
           <a:p>
             <a:pPr algn="l"/>
             <a:r>
-              <a:rPr sz="2470" b="0" i="0">
+              <a:rPr sz="2280" b="0" i="0">
                 <a:solidFill>
                   <a:srgbClr val="1A1A1A"/>
                 </a:solidFill>
@@ -13290,8 +13290,8 @@
         </p:blipFill>
         <p:spPr>
           <a:xfrm>
-            <a:off x="7071381" y="3645739"/>
-            <a:ext cx="176784" cy="207264"/>
+            <a:off x="7004952" y="3606877"/>
+            <a:ext cx="143637" cy="168401"/>
           </a:xfrm>
           <a:prstGeom prst="rect">
             <a:avLst/>
@@ -13306,8 +13306,8 @@
         </p:nvSpPr>
         <p:spPr>
           <a:xfrm>
-            <a:off x="7248165" y="3520771"/>
-            <a:ext cx="2492980" cy="457200"/>
+            <a:off x="7148589" y="3432379"/>
+            <a:ext cx="2317283" cy="457200"/>
           </a:xfrm>
           <a:prstGeom prst="rect">
             <a:avLst/>
@@ -13322,7 +13322,7 @@
           <a:p>
             <a:pPr algn="l"/>
             <a:r>
-              <a:rPr sz="2470" b="0" i="0">
+              <a:rPr sz="2280" b="0" i="0">
                 <a:solidFill>
                   <a:srgbClr val="1A1A1A"/>
                 </a:solidFill>
@@ -13341,7 +13341,7 @@
         </p:nvSpPr>
         <p:spPr>
           <a:xfrm>
-            <a:off x="777240" y="4366591"/>
+            <a:off x="777240" y="4343400"/>
             <a:ext cx="10607040" cy="457200"/>
           </a:xfrm>
           <a:prstGeom prst="rect">
@@ -13604,8 +13604,8 @@
         </p:nvSpPr>
         <p:spPr>
           <a:xfrm>
-            <a:off x="2054462" y="2124456"/>
-            <a:ext cx="3126680" cy="457200"/>
+            <a:off x="2463830" y="2080260"/>
+            <a:ext cx="2902375" cy="457200"/>
           </a:xfrm>
           <a:prstGeom prst="rect">
             <a:avLst/>
@@ -13620,7 +13620,7 @@
           <a:p>
             <a:pPr algn="l"/>
             <a:r>
-              <a:rPr sz="2470" b="0" i="0">
+              <a:rPr sz="2280" b="0" i="0">
                 <a:solidFill>
                   <a:srgbClr val="1A1A1A"/>
                 </a:solidFill>
@@ -13647,8 +13647,8 @@
         </p:blipFill>
         <p:spPr>
           <a:xfrm>
-            <a:off x="5043983" y="2103120"/>
-            <a:ext cx="1905000" cy="499871"/>
+            <a:off x="5229046" y="2103120"/>
+            <a:ext cx="1547812" cy="406146"/>
           </a:xfrm>
           <a:prstGeom prst="rect">
             <a:avLst/>
@@ -13663,8 +13663,8 @@
         </p:nvSpPr>
         <p:spPr>
           <a:xfrm>
-            <a:off x="6948983" y="2124456"/>
-            <a:ext cx="3295234" cy="457200"/>
+            <a:off x="6776858" y="2080260"/>
+            <a:ext cx="3057990" cy="457200"/>
           </a:xfrm>
           <a:prstGeom prst="rect">
             <a:avLst/>
@@ -13679,7 +13679,7 @@
           <a:p>
             <a:pPr algn="l"/>
             <a:r>
-              <a:rPr sz="2470" b="0" i="0">
+              <a:rPr sz="2280" b="0" i="0">
                 <a:solidFill>
                   <a:srgbClr val="1A1A1A"/>
                 </a:solidFill>
@@ -13698,7 +13698,7 @@
         </p:nvSpPr>
         <p:spPr>
           <a:xfrm>
-            <a:off x="777240" y="2877312"/>
+            <a:off x="777240" y="2788920"/>
             <a:ext cx="10607040" cy="465151"/>
           </a:xfrm>
           <a:prstGeom prst="rect">
@@ -13733,8 +13733,8 @@
         </p:nvSpPr>
         <p:spPr>
           <a:xfrm>
-            <a:off x="2557533" y="3429331"/>
-            <a:ext cx="4651007" cy="457200"/>
+            <a:off x="2832807" y="3340939"/>
+            <a:ext cx="4309304" cy="457200"/>
           </a:xfrm>
           <a:prstGeom prst="rect">
             <a:avLst/>
@@ -13749,7 +13749,7 @@
           <a:p>
             <a:pPr algn="l"/>
             <a:r>
-              <a:rPr sz="2470" b="0" i="0">
+              <a:rPr sz="2280" b="0" i="0">
                 <a:solidFill>
                   <a:srgbClr val="1A1A1A"/>
                 </a:solidFill>
@@ -13776,8 +13776,8 @@
         </p:blipFill>
         <p:spPr>
           <a:xfrm>
-            <a:off x="7071381" y="3554299"/>
-            <a:ext cx="176784" cy="207264"/>
+            <a:off x="7004952" y="3515437"/>
+            <a:ext cx="143637" cy="168401"/>
           </a:xfrm>
           <a:prstGeom prst="rect">
             <a:avLst/>
@@ -13792,8 +13792,8 @@
         </p:nvSpPr>
         <p:spPr>
           <a:xfrm>
-            <a:off x="7248165" y="3429331"/>
-            <a:ext cx="2492980" cy="457200"/>
+            <a:off x="7148589" y="3340939"/>
+            <a:ext cx="2317283" cy="457200"/>
           </a:xfrm>
           <a:prstGeom prst="rect">
             <a:avLst/>
@@ -13808,7 +13808,7 @@
           <a:p>
             <a:pPr algn="l"/>
             <a:r>
-              <a:rPr sz="2470" b="0" i="0">
+              <a:rPr sz="2280" b="0" i="0">
                 <a:solidFill>
                   <a:srgbClr val="1A1A1A"/>
                 </a:solidFill>
@@ -13827,7 +13827,7 @@
         </p:nvSpPr>
         <p:spPr>
           <a:xfrm>
-            <a:off x="2988076" y="4198951"/>
+            <a:off x="2989600" y="4110987"/>
             <a:ext cx="1342179" cy="457200"/>
           </a:xfrm>
           <a:prstGeom prst="rect">
@@ -13856,7 +13856,7 @@
       </p:sp>
       <p:pic>
         <p:nvPicPr>
-          <p:cNvPr id="16" name="Picture 15" descr="da0bec38e3107c39.png"/>
+          <p:cNvPr id="16" name="Picture 15" descr="9784f3a1f264e164.png"/>
           <p:cNvPicPr>
             <a:picLocks noChangeAspect="1"/>
           </p:cNvPicPr>
@@ -13870,8 +13870,8 @@
         </p:blipFill>
         <p:spPr>
           <a:xfrm>
-            <a:off x="4193095" y="4302583"/>
-            <a:ext cx="1036320" cy="249935"/>
+            <a:off x="4194619" y="4229097"/>
+            <a:ext cx="1033081" cy="248602"/>
           </a:xfrm>
           <a:prstGeom prst="rect">
             <a:avLst/>
@@ -13886,7 +13886,7 @@
         </p:nvSpPr>
         <p:spPr>
           <a:xfrm>
-            <a:off x="5229415" y="4198951"/>
+            <a:off x="5227701" y="4110987"/>
             <a:ext cx="606468" cy="457200"/>
           </a:xfrm>
           <a:prstGeom prst="rect">
@@ -13915,7 +13915,7 @@
       </p:sp>
       <p:pic>
         <p:nvPicPr>
-          <p:cNvPr id="18" name="Picture 17" descr="c90e576750902fbb.png"/>
+          <p:cNvPr id="18" name="Picture 17" descr="a4391d9dd1334944.png"/>
           <p:cNvPicPr>
             <a:picLocks noChangeAspect="1"/>
           </p:cNvPicPr>
@@ -13929,8 +13929,8 @@
         </p:blipFill>
         <p:spPr>
           <a:xfrm>
-            <a:off x="5698723" y="4211143"/>
-            <a:ext cx="3477768" cy="432816"/>
+            <a:off x="5697009" y="4122751"/>
+            <a:ext cx="3483197" cy="433673"/>
           </a:xfrm>
           <a:prstGeom prst="rect">
             <a:avLst/>
@@ -13939,7 +13939,7 @@
       </p:pic>
       <p:pic>
         <p:nvPicPr>
-          <p:cNvPr id="19" name="Picture 18" descr="ff74c5c7fd2cbb83.png"/>
+          <p:cNvPr id="19" name="Picture 18" descr="a2ae239b6083298f.png"/>
           <p:cNvPicPr>
             <a:picLocks noChangeAspect="1"/>
           </p:cNvPicPr>
@@ -13953,8 +13953,8 @@
         </p:blipFill>
         <p:spPr>
           <a:xfrm>
-            <a:off x="3042940" y="4825315"/>
-            <a:ext cx="868680" cy="304800"/>
+            <a:off x="3044464" y="4724445"/>
+            <a:ext cx="870108" cy="309372"/>
           </a:xfrm>
           <a:prstGeom prst="rect">
             <a:avLst/>
@@ -13969,7 +13969,7 @@
         </p:nvSpPr>
         <p:spPr>
           <a:xfrm>
-            <a:off x="3911620" y="4749115"/>
+            <a:off x="3914572" y="4661580"/>
             <a:ext cx="4321243" cy="457200"/>
           </a:xfrm>
           <a:prstGeom prst="rect">
@@ -14004,7 +14004,7 @@
         </p:nvSpPr>
         <p:spPr>
           <a:xfrm>
-            <a:off x="777240" y="5320615"/>
+            <a:off x="777240" y="5233080"/>
             <a:ext cx="10607040" cy="548640"/>
           </a:xfrm>
           <a:prstGeom prst="rect">
@@ -15046,7 +15046,7 @@
                 </a:solidFill>
                 <a:latin typeface="Lexend"/>
               </a:rPr>
-              <a:t>Every skill listed is required, to a SmartScore of 67. Due at the start of the next class.</a:t>
+              <a:t>Every skill listed is required, to a SmartScore of 67. Due by the Unit 4 test.</a:t>
             </a:r>
           </a:p>
         </p:txBody>
@@ -16939,8 +16939,8 @@
         </p:blipFill>
         <p:spPr>
           <a:xfrm>
-            <a:off x="2912347" y="2060448"/>
-            <a:ext cx="3008376" cy="277368"/>
+            <a:off x="3183453" y="2285349"/>
+            <a:ext cx="2647997" cy="244141"/>
           </a:xfrm>
           <a:prstGeom prst="rect">
             <a:avLst/>
@@ -16955,7 +16955,7 @@
         </p:nvSpPr>
         <p:spPr>
           <a:xfrm>
-            <a:off x="5920723" y="1970532"/>
+            <a:off x="5831450" y="2171700"/>
             <a:ext cx="1947704" cy="457200"/>
           </a:xfrm>
           <a:prstGeom prst="rect">
@@ -16998,8 +16998,8 @@
         </p:blipFill>
         <p:spPr>
           <a:xfrm>
-            <a:off x="7731268" y="2060448"/>
-            <a:ext cx="1517904" cy="277368"/>
+            <a:off x="7641994" y="2279983"/>
+            <a:ext cx="1336071" cy="244141"/>
           </a:xfrm>
           <a:prstGeom prst="rect">
             <a:avLst/>
@@ -17022,8 +17022,8 @@
         </p:blipFill>
         <p:spPr>
           <a:xfrm>
-            <a:off x="2772139" y="2744724"/>
-            <a:ext cx="3285744" cy="280416"/>
+            <a:off x="3060041" y="3078194"/>
+            <a:ext cx="2892139" cy="246824"/>
           </a:xfrm>
           <a:prstGeom prst="rect">
             <a:avLst/>
@@ -17038,7 +17038,7 @@
         </p:nvSpPr>
         <p:spPr>
           <a:xfrm>
-            <a:off x="6057883" y="2656332"/>
+            <a:off x="5952180" y="2967228"/>
             <a:ext cx="1947704" cy="457200"/>
           </a:xfrm>
           <a:prstGeom prst="rect">
@@ -17081,8 +17081,8 @@
         </p:blipFill>
         <p:spPr>
           <a:xfrm>
-            <a:off x="7868428" y="2746248"/>
-            <a:ext cx="1520952" cy="277368"/>
+            <a:off x="7762724" y="3080877"/>
+            <a:ext cx="1338754" cy="244141"/>
           </a:xfrm>
           <a:prstGeom prst="rect">
             <a:avLst/>
@@ -17097,7 +17097,7 @@
         </p:nvSpPr>
         <p:spPr>
           <a:xfrm>
-            <a:off x="987552" y="3429000"/>
+            <a:off x="987552" y="3941064"/>
             <a:ext cx="10131551" cy="950976"/>
           </a:xfrm>
           <a:prstGeom prst="rect">
@@ -17438,7 +17438,7 @@
         </p:blipFill>
         <p:spPr>
           <a:xfrm>
-            <a:off x="4881372" y="1993392"/>
+            <a:off x="4881372" y="2194560"/>
             <a:ext cx="2398776" cy="792480"/>
           </a:xfrm>
           <a:prstGeom prst="rect">
@@ -17462,7 +17462,7 @@
         </p:blipFill>
         <p:spPr>
           <a:xfrm>
-            <a:off x="3587496" y="3060192"/>
+            <a:off x="3587496" y="3371088"/>
             <a:ext cx="4986528" cy="847344"/>
           </a:xfrm>
           <a:prstGeom prst="rect">
@@ -17478,7 +17478,7 @@
         </p:nvSpPr>
         <p:spPr>
           <a:xfrm>
-            <a:off x="987552" y="4245864"/>
+            <a:off x="987552" y="4757928"/>
             <a:ext cx="10131551" cy="475488"/>
           </a:xfrm>
           <a:prstGeom prst="rect">
